--- a/architecture/finance-multicloud-architecture.pptx
+++ b/architecture/finance-multicloud-architecture.pptx
@@ -22,9 +22,10 @@
     <p:sldId id="270" r:id="rId16"/>
     <p:sldId id="271" r:id="rId17"/>
     <p:sldId id="272" r:id="rId18"/>
+    <p:sldId id="273" r:id="rId19"/>
   </p:sldIdLst>
   <p:notesMasterIdLst>
-    <p:notesMasterId r:id="rId19"/>
+    <p:notesMasterId r:id="rId20"/>
   </p:notesMasterIdLst>
   <p:sldSz cx="12191695" cy="6858000"/>
   <p:notesSz cx="6858000" cy="12191695"/>
@@ -1246,6 +1247,94 @@
             <a:fld id="{F7021451-1387-4CA6-816F-3879F97B5CBC}" type="slidenum">
               <a:rPr lang="en-US"/>
               <a:t>17</a:t>
+            </a:fld>
+            <a:endParaRPr lang="en-US"/>
+          </a:p>
+        </p:txBody>
+      </p:sp>
+    </p:spTree>
+    <p:extLst>
+      <p:ext uri="{BB962C8B-B14F-4D97-AF65-F5344CB8AC3E}">
+        <p14:creationId xmlns:p14="http://schemas.microsoft.com/office/powerpoint/2010/main" val="1024086991"/>
+      </p:ext>
+    </p:extLst>
+  </p:cSld>
+  <p:clrMapOvr>
+    <a:masterClrMapping/>
+  </p:clrMapOvr>
+</p:notes>
+</file>
+
+<file path=ppt/notesSlides/notesSlide18.xml><?xml version="1.0" encoding="utf-8"?>
+<p:notes xmlns:a="http://schemas.openxmlformats.org/drawingml/2006/main" xmlns:r="http://schemas.openxmlformats.org/officeDocument/2006/relationships" xmlns:p="http://schemas.openxmlformats.org/presentationml/2006/main">
+  <p:cSld>
+    <p:spTree>
+      <p:nvGrpSpPr>
+        <p:cNvPr id="1" name=""/>
+        <p:cNvGrpSpPr/>
+        <p:nvPr/>
+      </p:nvGrpSpPr>
+      <p:grpSpPr>
+        <a:xfrm>
+          <a:off x="0" y="0"/>
+          <a:ext cx="0" cy="0"/>
+          <a:chOff x="0" y="0"/>
+          <a:chExt cx="0" cy="0"/>
+        </a:xfrm>
+      </p:grpSpPr>
+      <p:sp>
+        <p:nvSpPr>
+          <p:cNvPr id="2" name="Slide Image Placeholder 1"/>
+          <p:cNvSpPr>
+            <a:spLocks noGrp="1" noRot="1" noChangeAspect="1"/>
+          </p:cNvSpPr>
+          <p:nvPr>
+            <p:ph type="sldImg"/>
+          </p:nvPr>
+        </p:nvSpPr>
+        <p:spPr/>
+      </p:sp>
+      <p:sp>
+        <p:nvSpPr>
+          <p:cNvPr id="3" name="Notes Placeholder 2"/>
+          <p:cNvSpPr>
+            <a:spLocks noGrp="1"/>
+          </p:cNvSpPr>
+          <p:nvPr>
+            <p:ph type="body" idx="1"/>
+          </p:nvPr>
+        </p:nvSpPr>
+        <p:spPr/>
+        <p:txBody>
+          <a:bodyPr/>
+          <a:lstStyle/>
+          <a:p>
+            <a:r>
+              <a:rPr lang="en-US" dirty="0"/>
+              <a:t/>
+            </a:r>
+            <a:endParaRPr lang="en-US" dirty="0"/>
+          </a:p>
+        </p:txBody>
+      </p:sp>
+      <p:sp>
+        <p:nvSpPr>
+          <p:cNvPr id="4" name="Slide Number Placeholder 3"/>
+          <p:cNvSpPr>
+            <a:spLocks noGrp="1"/>
+          </p:cNvSpPr>
+          <p:nvPr>
+            <p:ph type="sldNum" sz="quarter" idx="10"/>
+          </p:nvPr>
+        </p:nvSpPr>
+        <p:spPr/>
+        <p:txBody>
+          <a:bodyPr/>
+          <a:lstStyle/>
+          <a:p>
+            <a:fld id="{F7021451-1387-4CA6-816F-3879F97B5CBC}" type="slidenum">
+              <a:rPr lang="en-US"/>
+              <a:t>18</a:t>
             </a:fld>
             <a:endParaRPr lang="en-US"/>
           </a:p>
@@ -2814,7 +2903,1125 @@
                 <a:ea typeface="Consolas" pitchFamily="34" charset="-122"/>
                 <a:cs typeface="Consolas" pitchFamily="34" charset="-120"/>
               </a:rPr>
-              <a:t>08 · PERSONAL CREDIT INFO</a:t>
+              <a:t>08 · ACCESS CONTROL</a:t>
+            </a:r>
+            <a:endParaRPr lang="en-US" sz="1100" dirty="0"/>
+          </a:p>
+        </p:txBody>
+      </p:sp>
+      <p:sp>
+        <p:nvSpPr>
+          <p:cNvPr id="3" name="Text 1"/>
+          <p:cNvSpPr txBox="1"/>
+          <p:nvPr/>
+        </p:nvSpPr>
+        <p:spPr>
+          <a:xfrm>
+            <a:off x="502920" y="566928"/>
+            <a:ext cx="9601200" cy="566928"/>
+          </a:xfrm>
+          <a:prstGeom prst="rect">
+            <a:avLst/>
+          </a:prstGeom>
+          <a:noFill/>
+          <a:ln/>
+        </p:spPr>
+        <p:txBody>
+          <a:bodyPr wrap="square" lIns="0" tIns="0" rIns="0" bIns="0" rtlCol="0" anchor="t"/>
+          <a:lstStyle/>
+          <a:p>
+            <a:pPr indent="0" marL="0">
+              <a:buNone/>
+            </a:pPr>
+            <a:r>
+              <a:rPr lang="en-US" sz="2800" b="1" dirty="0">
+                <a:solidFill>
+                  <a:srgbClr val="1B2430"/>
+                </a:solidFill>
+                <a:latin typeface="Malgun Gothic" pitchFamily="34" charset="0"/>
+                <a:ea typeface="Malgun Gothic" pitchFamily="34" charset="-122"/>
+                <a:cs typeface="Malgun Gothic" pitchFamily="34" charset="-120"/>
+              </a:rPr>
+              <a:t>접근 통제 방안</a:t>
+            </a:r>
+            <a:endParaRPr lang="en-US" sz="2800" dirty="0"/>
+          </a:p>
+        </p:txBody>
+      </p:sp>
+      <p:sp>
+        <p:nvSpPr>
+          <p:cNvPr id="4" name="Text 2"/>
+          <p:cNvSpPr txBox="1"/>
+          <p:nvPr/>
+        </p:nvSpPr>
+        <p:spPr>
+          <a:xfrm>
+            <a:off x="502920" y="1170432"/>
+            <a:ext cx="10607040" cy="457200"/>
+          </a:xfrm>
+          <a:prstGeom prst="rect">
+            <a:avLst/>
+          </a:prstGeom>
+          <a:noFill/>
+          <a:ln/>
+        </p:spPr>
+        <p:txBody>
+          <a:bodyPr wrap="square" lIns="0" tIns="0" rIns="0" bIns="0" rtlCol="0" anchor="t"/>
+          <a:lstStyle/>
+          <a:p>
+            <a:pPr indent="0" marL="0">
+              <a:lnSpc>
+                <a:spcPct val="125000"/>
+              </a:lnSpc>
+              <a:buNone/>
+            </a:pPr>
+            <a:r>
+              <a:rPr lang="en-US" sz="1250" dirty="0">
+                <a:solidFill>
+                  <a:srgbClr val="5B6572"/>
+                </a:solidFill>
+                <a:latin typeface="Malgun Gothic" pitchFamily="34" charset="0"/>
+                <a:ea typeface="Malgun Gothic" pitchFamily="34" charset="-122"/>
+                <a:cs typeface="Malgun Gothic" pitchFamily="34" charset="-120"/>
+              </a:rPr>
+              <a:t>관리자는 망분리 전용단말 → VDI → 그룹 공통 Bastion(MFA·PAM) 순서로만 접속할 수 있습니다. 일반 PC의 직접 접속은 차단됩니다.</a:t>
+            </a:r>
+            <a:endParaRPr lang="en-US" sz="1250" dirty="0"/>
+          </a:p>
+        </p:txBody>
+      </p:sp>
+      <p:sp>
+        <p:nvSpPr>
+          <p:cNvPr id="5" name="Shape 3"/>
+          <p:cNvSpPr/>
+          <p:nvPr/>
+        </p:nvSpPr>
+        <p:spPr>
+          <a:xfrm>
+            <a:off x="548640" y="1828800"/>
+            <a:ext cx="2194560" cy="685800"/>
+          </a:xfrm>
+          <a:prstGeom prst="roundRect">
+            <a:avLst>
+              <a:gd name="adj" fmla="val 10667"/>
+            </a:avLst>
+          </a:prstGeom>
+          <a:solidFill>
+            <a:srgbClr val="FFFFFF"/>
+          </a:solidFill>
+          <a:ln w="15875">
+            <a:solidFill>
+              <a:srgbClr val="8F3226"/>
+            </a:solidFill>
+            <a:prstDash val="solid"/>
+          </a:ln>
+        </p:spPr>
+      </p:sp>
+      <p:sp>
+        <p:nvSpPr>
+          <p:cNvPr id="6" name="Text 4"/>
+          <p:cNvSpPr txBox="1"/>
+          <p:nvPr/>
+        </p:nvSpPr>
+        <p:spPr>
+          <a:xfrm>
+            <a:off x="658368" y="1828800"/>
+            <a:ext cx="1975104" cy="685800"/>
+          </a:xfrm>
+          <a:prstGeom prst="rect">
+            <a:avLst/>
+          </a:prstGeom>
+          <a:noFill/>
+          <a:ln/>
+        </p:spPr>
+        <p:txBody>
+          <a:bodyPr wrap="square" lIns="0" tIns="0" rIns="0" bIns="0" rtlCol="0" anchor="ctr"/>
+          <a:lstStyle/>
+          <a:p>
+            <a:pPr algn="ctr" indent="0" marL="0">
+              <a:lnSpc>
+                <a:spcPct val="120000"/>
+              </a:lnSpc>
+              <a:buNone/>
+            </a:pPr>
+            <a:r>
+              <a:rPr lang="en-US" sz="1050" b="1" dirty="0">
+                <a:solidFill>
+                  <a:srgbClr val="8F3226"/>
+                </a:solidFill>
+                <a:latin typeface="Malgun Gothic" pitchFamily="34" charset="0"/>
+                <a:ea typeface="Malgun Gothic" pitchFamily="34" charset="-122"/>
+                <a:cs typeface="Malgun Gothic" pitchFamily="34" charset="-120"/>
+              </a:rPr>
+              <a:t>일반 업무 PC</a:t>
+            </a:r>
+            <a:endParaRPr lang="en-US" sz="1050" dirty="0"/>
+          </a:p>
+          <a:p>
+            <a:pPr algn="ctr" indent="0" marL="0">
+              <a:lnSpc>
+                <a:spcPct val="120000"/>
+              </a:lnSpc>
+              <a:buNone/>
+            </a:pPr>
+            <a:r>
+              <a:rPr lang="en-US" sz="900" dirty="0">
+                <a:solidFill>
+                  <a:srgbClr val="5B6572"/>
+                </a:solidFill>
+                <a:latin typeface="Malgun Gothic" pitchFamily="34" charset="0"/>
+                <a:ea typeface="Malgun Gothic" pitchFamily="34" charset="-122"/>
+                <a:cs typeface="Malgun Gothic" pitchFamily="34" charset="-120"/>
+              </a:rPr>
+              <a:t>/ 외부 인터넷</a:t>
+            </a:r>
+            <a:endParaRPr lang="en-US" sz="1050" dirty="0"/>
+          </a:p>
+        </p:txBody>
+      </p:sp>
+      <p:sp>
+        <p:nvSpPr>
+          <p:cNvPr id="7" name="Shape 5"/>
+          <p:cNvSpPr/>
+          <p:nvPr/>
+        </p:nvSpPr>
+        <p:spPr>
+          <a:xfrm>
+            <a:off x="548640" y="3108960"/>
+            <a:ext cx="2194560" cy="685800"/>
+          </a:xfrm>
+          <a:prstGeom prst="roundRect">
+            <a:avLst>
+              <a:gd name="adj" fmla="val 10667"/>
+            </a:avLst>
+          </a:prstGeom>
+          <a:solidFill>
+            <a:srgbClr val="FFFFFF"/>
+          </a:solidFill>
+          <a:ln w="15875">
+            <a:solidFill>
+              <a:srgbClr val="B7BBA9"/>
+            </a:solidFill>
+            <a:prstDash val="solid"/>
+          </a:ln>
+        </p:spPr>
+      </p:sp>
+      <p:sp>
+        <p:nvSpPr>
+          <p:cNvPr id="8" name="Text 6"/>
+          <p:cNvSpPr txBox="1"/>
+          <p:nvPr/>
+        </p:nvSpPr>
+        <p:spPr>
+          <a:xfrm>
+            <a:off x="658368" y="3108960"/>
+            <a:ext cx="1975104" cy="685800"/>
+          </a:xfrm>
+          <a:prstGeom prst="rect">
+            <a:avLst/>
+          </a:prstGeom>
+          <a:noFill/>
+          <a:ln/>
+        </p:spPr>
+        <p:txBody>
+          <a:bodyPr wrap="square" lIns="0" tIns="0" rIns="0" bIns="0" rtlCol="0" anchor="ctr"/>
+          <a:lstStyle/>
+          <a:p>
+            <a:pPr algn="ctr" indent="0" marL="0">
+              <a:lnSpc>
+                <a:spcPct val="120000"/>
+              </a:lnSpc>
+              <a:buNone/>
+            </a:pPr>
+            <a:r>
+              <a:rPr lang="en-US" sz="1050" b="1" dirty="0">
+                <a:solidFill>
+                  <a:srgbClr val="1B2430"/>
+                </a:solidFill>
+                <a:latin typeface="Malgun Gothic" pitchFamily="34" charset="0"/>
+                <a:ea typeface="Malgun Gothic" pitchFamily="34" charset="-122"/>
+                <a:cs typeface="Malgun Gothic" pitchFamily="34" charset="-120"/>
+              </a:rPr>
+              <a:t>관리자 PC</a:t>
+            </a:r>
+            <a:endParaRPr lang="en-US" sz="1050" dirty="0"/>
+          </a:p>
+          <a:p>
+            <a:pPr algn="ctr" indent="0" marL="0">
+              <a:lnSpc>
+                <a:spcPct val="120000"/>
+              </a:lnSpc>
+              <a:buNone/>
+            </a:pPr>
+            <a:r>
+              <a:rPr lang="en-US" sz="900" dirty="0">
+                <a:solidFill>
+                  <a:srgbClr val="5B6572"/>
+                </a:solidFill>
+                <a:latin typeface="Malgun Gothic" pitchFamily="34" charset="0"/>
+                <a:ea typeface="Malgun Gothic" pitchFamily="34" charset="-122"/>
+                <a:cs typeface="Malgun Gothic" pitchFamily="34" charset="-120"/>
+              </a:rPr>
+              <a:t>(망분리 전용단말)</a:t>
+            </a:r>
+            <a:endParaRPr lang="en-US" sz="1050" dirty="0"/>
+          </a:p>
+        </p:txBody>
+      </p:sp>
+      <p:sp>
+        <p:nvSpPr>
+          <p:cNvPr id="9" name="Shape 7"/>
+          <p:cNvSpPr/>
+          <p:nvPr/>
+        </p:nvSpPr>
+        <p:spPr>
+          <a:xfrm>
+            <a:off x="3246120" y="3108960"/>
+            <a:ext cx="1920240" cy="685800"/>
+          </a:xfrm>
+          <a:prstGeom prst="roundRect">
+            <a:avLst>
+              <a:gd name="adj" fmla="val 10667"/>
+            </a:avLst>
+          </a:prstGeom>
+          <a:solidFill>
+            <a:srgbClr val="FFFFFF"/>
+          </a:solidFill>
+          <a:ln w="15875">
+            <a:solidFill>
+              <a:srgbClr val="B7BBA9"/>
+            </a:solidFill>
+            <a:prstDash val="solid"/>
+          </a:ln>
+        </p:spPr>
+      </p:sp>
+      <p:sp>
+        <p:nvSpPr>
+          <p:cNvPr id="10" name="Text 8"/>
+          <p:cNvSpPr txBox="1"/>
+          <p:nvPr/>
+        </p:nvSpPr>
+        <p:spPr>
+          <a:xfrm>
+            <a:off x="3355848" y="3108960"/>
+            <a:ext cx="1700784" cy="685800"/>
+          </a:xfrm>
+          <a:prstGeom prst="rect">
+            <a:avLst/>
+          </a:prstGeom>
+          <a:noFill/>
+          <a:ln/>
+        </p:spPr>
+        <p:txBody>
+          <a:bodyPr wrap="square" lIns="0" tIns="0" rIns="0" bIns="0" rtlCol="0" anchor="ctr"/>
+          <a:lstStyle/>
+          <a:p>
+            <a:pPr algn="ctr" indent="0" marL="0">
+              <a:lnSpc>
+                <a:spcPct val="120000"/>
+              </a:lnSpc>
+              <a:buNone/>
+            </a:pPr>
+            <a:r>
+              <a:rPr lang="en-US" sz="1050" b="1" dirty="0">
+                <a:solidFill>
+                  <a:srgbClr val="1B2430"/>
+                </a:solidFill>
+                <a:latin typeface="Malgun Gothic" pitchFamily="34" charset="0"/>
+                <a:ea typeface="Malgun Gothic" pitchFamily="34" charset="-122"/>
+                <a:cs typeface="Malgun Gothic" pitchFamily="34" charset="-120"/>
+              </a:rPr>
+              <a:t>VDI</a:t>
+            </a:r>
+            <a:endParaRPr lang="en-US" sz="1050" dirty="0"/>
+          </a:p>
+          <a:p>
+            <a:pPr algn="ctr" indent="0" marL="0">
+              <a:lnSpc>
+                <a:spcPct val="120000"/>
+              </a:lnSpc>
+              <a:buNone/>
+            </a:pPr>
+            <a:r>
+              <a:rPr lang="en-US" sz="900" dirty="0">
+                <a:solidFill>
+                  <a:srgbClr val="5B6572"/>
+                </a:solidFill>
+                <a:latin typeface="Malgun Gothic" pitchFamily="34" charset="0"/>
+                <a:ea typeface="Malgun Gothic" pitchFamily="34" charset="-122"/>
+                <a:cs typeface="Malgun Gothic" pitchFamily="34" charset="-120"/>
+              </a:rPr>
+              <a:t>가상 데스크톱</a:t>
+            </a:r>
+            <a:endParaRPr lang="en-US" sz="1050" dirty="0"/>
+          </a:p>
+        </p:txBody>
+      </p:sp>
+      <p:sp>
+        <p:nvSpPr>
+          <p:cNvPr id="11" name="Shape 9"/>
+          <p:cNvSpPr/>
+          <p:nvPr/>
+        </p:nvSpPr>
+        <p:spPr>
+          <a:xfrm>
+            <a:off x="5623560" y="2990088"/>
+            <a:ext cx="2651760" cy="914400"/>
+          </a:xfrm>
+          <a:prstGeom prst="roundRect">
+            <a:avLst>
+              <a:gd name="adj" fmla="val 8000"/>
+            </a:avLst>
+          </a:prstGeom>
+          <a:solidFill>
+            <a:srgbClr val="E4E5F0"/>
+          </a:solidFill>
+          <a:ln w="15875">
+            <a:solidFill>
+              <a:srgbClr val="5B60A0"/>
+            </a:solidFill>
+            <a:prstDash val="solid"/>
+          </a:ln>
+        </p:spPr>
+      </p:sp>
+      <p:sp>
+        <p:nvSpPr>
+          <p:cNvPr id="12" name="Text 10"/>
+          <p:cNvSpPr txBox="1"/>
+          <p:nvPr/>
+        </p:nvSpPr>
+        <p:spPr>
+          <a:xfrm>
+            <a:off x="5733288" y="2990088"/>
+            <a:ext cx="2432304" cy="914400"/>
+          </a:xfrm>
+          <a:prstGeom prst="rect">
+            <a:avLst/>
+          </a:prstGeom>
+          <a:noFill/>
+          <a:ln/>
+        </p:spPr>
+        <p:txBody>
+          <a:bodyPr wrap="square" lIns="0" tIns="0" rIns="0" bIns="0" rtlCol="0" anchor="ctr"/>
+          <a:lstStyle/>
+          <a:p>
+            <a:pPr algn="ctr" indent="0" marL="0">
+              <a:lnSpc>
+                <a:spcPct val="120000"/>
+              </a:lnSpc>
+              <a:buNone/>
+            </a:pPr>
+            <a:r>
+              <a:rPr lang="en-US" sz="1100" b="1" dirty="0">
+                <a:solidFill>
+                  <a:srgbClr val="5B60A0"/>
+                </a:solidFill>
+                <a:latin typeface="Malgun Gothic" pitchFamily="34" charset="0"/>
+                <a:ea typeface="Malgun Gothic" pitchFamily="34" charset="-122"/>
+                <a:cs typeface="Malgun Gothic" pitchFamily="34" charset="-120"/>
+              </a:rPr>
+              <a:t>그룹 공통 Bastion</a:t>
+            </a:r>
+            <a:endParaRPr lang="en-US" sz="1100" dirty="0"/>
+          </a:p>
+          <a:p>
+            <a:pPr algn="ctr" indent="0" marL="0">
+              <a:lnSpc>
+                <a:spcPct val="120000"/>
+              </a:lnSpc>
+              <a:buNone/>
+            </a:pPr>
+            <a:r>
+              <a:rPr lang="en-US" sz="850" dirty="0">
+                <a:solidFill>
+                  <a:srgbClr val="5B6572"/>
+                </a:solidFill>
+                <a:latin typeface="Malgun Gothic" pitchFamily="34" charset="0"/>
+                <a:ea typeface="Malgun Gothic" pitchFamily="34" charset="-122"/>
+                <a:cs typeface="Malgun Gothic" pitchFamily="34" charset="-120"/>
+              </a:rPr>
+              <a:t>Session Manager / Azure Bastion</a:t>
+            </a:r>
+            <a:endParaRPr lang="en-US" sz="1100" dirty="0"/>
+          </a:p>
+          <a:p>
+            <a:pPr algn="ctr" indent="0" marL="0">
+              <a:lnSpc>
+                <a:spcPct val="120000"/>
+              </a:lnSpc>
+              <a:buNone/>
+            </a:pPr>
+            <a:r>
+              <a:rPr lang="en-US" sz="850" dirty="0">
+                <a:solidFill>
+                  <a:srgbClr val="5B6572"/>
+                </a:solidFill>
+                <a:latin typeface="Malgun Gothic" pitchFamily="34" charset="0"/>
+                <a:ea typeface="Malgun Gothic" pitchFamily="34" charset="-122"/>
+                <a:cs typeface="Malgun Gothic" pitchFamily="34" charset="-120"/>
+              </a:rPr>
+              <a:t>+ PAM 체크아웃 · MFA</a:t>
+            </a:r>
+            <a:endParaRPr lang="en-US" sz="1100" dirty="0"/>
+          </a:p>
+        </p:txBody>
+      </p:sp>
+      <p:sp>
+        <p:nvSpPr>
+          <p:cNvPr id="13" name="Shape 11"/>
+          <p:cNvSpPr/>
+          <p:nvPr/>
+        </p:nvSpPr>
+        <p:spPr>
+          <a:xfrm>
+            <a:off x="8823960" y="1920240"/>
+            <a:ext cx="2651760" cy="685800"/>
+          </a:xfrm>
+          <a:prstGeom prst="roundRect">
+            <a:avLst>
+              <a:gd name="adj" fmla="val 10667"/>
+            </a:avLst>
+          </a:prstGeom>
+          <a:solidFill>
+            <a:srgbClr val="F4DFDA"/>
+          </a:solidFill>
+          <a:ln w="15875">
+            <a:solidFill>
+              <a:srgbClr val="AE4536"/>
+            </a:solidFill>
+            <a:prstDash val="solid"/>
+          </a:ln>
+        </p:spPr>
+      </p:sp>
+      <p:sp>
+        <p:nvSpPr>
+          <p:cNvPr id="14" name="Text 12"/>
+          <p:cNvSpPr txBox="1"/>
+          <p:nvPr/>
+        </p:nvSpPr>
+        <p:spPr>
+          <a:xfrm>
+            <a:off x="8933688" y="1920240"/>
+            <a:ext cx="2432304" cy="685800"/>
+          </a:xfrm>
+          <a:prstGeom prst="rect">
+            <a:avLst/>
+          </a:prstGeom>
+          <a:noFill/>
+          <a:ln/>
+        </p:spPr>
+        <p:txBody>
+          <a:bodyPr wrap="square" lIns="0" tIns="0" rIns="0" bIns="0" rtlCol="0" anchor="ctr"/>
+          <a:lstStyle/>
+          <a:p>
+            <a:pPr algn="ctr" indent="0" marL="0">
+              <a:lnSpc>
+                <a:spcPct val="120000"/>
+              </a:lnSpc>
+              <a:buNone/>
+            </a:pPr>
+            <a:r>
+              <a:rPr lang="en-US" sz="1050" b="1" dirty="0">
+                <a:solidFill>
+                  <a:srgbClr val="AE4536"/>
+                </a:solidFill>
+                <a:latin typeface="Malgun Gothic" pitchFamily="34" charset="0"/>
+                <a:ea typeface="Malgun Gothic" pitchFamily="34" charset="-122"/>
+                <a:cs typeface="Malgun Gothic" pitchFamily="34" charset="-120"/>
+              </a:rPr>
+              <a:t>대상 서버</a:t>
+            </a:r>
+            <a:endParaRPr lang="en-US" sz="1050" dirty="0"/>
+          </a:p>
+          <a:p>
+            <a:pPr algn="ctr" indent="0" marL="0">
+              <a:lnSpc>
+                <a:spcPct val="120000"/>
+              </a:lnSpc>
+              <a:buNone/>
+            </a:pPr>
+            <a:r>
+              <a:rPr lang="en-US" sz="900" dirty="0">
+                <a:solidFill>
+                  <a:srgbClr val="5B6572"/>
+                </a:solidFill>
+                <a:latin typeface="Malgun Gothic" pitchFamily="34" charset="0"/>
+                <a:ea typeface="Malgun Gothic" pitchFamily="34" charset="-122"/>
+                <a:cs typeface="Malgun Gothic" pitchFamily="34" charset="-120"/>
+              </a:rPr>
+              <a:t>Web / WAS Zone</a:t>
+            </a:r>
+            <a:endParaRPr lang="en-US" sz="1050" dirty="0"/>
+          </a:p>
+        </p:txBody>
+      </p:sp>
+      <p:sp>
+        <p:nvSpPr>
+          <p:cNvPr id="15" name="Shape 13"/>
+          <p:cNvSpPr/>
+          <p:nvPr/>
+        </p:nvSpPr>
+        <p:spPr>
+          <a:xfrm>
+            <a:off x="8823960" y="3840480"/>
+            <a:ext cx="2651760" cy="685800"/>
+          </a:xfrm>
+          <a:prstGeom prst="roundRect">
+            <a:avLst>
+              <a:gd name="adj" fmla="val 10667"/>
+            </a:avLst>
+          </a:prstGeom>
+          <a:solidFill>
+            <a:srgbClr val="F2E8CD"/>
+          </a:solidFill>
+          <a:ln w="15875">
+            <a:solidFill>
+              <a:srgbClr val="A9842A"/>
+            </a:solidFill>
+            <a:prstDash val="solid"/>
+          </a:ln>
+        </p:spPr>
+      </p:sp>
+      <p:sp>
+        <p:nvSpPr>
+          <p:cNvPr id="16" name="Text 14"/>
+          <p:cNvSpPr txBox="1"/>
+          <p:nvPr/>
+        </p:nvSpPr>
+        <p:spPr>
+          <a:xfrm>
+            <a:off x="8933688" y="3840480"/>
+            <a:ext cx="2432304" cy="685800"/>
+          </a:xfrm>
+          <a:prstGeom prst="rect">
+            <a:avLst/>
+          </a:prstGeom>
+          <a:noFill/>
+          <a:ln/>
+        </p:spPr>
+        <p:txBody>
+          <a:bodyPr wrap="square" lIns="0" tIns="0" rIns="0" bIns="0" rtlCol="0" anchor="ctr"/>
+          <a:lstStyle/>
+          <a:p>
+            <a:pPr algn="ctr" indent="0" marL="0">
+              <a:lnSpc>
+                <a:spcPct val="120000"/>
+              </a:lnSpc>
+              <a:buNone/>
+            </a:pPr>
+            <a:r>
+              <a:rPr lang="en-US" sz="1050" b="1" dirty="0">
+                <a:solidFill>
+                  <a:srgbClr val="A9842A"/>
+                </a:solidFill>
+                <a:latin typeface="Malgun Gothic" pitchFamily="34" charset="0"/>
+                <a:ea typeface="Malgun Gothic" pitchFamily="34" charset="-122"/>
+                <a:cs typeface="Malgun Gothic" pitchFamily="34" charset="-120"/>
+              </a:rPr>
+              <a:t>DAM 감사</a:t>
+            </a:r>
+            <a:endParaRPr lang="en-US" sz="1050" dirty="0"/>
+          </a:p>
+          <a:p>
+            <a:pPr algn="ctr" indent="0" marL="0">
+              <a:lnSpc>
+                <a:spcPct val="120000"/>
+              </a:lnSpc>
+              <a:buNone/>
+            </a:pPr>
+            <a:r>
+              <a:rPr lang="en-US" sz="900" dirty="0">
+                <a:solidFill>
+                  <a:srgbClr val="5B6572"/>
+                </a:solidFill>
+                <a:latin typeface="Malgun Gothic" pitchFamily="34" charset="0"/>
+                <a:ea typeface="Malgun Gothic" pitchFamily="34" charset="-122"/>
+                <a:cs typeface="Malgun Gothic" pitchFamily="34" charset="-120"/>
+              </a:rPr>
+              <a:t>DB 접근통제(쿼리 로깅)</a:t>
+            </a:r>
+            <a:endParaRPr lang="en-US" sz="1050" dirty="0"/>
+          </a:p>
+        </p:txBody>
+      </p:sp>
+      <p:sp>
+        <p:nvSpPr>
+          <p:cNvPr id="17" name="Shape 15"/>
+          <p:cNvSpPr/>
+          <p:nvPr/>
+        </p:nvSpPr>
+        <p:spPr>
+          <a:xfrm>
+            <a:off x="8823960" y="4846320"/>
+            <a:ext cx="2651760" cy="685800"/>
+          </a:xfrm>
+          <a:prstGeom prst="roundRect">
+            <a:avLst>
+              <a:gd name="adj" fmla="val 10667"/>
+            </a:avLst>
+          </a:prstGeom>
+          <a:solidFill>
+            <a:srgbClr val="F4DFDA"/>
+          </a:solidFill>
+          <a:ln w="15875">
+            <a:solidFill>
+              <a:srgbClr val="AE4536"/>
+            </a:solidFill>
+            <a:prstDash val="solid"/>
+          </a:ln>
+        </p:spPr>
+      </p:sp>
+      <p:sp>
+        <p:nvSpPr>
+          <p:cNvPr id="18" name="Text 16"/>
+          <p:cNvSpPr txBox="1"/>
+          <p:nvPr/>
+        </p:nvSpPr>
+        <p:spPr>
+          <a:xfrm>
+            <a:off x="8933688" y="4846320"/>
+            <a:ext cx="2432304" cy="685800"/>
+          </a:xfrm>
+          <a:prstGeom prst="rect">
+            <a:avLst/>
+          </a:prstGeom>
+          <a:noFill/>
+          <a:ln/>
+        </p:spPr>
+        <p:txBody>
+          <a:bodyPr wrap="square" lIns="0" tIns="0" rIns="0" bIns="0" rtlCol="0" anchor="ctr"/>
+          <a:lstStyle/>
+          <a:p>
+            <a:pPr algn="ctr" indent="0" marL="0">
+              <a:lnSpc>
+                <a:spcPct val="120000"/>
+              </a:lnSpc>
+              <a:buNone/>
+            </a:pPr>
+            <a:r>
+              <a:rPr lang="en-US" sz="1050" b="1" dirty="0">
+                <a:solidFill>
+                  <a:srgbClr val="AE4536"/>
+                </a:solidFill>
+                <a:latin typeface="Malgun Gothic" pitchFamily="34" charset="0"/>
+                <a:ea typeface="Malgun Gothic" pitchFamily="34" charset="-122"/>
+                <a:cs typeface="Malgun Gothic" pitchFamily="34" charset="-120"/>
+              </a:rPr>
+              <a:t>DB Zone</a:t>
+            </a:r>
+            <a:endParaRPr lang="en-US" sz="1050" dirty="0"/>
+          </a:p>
+          <a:p>
+            <a:pPr algn="ctr" indent="0" marL="0">
+              <a:lnSpc>
+                <a:spcPct val="120000"/>
+              </a:lnSpc>
+              <a:buNone/>
+            </a:pPr>
+            <a:r>
+              <a:rPr lang="en-US" sz="900" dirty="0">
+                <a:solidFill>
+                  <a:srgbClr val="5B6572"/>
+                </a:solidFill>
+                <a:latin typeface="Malgun Gothic" pitchFamily="34" charset="0"/>
+                <a:ea typeface="Malgun Gothic" pitchFamily="34" charset="-122"/>
+                <a:cs typeface="Malgun Gothic" pitchFamily="34" charset="-120"/>
+              </a:rPr>
+              <a:t>개인신용정보 · 암호화</a:t>
+            </a:r>
+            <a:endParaRPr lang="en-US" sz="1050" dirty="0"/>
+          </a:p>
+        </p:txBody>
+      </p:sp>
+      <p:sp>
+        <p:nvSpPr>
+          <p:cNvPr id="19" name="Shape 17"/>
+          <p:cNvSpPr/>
+          <p:nvPr/>
+        </p:nvSpPr>
+        <p:spPr>
+          <a:xfrm>
+            <a:off x="2743200" y="3451860"/>
+            <a:ext cx="457200" cy="9144"/>
+          </a:xfrm>
+          <a:prstGeom prst="line">
+            <a:avLst/>
+          </a:prstGeom>
+          <a:noFill/>
+          <a:ln w="19050">
+            <a:solidFill>
+              <a:srgbClr val="1B2430"/>
+            </a:solidFill>
+            <a:prstDash val="solid"/>
+            <a:tailEnd type="triangle"/>
+          </a:ln>
+        </p:spPr>
+      </p:sp>
+      <p:sp>
+        <p:nvSpPr>
+          <p:cNvPr id="20" name="Shape 18"/>
+          <p:cNvSpPr/>
+          <p:nvPr/>
+        </p:nvSpPr>
+        <p:spPr>
+          <a:xfrm>
+            <a:off x="5166360" y="3451860"/>
+            <a:ext cx="411480" cy="9144"/>
+          </a:xfrm>
+          <a:prstGeom prst="line">
+            <a:avLst/>
+          </a:prstGeom>
+          <a:noFill/>
+          <a:ln w="19050">
+            <a:solidFill>
+              <a:srgbClr val="1B2430"/>
+            </a:solidFill>
+            <a:prstDash val="solid"/>
+            <a:tailEnd type="triangle"/>
+          </a:ln>
+        </p:spPr>
+      </p:sp>
+      <p:sp>
+        <p:nvSpPr>
+          <p:cNvPr id="21" name="Shape 19"/>
+          <p:cNvSpPr/>
+          <p:nvPr/>
+        </p:nvSpPr>
+        <p:spPr>
+          <a:xfrm flipV="1">
+            <a:off x="8275320" y="2267712"/>
+            <a:ext cx="502920" cy="1097280"/>
+          </a:xfrm>
+          <a:prstGeom prst="line">
+            <a:avLst/>
+          </a:prstGeom>
+          <a:noFill/>
+          <a:ln w="19050">
+            <a:solidFill>
+              <a:srgbClr val="1B2430"/>
+            </a:solidFill>
+            <a:prstDash val="solid"/>
+            <a:tailEnd type="triangle"/>
+          </a:ln>
+        </p:spPr>
+      </p:sp>
+      <p:sp>
+        <p:nvSpPr>
+          <p:cNvPr id="22" name="Shape 20"/>
+          <p:cNvSpPr/>
+          <p:nvPr/>
+        </p:nvSpPr>
+        <p:spPr>
+          <a:xfrm>
+            <a:off x="10149840" y="2606040"/>
+            <a:ext cx="9144" cy="1207008"/>
+          </a:xfrm>
+          <a:prstGeom prst="line">
+            <a:avLst/>
+          </a:prstGeom>
+          <a:noFill/>
+          <a:ln w="19050">
+            <a:solidFill>
+              <a:srgbClr val="A9842A"/>
+            </a:solidFill>
+            <a:prstDash val="solid"/>
+            <a:tailEnd type="triangle"/>
+          </a:ln>
+        </p:spPr>
+      </p:sp>
+      <p:sp>
+        <p:nvSpPr>
+          <p:cNvPr id="23" name="Text 21"/>
+          <p:cNvSpPr txBox="1"/>
+          <p:nvPr/>
+        </p:nvSpPr>
+        <p:spPr>
+          <a:xfrm>
+            <a:off x="10378440" y="3063240"/>
+            <a:ext cx="1188720" cy="228600"/>
+          </a:xfrm>
+          <a:prstGeom prst="rect">
+            <a:avLst/>
+          </a:prstGeom>
+          <a:noFill/>
+          <a:ln/>
+        </p:spPr>
+        <p:txBody>
+          <a:bodyPr wrap="square" lIns="0" tIns="0" rIns="0" bIns="0" rtlCol="0" anchor="ctr"/>
+          <a:lstStyle/>
+          <a:p>
+            <a:pPr algn="l" indent="0" marL="0">
+              <a:buNone/>
+            </a:pPr>
+            <a:r>
+              <a:rPr lang="en-US" sz="900" dirty="0">
+                <a:solidFill>
+                  <a:srgbClr val="5B6572"/>
+                </a:solidFill>
+                <a:latin typeface="Consolas" pitchFamily="34" charset="0"/>
+                <a:ea typeface="Consolas" pitchFamily="34" charset="-122"/>
+                <a:cs typeface="Consolas" pitchFamily="34" charset="-120"/>
+              </a:rPr>
+              <a:t>DB 호출 시</a:t>
+            </a:r>
+            <a:endParaRPr lang="en-US" sz="900" dirty="0"/>
+          </a:p>
+        </p:txBody>
+      </p:sp>
+      <p:sp>
+        <p:nvSpPr>
+          <p:cNvPr id="24" name="Shape 22"/>
+          <p:cNvSpPr/>
+          <p:nvPr/>
+        </p:nvSpPr>
+        <p:spPr>
+          <a:xfrm>
+            <a:off x="10149840" y="4526280"/>
+            <a:ext cx="9144" cy="292608"/>
+          </a:xfrm>
+          <a:prstGeom prst="line">
+            <a:avLst/>
+          </a:prstGeom>
+          <a:noFill/>
+          <a:ln w="19050">
+            <a:solidFill>
+              <a:srgbClr val="A9842A"/>
+            </a:solidFill>
+            <a:prstDash val="solid"/>
+            <a:tailEnd type="triangle"/>
+          </a:ln>
+        </p:spPr>
+      </p:sp>
+      <p:sp>
+        <p:nvSpPr>
+          <p:cNvPr id="25" name="Shape 23"/>
+          <p:cNvSpPr/>
+          <p:nvPr/>
+        </p:nvSpPr>
+        <p:spPr>
+          <a:xfrm flipV="1">
+            <a:off x="2743200" y="2171700"/>
+            <a:ext cx="6035040" cy="1280160"/>
+          </a:xfrm>
+          <a:prstGeom prst="line">
+            <a:avLst/>
+          </a:prstGeom>
+          <a:noFill/>
+          <a:ln w="15875">
+            <a:solidFill>
+              <a:srgbClr val="8F3226"/>
+            </a:solidFill>
+            <a:prstDash val="dash"/>
+            <a:tailEnd type="triangle"/>
+          </a:ln>
+        </p:spPr>
+      </p:sp>
+      <p:sp>
+        <p:nvSpPr>
+          <p:cNvPr id="26" name="Text 24"/>
+          <p:cNvSpPr txBox="1"/>
+          <p:nvPr/>
+        </p:nvSpPr>
+        <p:spPr>
+          <a:xfrm>
+            <a:off x="548640" y="2606040"/>
+            <a:ext cx="2103120" cy="502920"/>
+          </a:xfrm>
+          <a:prstGeom prst="rect">
+            <a:avLst/>
+          </a:prstGeom>
+          <a:noFill/>
+          <a:ln/>
+        </p:spPr>
+        <p:txBody>
+          <a:bodyPr wrap="square" lIns="0" tIns="0" rIns="0" bIns="0" rtlCol="0" anchor="ctr"/>
+          <a:lstStyle/>
+          <a:p>
+            <a:pPr algn="l" indent="0" marL="0">
+              <a:lnSpc>
+                <a:spcPct val="125000"/>
+              </a:lnSpc>
+              <a:buNone/>
+            </a:pPr>
+            <a:r>
+              <a:rPr lang="en-US" sz="900" dirty="0">
+                <a:solidFill>
+                  <a:srgbClr val="8F3226"/>
+                </a:solidFill>
+                <a:latin typeface="Consolas" pitchFamily="34" charset="0"/>
+                <a:ea typeface="Consolas" pitchFamily="34" charset="-122"/>
+                <a:cs typeface="Consolas" pitchFamily="34" charset="-120"/>
+              </a:rPr>
+              <a:t>직접 접속 차단</a:t>
+            </a:r>
+            <a:endParaRPr lang="en-US" sz="900" dirty="0"/>
+          </a:p>
+          <a:p>
+            <a:pPr algn="l" indent="0" marL="0">
+              <a:lnSpc>
+                <a:spcPct val="125000"/>
+              </a:lnSpc>
+              <a:buNone/>
+            </a:pPr>
+            <a:r>
+              <a:rPr lang="en-US" sz="900" dirty="0">
+                <a:solidFill>
+                  <a:srgbClr val="8F3226"/>
+                </a:solidFill>
+                <a:latin typeface="Consolas" pitchFamily="34" charset="0"/>
+                <a:ea typeface="Consolas" pitchFamily="34" charset="-122"/>
+                <a:cs typeface="Consolas" pitchFamily="34" charset="-120"/>
+              </a:rPr>
+              <a:t>(SSH/RDP 미노출)</a:t>
+            </a:r>
+            <a:endParaRPr lang="en-US" sz="900" dirty="0"/>
+          </a:p>
+        </p:txBody>
+      </p:sp>
+      <p:sp>
+        <p:nvSpPr>
+          <p:cNvPr id="27" name="Text 25"/>
+          <p:cNvSpPr txBox="1"/>
+          <p:nvPr/>
+        </p:nvSpPr>
+        <p:spPr>
+          <a:xfrm>
+            <a:off x="3246120" y="3886200"/>
+            <a:ext cx="1920240" cy="228600"/>
+          </a:xfrm>
+          <a:prstGeom prst="rect">
+            <a:avLst/>
+          </a:prstGeom>
+          <a:noFill/>
+          <a:ln/>
+        </p:spPr>
+        <p:txBody>
+          <a:bodyPr wrap="square" lIns="0" tIns="0" rIns="0" bIns="0" rtlCol="0" anchor="ctr"/>
+          <a:lstStyle/>
+          <a:p>
+            <a:pPr algn="ctr" indent="0" marL="0">
+              <a:buNone/>
+            </a:pPr>
+            <a:r>
+              <a:rPr lang="en-US" sz="900" dirty="0">
+                <a:solidFill>
+                  <a:srgbClr val="5B6572"/>
+                </a:solidFill>
+                <a:latin typeface="Consolas" pitchFamily="34" charset="0"/>
+                <a:ea typeface="Consolas" pitchFamily="34" charset="-122"/>
+                <a:cs typeface="Consolas" pitchFamily="34" charset="-120"/>
+              </a:rPr>
+              <a:t>인터넷 구간 없음</a:t>
+            </a:r>
+            <a:endParaRPr lang="en-US" sz="900" dirty="0"/>
+          </a:p>
+        </p:txBody>
+      </p:sp>
+      <p:sp>
+        <p:nvSpPr>
+          <p:cNvPr id="28" name="Text 26"/>
+          <p:cNvSpPr txBox="1"/>
+          <p:nvPr/>
+        </p:nvSpPr>
+        <p:spPr>
+          <a:xfrm>
+            <a:off x="11368735" y="6419088"/>
+            <a:ext cx="457200" cy="274320"/>
+          </a:xfrm>
+          <a:prstGeom prst="rect">
+            <a:avLst/>
+          </a:prstGeom>
+          <a:noFill/>
+          <a:ln/>
+        </p:spPr>
+        <p:txBody>
+          <a:bodyPr wrap="square" lIns="0" tIns="0" rIns="0" bIns="0" rtlCol="0" anchor="ctr"/>
+          <a:lstStyle/>
+          <a:p>
+            <a:pPr algn="r" indent="0" marL="0">
+              <a:buNone/>
+            </a:pPr>
+            <a:r>
+              <a:rPr lang="en-US" sz="1000" dirty="0">
+                <a:solidFill>
+                  <a:srgbClr val="8B95A3"/>
+                </a:solidFill>
+                <a:latin typeface="Consolas" pitchFamily="34" charset="0"/>
+                <a:ea typeface="Consolas" pitchFamily="34" charset="-122"/>
+                <a:cs typeface="Consolas" pitchFamily="34" charset="-120"/>
+              </a:rPr>
+              <a:t>10</a:t>
+            </a:r>
+            <a:endParaRPr lang="en-US" sz="1000" dirty="0"/>
+          </a:p>
+        </p:txBody>
+      </p:sp>
+    </p:spTree>
+  </p:cSld>
+  <p:clrMapOvr>
+    <a:masterClrMapping/>
+  </p:clrMapOvr>
+</p:sld>
+</file>
+
+<file path=ppt/slides/slide11.xml><?xml version="1.0" encoding="utf-8"?>
+<p:sld xmlns:a="http://schemas.openxmlformats.org/drawingml/2006/main" xmlns:r="http://schemas.openxmlformats.org/officeDocument/2006/relationships" xmlns:p="http://schemas.openxmlformats.org/presentationml/2006/main">
+  <p:cSld name="Slide 11">
+    <p:bg>
+      <p:bgPr>
+        <a:solidFill>
+          <a:srgbClr val="FFFFFF"/>
+        </a:solidFill>
+      </p:bgPr>
+    </p:bg>
+    <p:spTree>
+      <p:nvGrpSpPr>
+        <p:cNvPr id="1" name=""/>
+        <p:cNvGrpSpPr/>
+        <p:nvPr/>
+      </p:nvGrpSpPr>
+      <p:grpSpPr>
+        <a:xfrm>
+          <a:off x="0" y="0"/>
+          <a:ext cx="0" cy="0"/>
+          <a:chOff x="0" y="0"/>
+          <a:chExt cx="0" cy="0"/>
+        </a:xfrm>
+      </p:grpSpPr>
+      <p:sp>
+        <p:nvSpPr>
+          <p:cNvPr id="2" name="Text 0"/>
+          <p:cNvSpPr txBox="1"/>
+          <p:nvPr/>
+        </p:nvSpPr>
+        <p:spPr>
+          <a:xfrm>
+            <a:off x="502920" y="320040"/>
+            <a:ext cx="7315200" cy="274320"/>
+          </a:xfrm>
+          <a:prstGeom prst="rect">
+            <a:avLst/>
+          </a:prstGeom>
+          <a:noFill/>
+          <a:ln/>
+        </p:spPr>
+        <p:txBody>
+          <a:bodyPr wrap="square" lIns="0" tIns="0" rIns="0" bIns="0" rtlCol="0" anchor="ctr"/>
+          <a:lstStyle/>
+          <a:p>
+            <a:pPr indent="0" marL="0">
+              <a:buNone/>
+            </a:pPr>
+            <a:r>
+              <a:rPr lang="en-US" sz="1100" b="1" spc="200" kern="0" dirty="0">
+                <a:solidFill>
+                  <a:srgbClr val="5B6572"/>
+                </a:solidFill>
+                <a:latin typeface="Consolas" pitchFamily="34" charset="0"/>
+                <a:ea typeface="Consolas" pitchFamily="34" charset="-122"/>
+                <a:cs typeface="Consolas" pitchFamily="34" charset="-120"/>
+              </a:rPr>
+              <a:t>09 · PERSONAL CREDIT INFO</a:t>
             </a:r>
             <a:endParaRPr lang="en-US" sz="1100" dirty="0"/>
           </a:p>
@@ -2903,7 +4110,7 @@
       </p:sp>
       <p:graphicFrame>
         <p:nvGraphicFramePr>
-          <p:cNvPr id="11" name="Table 0"/>
+          <p:cNvPr id="12" name="Table 0"/>
           <p:cNvGraphicFramePr>
             <a:graphicFrameLocks noGrp="1"/>
           </p:cNvGraphicFramePr>
@@ -5706,7 +6913,7 @@
                 <a:ea typeface="Consolas" pitchFamily="34" charset="-122"/>
                 <a:cs typeface="Consolas" pitchFamily="34" charset="-120"/>
               </a:rPr>
-              <a:t>10</a:t>
+              <a:t>11</a:t>
             </a:r>
             <a:endParaRPr lang="en-US" sz="1000" dirty="0"/>
           </a:p>
@@ -5720,9 +6927,9 @@
 </p:sld>
 </file>
 
-<file path=ppt/slides/slide11.xml><?xml version="1.0" encoding="utf-8"?>
+<file path=ppt/slides/slide12.xml><?xml version="1.0" encoding="utf-8"?>
 <p:sld xmlns:a="http://schemas.openxmlformats.org/drawingml/2006/main" xmlns:r="http://schemas.openxmlformats.org/officeDocument/2006/relationships" xmlns:p="http://schemas.openxmlformats.org/presentationml/2006/main">
-  <p:cSld name="Slide 11">
+  <p:cSld name="Slide 12">
     <p:bg>
       <p:bgPr>
         <a:solidFill>
@@ -5777,7 +6984,7 @@
                 <a:ea typeface="Consolas" pitchFamily="34" charset="-122"/>
                 <a:cs typeface="Consolas" pitchFamily="34" charset="-120"/>
               </a:rPr>
-              <a:t>09 · NETWORK SEGMENTATION</a:t>
+              <a:t>10 · NETWORK SEGMENTATION</a:t>
             </a:r>
             <a:endParaRPr lang="en-US" sz="1100" dirty="0"/>
           </a:p>
@@ -6357,7 +7564,7 @@
                 <a:ea typeface="Consolas" pitchFamily="34" charset="-122"/>
                 <a:cs typeface="Consolas" pitchFamily="34" charset="-120"/>
               </a:rPr>
-              <a:t>11</a:t>
+              <a:t>12</a:t>
             </a:r>
             <a:endParaRPr lang="en-US" sz="1000" dirty="0"/>
           </a:p>
@@ -6371,9 +7578,9 @@
 </p:sld>
 </file>
 
-<file path=ppt/slides/slide12.xml><?xml version="1.0" encoding="utf-8"?>
+<file path=ppt/slides/slide13.xml><?xml version="1.0" encoding="utf-8"?>
 <p:sld xmlns:a="http://schemas.openxmlformats.org/drawingml/2006/main" xmlns:r="http://schemas.openxmlformats.org/officeDocument/2006/relationships" xmlns:p="http://schemas.openxmlformats.org/presentationml/2006/main">
-  <p:cSld name="Slide 12">
+  <p:cSld name="Slide 13">
     <p:bg>
       <p:bgPr>
         <a:solidFill>
@@ -6428,7 +7635,7 @@
                 <a:ea typeface="Consolas" pitchFamily="34" charset="-122"/>
                 <a:cs typeface="Consolas" pitchFamily="34" charset="-120"/>
               </a:rPr>
-              <a:t>10 · ZONE OPERATIONS</a:t>
+              <a:t>11 · ZONE OPERATIONS</a:t>
             </a:r>
             <a:endParaRPr lang="en-US" sz="1100" dirty="0"/>
           </a:p>
@@ -6517,7 +7724,7 @@
       </p:sp>
       <p:graphicFrame>
         <p:nvGraphicFramePr>
-          <p:cNvPr id="13" name="Table 0"/>
+          <p:cNvPr id="14" name="Table 0"/>
           <p:cNvGraphicFramePr>
             <a:graphicFrameLocks noGrp="1"/>
           </p:cNvGraphicFramePr>
@@ -8975,7 +10182,7 @@
                 <a:ea typeface="Consolas" pitchFamily="34" charset="-122"/>
                 <a:cs typeface="Consolas" pitchFamily="34" charset="-120"/>
               </a:rPr>
-              <a:t>12</a:t>
+              <a:t>13</a:t>
             </a:r>
             <a:endParaRPr lang="en-US" sz="1000" dirty="0"/>
           </a:p>
@@ -8989,9 +10196,9 @@
 </p:sld>
 </file>
 
-<file path=ppt/slides/slide13.xml><?xml version="1.0" encoding="utf-8"?>
+<file path=ppt/slides/slide14.xml><?xml version="1.0" encoding="utf-8"?>
 <p:sld xmlns:a="http://schemas.openxmlformats.org/drawingml/2006/main" xmlns:r="http://schemas.openxmlformats.org/officeDocument/2006/relationships" xmlns:p="http://schemas.openxmlformats.org/presentationml/2006/main">
-  <p:cSld name="Slide 13">
+  <p:cSld name="Slide 14">
     <p:bg>
       <p:bgPr>
         <a:solidFill>
@@ -9046,7 +10253,7 @@
                 <a:ea typeface="Consolas" pitchFamily="34" charset="-122"/>
                 <a:cs typeface="Consolas" pitchFamily="34" charset="-120"/>
               </a:rPr>
-              <a:t>10 · ZONE OPERATIONS</a:t>
+              <a:t>11 · ZONE OPERATIONS</a:t>
             </a:r>
             <a:endParaRPr lang="en-US" sz="1100" dirty="0"/>
           </a:p>
@@ -9135,7 +10342,7 @@
       </p:sp>
       <p:graphicFrame>
         <p:nvGraphicFramePr>
-          <p:cNvPr id="14" name="Table 0"/>
+          <p:cNvPr id="15" name="Table 0"/>
           <p:cNvGraphicFramePr>
             <a:graphicFrameLocks noGrp="1"/>
           </p:cNvGraphicFramePr>
@@ -12547,7 +13754,7 @@
                 <a:ea typeface="Consolas" pitchFamily="34" charset="-122"/>
                 <a:cs typeface="Consolas" pitchFamily="34" charset="-120"/>
               </a:rPr>
-              <a:t>13</a:t>
+              <a:t>14</a:t>
             </a:r>
             <a:endParaRPr lang="en-US" sz="1000" dirty="0"/>
           </a:p>
@@ -12561,9 +13768,9 @@
 </p:sld>
 </file>
 
-<file path=ppt/slides/slide14.xml><?xml version="1.0" encoding="utf-8"?>
+<file path=ppt/slides/slide15.xml><?xml version="1.0" encoding="utf-8"?>
 <p:sld xmlns:a="http://schemas.openxmlformats.org/drawingml/2006/main" xmlns:r="http://schemas.openxmlformats.org/officeDocument/2006/relationships" xmlns:p="http://schemas.openxmlformats.org/presentationml/2006/main">
-  <p:cSld name="Slide 14">
+  <p:cSld name="Slide 15">
     <p:bg>
       <p:bgPr>
         <a:solidFill>
@@ -12618,7 +13825,7 @@
                 <a:ea typeface="Consolas" pitchFamily="34" charset="-122"/>
                 <a:cs typeface="Consolas" pitchFamily="34" charset="-120"/>
               </a:rPr>
-              <a:t>10 · ZONE OPERATIONS</a:t>
+              <a:t>11 · ZONE OPERATIONS</a:t>
             </a:r>
             <a:endParaRPr lang="en-US" sz="1100" dirty="0"/>
           </a:p>
@@ -13359,7 +14566,7 @@
                 <a:ea typeface="Consolas" pitchFamily="34" charset="-122"/>
                 <a:cs typeface="Consolas" pitchFamily="34" charset="-120"/>
               </a:rPr>
-              <a:t>14</a:t>
+              <a:t>15</a:t>
             </a:r>
             <a:endParaRPr lang="en-US" sz="1000" dirty="0"/>
           </a:p>
@@ -13373,9 +14580,9 @@
 </p:sld>
 </file>
 
-<file path=ppt/slides/slide15.xml><?xml version="1.0" encoding="utf-8"?>
+<file path=ppt/slides/slide16.xml><?xml version="1.0" encoding="utf-8"?>
 <p:sld xmlns:a="http://schemas.openxmlformats.org/drawingml/2006/main" xmlns:r="http://schemas.openxmlformats.org/officeDocument/2006/relationships" xmlns:p="http://schemas.openxmlformats.org/presentationml/2006/main">
-  <p:cSld name="Slide 15">
+  <p:cSld name="Slide 16">
     <p:bg>
       <p:bgPr>
         <a:solidFill>
@@ -13430,7 +14637,7 @@
                 <a:ea typeface="Consolas" pitchFamily="34" charset="-122"/>
                 <a:cs typeface="Consolas" pitchFamily="34" charset="-120"/>
               </a:rPr>
-              <a:t>11 · COMPLIANCE</a:t>
+              <a:t>12 · COMPLIANCE</a:t>
             </a:r>
             <a:endParaRPr lang="en-US" sz="1100" dirty="0"/>
           </a:p>
@@ -14166,7 +15373,7 @@
                 <a:ea typeface="Consolas" pitchFamily="34" charset="-122"/>
                 <a:cs typeface="Consolas" pitchFamily="34" charset="-120"/>
               </a:rPr>
-              <a:t>15</a:t>
+              <a:t>16</a:t>
             </a:r>
             <a:endParaRPr lang="en-US" sz="1000" dirty="0"/>
           </a:p>
@@ -14180,9 +15387,9 @@
 </p:sld>
 </file>
 
-<file path=ppt/slides/slide16.xml><?xml version="1.0" encoding="utf-8"?>
+<file path=ppt/slides/slide17.xml><?xml version="1.0" encoding="utf-8"?>
 <p:sld xmlns:a="http://schemas.openxmlformats.org/drawingml/2006/main" xmlns:r="http://schemas.openxmlformats.org/officeDocument/2006/relationships" xmlns:p="http://schemas.openxmlformats.org/presentationml/2006/main">
-  <p:cSld name="Slide 16">
+  <p:cSld name="Slide 17">
     <p:bg>
       <p:bgPr>
         <a:solidFill>
@@ -14237,7 +15444,7 @@
                 <a:ea typeface="Consolas" pitchFamily="34" charset="-122"/>
                 <a:cs typeface="Consolas" pitchFamily="34" charset="-120"/>
               </a:rPr>
-              <a:t>11 · COMPLIANCE</a:t>
+              <a:t>12 · COMPLIANCE</a:t>
             </a:r>
             <a:endParaRPr lang="en-US" sz="1100" dirty="0"/>
           </a:p>
@@ -14326,7 +15533,7 @@
       </p:sp>
       <p:graphicFrame>
         <p:nvGraphicFramePr>
-          <p:cNvPr id="17" name="Table 0"/>
+          <p:cNvPr id="18" name="Table 0"/>
           <p:cNvGraphicFramePr>
             <a:graphicFrameLocks noGrp="1"/>
           </p:cNvGraphicFramePr>
@@ -16036,7 +17243,7 @@
                 <a:ea typeface="Consolas" pitchFamily="34" charset="-122"/>
                 <a:cs typeface="Consolas" pitchFamily="34" charset="-120"/>
               </a:rPr>
-              <a:t>16</a:t>
+              <a:t>17</a:t>
             </a:r>
             <a:endParaRPr lang="en-US" sz="1000" dirty="0"/>
           </a:p>
@@ -16050,9 +17257,9 @@
 </p:sld>
 </file>
 
-<file path=ppt/slides/slide17.xml><?xml version="1.0" encoding="utf-8"?>
+<file path=ppt/slides/slide18.xml><?xml version="1.0" encoding="utf-8"?>
 <p:sld xmlns:a="http://schemas.openxmlformats.org/drawingml/2006/main" xmlns:r="http://schemas.openxmlformats.org/officeDocument/2006/relationships" xmlns:p="http://schemas.openxmlformats.org/presentationml/2006/main">
-  <p:cSld name="Slide 17">
+  <p:cSld name="Slide 18">
     <p:bg>
       <p:bgPr>
         <a:solidFill>
@@ -16107,7 +17314,7 @@
                 <a:ea typeface="Consolas" pitchFamily="34" charset="-122"/>
                 <a:cs typeface="Consolas" pitchFamily="34" charset="-120"/>
               </a:rPr>
-              <a:t>11 · COMPLIANCE — 사후관리</a:t>
+              <a:t>12 · COMPLIANCE — 사후관리</a:t>
             </a:r>
             <a:endParaRPr lang="en-US" sz="1100" dirty="0"/>
           </a:p>
@@ -16698,7 +17905,7 @@
                 <a:ea typeface="Consolas" pitchFamily="34" charset="-122"/>
                 <a:cs typeface="Consolas" pitchFamily="34" charset="-120"/>
               </a:rPr>
-              <a:t>17</a:t>
+              <a:t>18</a:t>
             </a:r>
             <a:endParaRPr lang="en-US" sz="1000" dirty="0"/>
           </a:p>
@@ -18845,7 +20052,2970 @@
                 <a:ea typeface="Consolas" pitchFamily="34" charset="-122"/>
                 <a:cs typeface="Consolas" pitchFamily="34" charset="-120"/>
               </a:rPr>
-              <a:t>02 · ARCHITECTURE</a:t>
+              <a:t>02 · ENVIRONMENT</a:t>
+            </a:r>
+            <a:endParaRPr lang="en-US" sz="1100" dirty="0"/>
+          </a:p>
+        </p:txBody>
+      </p:sp>
+      <p:sp>
+        <p:nvSpPr>
+          <p:cNvPr id="3" name="Text 1"/>
+          <p:cNvSpPr txBox="1"/>
+          <p:nvPr/>
+        </p:nvSpPr>
+        <p:spPr>
+          <a:xfrm>
+            <a:off x="502920" y="566928"/>
+            <a:ext cx="9601200" cy="566928"/>
+          </a:xfrm>
+          <a:prstGeom prst="rect">
+            <a:avLst/>
+          </a:prstGeom>
+          <a:noFill/>
+          <a:ln/>
+        </p:spPr>
+        <p:txBody>
+          <a:bodyPr wrap="square" lIns="0" tIns="0" rIns="0" bIns="0" rtlCol="0" anchor="t"/>
+          <a:lstStyle/>
+          <a:p>
+            <a:pPr indent="0" marL="0">
+              <a:buNone/>
+            </a:pPr>
+            <a:r>
+              <a:rPr lang="en-US" sz="2800" b="1" dirty="0">
+                <a:solidFill>
+                  <a:srgbClr val="1B2430"/>
+                </a:solidFill>
+                <a:latin typeface="Malgun Gothic" pitchFamily="34" charset="0"/>
+                <a:ea typeface="Malgun Gothic" pitchFamily="34" charset="-122"/>
+                <a:cs typeface="Malgun Gothic" pitchFamily="34" charset="-120"/>
+              </a:rPr>
+              <a:t>운영·Stage·Test는 무엇으로 구분해야 하는가</a:t>
+            </a:r>
+            <a:endParaRPr lang="en-US" sz="2800" dirty="0"/>
+          </a:p>
+        </p:txBody>
+      </p:sp>
+      <p:sp>
+        <p:nvSpPr>
+          <p:cNvPr id="4" name="Text 2"/>
+          <p:cNvSpPr txBox="1"/>
+          <p:nvPr/>
+        </p:nvSpPr>
+        <p:spPr>
+          <a:xfrm>
+            <a:off x="502920" y="1170432"/>
+            <a:ext cx="10607040" cy="457200"/>
+          </a:xfrm>
+          <a:prstGeom prst="rect">
+            <a:avLst/>
+          </a:prstGeom>
+          <a:noFill/>
+          <a:ln/>
+        </p:spPr>
+        <p:txBody>
+          <a:bodyPr wrap="square" lIns="0" tIns="0" rIns="0" bIns="0" rtlCol="0" anchor="t"/>
+          <a:lstStyle/>
+          <a:p>
+            <a:pPr indent="0" marL="0">
+              <a:lnSpc>
+                <a:spcPct val="125000"/>
+              </a:lnSpc>
+              <a:buNone/>
+            </a:pPr>
+            <a:r>
+              <a:rPr lang="en-US" sz="1250" dirty="0">
+                <a:solidFill>
+                  <a:srgbClr val="5B6572"/>
+                </a:solidFill>
+                <a:latin typeface="Malgun Gothic" pitchFamily="34" charset="0"/>
+                <a:ea typeface="Malgun Gothic" pitchFamily="34" charset="-122"/>
+                <a:cs typeface="Malgun Gothic" pitchFamily="34" charset="-120"/>
+              </a:rPr>
+              <a:t>"환경을 나눈다"는 계정만 3개 만드는 것이 아닙니다. 아래 9가지 기준을 모두 다르게 적용해야 환경 분리가 실제로 작동합니다.</a:t>
+            </a:r>
+            <a:endParaRPr lang="en-US" sz="1250" dirty="0"/>
+          </a:p>
+        </p:txBody>
+      </p:sp>
+      <p:graphicFrame>
+        <p:nvGraphicFramePr>
+          <p:cNvPr id="5" name="Table 0"/>
+          <p:cNvGraphicFramePr>
+            <a:graphicFrameLocks noGrp="1"/>
+          </p:cNvGraphicFramePr>
+          <p:nvPr>
+            <p:extLst>
+              <p:ext uri="{D42A27DB-BD31-4B8C-83A1-F6EECF244321}">
+                <p14:modId xmlns:p14="http://schemas.microsoft.com/office/powerpoint/2010/main" val="1579011935"/>
+              </p:ext>
+            </p:extLst>
+          </p:nvPr>
+        </p:nvGraphicFramePr>
+        <p:xfrm>
+          <a:off x="502920" y="1463040"/>
+          <a:ext cx="11185855" cy="914400"/>
+        </p:xfrm>
+        <a:graphic>
+          <a:graphicData uri="http://schemas.openxmlformats.org/drawingml/2006/table">
+            <a:tbl>
+              <a:tblPr/>
+              <a:tblGrid>
+                <a:gridCol w="1645920"/>
+                <a:gridCol w="3383280"/>
+                <a:gridCol w="3383280"/>
+                <a:gridCol w="3200400"/>
+              </a:tblGrid>
+              <a:tr h="0">
+                <a:tc>
+                  <a:txBody>
+                    <a:bodyPr/>
+                    <a:lstStyle/>
+                    <a:p>
+                      <a:pPr algn="l" indent="0" marL="0">
+                        <a:buNone/>
+                      </a:pPr>
+                      <a:r>
+                        <a:rPr lang="en-US" sz="1000" b="1" dirty="0">
+                          <a:solidFill>
+                            <a:srgbClr val="FFFFFF"/>
+                          </a:solidFill>
+                          <a:latin typeface="Consolas" pitchFamily="34" charset="0"/>
+                          <a:ea typeface="Consolas" pitchFamily="34" charset="-122"/>
+                          <a:cs typeface="Consolas" pitchFamily="34" charset="-120"/>
+                        </a:rPr>
+                        <a:t>구분 기준</a:t>
+                      </a:r>
+                      <a:endParaRPr lang="en-US" sz="1000" dirty="0">
+                        <a:latin typeface="Consolas" charset="0"/>
+                        <a:ea typeface="Consolas" charset="0"/>
+                        <a:cs typeface="Consolas" charset="0"/>
+                      </a:endParaRPr>
+                    </a:p>
+                  </a:txBody>
+                  <a:tcPr marL="91440" marR="91440" marT="45720" marB="45720" anchor="ctr">
+                    <a:lnL w="9525" cap="flat" cmpd="sng" algn="ctr">
+                      <a:solidFill>
+                        <a:srgbClr val="D8DBD2"/>
+                      </a:solidFill>
+                      <a:prstDash val="solid"/>
+                      <a:round/>
+                      <a:headEnd type="none" w="med" len="med"/>
+                      <a:tailEnd type="none" w="med" len="med"/>
+                    </a:lnL>
+                    <a:lnR w="9525" cap="flat" cmpd="sng" algn="ctr">
+                      <a:solidFill>
+                        <a:srgbClr val="D8DBD2"/>
+                      </a:solidFill>
+                      <a:prstDash val="solid"/>
+                      <a:round/>
+                      <a:headEnd type="none" w="med" len="med"/>
+                      <a:tailEnd type="none" w="med" len="med"/>
+                    </a:lnR>
+                    <a:lnT w="9525" cap="flat" cmpd="sng" algn="ctr">
+                      <a:solidFill>
+                        <a:srgbClr val="D8DBD2"/>
+                      </a:solidFill>
+                      <a:prstDash val="solid"/>
+                      <a:round/>
+                      <a:headEnd type="none" w="med" len="med"/>
+                      <a:tailEnd type="none" w="med" len="med"/>
+                    </a:lnT>
+                    <a:lnB w="9525" cap="flat" cmpd="sng" algn="ctr">
+                      <a:solidFill>
+                        <a:srgbClr val="D8DBD2"/>
+                      </a:solidFill>
+                      <a:prstDash val="solid"/>
+                      <a:round/>
+                      <a:headEnd type="none" w="med" len="med"/>
+                      <a:tailEnd type="none" w="med" len="med"/>
+                    </a:lnB>
+                    <a:solidFill>
+                      <a:srgbClr val="1E2A44"/>
+                    </a:solidFill>
+                  </a:tcPr>
+                </a:tc>
+                <a:tc>
+                  <a:txBody>
+                    <a:bodyPr/>
+                    <a:lstStyle/>
+                    <a:p>
+                      <a:pPr algn="l" indent="0" marL="0">
+                        <a:buNone/>
+                      </a:pPr>
+                      <a:r>
+                        <a:rPr lang="en-US" sz="1000" b="1" dirty="0">
+                          <a:solidFill>
+                            <a:srgbClr val="FFFFFF"/>
+                          </a:solidFill>
+                          <a:latin typeface="Consolas" pitchFamily="34" charset="0"/>
+                          <a:ea typeface="Consolas" pitchFamily="34" charset="-122"/>
+                          <a:cs typeface="Consolas" pitchFamily="34" charset="-120"/>
+                        </a:rPr>
+                        <a:t>Production</a:t>
+                      </a:r>
+                      <a:endParaRPr lang="en-US" sz="1000" dirty="0">
+                        <a:latin typeface="Consolas" charset="0"/>
+                        <a:ea typeface="Consolas" charset="0"/>
+                        <a:cs typeface="Consolas" charset="0"/>
+                      </a:endParaRPr>
+                    </a:p>
+                  </a:txBody>
+                  <a:tcPr marL="91440" marR="91440" marT="45720" marB="45720" anchor="ctr">
+                    <a:lnL w="9525" cap="flat" cmpd="sng" algn="ctr">
+                      <a:solidFill>
+                        <a:srgbClr val="D8DBD2"/>
+                      </a:solidFill>
+                      <a:prstDash val="solid"/>
+                      <a:round/>
+                      <a:headEnd type="none" w="med" len="med"/>
+                      <a:tailEnd type="none" w="med" len="med"/>
+                    </a:lnL>
+                    <a:lnR w="9525" cap="flat" cmpd="sng" algn="ctr">
+                      <a:solidFill>
+                        <a:srgbClr val="D8DBD2"/>
+                      </a:solidFill>
+                      <a:prstDash val="solid"/>
+                      <a:round/>
+                      <a:headEnd type="none" w="med" len="med"/>
+                      <a:tailEnd type="none" w="med" len="med"/>
+                    </a:lnR>
+                    <a:lnT w="9525" cap="flat" cmpd="sng" algn="ctr">
+                      <a:solidFill>
+                        <a:srgbClr val="D8DBD2"/>
+                      </a:solidFill>
+                      <a:prstDash val="solid"/>
+                      <a:round/>
+                      <a:headEnd type="none" w="med" len="med"/>
+                      <a:tailEnd type="none" w="med" len="med"/>
+                    </a:lnT>
+                    <a:lnB w="9525" cap="flat" cmpd="sng" algn="ctr">
+                      <a:solidFill>
+                        <a:srgbClr val="D8DBD2"/>
+                      </a:solidFill>
+                      <a:prstDash val="solid"/>
+                      <a:round/>
+                      <a:headEnd type="none" w="med" len="med"/>
+                      <a:tailEnd type="none" w="med" len="med"/>
+                    </a:lnB>
+                    <a:solidFill>
+                      <a:srgbClr val="1E2A44"/>
+                    </a:solidFill>
+                  </a:tcPr>
+                </a:tc>
+                <a:tc>
+                  <a:txBody>
+                    <a:bodyPr/>
+                    <a:lstStyle/>
+                    <a:p>
+                      <a:pPr algn="l" indent="0" marL="0">
+                        <a:buNone/>
+                      </a:pPr>
+                      <a:r>
+                        <a:rPr lang="en-US" sz="1000" b="1" dirty="0">
+                          <a:solidFill>
+                            <a:srgbClr val="FFFFFF"/>
+                          </a:solidFill>
+                          <a:latin typeface="Consolas" pitchFamily="34" charset="0"/>
+                          <a:ea typeface="Consolas" pitchFamily="34" charset="-122"/>
+                          <a:cs typeface="Consolas" pitchFamily="34" charset="-120"/>
+                        </a:rPr>
+                        <a:t>Stage</a:t>
+                      </a:r>
+                      <a:endParaRPr lang="en-US" sz="1000" dirty="0">
+                        <a:latin typeface="Consolas" charset="0"/>
+                        <a:ea typeface="Consolas" charset="0"/>
+                        <a:cs typeface="Consolas" charset="0"/>
+                      </a:endParaRPr>
+                    </a:p>
+                  </a:txBody>
+                  <a:tcPr marL="91440" marR="91440" marT="45720" marB="45720" anchor="ctr">
+                    <a:lnL w="9525" cap="flat" cmpd="sng" algn="ctr">
+                      <a:solidFill>
+                        <a:srgbClr val="D8DBD2"/>
+                      </a:solidFill>
+                      <a:prstDash val="solid"/>
+                      <a:round/>
+                      <a:headEnd type="none" w="med" len="med"/>
+                      <a:tailEnd type="none" w="med" len="med"/>
+                    </a:lnL>
+                    <a:lnR w="9525" cap="flat" cmpd="sng" algn="ctr">
+                      <a:solidFill>
+                        <a:srgbClr val="D8DBD2"/>
+                      </a:solidFill>
+                      <a:prstDash val="solid"/>
+                      <a:round/>
+                      <a:headEnd type="none" w="med" len="med"/>
+                      <a:tailEnd type="none" w="med" len="med"/>
+                    </a:lnR>
+                    <a:lnT w="9525" cap="flat" cmpd="sng" algn="ctr">
+                      <a:solidFill>
+                        <a:srgbClr val="D8DBD2"/>
+                      </a:solidFill>
+                      <a:prstDash val="solid"/>
+                      <a:round/>
+                      <a:headEnd type="none" w="med" len="med"/>
+                      <a:tailEnd type="none" w="med" len="med"/>
+                    </a:lnT>
+                    <a:lnB w="9525" cap="flat" cmpd="sng" algn="ctr">
+                      <a:solidFill>
+                        <a:srgbClr val="D8DBD2"/>
+                      </a:solidFill>
+                      <a:prstDash val="solid"/>
+                      <a:round/>
+                      <a:headEnd type="none" w="med" len="med"/>
+                      <a:tailEnd type="none" w="med" len="med"/>
+                    </a:lnB>
+                    <a:solidFill>
+                      <a:srgbClr val="1E2A44"/>
+                    </a:solidFill>
+                  </a:tcPr>
+                </a:tc>
+                <a:tc>
+                  <a:txBody>
+                    <a:bodyPr/>
+                    <a:lstStyle/>
+                    <a:p>
+                      <a:pPr algn="l" indent="0" marL="0">
+                        <a:buNone/>
+                      </a:pPr>
+                      <a:r>
+                        <a:rPr lang="en-US" sz="1000" b="1" dirty="0">
+                          <a:solidFill>
+                            <a:srgbClr val="FFFFFF"/>
+                          </a:solidFill>
+                          <a:latin typeface="Consolas" pitchFamily="34" charset="0"/>
+                          <a:ea typeface="Consolas" pitchFamily="34" charset="-122"/>
+                          <a:cs typeface="Consolas" pitchFamily="34" charset="-120"/>
+                        </a:rPr>
+                        <a:t>Test / Dev</a:t>
+                      </a:r>
+                      <a:endParaRPr lang="en-US" sz="1000" dirty="0">
+                        <a:latin typeface="Consolas" charset="0"/>
+                        <a:ea typeface="Consolas" charset="0"/>
+                        <a:cs typeface="Consolas" charset="0"/>
+                      </a:endParaRPr>
+                    </a:p>
+                  </a:txBody>
+                  <a:tcPr marL="91440" marR="91440" marT="45720" marB="45720" anchor="ctr">
+                    <a:lnL w="9525" cap="flat" cmpd="sng" algn="ctr">
+                      <a:solidFill>
+                        <a:srgbClr val="D8DBD2"/>
+                      </a:solidFill>
+                      <a:prstDash val="solid"/>
+                      <a:round/>
+                      <a:headEnd type="none" w="med" len="med"/>
+                      <a:tailEnd type="none" w="med" len="med"/>
+                    </a:lnL>
+                    <a:lnR w="9525" cap="flat" cmpd="sng" algn="ctr">
+                      <a:solidFill>
+                        <a:srgbClr val="D8DBD2"/>
+                      </a:solidFill>
+                      <a:prstDash val="solid"/>
+                      <a:round/>
+                      <a:headEnd type="none" w="med" len="med"/>
+                      <a:tailEnd type="none" w="med" len="med"/>
+                    </a:lnR>
+                    <a:lnT w="9525" cap="flat" cmpd="sng" algn="ctr">
+                      <a:solidFill>
+                        <a:srgbClr val="D8DBD2"/>
+                      </a:solidFill>
+                      <a:prstDash val="solid"/>
+                      <a:round/>
+                      <a:headEnd type="none" w="med" len="med"/>
+                      <a:tailEnd type="none" w="med" len="med"/>
+                    </a:lnT>
+                    <a:lnB w="9525" cap="flat" cmpd="sng" algn="ctr">
+                      <a:solidFill>
+                        <a:srgbClr val="D8DBD2"/>
+                      </a:solidFill>
+                      <a:prstDash val="solid"/>
+                      <a:round/>
+                      <a:headEnd type="none" w="med" len="med"/>
+                      <a:tailEnd type="none" w="med" len="med"/>
+                    </a:lnB>
+                    <a:solidFill>
+                      <a:srgbClr val="1E2A44"/>
+                    </a:solidFill>
+                  </a:tcPr>
+                </a:tc>
+              </a:tr>
+              <a:tr h="0">
+                <a:tc>
+                  <a:txBody>
+                    <a:bodyPr/>
+                    <a:lstStyle/>
+                    <a:p>
+                      <a:pPr algn="l" indent="0" marL="0">
+                        <a:buNone/>
+                      </a:pPr>
+                      <a:r>
+                        <a:rPr lang="en-US" sz="1050" b="1" dirty="0">
+                          <a:solidFill>
+                            <a:srgbClr val="5B6572"/>
+                          </a:solidFill>
+                          <a:latin typeface="Malgun Gothic" pitchFamily="34" charset="0"/>
+                          <a:ea typeface="Malgun Gothic" pitchFamily="34" charset="-122"/>
+                          <a:cs typeface="Malgun Gothic" pitchFamily="34" charset="-120"/>
+                        </a:rPr>
+                        <a:t>계정/구독</a:t>
+                      </a:r>
+                      <a:endParaRPr lang="en-US" sz="1050" dirty="0">
+                        <a:latin typeface="Malgun Gothic" charset="0"/>
+                        <a:ea typeface="Malgun Gothic" charset="0"/>
+                        <a:cs typeface="Malgun Gothic" charset="0"/>
+                      </a:endParaRPr>
+                    </a:p>
+                  </a:txBody>
+                  <a:tcPr marL="91440" marR="91440" marT="45720" marB="45720" anchor="ctr">
+                    <a:lnL w="9525" cap="flat" cmpd="sng" algn="ctr">
+                      <a:solidFill>
+                        <a:srgbClr val="D8DBD2"/>
+                      </a:solidFill>
+                      <a:prstDash val="solid"/>
+                      <a:round/>
+                      <a:headEnd type="none" w="med" len="med"/>
+                      <a:tailEnd type="none" w="med" len="med"/>
+                    </a:lnL>
+                    <a:lnR w="9525" cap="flat" cmpd="sng" algn="ctr">
+                      <a:solidFill>
+                        <a:srgbClr val="D8DBD2"/>
+                      </a:solidFill>
+                      <a:prstDash val="solid"/>
+                      <a:round/>
+                      <a:headEnd type="none" w="med" len="med"/>
+                      <a:tailEnd type="none" w="med" len="med"/>
+                    </a:lnR>
+                    <a:lnT w="9525" cap="flat" cmpd="sng" algn="ctr">
+                      <a:solidFill>
+                        <a:srgbClr val="D8DBD2"/>
+                      </a:solidFill>
+                      <a:prstDash val="solid"/>
+                      <a:round/>
+                      <a:headEnd type="none" w="med" len="med"/>
+                      <a:tailEnd type="none" w="med" len="med"/>
+                    </a:lnT>
+                    <a:lnB w="9525" cap="flat" cmpd="sng" algn="ctr">
+                      <a:solidFill>
+                        <a:srgbClr val="D8DBD2"/>
+                      </a:solidFill>
+                      <a:prstDash val="solid"/>
+                      <a:round/>
+                      <a:headEnd type="none" w="med" len="med"/>
+                      <a:tailEnd type="none" w="med" len="med"/>
+                    </a:lnB>
+                    <a:solidFill>
+                      <a:srgbClr val="FFFFFF"/>
+                    </a:solidFill>
+                  </a:tcPr>
+                </a:tc>
+                <a:tc>
+                  <a:txBody>
+                    <a:bodyPr/>
+                    <a:lstStyle/>
+                    <a:p>
+                      <a:pPr algn="l" indent="0" marL="0">
+                        <a:buNone/>
+                      </a:pPr>
+                      <a:r>
+                        <a:rPr lang="en-US" sz="1050" dirty="0">
+                          <a:solidFill>
+                            <a:srgbClr val="1B2430"/>
+                          </a:solidFill>
+                          <a:latin typeface="Malgun Gothic" pitchFamily="34" charset="0"/>
+                          <a:ea typeface="Malgun Gothic" pitchFamily="34" charset="-122"/>
+                          <a:cs typeface="Malgun Gothic" pitchFamily="34" charset="-120"/>
+                        </a:rPr>
+                        <a:t>전용 Account/Subscription</a:t>
+                      </a:r>
+                      <a:endParaRPr lang="en-US" sz="1050" dirty="0">
+                        <a:latin typeface="Malgun Gothic" charset="0"/>
+                        <a:ea typeface="Malgun Gothic" charset="0"/>
+                        <a:cs typeface="Malgun Gothic" charset="0"/>
+                      </a:endParaRPr>
+                    </a:p>
+                  </a:txBody>
+                  <a:tcPr marL="91440" marR="91440" marT="45720" marB="45720" anchor="ctr">
+                    <a:lnL w="9525" cap="flat" cmpd="sng" algn="ctr">
+                      <a:solidFill>
+                        <a:srgbClr val="D8DBD2"/>
+                      </a:solidFill>
+                      <a:prstDash val="solid"/>
+                      <a:round/>
+                      <a:headEnd type="none" w="med" len="med"/>
+                      <a:tailEnd type="none" w="med" len="med"/>
+                    </a:lnL>
+                    <a:lnR w="9525" cap="flat" cmpd="sng" algn="ctr">
+                      <a:solidFill>
+                        <a:srgbClr val="D8DBD2"/>
+                      </a:solidFill>
+                      <a:prstDash val="solid"/>
+                      <a:round/>
+                      <a:headEnd type="none" w="med" len="med"/>
+                      <a:tailEnd type="none" w="med" len="med"/>
+                    </a:lnR>
+                    <a:lnT w="9525" cap="flat" cmpd="sng" algn="ctr">
+                      <a:solidFill>
+                        <a:srgbClr val="D8DBD2"/>
+                      </a:solidFill>
+                      <a:prstDash val="solid"/>
+                      <a:round/>
+                      <a:headEnd type="none" w="med" len="med"/>
+                      <a:tailEnd type="none" w="med" len="med"/>
+                    </a:lnT>
+                    <a:lnB w="9525" cap="flat" cmpd="sng" algn="ctr">
+                      <a:solidFill>
+                        <a:srgbClr val="D8DBD2"/>
+                      </a:solidFill>
+                      <a:prstDash val="solid"/>
+                      <a:round/>
+                      <a:headEnd type="none" w="med" len="med"/>
+                      <a:tailEnd type="none" w="med" len="med"/>
+                    </a:lnB>
+                    <a:solidFill>
+                      <a:srgbClr val="FFFFFF"/>
+                    </a:solidFill>
+                  </a:tcPr>
+                </a:tc>
+                <a:tc>
+                  <a:txBody>
+                    <a:bodyPr/>
+                    <a:lstStyle/>
+                    <a:p>
+                      <a:pPr algn="l" indent="0" marL="0">
+                        <a:buNone/>
+                      </a:pPr>
+                      <a:r>
+                        <a:rPr lang="en-US" sz="1050" dirty="0">
+                          <a:solidFill>
+                            <a:srgbClr val="1B2430"/>
+                          </a:solidFill>
+                          <a:latin typeface="Malgun Gothic" pitchFamily="34" charset="0"/>
+                          <a:ea typeface="Malgun Gothic" pitchFamily="34" charset="-122"/>
+                          <a:cs typeface="Malgun Gothic" pitchFamily="34" charset="-120"/>
+                        </a:rPr>
+                        <a:t>별도 Account/Subscription(Prod와 Peering 없음)</a:t>
+                      </a:r>
+                      <a:endParaRPr lang="en-US" sz="1050" dirty="0">
+                        <a:latin typeface="Malgun Gothic" charset="0"/>
+                        <a:ea typeface="Malgun Gothic" charset="0"/>
+                        <a:cs typeface="Malgun Gothic" charset="0"/>
+                      </a:endParaRPr>
+                    </a:p>
+                  </a:txBody>
+                  <a:tcPr marL="91440" marR="91440" marT="45720" marB="45720" anchor="ctr">
+                    <a:lnL w="9525" cap="flat" cmpd="sng" algn="ctr">
+                      <a:solidFill>
+                        <a:srgbClr val="D8DBD2"/>
+                      </a:solidFill>
+                      <a:prstDash val="solid"/>
+                      <a:round/>
+                      <a:headEnd type="none" w="med" len="med"/>
+                      <a:tailEnd type="none" w="med" len="med"/>
+                    </a:lnL>
+                    <a:lnR w="9525" cap="flat" cmpd="sng" algn="ctr">
+                      <a:solidFill>
+                        <a:srgbClr val="D8DBD2"/>
+                      </a:solidFill>
+                      <a:prstDash val="solid"/>
+                      <a:round/>
+                      <a:headEnd type="none" w="med" len="med"/>
+                      <a:tailEnd type="none" w="med" len="med"/>
+                    </a:lnR>
+                    <a:lnT w="9525" cap="flat" cmpd="sng" algn="ctr">
+                      <a:solidFill>
+                        <a:srgbClr val="D8DBD2"/>
+                      </a:solidFill>
+                      <a:prstDash val="solid"/>
+                      <a:round/>
+                      <a:headEnd type="none" w="med" len="med"/>
+                      <a:tailEnd type="none" w="med" len="med"/>
+                    </a:lnT>
+                    <a:lnB w="9525" cap="flat" cmpd="sng" algn="ctr">
+                      <a:solidFill>
+                        <a:srgbClr val="D8DBD2"/>
+                      </a:solidFill>
+                      <a:prstDash val="solid"/>
+                      <a:round/>
+                      <a:headEnd type="none" w="med" len="med"/>
+                      <a:tailEnd type="none" w="med" len="med"/>
+                    </a:lnB>
+                    <a:solidFill>
+                      <a:srgbClr val="FFFFFF"/>
+                    </a:solidFill>
+                  </a:tcPr>
+                </a:tc>
+                <a:tc>
+                  <a:txBody>
+                    <a:bodyPr/>
+                    <a:lstStyle/>
+                    <a:p>
+                      <a:pPr algn="l" indent="0" marL="0">
+                        <a:buNone/>
+                      </a:pPr>
+                      <a:r>
+                        <a:rPr lang="en-US" sz="1050" dirty="0">
+                          <a:solidFill>
+                            <a:srgbClr val="1B2430"/>
+                          </a:solidFill>
+                          <a:latin typeface="Malgun Gothic" pitchFamily="34" charset="0"/>
+                          <a:ea typeface="Malgun Gothic" pitchFamily="34" charset="-122"/>
+                          <a:cs typeface="Malgun Gothic" pitchFamily="34" charset="-120"/>
+                        </a:rPr>
+                        <a:t>별도 Account/Subscription(Prod 접근 원천 차단)</a:t>
+                      </a:r>
+                      <a:endParaRPr lang="en-US" sz="1050" dirty="0">
+                        <a:latin typeface="Malgun Gothic" charset="0"/>
+                        <a:ea typeface="Malgun Gothic" charset="0"/>
+                        <a:cs typeface="Malgun Gothic" charset="0"/>
+                      </a:endParaRPr>
+                    </a:p>
+                  </a:txBody>
+                  <a:tcPr marL="91440" marR="91440" marT="45720" marB="45720" anchor="ctr">
+                    <a:lnL w="9525" cap="flat" cmpd="sng" algn="ctr">
+                      <a:solidFill>
+                        <a:srgbClr val="D8DBD2"/>
+                      </a:solidFill>
+                      <a:prstDash val="solid"/>
+                      <a:round/>
+                      <a:headEnd type="none" w="med" len="med"/>
+                      <a:tailEnd type="none" w="med" len="med"/>
+                    </a:lnL>
+                    <a:lnR w="9525" cap="flat" cmpd="sng" algn="ctr">
+                      <a:solidFill>
+                        <a:srgbClr val="D8DBD2"/>
+                      </a:solidFill>
+                      <a:prstDash val="solid"/>
+                      <a:round/>
+                      <a:headEnd type="none" w="med" len="med"/>
+                      <a:tailEnd type="none" w="med" len="med"/>
+                    </a:lnR>
+                    <a:lnT w="9525" cap="flat" cmpd="sng" algn="ctr">
+                      <a:solidFill>
+                        <a:srgbClr val="D8DBD2"/>
+                      </a:solidFill>
+                      <a:prstDash val="solid"/>
+                      <a:round/>
+                      <a:headEnd type="none" w="med" len="med"/>
+                      <a:tailEnd type="none" w="med" len="med"/>
+                    </a:lnT>
+                    <a:lnB w="9525" cap="flat" cmpd="sng" algn="ctr">
+                      <a:solidFill>
+                        <a:srgbClr val="D8DBD2"/>
+                      </a:solidFill>
+                      <a:prstDash val="solid"/>
+                      <a:round/>
+                      <a:headEnd type="none" w="med" len="med"/>
+                      <a:tailEnd type="none" w="med" len="med"/>
+                    </a:lnB>
+                    <a:solidFill>
+                      <a:srgbClr val="FFFFFF"/>
+                    </a:solidFill>
+                  </a:tcPr>
+                </a:tc>
+              </a:tr>
+              <a:tr h="0">
+                <a:tc>
+                  <a:txBody>
+                    <a:bodyPr/>
+                    <a:lstStyle/>
+                    <a:p>
+                      <a:pPr algn="l" indent="0" marL="0">
+                        <a:buNone/>
+                      </a:pPr>
+                      <a:r>
+                        <a:rPr lang="en-US" sz="1050" b="1" dirty="0">
+                          <a:solidFill>
+                            <a:srgbClr val="5B6572"/>
+                          </a:solidFill>
+                          <a:latin typeface="Malgun Gothic" pitchFamily="34" charset="0"/>
+                          <a:ea typeface="Malgun Gothic" pitchFamily="34" charset="-122"/>
+                          <a:cs typeface="Malgun Gothic" pitchFamily="34" charset="-120"/>
+                        </a:rPr>
+                        <a:t>네트워크</a:t>
+                      </a:r>
+                      <a:endParaRPr lang="en-US" sz="1050" dirty="0">
+                        <a:latin typeface="Malgun Gothic" charset="0"/>
+                        <a:ea typeface="Malgun Gothic" charset="0"/>
+                        <a:cs typeface="Malgun Gothic" charset="0"/>
+                      </a:endParaRPr>
+                    </a:p>
+                  </a:txBody>
+                  <a:tcPr marL="91440" marR="91440" marT="45720" marB="45720" anchor="ctr">
+                    <a:lnL w="9525" cap="flat" cmpd="sng" algn="ctr">
+                      <a:solidFill>
+                        <a:srgbClr val="D8DBD2"/>
+                      </a:solidFill>
+                      <a:prstDash val="solid"/>
+                      <a:round/>
+                      <a:headEnd type="none" w="med" len="med"/>
+                      <a:tailEnd type="none" w="med" len="med"/>
+                    </a:lnL>
+                    <a:lnR w="9525" cap="flat" cmpd="sng" algn="ctr">
+                      <a:solidFill>
+                        <a:srgbClr val="D8DBD2"/>
+                      </a:solidFill>
+                      <a:prstDash val="solid"/>
+                      <a:round/>
+                      <a:headEnd type="none" w="med" len="med"/>
+                      <a:tailEnd type="none" w="med" len="med"/>
+                    </a:lnR>
+                    <a:lnT w="9525" cap="flat" cmpd="sng" algn="ctr">
+                      <a:solidFill>
+                        <a:srgbClr val="D8DBD2"/>
+                      </a:solidFill>
+                      <a:prstDash val="solid"/>
+                      <a:round/>
+                      <a:headEnd type="none" w="med" len="med"/>
+                      <a:tailEnd type="none" w="med" len="med"/>
+                    </a:lnT>
+                    <a:lnB w="9525" cap="flat" cmpd="sng" algn="ctr">
+                      <a:solidFill>
+                        <a:srgbClr val="D8DBD2"/>
+                      </a:solidFill>
+                      <a:prstDash val="solid"/>
+                      <a:round/>
+                      <a:headEnd type="none" w="med" len="med"/>
+                      <a:tailEnd type="none" w="med" len="med"/>
+                    </a:lnB>
+                    <a:solidFill>
+                      <a:srgbClr val="F1F2EF"/>
+                    </a:solidFill>
+                  </a:tcPr>
+                </a:tc>
+                <a:tc>
+                  <a:txBody>
+                    <a:bodyPr/>
+                    <a:lstStyle/>
+                    <a:p>
+                      <a:pPr algn="l" indent="0" marL="0">
+                        <a:buNone/>
+                      </a:pPr>
+                      <a:r>
+                        <a:rPr lang="en-US" sz="1050" dirty="0">
+                          <a:solidFill>
+                            <a:srgbClr val="1B2430"/>
+                          </a:solidFill>
+                          <a:latin typeface="Malgun Gothic" pitchFamily="34" charset="0"/>
+                          <a:ea typeface="Malgun Gothic" pitchFamily="34" charset="-122"/>
+                          <a:cs typeface="Malgun Gothic" pitchFamily="34" charset="-120"/>
+                        </a:rPr>
+                        <a:t>전용 VPC/VNet · Multi-AZ 이중화</a:t>
+                      </a:r>
+                      <a:endParaRPr lang="en-US" sz="1050" dirty="0">
+                        <a:latin typeface="Malgun Gothic" charset="0"/>
+                        <a:ea typeface="Malgun Gothic" charset="0"/>
+                        <a:cs typeface="Malgun Gothic" charset="0"/>
+                      </a:endParaRPr>
+                    </a:p>
+                  </a:txBody>
+                  <a:tcPr marL="91440" marR="91440" marT="45720" marB="45720" anchor="ctr">
+                    <a:lnL w="9525" cap="flat" cmpd="sng" algn="ctr">
+                      <a:solidFill>
+                        <a:srgbClr val="D8DBD2"/>
+                      </a:solidFill>
+                      <a:prstDash val="solid"/>
+                      <a:round/>
+                      <a:headEnd type="none" w="med" len="med"/>
+                      <a:tailEnd type="none" w="med" len="med"/>
+                    </a:lnL>
+                    <a:lnR w="9525" cap="flat" cmpd="sng" algn="ctr">
+                      <a:solidFill>
+                        <a:srgbClr val="D8DBD2"/>
+                      </a:solidFill>
+                      <a:prstDash val="solid"/>
+                      <a:round/>
+                      <a:headEnd type="none" w="med" len="med"/>
+                      <a:tailEnd type="none" w="med" len="med"/>
+                    </a:lnR>
+                    <a:lnT w="9525" cap="flat" cmpd="sng" algn="ctr">
+                      <a:solidFill>
+                        <a:srgbClr val="D8DBD2"/>
+                      </a:solidFill>
+                      <a:prstDash val="solid"/>
+                      <a:round/>
+                      <a:headEnd type="none" w="med" len="med"/>
+                      <a:tailEnd type="none" w="med" len="med"/>
+                    </a:lnT>
+                    <a:lnB w="9525" cap="flat" cmpd="sng" algn="ctr">
+                      <a:solidFill>
+                        <a:srgbClr val="D8DBD2"/>
+                      </a:solidFill>
+                      <a:prstDash val="solid"/>
+                      <a:round/>
+                      <a:headEnd type="none" w="med" len="med"/>
+                      <a:tailEnd type="none" w="med" len="med"/>
+                    </a:lnB>
+                    <a:solidFill>
+                      <a:srgbClr val="F1F2EF"/>
+                    </a:solidFill>
+                  </a:tcPr>
+                </a:tc>
+                <a:tc>
+                  <a:txBody>
+                    <a:bodyPr/>
+                    <a:lstStyle/>
+                    <a:p>
+                      <a:pPr algn="l" indent="0" marL="0">
+                        <a:buNone/>
+                      </a:pPr>
+                      <a:r>
+                        <a:rPr lang="en-US" sz="1050" dirty="0">
+                          <a:solidFill>
+                            <a:srgbClr val="1B2430"/>
+                          </a:solidFill>
+                          <a:latin typeface="Malgun Gothic" pitchFamily="34" charset="0"/>
+                          <a:ea typeface="Malgun Gothic" pitchFamily="34" charset="-122"/>
+                          <a:cs typeface="Malgun Gothic" pitchFamily="34" charset="-120"/>
+                        </a:rPr>
+                        <a:t>별도 VPC/VNet · 축소 구성</a:t>
+                      </a:r>
+                      <a:endParaRPr lang="en-US" sz="1050" dirty="0">
+                        <a:latin typeface="Malgun Gothic" charset="0"/>
+                        <a:ea typeface="Malgun Gothic" charset="0"/>
+                        <a:cs typeface="Malgun Gothic" charset="0"/>
+                      </a:endParaRPr>
+                    </a:p>
+                  </a:txBody>
+                  <a:tcPr marL="91440" marR="91440" marT="45720" marB="45720" anchor="ctr">
+                    <a:lnL w="9525" cap="flat" cmpd="sng" algn="ctr">
+                      <a:solidFill>
+                        <a:srgbClr val="D8DBD2"/>
+                      </a:solidFill>
+                      <a:prstDash val="solid"/>
+                      <a:round/>
+                      <a:headEnd type="none" w="med" len="med"/>
+                      <a:tailEnd type="none" w="med" len="med"/>
+                    </a:lnL>
+                    <a:lnR w="9525" cap="flat" cmpd="sng" algn="ctr">
+                      <a:solidFill>
+                        <a:srgbClr val="D8DBD2"/>
+                      </a:solidFill>
+                      <a:prstDash val="solid"/>
+                      <a:round/>
+                      <a:headEnd type="none" w="med" len="med"/>
+                      <a:tailEnd type="none" w="med" len="med"/>
+                    </a:lnR>
+                    <a:lnT w="9525" cap="flat" cmpd="sng" algn="ctr">
+                      <a:solidFill>
+                        <a:srgbClr val="D8DBD2"/>
+                      </a:solidFill>
+                      <a:prstDash val="solid"/>
+                      <a:round/>
+                      <a:headEnd type="none" w="med" len="med"/>
+                      <a:tailEnd type="none" w="med" len="med"/>
+                    </a:lnT>
+                    <a:lnB w="9525" cap="flat" cmpd="sng" algn="ctr">
+                      <a:solidFill>
+                        <a:srgbClr val="D8DBD2"/>
+                      </a:solidFill>
+                      <a:prstDash val="solid"/>
+                      <a:round/>
+                      <a:headEnd type="none" w="med" len="med"/>
+                      <a:tailEnd type="none" w="med" len="med"/>
+                    </a:lnB>
+                    <a:solidFill>
+                      <a:srgbClr val="F1F2EF"/>
+                    </a:solidFill>
+                  </a:tcPr>
+                </a:tc>
+                <a:tc>
+                  <a:txBody>
+                    <a:bodyPr/>
+                    <a:lstStyle/>
+                    <a:p>
+                      <a:pPr algn="l" indent="0" marL="0">
+                        <a:buNone/>
+                      </a:pPr>
+                      <a:r>
+                        <a:rPr lang="en-US" sz="1050" dirty="0">
+                          <a:solidFill>
+                            <a:srgbClr val="1B2430"/>
+                          </a:solidFill>
+                          <a:latin typeface="Malgun Gothic" pitchFamily="34" charset="0"/>
+                          <a:ea typeface="Malgun Gothic" pitchFamily="34" charset="-122"/>
+                          <a:cs typeface="Malgun Gothic" pitchFamily="34" charset="-120"/>
+                        </a:rPr>
+                        <a:t>별도 VPC/VNet · 최소 구성</a:t>
+                      </a:r>
+                      <a:endParaRPr lang="en-US" sz="1050" dirty="0">
+                        <a:latin typeface="Malgun Gothic" charset="0"/>
+                        <a:ea typeface="Malgun Gothic" charset="0"/>
+                        <a:cs typeface="Malgun Gothic" charset="0"/>
+                      </a:endParaRPr>
+                    </a:p>
+                  </a:txBody>
+                  <a:tcPr marL="91440" marR="91440" marT="45720" marB="45720" anchor="ctr">
+                    <a:lnL w="9525" cap="flat" cmpd="sng" algn="ctr">
+                      <a:solidFill>
+                        <a:srgbClr val="D8DBD2"/>
+                      </a:solidFill>
+                      <a:prstDash val="solid"/>
+                      <a:round/>
+                      <a:headEnd type="none" w="med" len="med"/>
+                      <a:tailEnd type="none" w="med" len="med"/>
+                    </a:lnL>
+                    <a:lnR w="9525" cap="flat" cmpd="sng" algn="ctr">
+                      <a:solidFill>
+                        <a:srgbClr val="D8DBD2"/>
+                      </a:solidFill>
+                      <a:prstDash val="solid"/>
+                      <a:round/>
+                      <a:headEnd type="none" w="med" len="med"/>
+                      <a:tailEnd type="none" w="med" len="med"/>
+                    </a:lnR>
+                    <a:lnT w="9525" cap="flat" cmpd="sng" algn="ctr">
+                      <a:solidFill>
+                        <a:srgbClr val="D8DBD2"/>
+                      </a:solidFill>
+                      <a:prstDash val="solid"/>
+                      <a:round/>
+                      <a:headEnd type="none" w="med" len="med"/>
+                      <a:tailEnd type="none" w="med" len="med"/>
+                    </a:lnT>
+                    <a:lnB w="9525" cap="flat" cmpd="sng" algn="ctr">
+                      <a:solidFill>
+                        <a:srgbClr val="D8DBD2"/>
+                      </a:solidFill>
+                      <a:prstDash val="solid"/>
+                      <a:round/>
+                      <a:headEnd type="none" w="med" len="med"/>
+                      <a:tailEnd type="none" w="med" len="med"/>
+                    </a:lnB>
+                    <a:solidFill>
+                      <a:srgbClr val="F1F2EF"/>
+                    </a:solidFill>
+                  </a:tcPr>
+                </a:tc>
+              </a:tr>
+              <a:tr h="0">
+                <a:tc>
+                  <a:txBody>
+                    <a:bodyPr/>
+                    <a:lstStyle/>
+                    <a:p>
+                      <a:pPr algn="l" indent="0" marL="0">
+                        <a:buNone/>
+                      </a:pPr>
+                      <a:r>
+                        <a:rPr lang="en-US" sz="1050" b="1" dirty="0">
+                          <a:solidFill>
+                            <a:srgbClr val="5B6572"/>
+                          </a:solidFill>
+                          <a:latin typeface="Malgun Gothic" pitchFamily="34" charset="0"/>
+                          <a:ea typeface="Malgun Gothic" pitchFamily="34" charset="-122"/>
+                          <a:cs typeface="Malgun Gothic" pitchFamily="34" charset="-120"/>
+                        </a:rPr>
+                        <a:t>데이터</a:t>
+                      </a:r>
+                      <a:endParaRPr lang="en-US" sz="1050" dirty="0">
+                        <a:latin typeface="Malgun Gothic" charset="0"/>
+                        <a:ea typeface="Malgun Gothic" charset="0"/>
+                        <a:cs typeface="Malgun Gothic" charset="0"/>
+                      </a:endParaRPr>
+                    </a:p>
+                  </a:txBody>
+                  <a:tcPr marL="91440" marR="91440" marT="45720" marB="45720" anchor="ctr">
+                    <a:lnL w="9525" cap="flat" cmpd="sng" algn="ctr">
+                      <a:solidFill>
+                        <a:srgbClr val="D8DBD2"/>
+                      </a:solidFill>
+                      <a:prstDash val="solid"/>
+                      <a:round/>
+                      <a:headEnd type="none" w="med" len="med"/>
+                      <a:tailEnd type="none" w="med" len="med"/>
+                    </a:lnL>
+                    <a:lnR w="9525" cap="flat" cmpd="sng" algn="ctr">
+                      <a:solidFill>
+                        <a:srgbClr val="D8DBD2"/>
+                      </a:solidFill>
+                      <a:prstDash val="solid"/>
+                      <a:round/>
+                      <a:headEnd type="none" w="med" len="med"/>
+                      <a:tailEnd type="none" w="med" len="med"/>
+                    </a:lnR>
+                    <a:lnT w="9525" cap="flat" cmpd="sng" algn="ctr">
+                      <a:solidFill>
+                        <a:srgbClr val="D8DBD2"/>
+                      </a:solidFill>
+                      <a:prstDash val="solid"/>
+                      <a:round/>
+                      <a:headEnd type="none" w="med" len="med"/>
+                      <a:tailEnd type="none" w="med" len="med"/>
+                    </a:lnT>
+                    <a:lnB w="9525" cap="flat" cmpd="sng" algn="ctr">
+                      <a:solidFill>
+                        <a:srgbClr val="D8DBD2"/>
+                      </a:solidFill>
+                      <a:prstDash val="solid"/>
+                      <a:round/>
+                      <a:headEnd type="none" w="med" len="med"/>
+                      <a:tailEnd type="none" w="med" len="med"/>
+                    </a:lnB>
+                    <a:solidFill>
+                      <a:srgbClr val="FFFFFF"/>
+                    </a:solidFill>
+                  </a:tcPr>
+                </a:tc>
+                <a:tc>
+                  <a:txBody>
+                    <a:bodyPr/>
+                    <a:lstStyle/>
+                    <a:p>
+                      <a:pPr algn="l" indent="0" marL="0">
+                        <a:buNone/>
+                      </a:pPr>
+                      <a:r>
+                        <a:rPr lang="en-US" sz="1050" b="1" dirty="0">
+                          <a:solidFill>
+                            <a:srgbClr val="AE4536"/>
+                          </a:solidFill>
+                          <a:latin typeface="Malgun Gothic" pitchFamily="34" charset="0"/>
+                          <a:ea typeface="Malgun Gothic" pitchFamily="34" charset="-122"/>
+                          <a:cs typeface="Malgun Gothic" pitchFamily="34" charset="-120"/>
+                        </a:rPr>
+                        <a:t>실 개인신용정보(원본)</a:t>
+                      </a:r>
+                      <a:endParaRPr lang="en-US" sz="1050" dirty="0">
+                        <a:latin typeface="Malgun Gothic" charset="0"/>
+                        <a:ea typeface="Malgun Gothic" charset="0"/>
+                        <a:cs typeface="Malgun Gothic" charset="0"/>
+                      </a:endParaRPr>
+                    </a:p>
+                  </a:txBody>
+                  <a:tcPr marL="91440" marR="91440" marT="45720" marB="45720" anchor="ctr">
+                    <a:lnL w="9525" cap="flat" cmpd="sng" algn="ctr">
+                      <a:solidFill>
+                        <a:srgbClr val="D8DBD2"/>
+                      </a:solidFill>
+                      <a:prstDash val="solid"/>
+                      <a:round/>
+                      <a:headEnd type="none" w="med" len="med"/>
+                      <a:tailEnd type="none" w="med" len="med"/>
+                    </a:lnL>
+                    <a:lnR w="9525" cap="flat" cmpd="sng" algn="ctr">
+                      <a:solidFill>
+                        <a:srgbClr val="D8DBD2"/>
+                      </a:solidFill>
+                      <a:prstDash val="solid"/>
+                      <a:round/>
+                      <a:headEnd type="none" w="med" len="med"/>
+                      <a:tailEnd type="none" w="med" len="med"/>
+                    </a:lnR>
+                    <a:lnT w="9525" cap="flat" cmpd="sng" algn="ctr">
+                      <a:solidFill>
+                        <a:srgbClr val="D8DBD2"/>
+                      </a:solidFill>
+                      <a:prstDash val="solid"/>
+                      <a:round/>
+                      <a:headEnd type="none" w="med" len="med"/>
+                      <a:tailEnd type="none" w="med" len="med"/>
+                    </a:lnT>
+                    <a:lnB w="9525" cap="flat" cmpd="sng" algn="ctr">
+                      <a:solidFill>
+                        <a:srgbClr val="D8DBD2"/>
+                      </a:solidFill>
+                      <a:prstDash val="solid"/>
+                      <a:round/>
+                      <a:headEnd type="none" w="med" len="med"/>
+                      <a:tailEnd type="none" w="med" len="med"/>
+                    </a:lnB>
+                    <a:solidFill>
+                      <a:srgbClr val="FFFFFF"/>
+                    </a:solidFill>
+                  </a:tcPr>
+                </a:tc>
+                <a:tc>
+                  <a:txBody>
+                    <a:bodyPr/>
+                    <a:lstStyle/>
+                    <a:p>
+                      <a:pPr algn="l" indent="0" marL="0">
+                        <a:buNone/>
+                      </a:pPr>
+                      <a:r>
+                        <a:rPr lang="en-US" sz="1050" dirty="0">
+                          <a:solidFill>
+                            <a:srgbClr val="1B2430"/>
+                          </a:solidFill>
+                          <a:latin typeface="Malgun Gothic" pitchFamily="34" charset="0"/>
+                          <a:ea typeface="Malgun Gothic" pitchFamily="34" charset="-122"/>
+                          <a:cs typeface="Malgun Gothic" pitchFamily="34" charset="-120"/>
+                        </a:rPr>
+                        <a:t>마스킹·익명화 데이터</a:t>
+                      </a:r>
+                      <a:endParaRPr lang="en-US" sz="1050" dirty="0">
+                        <a:latin typeface="Malgun Gothic" charset="0"/>
+                        <a:ea typeface="Malgun Gothic" charset="0"/>
+                        <a:cs typeface="Malgun Gothic" charset="0"/>
+                      </a:endParaRPr>
+                    </a:p>
+                  </a:txBody>
+                  <a:tcPr marL="91440" marR="91440" marT="45720" marB="45720" anchor="ctr">
+                    <a:lnL w="9525" cap="flat" cmpd="sng" algn="ctr">
+                      <a:solidFill>
+                        <a:srgbClr val="D8DBD2"/>
+                      </a:solidFill>
+                      <a:prstDash val="solid"/>
+                      <a:round/>
+                      <a:headEnd type="none" w="med" len="med"/>
+                      <a:tailEnd type="none" w="med" len="med"/>
+                    </a:lnL>
+                    <a:lnR w="9525" cap="flat" cmpd="sng" algn="ctr">
+                      <a:solidFill>
+                        <a:srgbClr val="D8DBD2"/>
+                      </a:solidFill>
+                      <a:prstDash val="solid"/>
+                      <a:round/>
+                      <a:headEnd type="none" w="med" len="med"/>
+                      <a:tailEnd type="none" w="med" len="med"/>
+                    </a:lnR>
+                    <a:lnT w="9525" cap="flat" cmpd="sng" algn="ctr">
+                      <a:solidFill>
+                        <a:srgbClr val="D8DBD2"/>
+                      </a:solidFill>
+                      <a:prstDash val="solid"/>
+                      <a:round/>
+                      <a:headEnd type="none" w="med" len="med"/>
+                      <a:tailEnd type="none" w="med" len="med"/>
+                    </a:lnT>
+                    <a:lnB w="9525" cap="flat" cmpd="sng" algn="ctr">
+                      <a:solidFill>
+                        <a:srgbClr val="D8DBD2"/>
+                      </a:solidFill>
+                      <a:prstDash val="solid"/>
+                      <a:round/>
+                      <a:headEnd type="none" w="med" len="med"/>
+                      <a:tailEnd type="none" w="med" len="med"/>
+                    </a:lnB>
+                    <a:solidFill>
+                      <a:srgbClr val="FFFFFF"/>
+                    </a:solidFill>
+                  </a:tcPr>
+                </a:tc>
+                <a:tc>
+                  <a:txBody>
+                    <a:bodyPr/>
+                    <a:lstStyle/>
+                    <a:p>
+                      <a:pPr algn="l" indent="0" marL="0">
+                        <a:buNone/>
+                      </a:pPr>
+                      <a:r>
+                        <a:rPr lang="en-US" sz="1050" dirty="0">
+                          <a:solidFill>
+                            <a:srgbClr val="1B2430"/>
+                          </a:solidFill>
+                          <a:latin typeface="Malgun Gothic" pitchFamily="34" charset="0"/>
+                          <a:ea typeface="Malgun Gothic" pitchFamily="34" charset="-122"/>
+                          <a:cs typeface="Malgun Gothic" pitchFamily="34" charset="-120"/>
+                        </a:rPr>
+                        <a:t>더미/샘플 데이터만</a:t>
+                      </a:r>
+                      <a:endParaRPr lang="en-US" sz="1050" dirty="0">
+                        <a:latin typeface="Malgun Gothic" charset="0"/>
+                        <a:ea typeface="Malgun Gothic" charset="0"/>
+                        <a:cs typeface="Malgun Gothic" charset="0"/>
+                      </a:endParaRPr>
+                    </a:p>
+                  </a:txBody>
+                  <a:tcPr marL="91440" marR="91440" marT="45720" marB="45720" anchor="ctr">
+                    <a:lnL w="9525" cap="flat" cmpd="sng" algn="ctr">
+                      <a:solidFill>
+                        <a:srgbClr val="D8DBD2"/>
+                      </a:solidFill>
+                      <a:prstDash val="solid"/>
+                      <a:round/>
+                      <a:headEnd type="none" w="med" len="med"/>
+                      <a:tailEnd type="none" w="med" len="med"/>
+                    </a:lnL>
+                    <a:lnR w="9525" cap="flat" cmpd="sng" algn="ctr">
+                      <a:solidFill>
+                        <a:srgbClr val="D8DBD2"/>
+                      </a:solidFill>
+                      <a:prstDash val="solid"/>
+                      <a:round/>
+                      <a:headEnd type="none" w="med" len="med"/>
+                      <a:tailEnd type="none" w="med" len="med"/>
+                    </a:lnR>
+                    <a:lnT w="9525" cap="flat" cmpd="sng" algn="ctr">
+                      <a:solidFill>
+                        <a:srgbClr val="D8DBD2"/>
+                      </a:solidFill>
+                      <a:prstDash val="solid"/>
+                      <a:round/>
+                      <a:headEnd type="none" w="med" len="med"/>
+                      <a:tailEnd type="none" w="med" len="med"/>
+                    </a:lnT>
+                    <a:lnB w="9525" cap="flat" cmpd="sng" algn="ctr">
+                      <a:solidFill>
+                        <a:srgbClr val="D8DBD2"/>
+                      </a:solidFill>
+                      <a:prstDash val="solid"/>
+                      <a:round/>
+                      <a:headEnd type="none" w="med" len="med"/>
+                      <a:tailEnd type="none" w="med" len="med"/>
+                    </a:lnB>
+                    <a:solidFill>
+                      <a:srgbClr val="FFFFFF"/>
+                    </a:solidFill>
+                  </a:tcPr>
+                </a:tc>
+              </a:tr>
+              <a:tr h="0">
+                <a:tc>
+                  <a:txBody>
+                    <a:bodyPr/>
+                    <a:lstStyle/>
+                    <a:p>
+                      <a:pPr algn="l" indent="0" marL="0">
+                        <a:buNone/>
+                      </a:pPr>
+                      <a:r>
+                        <a:rPr lang="en-US" sz="1050" b="1" dirty="0">
+                          <a:solidFill>
+                            <a:srgbClr val="5B6572"/>
+                          </a:solidFill>
+                          <a:latin typeface="Malgun Gothic" pitchFamily="34" charset="0"/>
+                          <a:ea typeface="Malgun Gothic" pitchFamily="34" charset="-122"/>
+                          <a:cs typeface="Malgun Gothic" pitchFamily="34" charset="-120"/>
+                        </a:rPr>
+                        <a:t>DB 인스턴스·키</a:t>
+                      </a:r>
+                      <a:endParaRPr lang="en-US" sz="1050" dirty="0">
+                        <a:latin typeface="Malgun Gothic" charset="0"/>
+                        <a:ea typeface="Malgun Gothic" charset="0"/>
+                        <a:cs typeface="Malgun Gothic" charset="0"/>
+                      </a:endParaRPr>
+                    </a:p>
+                  </a:txBody>
+                  <a:tcPr marL="91440" marR="91440" marT="45720" marB="45720" anchor="ctr">
+                    <a:lnL w="9525" cap="flat" cmpd="sng" algn="ctr">
+                      <a:solidFill>
+                        <a:srgbClr val="D8DBD2"/>
+                      </a:solidFill>
+                      <a:prstDash val="solid"/>
+                      <a:round/>
+                      <a:headEnd type="none" w="med" len="med"/>
+                      <a:tailEnd type="none" w="med" len="med"/>
+                    </a:lnL>
+                    <a:lnR w="9525" cap="flat" cmpd="sng" algn="ctr">
+                      <a:solidFill>
+                        <a:srgbClr val="D8DBD2"/>
+                      </a:solidFill>
+                      <a:prstDash val="solid"/>
+                      <a:round/>
+                      <a:headEnd type="none" w="med" len="med"/>
+                      <a:tailEnd type="none" w="med" len="med"/>
+                    </a:lnR>
+                    <a:lnT w="9525" cap="flat" cmpd="sng" algn="ctr">
+                      <a:solidFill>
+                        <a:srgbClr val="D8DBD2"/>
+                      </a:solidFill>
+                      <a:prstDash val="solid"/>
+                      <a:round/>
+                      <a:headEnd type="none" w="med" len="med"/>
+                      <a:tailEnd type="none" w="med" len="med"/>
+                    </a:lnT>
+                    <a:lnB w="9525" cap="flat" cmpd="sng" algn="ctr">
+                      <a:solidFill>
+                        <a:srgbClr val="D8DBD2"/>
+                      </a:solidFill>
+                      <a:prstDash val="solid"/>
+                      <a:round/>
+                      <a:headEnd type="none" w="med" len="med"/>
+                      <a:tailEnd type="none" w="med" len="med"/>
+                    </a:lnB>
+                    <a:solidFill>
+                      <a:srgbClr val="F1F2EF"/>
+                    </a:solidFill>
+                  </a:tcPr>
+                </a:tc>
+                <a:tc>
+                  <a:txBody>
+                    <a:bodyPr/>
+                    <a:lstStyle/>
+                    <a:p>
+                      <a:pPr algn="l" indent="0" marL="0">
+                        <a:buNone/>
+                      </a:pPr>
+                      <a:r>
+                        <a:rPr lang="en-US" sz="1050" dirty="0">
+                          <a:solidFill>
+                            <a:srgbClr val="1B2430"/>
+                          </a:solidFill>
+                          <a:latin typeface="Malgun Gothic" pitchFamily="34" charset="0"/>
+                          <a:ea typeface="Malgun Gothic" pitchFamily="34" charset="-122"/>
+                          <a:cs typeface="Malgun Gothic" pitchFamily="34" charset="-120"/>
+                        </a:rPr>
+                        <a:t>전용 인스턴스 + 전용 암호화 키(고가용성)</a:t>
+                      </a:r>
+                      <a:endParaRPr lang="en-US" sz="1050" dirty="0">
+                        <a:latin typeface="Malgun Gothic" charset="0"/>
+                        <a:ea typeface="Malgun Gothic" charset="0"/>
+                        <a:cs typeface="Malgun Gothic" charset="0"/>
+                      </a:endParaRPr>
+                    </a:p>
+                  </a:txBody>
+                  <a:tcPr marL="91440" marR="91440" marT="45720" marB="45720" anchor="ctr">
+                    <a:lnL w="9525" cap="flat" cmpd="sng" algn="ctr">
+                      <a:solidFill>
+                        <a:srgbClr val="D8DBD2"/>
+                      </a:solidFill>
+                      <a:prstDash val="solid"/>
+                      <a:round/>
+                      <a:headEnd type="none" w="med" len="med"/>
+                      <a:tailEnd type="none" w="med" len="med"/>
+                    </a:lnL>
+                    <a:lnR w="9525" cap="flat" cmpd="sng" algn="ctr">
+                      <a:solidFill>
+                        <a:srgbClr val="D8DBD2"/>
+                      </a:solidFill>
+                      <a:prstDash val="solid"/>
+                      <a:round/>
+                      <a:headEnd type="none" w="med" len="med"/>
+                      <a:tailEnd type="none" w="med" len="med"/>
+                    </a:lnR>
+                    <a:lnT w="9525" cap="flat" cmpd="sng" algn="ctr">
+                      <a:solidFill>
+                        <a:srgbClr val="D8DBD2"/>
+                      </a:solidFill>
+                      <a:prstDash val="solid"/>
+                      <a:round/>
+                      <a:headEnd type="none" w="med" len="med"/>
+                      <a:tailEnd type="none" w="med" len="med"/>
+                    </a:lnT>
+                    <a:lnB w="9525" cap="flat" cmpd="sng" algn="ctr">
+                      <a:solidFill>
+                        <a:srgbClr val="D8DBD2"/>
+                      </a:solidFill>
+                      <a:prstDash val="solid"/>
+                      <a:round/>
+                      <a:headEnd type="none" w="med" len="med"/>
+                      <a:tailEnd type="none" w="med" len="med"/>
+                    </a:lnB>
+                    <a:solidFill>
+                      <a:srgbClr val="F1F2EF"/>
+                    </a:solidFill>
+                  </a:tcPr>
+                </a:tc>
+                <a:tc>
+                  <a:txBody>
+                    <a:bodyPr/>
+                    <a:lstStyle/>
+                    <a:p>
+                      <a:pPr algn="l" indent="0" marL="0">
+                        <a:buNone/>
+                      </a:pPr>
+                      <a:r>
+                        <a:rPr lang="en-US" sz="1050" dirty="0">
+                          <a:solidFill>
+                            <a:srgbClr val="1B2430"/>
+                          </a:solidFill>
+                          <a:latin typeface="Malgun Gothic" pitchFamily="34" charset="0"/>
+                          <a:ea typeface="Malgun Gothic" pitchFamily="34" charset="-122"/>
+                          <a:cs typeface="Malgun Gothic" pitchFamily="34" charset="-120"/>
+                        </a:rPr>
+                        <a:t>별도 인스턴스 + 별도 키(단일 AZ 가능)</a:t>
+                      </a:r>
+                      <a:endParaRPr lang="en-US" sz="1050" dirty="0">
+                        <a:latin typeface="Malgun Gothic" charset="0"/>
+                        <a:ea typeface="Malgun Gothic" charset="0"/>
+                        <a:cs typeface="Malgun Gothic" charset="0"/>
+                      </a:endParaRPr>
+                    </a:p>
+                  </a:txBody>
+                  <a:tcPr marL="91440" marR="91440" marT="45720" marB="45720" anchor="ctr">
+                    <a:lnL w="9525" cap="flat" cmpd="sng" algn="ctr">
+                      <a:solidFill>
+                        <a:srgbClr val="D8DBD2"/>
+                      </a:solidFill>
+                      <a:prstDash val="solid"/>
+                      <a:round/>
+                      <a:headEnd type="none" w="med" len="med"/>
+                      <a:tailEnd type="none" w="med" len="med"/>
+                    </a:lnL>
+                    <a:lnR w="9525" cap="flat" cmpd="sng" algn="ctr">
+                      <a:solidFill>
+                        <a:srgbClr val="D8DBD2"/>
+                      </a:solidFill>
+                      <a:prstDash val="solid"/>
+                      <a:round/>
+                      <a:headEnd type="none" w="med" len="med"/>
+                      <a:tailEnd type="none" w="med" len="med"/>
+                    </a:lnR>
+                    <a:lnT w="9525" cap="flat" cmpd="sng" algn="ctr">
+                      <a:solidFill>
+                        <a:srgbClr val="D8DBD2"/>
+                      </a:solidFill>
+                      <a:prstDash val="solid"/>
+                      <a:round/>
+                      <a:headEnd type="none" w="med" len="med"/>
+                      <a:tailEnd type="none" w="med" len="med"/>
+                    </a:lnT>
+                    <a:lnB w="9525" cap="flat" cmpd="sng" algn="ctr">
+                      <a:solidFill>
+                        <a:srgbClr val="D8DBD2"/>
+                      </a:solidFill>
+                      <a:prstDash val="solid"/>
+                      <a:round/>
+                      <a:headEnd type="none" w="med" len="med"/>
+                      <a:tailEnd type="none" w="med" len="med"/>
+                    </a:lnB>
+                    <a:solidFill>
+                      <a:srgbClr val="F1F2EF"/>
+                    </a:solidFill>
+                  </a:tcPr>
+                </a:tc>
+                <a:tc>
+                  <a:txBody>
+                    <a:bodyPr/>
+                    <a:lstStyle/>
+                    <a:p>
+                      <a:pPr algn="l" indent="0" marL="0">
+                        <a:buNone/>
+                      </a:pPr>
+                      <a:r>
+                        <a:rPr lang="en-US" sz="1050" dirty="0">
+                          <a:solidFill>
+                            <a:srgbClr val="1B2430"/>
+                          </a:solidFill>
+                          <a:latin typeface="Malgun Gothic" pitchFamily="34" charset="0"/>
+                          <a:ea typeface="Malgun Gothic" pitchFamily="34" charset="-122"/>
+                          <a:cs typeface="Malgun Gothic" pitchFamily="34" charset="-120"/>
+                        </a:rPr>
+                        <a:t>별도 인스턴스 + 별도 키(최소 사양)</a:t>
+                      </a:r>
+                      <a:endParaRPr lang="en-US" sz="1050" dirty="0">
+                        <a:latin typeface="Malgun Gothic" charset="0"/>
+                        <a:ea typeface="Malgun Gothic" charset="0"/>
+                        <a:cs typeface="Malgun Gothic" charset="0"/>
+                      </a:endParaRPr>
+                    </a:p>
+                  </a:txBody>
+                  <a:tcPr marL="91440" marR="91440" marT="45720" marB="45720" anchor="ctr">
+                    <a:lnL w="9525" cap="flat" cmpd="sng" algn="ctr">
+                      <a:solidFill>
+                        <a:srgbClr val="D8DBD2"/>
+                      </a:solidFill>
+                      <a:prstDash val="solid"/>
+                      <a:round/>
+                      <a:headEnd type="none" w="med" len="med"/>
+                      <a:tailEnd type="none" w="med" len="med"/>
+                    </a:lnL>
+                    <a:lnR w="9525" cap="flat" cmpd="sng" algn="ctr">
+                      <a:solidFill>
+                        <a:srgbClr val="D8DBD2"/>
+                      </a:solidFill>
+                      <a:prstDash val="solid"/>
+                      <a:round/>
+                      <a:headEnd type="none" w="med" len="med"/>
+                      <a:tailEnd type="none" w="med" len="med"/>
+                    </a:lnR>
+                    <a:lnT w="9525" cap="flat" cmpd="sng" algn="ctr">
+                      <a:solidFill>
+                        <a:srgbClr val="D8DBD2"/>
+                      </a:solidFill>
+                      <a:prstDash val="solid"/>
+                      <a:round/>
+                      <a:headEnd type="none" w="med" len="med"/>
+                      <a:tailEnd type="none" w="med" len="med"/>
+                    </a:lnT>
+                    <a:lnB w="9525" cap="flat" cmpd="sng" algn="ctr">
+                      <a:solidFill>
+                        <a:srgbClr val="D8DBD2"/>
+                      </a:solidFill>
+                      <a:prstDash val="solid"/>
+                      <a:round/>
+                      <a:headEnd type="none" w="med" len="med"/>
+                      <a:tailEnd type="none" w="med" len="med"/>
+                    </a:lnB>
+                    <a:solidFill>
+                      <a:srgbClr val="F1F2EF"/>
+                    </a:solidFill>
+                  </a:tcPr>
+                </a:tc>
+              </a:tr>
+              <a:tr h="0">
+                <a:tc>
+                  <a:txBody>
+                    <a:bodyPr/>
+                    <a:lstStyle/>
+                    <a:p>
+                      <a:pPr algn="l" indent="0" marL="0">
+                        <a:buNone/>
+                      </a:pPr>
+                      <a:r>
+                        <a:rPr lang="en-US" sz="1050" b="1" dirty="0">
+                          <a:solidFill>
+                            <a:srgbClr val="5B6572"/>
+                          </a:solidFill>
+                          <a:latin typeface="Malgun Gothic" pitchFamily="34" charset="0"/>
+                          <a:ea typeface="Malgun Gothic" pitchFamily="34" charset="-122"/>
+                          <a:cs typeface="Malgun Gothic" pitchFamily="34" charset="-120"/>
+                        </a:rPr>
+                        <a:t>접근 권한</a:t>
+                      </a:r>
+                      <a:endParaRPr lang="en-US" sz="1050" dirty="0">
+                        <a:latin typeface="Malgun Gothic" charset="0"/>
+                        <a:ea typeface="Malgun Gothic" charset="0"/>
+                        <a:cs typeface="Malgun Gothic" charset="0"/>
+                      </a:endParaRPr>
+                    </a:p>
+                  </a:txBody>
+                  <a:tcPr marL="91440" marR="91440" marT="45720" marB="45720" anchor="ctr">
+                    <a:lnL w="9525" cap="flat" cmpd="sng" algn="ctr">
+                      <a:solidFill>
+                        <a:srgbClr val="D8DBD2"/>
+                      </a:solidFill>
+                      <a:prstDash val="solid"/>
+                      <a:round/>
+                      <a:headEnd type="none" w="med" len="med"/>
+                      <a:tailEnd type="none" w="med" len="med"/>
+                    </a:lnL>
+                    <a:lnR w="9525" cap="flat" cmpd="sng" algn="ctr">
+                      <a:solidFill>
+                        <a:srgbClr val="D8DBD2"/>
+                      </a:solidFill>
+                      <a:prstDash val="solid"/>
+                      <a:round/>
+                      <a:headEnd type="none" w="med" len="med"/>
+                      <a:tailEnd type="none" w="med" len="med"/>
+                    </a:lnR>
+                    <a:lnT w="9525" cap="flat" cmpd="sng" algn="ctr">
+                      <a:solidFill>
+                        <a:srgbClr val="D8DBD2"/>
+                      </a:solidFill>
+                      <a:prstDash val="solid"/>
+                      <a:round/>
+                      <a:headEnd type="none" w="med" len="med"/>
+                      <a:tailEnd type="none" w="med" len="med"/>
+                    </a:lnT>
+                    <a:lnB w="9525" cap="flat" cmpd="sng" algn="ctr">
+                      <a:solidFill>
+                        <a:srgbClr val="D8DBD2"/>
+                      </a:solidFill>
+                      <a:prstDash val="solid"/>
+                      <a:round/>
+                      <a:headEnd type="none" w="med" len="med"/>
+                      <a:tailEnd type="none" w="med" len="med"/>
+                    </a:lnB>
+                    <a:solidFill>
+                      <a:srgbClr val="FFFFFF"/>
+                    </a:solidFill>
+                  </a:tcPr>
+                </a:tc>
+                <a:tc>
+                  <a:txBody>
+                    <a:bodyPr/>
+                    <a:lstStyle/>
+                    <a:p>
+                      <a:pPr algn="l" indent="0" marL="0">
+                        <a:buNone/>
+                      </a:pPr>
+                      <a:r>
+                        <a:rPr lang="en-US" sz="1050" dirty="0">
+                          <a:solidFill>
+                            <a:srgbClr val="1B2430"/>
+                          </a:solidFill>
+                          <a:latin typeface="Malgun Gothic" pitchFamily="34" charset="0"/>
+                          <a:ea typeface="Malgun Gothic" pitchFamily="34" charset="-122"/>
+                          <a:cs typeface="Malgun Gothic" pitchFamily="34" charset="-120"/>
+                        </a:rPr>
+                        <a:t>최소 인원 + PAM 승인 필수(Tier 1)</a:t>
+                      </a:r>
+                      <a:endParaRPr lang="en-US" sz="1050" dirty="0">
+                        <a:latin typeface="Malgun Gothic" charset="0"/>
+                        <a:ea typeface="Malgun Gothic" charset="0"/>
+                        <a:cs typeface="Malgun Gothic" charset="0"/>
+                      </a:endParaRPr>
+                    </a:p>
+                  </a:txBody>
+                  <a:tcPr marL="91440" marR="91440" marT="45720" marB="45720" anchor="ctr">
+                    <a:lnL w="9525" cap="flat" cmpd="sng" algn="ctr">
+                      <a:solidFill>
+                        <a:srgbClr val="D8DBD2"/>
+                      </a:solidFill>
+                      <a:prstDash val="solid"/>
+                      <a:round/>
+                      <a:headEnd type="none" w="med" len="med"/>
+                      <a:tailEnd type="none" w="med" len="med"/>
+                    </a:lnL>
+                    <a:lnR w="9525" cap="flat" cmpd="sng" algn="ctr">
+                      <a:solidFill>
+                        <a:srgbClr val="D8DBD2"/>
+                      </a:solidFill>
+                      <a:prstDash val="solid"/>
+                      <a:round/>
+                      <a:headEnd type="none" w="med" len="med"/>
+                      <a:tailEnd type="none" w="med" len="med"/>
+                    </a:lnR>
+                    <a:lnT w="9525" cap="flat" cmpd="sng" algn="ctr">
+                      <a:solidFill>
+                        <a:srgbClr val="D8DBD2"/>
+                      </a:solidFill>
+                      <a:prstDash val="solid"/>
+                      <a:round/>
+                      <a:headEnd type="none" w="med" len="med"/>
+                      <a:tailEnd type="none" w="med" len="med"/>
+                    </a:lnT>
+                    <a:lnB w="9525" cap="flat" cmpd="sng" algn="ctr">
+                      <a:solidFill>
+                        <a:srgbClr val="D8DBD2"/>
+                      </a:solidFill>
+                      <a:prstDash val="solid"/>
+                      <a:round/>
+                      <a:headEnd type="none" w="med" len="med"/>
+                      <a:tailEnd type="none" w="med" len="med"/>
+                    </a:lnB>
+                    <a:solidFill>
+                      <a:srgbClr val="FFFFFF"/>
+                    </a:solidFill>
+                  </a:tcPr>
+                </a:tc>
+                <a:tc>
+                  <a:txBody>
+                    <a:bodyPr/>
+                    <a:lstStyle/>
+                    <a:p>
+                      <a:pPr algn="l" indent="0" marL="0">
+                        <a:buNone/>
+                      </a:pPr>
+                      <a:r>
+                        <a:rPr lang="en-US" sz="1050" dirty="0">
+                          <a:solidFill>
+                            <a:srgbClr val="1B2430"/>
+                          </a:solidFill>
+                          <a:latin typeface="Malgun Gothic" pitchFamily="34" charset="0"/>
+                          <a:ea typeface="Malgun Gothic" pitchFamily="34" charset="-122"/>
+                          <a:cs typeface="Malgun Gothic" pitchFamily="34" charset="-120"/>
+                        </a:rPr>
+                        <a:t>운영·QA팀 제한적 접근</a:t>
+                      </a:r>
+                      <a:endParaRPr lang="en-US" sz="1050" dirty="0">
+                        <a:latin typeface="Malgun Gothic" charset="0"/>
+                        <a:ea typeface="Malgun Gothic" charset="0"/>
+                        <a:cs typeface="Malgun Gothic" charset="0"/>
+                      </a:endParaRPr>
+                    </a:p>
+                  </a:txBody>
+                  <a:tcPr marL="91440" marR="91440" marT="45720" marB="45720" anchor="ctr">
+                    <a:lnL w="9525" cap="flat" cmpd="sng" algn="ctr">
+                      <a:solidFill>
+                        <a:srgbClr val="D8DBD2"/>
+                      </a:solidFill>
+                      <a:prstDash val="solid"/>
+                      <a:round/>
+                      <a:headEnd type="none" w="med" len="med"/>
+                      <a:tailEnd type="none" w="med" len="med"/>
+                    </a:lnL>
+                    <a:lnR w="9525" cap="flat" cmpd="sng" algn="ctr">
+                      <a:solidFill>
+                        <a:srgbClr val="D8DBD2"/>
+                      </a:solidFill>
+                      <a:prstDash val="solid"/>
+                      <a:round/>
+                      <a:headEnd type="none" w="med" len="med"/>
+                      <a:tailEnd type="none" w="med" len="med"/>
+                    </a:lnR>
+                    <a:lnT w="9525" cap="flat" cmpd="sng" algn="ctr">
+                      <a:solidFill>
+                        <a:srgbClr val="D8DBD2"/>
+                      </a:solidFill>
+                      <a:prstDash val="solid"/>
+                      <a:round/>
+                      <a:headEnd type="none" w="med" len="med"/>
+                      <a:tailEnd type="none" w="med" len="med"/>
+                    </a:lnT>
+                    <a:lnB w="9525" cap="flat" cmpd="sng" algn="ctr">
+                      <a:solidFill>
+                        <a:srgbClr val="D8DBD2"/>
+                      </a:solidFill>
+                      <a:prstDash val="solid"/>
+                      <a:round/>
+                      <a:headEnd type="none" w="med" len="med"/>
+                      <a:tailEnd type="none" w="med" len="med"/>
+                    </a:lnB>
+                    <a:solidFill>
+                      <a:srgbClr val="FFFFFF"/>
+                    </a:solidFill>
+                  </a:tcPr>
+                </a:tc>
+                <a:tc>
+                  <a:txBody>
+                    <a:bodyPr/>
+                    <a:lstStyle/>
+                    <a:p>
+                      <a:pPr algn="l" indent="0" marL="0">
+                        <a:buNone/>
+                      </a:pPr>
+                      <a:r>
+                        <a:rPr lang="en-US" sz="1050" dirty="0">
+                          <a:solidFill>
+                            <a:srgbClr val="1B2430"/>
+                          </a:solidFill>
+                          <a:latin typeface="Malgun Gothic" pitchFamily="34" charset="0"/>
+                          <a:ea typeface="Malgun Gothic" pitchFamily="34" charset="-122"/>
+                          <a:cs typeface="Malgun Gothic" pitchFamily="34" charset="-120"/>
+                        </a:rPr>
+                        <a:t>개발자 자율 접근(계정 내부)</a:t>
+                      </a:r>
+                      <a:endParaRPr lang="en-US" sz="1050" dirty="0">
+                        <a:latin typeface="Malgun Gothic" charset="0"/>
+                        <a:ea typeface="Malgun Gothic" charset="0"/>
+                        <a:cs typeface="Malgun Gothic" charset="0"/>
+                      </a:endParaRPr>
+                    </a:p>
+                  </a:txBody>
+                  <a:tcPr marL="91440" marR="91440" marT="45720" marB="45720" anchor="ctr">
+                    <a:lnL w="9525" cap="flat" cmpd="sng" algn="ctr">
+                      <a:solidFill>
+                        <a:srgbClr val="D8DBD2"/>
+                      </a:solidFill>
+                      <a:prstDash val="solid"/>
+                      <a:round/>
+                      <a:headEnd type="none" w="med" len="med"/>
+                      <a:tailEnd type="none" w="med" len="med"/>
+                    </a:lnL>
+                    <a:lnR w="9525" cap="flat" cmpd="sng" algn="ctr">
+                      <a:solidFill>
+                        <a:srgbClr val="D8DBD2"/>
+                      </a:solidFill>
+                      <a:prstDash val="solid"/>
+                      <a:round/>
+                      <a:headEnd type="none" w="med" len="med"/>
+                      <a:tailEnd type="none" w="med" len="med"/>
+                    </a:lnR>
+                    <a:lnT w="9525" cap="flat" cmpd="sng" algn="ctr">
+                      <a:solidFill>
+                        <a:srgbClr val="D8DBD2"/>
+                      </a:solidFill>
+                      <a:prstDash val="solid"/>
+                      <a:round/>
+                      <a:headEnd type="none" w="med" len="med"/>
+                      <a:tailEnd type="none" w="med" len="med"/>
+                    </a:lnT>
+                    <a:lnB w="9525" cap="flat" cmpd="sng" algn="ctr">
+                      <a:solidFill>
+                        <a:srgbClr val="D8DBD2"/>
+                      </a:solidFill>
+                      <a:prstDash val="solid"/>
+                      <a:round/>
+                      <a:headEnd type="none" w="med" len="med"/>
+                      <a:tailEnd type="none" w="med" len="med"/>
+                    </a:lnB>
+                    <a:solidFill>
+                      <a:srgbClr val="FFFFFF"/>
+                    </a:solidFill>
+                  </a:tcPr>
+                </a:tc>
+              </a:tr>
+              <a:tr h="0">
+                <a:tc>
+                  <a:txBody>
+                    <a:bodyPr/>
+                    <a:lstStyle/>
+                    <a:p>
+                      <a:pPr algn="l" indent="0" marL="0">
+                        <a:buNone/>
+                      </a:pPr>
+                      <a:r>
+                        <a:rPr lang="en-US" sz="1050" b="1" dirty="0">
+                          <a:solidFill>
+                            <a:srgbClr val="5B6572"/>
+                          </a:solidFill>
+                          <a:latin typeface="Malgun Gothic" pitchFamily="34" charset="0"/>
+                          <a:ea typeface="Malgun Gothic" pitchFamily="34" charset="-122"/>
+                          <a:cs typeface="Malgun Gothic" pitchFamily="34" charset="-120"/>
+                        </a:rPr>
+                        <a:t>변경관리</a:t>
+                      </a:r>
+                      <a:endParaRPr lang="en-US" sz="1050" dirty="0">
+                        <a:latin typeface="Malgun Gothic" charset="0"/>
+                        <a:ea typeface="Malgun Gothic" charset="0"/>
+                        <a:cs typeface="Malgun Gothic" charset="0"/>
+                      </a:endParaRPr>
+                    </a:p>
+                  </a:txBody>
+                  <a:tcPr marL="91440" marR="91440" marT="45720" marB="45720" anchor="ctr">
+                    <a:lnL w="9525" cap="flat" cmpd="sng" algn="ctr">
+                      <a:solidFill>
+                        <a:srgbClr val="D8DBD2"/>
+                      </a:solidFill>
+                      <a:prstDash val="solid"/>
+                      <a:round/>
+                      <a:headEnd type="none" w="med" len="med"/>
+                      <a:tailEnd type="none" w="med" len="med"/>
+                    </a:lnL>
+                    <a:lnR w="9525" cap="flat" cmpd="sng" algn="ctr">
+                      <a:solidFill>
+                        <a:srgbClr val="D8DBD2"/>
+                      </a:solidFill>
+                      <a:prstDash val="solid"/>
+                      <a:round/>
+                      <a:headEnd type="none" w="med" len="med"/>
+                      <a:tailEnd type="none" w="med" len="med"/>
+                    </a:lnR>
+                    <a:lnT w="9525" cap="flat" cmpd="sng" algn="ctr">
+                      <a:solidFill>
+                        <a:srgbClr val="D8DBD2"/>
+                      </a:solidFill>
+                      <a:prstDash val="solid"/>
+                      <a:round/>
+                      <a:headEnd type="none" w="med" len="med"/>
+                      <a:tailEnd type="none" w="med" len="med"/>
+                    </a:lnT>
+                    <a:lnB w="9525" cap="flat" cmpd="sng" algn="ctr">
+                      <a:solidFill>
+                        <a:srgbClr val="D8DBD2"/>
+                      </a:solidFill>
+                      <a:prstDash val="solid"/>
+                      <a:round/>
+                      <a:headEnd type="none" w="med" len="med"/>
+                      <a:tailEnd type="none" w="med" len="med"/>
+                    </a:lnB>
+                    <a:solidFill>
+                      <a:srgbClr val="F1F2EF"/>
+                    </a:solidFill>
+                  </a:tcPr>
+                </a:tc>
+                <a:tc>
+                  <a:txBody>
+                    <a:bodyPr/>
+                    <a:lstStyle/>
+                    <a:p>
+                      <a:pPr algn="l" indent="0" marL="0">
+                        <a:buNone/>
+                      </a:pPr>
+                      <a:r>
+                        <a:rPr lang="en-US" sz="1050" dirty="0">
+                          <a:solidFill>
+                            <a:srgbClr val="1B2430"/>
+                          </a:solidFill>
+                          <a:latin typeface="Malgun Gothic" pitchFamily="34" charset="0"/>
+                          <a:ea typeface="Malgun Gothic" pitchFamily="34" charset="-122"/>
+                          <a:cs typeface="Malgun Gothic" pitchFamily="34" charset="-120"/>
+                        </a:rPr>
+                        <a:t>변경관리위원회 사전승인 필수</a:t>
+                      </a:r>
+                      <a:endParaRPr lang="en-US" sz="1050" dirty="0">
+                        <a:latin typeface="Malgun Gothic" charset="0"/>
+                        <a:ea typeface="Malgun Gothic" charset="0"/>
+                        <a:cs typeface="Malgun Gothic" charset="0"/>
+                      </a:endParaRPr>
+                    </a:p>
+                  </a:txBody>
+                  <a:tcPr marL="91440" marR="91440" marT="45720" marB="45720" anchor="ctr">
+                    <a:lnL w="9525" cap="flat" cmpd="sng" algn="ctr">
+                      <a:solidFill>
+                        <a:srgbClr val="D8DBD2"/>
+                      </a:solidFill>
+                      <a:prstDash val="solid"/>
+                      <a:round/>
+                      <a:headEnd type="none" w="med" len="med"/>
+                      <a:tailEnd type="none" w="med" len="med"/>
+                    </a:lnL>
+                    <a:lnR w="9525" cap="flat" cmpd="sng" algn="ctr">
+                      <a:solidFill>
+                        <a:srgbClr val="D8DBD2"/>
+                      </a:solidFill>
+                      <a:prstDash val="solid"/>
+                      <a:round/>
+                      <a:headEnd type="none" w="med" len="med"/>
+                      <a:tailEnd type="none" w="med" len="med"/>
+                    </a:lnR>
+                    <a:lnT w="9525" cap="flat" cmpd="sng" algn="ctr">
+                      <a:solidFill>
+                        <a:srgbClr val="D8DBD2"/>
+                      </a:solidFill>
+                      <a:prstDash val="solid"/>
+                      <a:round/>
+                      <a:headEnd type="none" w="med" len="med"/>
+                      <a:tailEnd type="none" w="med" len="med"/>
+                    </a:lnT>
+                    <a:lnB w="9525" cap="flat" cmpd="sng" algn="ctr">
+                      <a:solidFill>
+                        <a:srgbClr val="D8DBD2"/>
+                      </a:solidFill>
+                      <a:prstDash val="solid"/>
+                      <a:round/>
+                      <a:headEnd type="none" w="med" len="med"/>
+                      <a:tailEnd type="none" w="med" len="med"/>
+                    </a:lnB>
+                    <a:solidFill>
+                      <a:srgbClr val="F1F2EF"/>
+                    </a:solidFill>
+                  </a:tcPr>
+                </a:tc>
+                <a:tc>
+                  <a:txBody>
+                    <a:bodyPr/>
+                    <a:lstStyle/>
+                    <a:p>
+                      <a:pPr algn="l" indent="0" marL="0">
+                        <a:buNone/>
+                      </a:pPr>
+                      <a:r>
+                        <a:rPr lang="en-US" sz="1050" dirty="0">
+                          <a:solidFill>
+                            <a:srgbClr val="1B2430"/>
+                          </a:solidFill>
+                          <a:latin typeface="Malgun Gothic" pitchFamily="34" charset="0"/>
+                          <a:ea typeface="Malgun Gothic" pitchFamily="34" charset="-122"/>
+                          <a:cs typeface="Malgun Gothic" pitchFamily="34" charset="-120"/>
+                        </a:rPr>
+                        <a:t>표준 변경 절차(경량 승인)</a:t>
+                      </a:r>
+                      <a:endParaRPr lang="en-US" sz="1050" dirty="0">
+                        <a:latin typeface="Malgun Gothic" charset="0"/>
+                        <a:ea typeface="Malgun Gothic" charset="0"/>
+                        <a:cs typeface="Malgun Gothic" charset="0"/>
+                      </a:endParaRPr>
+                    </a:p>
+                  </a:txBody>
+                  <a:tcPr marL="91440" marR="91440" marT="45720" marB="45720" anchor="ctr">
+                    <a:lnL w="9525" cap="flat" cmpd="sng" algn="ctr">
+                      <a:solidFill>
+                        <a:srgbClr val="D8DBD2"/>
+                      </a:solidFill>
+                      <a:prstDash val="solid"/>
+                      <a:round/>
+                      <a:headEnd type="none" w="med" len="med"/>
+                      <a:tailEnd type="none" w="med" len="med"/>
+                    </a:lnL>
+                    <a:lnR w="9525" cap="flat" cmpd="sng" algn="ctr">
+                      <a:solidFill>
+                        <a:srgbClr val="D8DBD2"/>
+                      </a:solidFill>
+                      <a:prstDash val="solid"/>
+                      <a:round/>
+                      <a:headEnd type="none" w="med" len="med"/>
+                      <a:tailEnd type="none" w="med" len="med"/>
+                    </a:lnR>
+                    <a:lnT w="9525" cap="flat" cmpd="sng" algn="ctr">
+                      <a:solidFill>
+                        <a:srgbClr val="D8DBD2"/>
+                      </a:solidFill>
+                      <a:prstDash val="solid"/>
+                      <a:round/>
+                      <a:headEnd type="none" w="med" len="med"/>
+                      <a:tailEnd type="none" w="med" len="med"/>
+                    </a:lnT>
+                    <a:lnB w="9525" cap="flat" cmpd="sng" algn="ctr">
+                      <a:solidFill>
+                        <a:srgbClr val="D8DBD2"/>
+                      </a:solidFill>
+                      <a:prstDash val="solid"/>
+                      <a:round/>
+                      <a:headEnd type="none" w="med" len="med"/>
+                      <a:tailEnd type="none" w="med" len="med"/>
+                    </a:lnB>
+                    <a:solidFill>
+                      <a:srgbClr val="F1F2EF"/>
+                    </a:solidFill>
+                  </a:tcPr>
+                </a:tc>
+                <a:tc>
+                  <a:txBody>
+                    <a:bodyPr/>
+                    <a:lstStyle/>
+                    <a:p>
+                      <a:pPr algn="l" indent="0" marL="0">
+                        <a:buNone/>
+                      </a:pPr>
+                      <a:r>
+                        <a:rPr lang="en-US" sz="1050" dirty="0">
+                          <a:solidFill>
+                            <a:srgbClr val="1B2430"/>
+                          </a:solidFill>
+                          <a:latin typeface="Malgun Gothic" pitchFamily="34" charset="0"/>
+                          <a:ea typeface="Malgun Gothic" pitchFamily="34" charset="-122"/>
+                          <a:cs typeface="Malgun Gothic" pitchFamily="34" charset="-120"/>
+                        </a:rPr>
+                        <a:t>자유 배포(CI/CD, 승인 불요)</a:t>
+                      </a:r>
+                      <a:endParaRPr lang="en-US" sz="1050" dirty="0">
+                        <a:latin typeface="Malgun Gothic" charset="0"/>
+                        <a:ea typeface="Malgun Gothic" charset="0"/>
+                        <a:cs typeface="Malgun Gothic" charset="0"/>
+                      </a:endParaRPr>
+                    </a:p>
+                  </a:txBody>
+                  <a:tcPr marL="91440" marR="91440" marT="45720" marB="45720" anchor="ctr">
+                    <a:lnL w="9525" cap="flat" cmpd="sng" algn="ctr">
+                      <a:solidFill>
+                        <a:srgbClr val="D8DBD2"/>
+                      </a:solidFill>
+                      <a:prstDash val="solid"/>
+                      <a:round/>
+                      <a:headEnd type="none" w="med" len="med"/>
+                      <a:tailEnd type="none" w="med" len="med"/>
+                    </a:lnL>
+                    <a:lnR w="9525" cap="flat" cmpd="sng" algn="ctr">
+                      <a:solidFill>
+                        <a:srgbClr val="D8DBD2"/>
+                      </a:solidFill>
+                      <a:prstDash val="solid"/>
+                      <a:round/>
+                      <a:headEnd type="none" w="med" len="med"/>
+                      <a:tailEnd type="none" w="med" len="med"/>
+                    </a:lnR>
+                    <a:lnT w="9525" cap="flat" cmpd="sng" algn="ctr">
+                      <a:solidFill>
+                        <a:srgbClr val="D8DBD2"/>
+                      </a:solidFill>
+                      <a:prstDash val="solid"/>
+                      <a:round/>
+                      <a:headEnd type="none" w="med" len="med"/>
+                      <a:tailEnd type="none" w="med" len="med"/>
+                    </a:lnT>
+                    <a:lnB w="9525" cap="flat" cmpd="sng" algn="ctr">
+                      <a:solidFill>
+                        <a:srgbClr val="D8DBD2"/>
+                      </a:solidFill>
+                      <a:prstDash val="solid"/>
+                      <a:round/>
+                      <a:headEnd type="none" w="med" len="med"/>
+                      <a:tailEnd type="none" w="med" len="med"/>
+                    </a:lnB>
+                    <a:solidFill>
+                      <a:srgbClr val="F1F2EF"/>
+                    </a:solidFill>
+                  </a:tcPr>
+                </a:tc>
+              </a:tr>
+              <a:tr h="0">
+                <a:tc>
+                  <a:txBody>
+                    <a:bodyPr/>
+                    <a:lstStyle/>
+                    <a:p>
+                      <a:pPr algn="l" indent="0" marL="0">
+                        <a:buNone/>
+                      </a:pPr>
+                      <a:r>
+                        <a:rPr lang="en-US" sz="1050" b="1" dirty="0">
+                          <a:solidFill>
+                            <a:srgbClr val="5B6572"/>
+                          </a:solidFill>
+                          <a:latin typeface="Malgun Gothic" pitchFamily="34" charset="0"/>
+                          <a:ea typeface="Malgun Gothic" pitchFamily="34" charset="-122"/>
+                          <a:cs typeface="Malgun Gothic" pitchFamily="34" charset="-120"/>
+                        </a:rPr>
+                        <a:t>모니터링·로그</a:t>
+                      </a:r>
+                      <a:endParaRPr lang="en-US" sz="1050" dirty="0">
+                        <a:latin typeface="Malgun Gothic" charset="0"/>
+                        <a:ea typeface="Malgun Gothic" charset="0"/>
+                        <a:cs typeface="Malgun Gothic" charset="0"/>
+                      </a:endParaRPr>
+                    </a:p>
+                  </a:txBody>
+                  <a:tcPr marL="91440" marR="91440" marT="45720" marB="45720" anchor="ctr">
+                    <a:lnL w="9525" cap="flat" cmpd="sng" algn="ctr">
+                      <a:solidFill>
+                        <a:srgbClr val="D8DBD2"/>
+                      </a:solidFill>
+                      <a:prstDash val="solid"/>
+                      <a:round/>
+                      <a:headEnd type="none" w="med" len="med"/>
+                      <a:tailEnd type="none" w="med" len="med"/>
+                    </a:lnL>
+                    <a:lnR w="9525" cap="flat" cmpd="sng" algn="ctr">
+                      <a:solidFill>
+                        <a:srgbClr val="D8DBD2"/>
+                      </a:solidFill>
+                      <a:prstDash val="solid"/>
+                      <a:round/>
+                      <a:headEnd type="none" w="med" len="med"/>
+                      <a:tailEnd type="none" w="med" len="med"/>
+                    </a:lnR>
+                    <a:lnT w="9525" cap="flat" cmpd="sng" algn="ctr">
+                      <a:solidFill>
+                        <a:srgbClr val="D8DBD2"/>
+                      </a:solidFill>
+                      <a:prstDash val="solid"/>
+                      <a:round/>
+                      <a:headEnd type="none" w="med" len="med"/>
+                      <a:tailEnd type="none" w="med" len="med"/>
+                    </a:lnT>
+                    <a:lnB w="9525" cap="flat" cmpd="sng" algn="ctr">
+                      <a:solidFill>
+                        <a:srgbClr val="D8DBD2"/>
+                      </a:solidFill>
+                      <a:prstDash val="solid"/>
+                      <a:round/>
+                      <a:headEnd type="none" w="med" len="med"/>
+                      <a:tailEnd type="none" w="med" len="med"/>
+                    </a:lnB>
+                    <a:solidFill>
+                      <a:srgbClr val="FFFFFF"/>
+                    </a:solidFill>
+                  </a:tcPr>
+                </a:tc>
+                <a:tc>
+                  <a:txBody>
+                    <a:bodyPr/>
+                    <a:lstStyle/>
+                    <a:p>
+                      <a:pPr algn="l" indent="0" marL="0">
+                        <a:buNone/>
+                      </a:pPr>
+                      <a:r>
+                        <a:rPr lang="en-US" sz="1050" dirty="0">
+                          <a:solidFill>
+                            <a:srgbClr val="1B2430"/>
+                          </a:solidFill>
+                          <a:latin typeface="Malgun Gothic" pitchFamily="34" charset="0"/>
+                          <a:ea typeface="Malgun Gothic" pitchFamily="34" charset="-122"/>
+                          <a:cs typeface="Malgun Gothic" pitchFamily="34" charset="-120"/>
+                        </a:rPr>
+                        <a:t>상시 실시간 관제 + 장기 보존(2년 이상)</a:t>
+                      </a:r>
+                      <a:endParaRPr lang="en-US" sz="1050" dirty="0">
+                        <a:latin typeface="Malgun Gothic" charset="0"/>
+                        <a:ea typeface="Malgun Gothic" charset="0"/>
+                        <a:cs typeface="Malgun Gothic" charset="0"/>
+                      </a:endParaRPr>
+                    </a:p>
+                  </a:txBody>
+                  <a:tcPr marL="91440" marR="91440" marT="45720" marB="45720" anchor="ctr">
+                    <a:lnL w="9525" cap="flat" cmpd="sng" algn="ctr">
+                      <a:solidFill>
+                        <a:srgbClr val="D8DBD2"/>
+                      </a:solidFill>
+                      <a:prstDash val="solid"/>
+                      <a:round/>
+                      <a:headEnd type="none" w="med" len="med"/>
+                      <a:tailEnd type="none" w="med" len="med"/>
+                    </a:lnL>
+                    <a:lnR w="9525" cap="flat" cmpd="sng" algn="ctr">
+                      <a:solidFill>
+                        <a:srgbClr val="D8DBD2"/>
+                      </a:solidFill>
+                      <a:prstDash val="solid"/>
+                      <a:round/>
+                      <a:headEnd type="none" w="med" len="med"/>
+                      <a:tailEnd type="none" w="med" len="med"/>
+                    </a:lnR>
+                    <a:lnT w="9525" cap="flat" cmpd="sng" algn="ctr">
+                      <a:solidFill>
+                        <a:srgbClr val="D8DBD2"/>
+                      </a:solidFill>
+                      <a:prstDash val="solid"/>
+                      <a:round/>
+                      <a:headEnd type="none" w="med" len="med"/>
+                      <a:tailEnd type="none" w="med" len="med"/>
+                    </a:lnT>
+                    <a:lnB w="9525" cap="flat" cmpd="sng" algn="ctr">
+                      <a:solidFill>
+                        <a:srgbClr val="D8DBD2"/>
+                      </a:solidFill>
+                      <a:prstDash val="solid"/>
+                      <a:round/>
+                      <a:headEnd type="none" w="med" len="med"/>
+                      <a:tailEnd type="none" w="med" len="med"/>
+                    </a:lnB>
+                    <a:solidFill>
+                      <a:srgbClr val="FFFFFF"/>
+                    </a:solidFill>
+                  </a:tcPr>
+                </a:tc>
+                <a:tc>
+                  <a:txBody>
+                    <a:bodyPr/>
+                    <a:lstStyle/>
+                    <a:p>
+                      <a:pPr algn="l" indent="0" marL="0">
+                        <a:buNone/>
+                      </a:pPr>
+                      <a:r>
+                        <a:rPr lang="en-US" sz="1050" dirty="0">
+                          <a:solidFill>
+                            <a:srgbClr val="1B2430"/>
+                          </a:solidFill>
+                          <a:latin typeface="Malgun Gothic" pitchFamily="34" charset="0"/>
+                          <a:ea typeface="Malgun Gothic" pitchFamily="34" charset="-122"/>
+                          <a:cs typeface="Malgun Gothic" pitchFamily="34" charset="-120"/>
+                        </a:rPr>
+                        <a:t>배포 검증용 모니터링 + 단기 보존</a:t>
+                      </a:r>
+                      <a:endParaRPr lang="en-US" sz="1050" dirty="0">
+                        <a:latin typeface="Malgun Gothic" charset="0"/>
+                        <a:ea typeface="Malgun Gothic" charset="0"/>
+                        <a:cs typeface="Malgun Gothic" charset="0"/>
+                      </a:endParaRPr>
+                    </a:p>
+                  </a:txBody>
+                  <a:tcPr marL="91440" marR="91440" marT="45720" marB="45720" anchor="ctr">
+                    <a:lnL w="9525" cap="flat" cmpd="sng" algn="ctr">
+                      <a:solidFill>
+                        <a:srgbClr val="D8DBD2"/>
+                      </a:solidFill>
+                      <a:prstDash val="solid"/>
+                      <a:round/>
+                      <a:headEnd type="none" w="med" len="med"/>
+                      <a:tailEnd type="none" w="med" len="med"/>
+                    </a:lnL>
+                    <a:lnR w="9525" cap="flat" cmpd="sng" algn="ctr">
+                      <a:solidFill>
+                        <a:srgbClr val="D8DBD2"/>
+                      </a:solidFill>
+                      <a:prstDash val="solid"/>
+                      <a:round/>
+                      <a:headEnd type="none" w="med" len="med"/>
+                      <a:tailEnd type="none" w="med" len="med"/>
+                    </a:lnR>
+                    <a:lnT w="9525" cap="flat" cmpd="sng" algn="ctr">
+                      <a:solidFill>
+                        <a:srgbClr val="D8DBD2"/>
+                      </a:solidFill>
+                      <a:prstDash val="solid"/>
+                      <a:round/>
+                      <a:headEnd type="none" w="med" len="med"/>
+                      <a:tailEnd type="none" w="med" len="med"/>
+                    </a:lnT>
+                    <a:lnB w="9525" cap="flat" cmpd="sng" algn="ctr">
+                      <a:solidFill>
+                        <a:srgbClr val="D8DBD2"/>
+                      </a:solidFill>
+                      <a:prstDash val="solid"/>
+                      <a:round/>
+                      <a:headEnd type="none" w="med" len="med"/>
+                      <a:tailEnd type="none" w="med" len="med"/>
+                    </a:lnB>
+                    <a:solidFill>
+                      <a:srgbClr val="FFFFFF"/>
+                    </a:solidFill>
+                  </a:tcPr>
+                </a:tc>
+                <a:tc>
+                  <a:txBody>
+                    <a:bodyPr/>
+                    <a:lstStyle/>
+                    <a:p>
+                      <a:pPr algn="l" indent="0" marL="0">
+                        <a:buNone/>
+                      </a:pPr>
+                      <a:r>
+                        <a:rPr lang="en-US" sz="1050" dirty="0">
+                          <a:solidFill>
+                            <a:srgbClr val="1B2430"/>
+                          </a:solidFill>
+                          <a:latin typeface="Malgun Gothic" pitchFamily="34" charset="0"/>
+                          <a:ea typeface="Malgun Gothic" pitchFamily="34" charset="-122"/>
+                          <a:cs typeface="Malgun Gothic" pitchFamily="34" charset="-120"/>
+                        </a:rPr>
+                        <a:t>기본 로그만, 단기 보존(30일 등)</a:t>
+                      </a:r>
+                      <a:endParaRPr lang="en-US" sz="1050" dirty="0">
+                        <a:latin typeface="Malgun Gothic" charset="0"/>
+                        <a:ea typeface="Malgun Gothic" charset="0"/>
+                        <a:cs typeface="Malgun Gothic" charset="0"/>
+                      </a:endParaRPr>
+                    </a:p>
+                  </a:txBody>
+                  <a:tcPr marL="91440" marR="91440" marT="45720" marB="45720" anchor="ctr">
+                    <a:lnL w="9525" cap="flat" cmpd="sng" algn="ctr">
+                      <a:solidFill>
+                        <a:srgbClr val="D8DBD2"/>
+                      </a:solidFill>
+                      <a:prstDash val="solid"/>
+                      <a:round/>
+                      <a:headEnd type="none" w="med" len="med"/>
+                      <a:tailEnd type="none" w="med" len="med"/>
+                    </a:lnL>
+                    <a:lnR w="9525" cap="flat" cmpd="sng" algn="ctr">
+                      <a:solidFill>
+                        <a:srgbClr val="D8DBD2"/>
+                      </a:solidFill>
+                      <a:prstDash val="solid"/>
+                      <a:round/>
+                      <a:headEnd type="none" w="med" len="med"/>
+                      <a:tailEnd type="none" w="med" len="med"/>
+                    </a:lnR>
+                    <a:lnT w="9525" cap="flat" cmpd="sng" algn="ctr">
+                      <a:solidFill>
+                        <a:srgbClr val="D8DBD2"/>
+                      </a:solidFill>
+                      <a:prstDash val="solid"/>
+                      <a:round/>
+                      <a:headEnd type="none" w="med" len="med"/>
+                      <a:tailEnd type="none" w="med" len="med"/>
+                    </a:lnT>
+                    <a:lnB w="9525" cap="flat" cmpd="sng" algn="ctr">
+                      <a:solidFill>
+                        <a:srgbClr val="D8DBD2"/>
+                      </a:solidFill>
+                      <a:prstDash val="solid"/>
+                      <a:round/>
+                      <a:headEnd type="none" w="med" len="med"/>
+                      <a:tailEnd type="none" w="med" len="med"/>
+                    </a:lnB>
+                    <a:solidFill>
+                      <a:srgbClr val="FFFFFF"/>
+                    </a:solidFill>
+                  </a:tcPr>
+                </a:tc>
+              </a:tr>
+              <a:tr h="0">
+                <a:tc>
+                  <a:txBody>
+                    <a:bodyPr/>
+                    <a:lstStyle/>
+                    <a:p>
+                      <a:pPr algn="l" indent="0" marL="0">
+                        <a:buNone/>
+                      </a:pPr>
+                      <a:r>
+                        <a:rPr lang="en-US" sz="1050" b="1" dirty="0">
+                          <a:solidFill>
+                            <a:srgbClr val="5B6572"/>
+                          </a:solidFill>
+                          <a:latin typeface="Malgun Gothic" pitchFamily="34" charset="0"/>
+                          <a:ea typeface="Malgun Gothic" pitchFamily="34" charset="-122"/>
+                          <a:cs typeface="Malgun Gothic" pitchFamily="34" charset="-120"/>
+                        </a:rPr>
+                        <a:t>태그/명명규칙</a:t>
+                      </a:r>
+                      <a:endParaRPr lang="en-US" sz="1050" dirty="0">
+                        <a:latin typeface="Malgun Gothic" charset="0"/>
+                        <a:ea typeface="Malgun Gothic" charset="0"/>
+                        <a:cs typeface="Malgun Gothic" charset="0"/>
+                      </a:endParaRPr>
+                    </a:p>
+                  </a:txBody>
+                  <a:tcPr marL="91440" marR="91440" marT="45720" marB="45720" anchor="ctr">
+                    <a:lnL w="9525" cap="flat" cmpd="sng" algn="ctr">
+                      <a:solidFill>
+                        <a:srgbClr val="D8DBD2"/>
+                      </a:solidFill>
+                      <a:prstDash val="solid"/>
+                      <a:round/>
+                      <a:headEnd type="none" w="med" len="med"/>
+                      <a:tailEnd type="none" w="med" len="med"/>
+                    </a:lnL>
+                    <a:lnR w="9525" cap="flat" cmpd="sng" algn="ctr">
+                      <a:solidFill>
+                        <a:srgbClr val="D8DBD2"/>
+                      </a:solidFill>
+                      <a:prstDash val="solid"/>
+                      <a:round/>
+                      <a:headEnd type="none" w="med" len="med"/>
+                      <a:tailEnd type="none" w="med" len="med"/>
+                    </a:lnR>
+                    <a:lnT w="9525" cap="flat" cmpd="sng" algn="ctr">
+                      <a:solidFill>
+                        <a:srgbClr val="D8DBD2"/>
+                      </a:solidFill>
+                      <a:prstDash val="solid"/>
+                      <a:round/>
+                      <a:headEnd type="none" w="med" len="med"/>
+                      <a:tailEnd type="none" w="med" len="med"/>
+                    </a:lnT>
+                    <a:lnB w="9525" cap="flat" cmpd="sng" algn="ctr">
+                      <a:solidFill>
+                        <a:srgbClr val="D8DBD2"/>
+                      </a:solidFill>
+                      <a:prstDash val="solid"/>
+                      <a:round/>
+                      <a:headEnd type="none" w="med" len="med"/>
+                      <a:tailEnd type="none" w="med" len="med"/>
+                    </a:lnB>
+                    <a:solidFill>
+                      <a:srgbClr val="F1F2EF"/>
+                    </a:solidFill>
+                  </a:tcPr>
+                </a:tc>
+                <a:tc>
+                  <a:txBody>
+                    <a:bodyPr/>
+                    <a:lstStyle/>
+                    <a:p>
+                      <a:pPr algn="l" indent="0" marL="0">
+                        <a:buNone/>
+                      </a:pPr>
+                      <a:r>
+                        <a:rPr lang="en-US" sz="1050" dirty="0">
+                          <a:solidFill>
+                            <a:srgbClr val="1B2430"/>
+                          </a:solidFill>
+                          <a:latin typeface="Malgun Gothic" pitchFamily="34" charset="0"/>
+                          <a:ea typeface="Malgun Gothic" pitchFamily="34" charset="-122"/>
+                          <a:cs typeface="Malgun Gothic" pitchFamily="34" charset="-120"/>
+                        </a:rPr>
+                        <a:t>env=prod 필수 태깅</a:t>
+                      </a:r>
+                      <a:endParaRPr lang="en-US" sz="1050" dirty="0">
+                        <a:latin typeface="Malgun Gothic" charset="0"/>
+                        <a:ea typeface="Malgun Gothic" charset="0"/>
+                        <a:cs typeface="Malgun Gothic" charset="0"/>
+                      </a:endParaRPr>
+                    </a:p>
+                  </a:txBody>
+                  <a:tcPr marL="91440" marR="91440" marT="45720" marB="45720" anchor="ctr">
+                    <a:lnL w="9525" cap="flat" cmpd="sng" algn="ctr">
+                      <a:solidFill>
+                        <a:srgbClr val="D8DBD2"/>
+                      </a:solidFill>
+                      <a:prstDash val="solid"/>
+                      <a:round/>
+                      <a:headEnd type="none" w="med" len="med"/>
+                      <a:tailEnd type="none" w="med" len="med"/>
+                    </a:lnL>
+                    <a:lnR w="9525" cap="flat" cmpd="sng" algn="ctr">
+                      <a:solidFill>
+                        <a:srgbClr val="D8DBD2"/>
+                      </a:solidFill>
+                      <a:prstDash val="solid"/>
+                      <a:round/>
+                      <a:headEnd type="none" w="med" len="med"/>
+                      <a:tailEnd type="none" w="med" len="med"/>
+                    </a:lnR>
+                    <a:lnT w="9525" cap="flat" cmpd="sng" algn="ctr">
+                      <a:solidFill>
+                        <a:srgbClr val="D8DBD2"/>
+                      </a:solidFill>
+                      <a:prstDash val="solid"/>
+                      <a:round/>
+                      <a:headEnd type="none" w="med" len="med"/>
+                      <a:tailEnd type="none" w="med" len="med"/>
+                    </a:lnT>
+                    <a:lnB w="9525" cap="flat" cmpd="sng" algn="ctr">
+                      <a:solidFill>
+                        <a:srgbClr val="D8DBD2"/>
+                      </a:solidFill>
+                      <a:prstDash val="solid"/>
+                      <a:round/>
+                      <a:headEnd type="none" w="med" len="med"/>
+                      <a:tailEnd type="none" w="med" len="med"/>
+                    </a:lnB>
+                    <a:solidFill>
+                      <a:srgbClr val="F1F2EF"/>
+                    </a:solidFill>
+                  </a:tcPr>
+                </a:tc>
+                <a:tc>
+                  <a:txBody>
+                    <a:bodyPr/>
+                    <a:lstStyle/>
+                    <a:p>
+                      <a:pPr algn="l" indent="0" marL="0">
+                        <a:buNone/>
+                      </a:pPr>
+                      <a:r>
+                        <a:rPr lang="en-US" sz="1050" dirty="0">
+                          <a:solidFill>
+                            <a:srgbClr val="1B2430"/>
+                          </a:solidFill>
+                          <a:latin typeface="Malgun Gothic" pitchFamily="34" charset="0"/>
+                          <a:ea typeface="Malgun Gothic" pitchFamily="34" charset="-122"/>
+                          <a:cs typeface="Malgun Gothic" pitchFamily="34" charset="-120"/>
+                        </a:rPr>
+                        <a:t>env=stage 필수 태깅</a:t>
+                      </a:r>
+                      <a:endParaRPr lang="en-US" sz="1050" dirty="0">
+                        <a:latin typeface="Malgun Gothic" charset="0"/>
+                        <a:ea typeface="Malgun Gothic" charset="0"/>
+                        <a:cs typeface="Malgun Gothic" charset="0"/>
+                      </a:endParaRPr>
+                    </a:p>
+                  </a:txBody>
+                  <a:tcPr marL="91440" marR="91440" marT="45720" marB="45720" anchor="ctr">
+                    <a:lnL w="9525" cap="flat" cmpd="sng" algn="ctr">
+                      <a:solidFill>
+                        <a:srgbClr val="D8DBD2"/>
+                      </a:solidFill>
+                      <a:prstDash val="solid"/>
+                      <a:round/>
+                      <a:headEnd type="none" w="med" len="med"/>
+                      <a:tailEnd type="none" w="med" len="med"/>
+                    </a:lnL>
+                    <a:lnR w="9525" cap="flat" cmpd="sng" algn="ctr">
+                      <a:solidFill>
+                        <a:srgbClr val="D8DBD2"/>
+                      </a:solidFill>
+                      <a:prstDash val="solid"/>
+                      <a:round/>
+                      <a:headEnd type="none" w="med" len="med"/>
+                      <a:tailEnd type="none" w="med" len="med"/>
+                    </a:lnR>
+                    <a:lnT w="9525" cap="flat" cmpd="sng" algn="ctr">
+                      <a:solidFill>
+                        <a:srgbClr val="D8DBD2"/>
+                      </a:solidFill>
+                      <a:prstDash val="solid"/>
+                      <a:round/>
+                      <a:headEnd type="none" w="med" len="med"/>
+                      <a:tailEnd type="none" w="med" len="med"/>
+                    </a:lnT>
+                    <a:lnB w="9525" cap="flat" cmpd="sng" algn="ctr">
+                      <a:solidFill>
+                        <a:srgbClr val="D8DBD2"/>
+                      </a:solidFill>
+                      <a:prstDash val="solid"/>
+                      <a:round/>
+                      <a:headEnd type="none" w="med" len="med"/>
+                      <a:tailEnd type="none" w="med" len="med"/>
+                    </a:lnB>
+                    <a:solidFill>
+                      <a:srgbClr val="F1F2EF"/>
+                    </a:solidFill>
+                  </a:tcPr>
+                </a:tc>
+                <a:tc>
+                  <a:txBody>
+                    <a:bodyPr/>
+                    <a:lstStyle/>
+                    <a:p>
+                      <a:pPr algn="l" indent="0" marL="0">
+                        <a:buNone/>
+                      </a:pPr>
+                      <a:r>
+                        <a:rPr lang="en-US" sz="1050" dirty="0">
+                          <a:solidFill>
+                            <a:srgbClr val="1B2430"/>
+                          </a:solidFill>
+                          <a:latin typeface="Malgun Gothic" pitchFamily="34" charset="0"/>
+                          <a:ea typeface="Malgun Gothic" pitchFamily="34" charset="-122"/>
+                          <a:cs typeface="Malgun Gothic" pitchFamily="34" charset="-120"/>
+                        </a:rPr>
+                        <a:t>env=dev/test 필수 태깅</a:t>
+                      </a:r>
+                      <a:endParaRPr lang="en-US" sz="1050" dirty="0">
+                        <a:latin typeface="Malgun Gothic" charset="0"/>
+                        <a:ea typeface="Malgun Gothic" charset="0"/>
+                        <a:cs typeface="Malgun Gothic" charset="0"/>
+                      </a:endParaRPr>
+                    </a:p>
+                  </a:txBody>
+                  <a:tcPr marL="91440" marR="91440" marT="45720" marB="45720" anchor="ctr">
+                    <a:lnL w="9525" cap="flat" cmpd="sng" algn="ctr">
+                      <a:solidFill>
+                        <a:srgbClr val="D8DBD2"/>
+                      </a:solidFill>
+                      <a:prstDash val="solid"/>
+                      <a:round/>
+                      <a:headEnd type="none" w="med" len="med"/>
+                      <a:tailEnd type="none" w="med" len="med"/>
+                    </a:lnL>
+                    <a:lnR w="9525" cap="flat" cmpd="sng" algn="ctr">
+                      <a:solidFill>
+                        <a:srgbClr val="D8DBD2"/>
+                      </a:solidFill>
+                      <a:prstDash val="solid"/>
+                      <a:round/>
+                      <a:headEnd type="none" w="med" len="med"/>
+                      <a:tailEnd type="none" w="med" len="med"/>
+                    </a:lnR>
+                    <a:lnT w="9525" cap="flat" cmpd="sng" algn="ctr">
+                      <a:solidFill>
+                        <a:srgbClr val="D8DBD2"/>
+                      </a:solidFill>
+                      <a:prstDash val="solid"/>
+                      <a:round/>
+                      <a:headEnd type="none" w="med" len="med"/>
+                      <a:tailEnd type="none" w="med" len="med"/>
+                    </a:lnT>
+                    <a:lnB w="9525" cap="flat" cmpd="sng" algn="ctr">
+                      <a:solidFill>
+                        <a:srgbClr val="D8DBD2"/>
+                      </a:solidFill>
+                      <a:prstDash val="solid"/>
+                      <a:round/>
+                      <a:headEnd type="none" w="med" len="med"/>
+                      <a:tailEnd type="none" w="med" len="med"/>
+                    </a:lnB>
+                    <a:solidFill>
+                      <a:srgbClr val="F1F2EF"/>
+                    </a:solidFill>
+                  </a:tcPr>
+                </a:tc>
+              </a:tr>
+              <a:tr h="0">
+                <a:tc>
+                  <a:txBody>
+                    <a:bodyPr/>
+                    <a:lstStyle/>
+                    <a:p>
+                      <a:pPr algn="l" indent="0" marL="0">
+                        <a:buNone/>
+                      </a:pPr>
+                      <a:r>
+                        <a:rPr lang="en-US" sz="1050" b="1" dirty="0">
+                          <a:solidFill>
+                            <a:srgbClr val="5B6572"/>
+                          </a:solidFill>
+                          <a:latin typeface="Malgun Gothic" pitchFamily="34" charset="0"/>
+                          <a:ea typeface="Malgun Gothic" pitchFamily="34" charset="-122"/>
+                          <a:cs typeface="Malgun Gothic" pitchFamily="34" charset="-120"/>
+                        </a:rPr>
+                        <a:t>규모(Sizing)</a:t>
+                      </a:r>
+                      <a:endParaRPr lang="en-US" sz="1050" dirty="0">
+                        <a:latin typeface="Malgun Gothic" charset="0"/>
+                        <a:ea typeface="Malgun Gothic" charset="0"/>
+                        <a:cs typeface="Malgun Gothic" charset="0"/>
+                      </a:endParaRPr>
+                    </a:p>
+                  </a:txBody>
+                  <a:tcPr marL="91440" marR="91440" marT="45720" marB="45720" anchor="ctr">
+                    <a:lnL w="9525" cap="flat" cmpd="sng" algn="ctr">
+                      <a:solidFill>
+                        <a:srgbClr val="D8DBD2"/>
+                      </a:solidFill>
+                      <a:prstDash val="solid"/>
+                      <a:round/>
+                      <a:headEnd type="none" w="med" len="med"/>
+                      <a:tailEnd type="none" w="med" len="med"/>
+                    </a:lnL>
+                    <a:lnR w="9525" cap="flat" cmpd="sng" algn="ctr">
+                      <a:solidFill>
+                        <a:srgbClr val="D8DBD2"/>
+                      </a:solidFill>
+                      <a:prstDash val="solid"/>
+                      <a:round/>
+                      <a:headEnd type="none" w="med" len="med"/>
+                      <a:tailEnd type="none" w="med" len="med"/>
+                    </a:lnR>
+                    <a:lnT w="9525" cap="flat" cmpd="sng" algn="ctr">
+                      <a:solidFill>
+                        <a:srgbClr val="D8DBD2"/>
+                      </a:solidFill>
+                      <a:prstDash val="solid"/>
+                      <a:round/>
+                      <a:headEnd type="none" w="med" len="med"/>
+                      <a:tailEnd type="none" w="med" len="med"/>
+                    </a:lnT>
+                    <a:lnB w="9525" cap="flat" cmpd="sng" algn="ctr">
+                      <a:solidFill>
+                        <a:srgbClr val="D8DBD2"/>
+                      </a:solidFill>
+                      <a:prstDash val="solid"/>
+                      <a:round/>
+                      <a:headEnd type="none" w="med" len="med"/>
+                      <a:tailEnd type="none" w="med" len="med"/>
+                    </a:lnB>
+                    <a:solidFill>
+                      <a:srgbClr val="FFFFFF"/>
+                    </a:solidFill>
+                  </a:tcPr>
+                </a:tc>
+                <a:tc>
+                  <a:txBody>
+                    <a:bodyPr/>
+                    <a:lstStyle/>
+                    <a:p>
+                      <a:pPr algn="l" indent="0" marL="0">
+                        <a:buNone/>
+                      </a:pPr>
+                      <a:r>
+                        <a:rPr lang="en-US" sz="1050" dirty="0">
+                          <a:solidFill>
+                            <a:srgbClr val="1B2430"/>
+                          </a:solidFill>
+                          <a:latin typeface="Malgun Gothic" pitchFamily="34" charset="0"/>
+                          <a:ea typeface="Malgun Gothic" pitchFamily="34" charset="-122"/>
+                          <a:cs typeface="Malgun Gothic" pitchFamily="34" charset="-120"/>
+                        </a:rPr>
+                        <a:t>운영 트래픽 기준 풀 사이즈</a:t>
+                      </a:r>
+                      <a:endParaRPr lang="en-US" sz="1050" dirty="0">
+                        <a:latin typeface="Malgun Gothic" charset="0"/>
+                        <a:ea typeface="Malgun Gothic" charset="0"/>
+                        <a:cs typeface="Malgun Gothic" charset="0"/>
+                      </a:endParaRPr>
+                    </a:p>
+                  </a:txBody>
+                  <a:tcPr marL="91440" marR="91440" marT="45720" marB="45720" anchor="ctr">
+                    <a:lnL w="9525" cap="flat" cmpd="sng" algn="ctr">
+                      <a:solidFill>
+                        <a:srgbClr val="D8DBD2"/>
+                      </a:solidFill>
+                      <a:prstDash val="solid"/>
+                      <a:round/>
+                      <a:headEnd type="none" w="med" len="med"/>
+                      <a:tailEnd type="none" w="med" len="med"/>
+                    </a:lnL>
+                    <a:lnR w="9525" cap="flat" cmpd="sng" algn="ctr">
+                      <a:solidFill>
+                        <a:srgbClr val="D8DBD2"/>
+                      </a:solidFill>
+                      <a:prstDash val="solid"/>
+                      <a:round/>
+                      <a:headEnd type="none" w="med" len="med"/>
+                      <a:tailEnd type="none" w="med" len="med"/>
+                    </a:lnR>
+                    <a:lnT w="9525" cap="flat" cmpd="sng" algn="ctr">
+                      <a:solidFill>
+                        <a:srgbClr val="D8DBD2"/>
+                      </a:solidFill>
+                      <a:prstDash val="solid"/>
+                      <a:round/>
+                      <a:headEnd type="none" w="med" len="med"/>
+                      <a:tailEnd type="none" w="med" len="med"/>
+                    </a:lnT>
+                    <a:lnB w="9525" cap="flat" cmpd="sng" algn="ctr">
+                      <a:solidFill>
+                        <a:srgbClr val="D8DBD2"/>
+                      </a:solidFill>
+                      <a:prstDash val="solid"/>
+                      <a:round/>
+                      <a:headEnd type="none" w="med" len="med"/>
+                      <a:tailEnd type="none" w="med" len="med"/>
+                    </a:lnB>
+                    <a:solidFill>
+                      <a:srgbClr val="FFFFFF"/>
+                    </a:solidFill>
+                  </a:tcPr>
+                </a:tc>
+                <a:tc>
+                  <a:txBody>
+                    <a:bodyPr/>
+                    <a:lstStyle/>
+                    <a:p>
+                      <a:pPr algn="l" indent="0" marL="0">
+                        <a:buNone/>
+                      </a:pPr>
+                      <a:r>
+                        <a:rPr lang="en-US" sz="1050" dirty="0">
+                          <a:solidFill>
+                            <a:srgbClr val="1B2430"/>
+                          </a:solidFill>
+                          <a:latin typeface="Malgun Gothic" pitchFamily="34" charset="0"/>
+                          <a:ea typeface="Malgun Gothic" pitchFamily="34" charset="-122"/>
+                          <a:cs typeface="Malgun Gothic" pitchFamily="34" charset="-120"/>
+                        </a:rPr>
+                        <a:t>Prod 대비 축소 가능</a:t>
+                      </a:r>
+                      <a:endParaRPr lang="en-US" sz="1050" dirty="0">
+                        <a:latin typeface="Malgun Gothic" charset="0"/>
+                        <a:ea typeface="Malgun Gothic" charset="0"/>
+                        <a:cs typeface="Malgun Gothic" charset="0"/>
+                      </a:endParaRPr>
+                    </a:p>
+                  </a:txBody>
+                  <a:tcPr marL="91440" marR="91440" marT="45720" marB="45720" anchor="ctr">
+                    <a:lnL w="9525" cap="flat" cmpd="sng" algn="ctr">
+                      <a:solidFill>
+                        <a:srgbClr val="D8DBD2"/>
+                      </a:solidFill>
+                      <a:prstDash val="solid"/>
+                      <a:round/>
+                      <a:headEnd type="none" w="med" len="med"/>
+                      <a:tailEnd type="none" w="med" len="med"/>
+                    </a:lnL>
+                    <a:lnR w="9525" cap="flat" cmpd="sng" algn="ctr">
+                      <a:solidFill>
+                        <a:srgbClr val="D8DBD2"/>
+                      </a:solidFill>
+                      <a:prstDash val="solid"/>
+                      <a:round/>
+                      <a:headEnd type="none" w="med" len="med"/>
+                      <a:tailEnd type="none" w="med" len="med"/>
+                    </a:lnR>
+                    <a:lnT w="9525" cap="flat" cmpd="sng" algn="ctr">
+                      <a:solidFill>
+                        <a:srgbClr val="D8DBD2"/>
+                      </a:solidFill>
+                      <a:prstDash val="solid"/>
+                      <a:round/>
+                      <a:headEnd type="none" w="med" len="med"/>
+                      <a:tailEnd type="none" w="med" len="med"/>
+                    </a:lnT>
+                    <a:lnB w="9525" cap="flat" cmpd="sng" algn="ctr">
+                      <a:solidFill>
+                        <a:srgbClr val="D8DBD2"/>
+                      </a:solidFill>
+                      <a:prstDash val="solid"/>
+                      <a:round/>
+                      <a:headEnd type="none" w="med" len="med"/>
+                      <a:tailEnd type="none" w="med" len="med"/>
+                    </a:lnB>
+                    <a:solidFill>
+                      <a:srgbClr val="FFFFFF"/>
+                    </a:solidFill>
+                  </a:tcPr>
+                </a:tc>
+                <a:tc>
+                  <a:txBody>
+                    <a:bodyPr/>
+                    <a:lstStyle/>
+                    <a:p>
+                      <a:pPr algn="l" indent="0" marL="0">
+                        <a:buNone/>
+                      </a:pPr>
+                      <a:r>
+                        <a:rPr lang="en-US" sz="1050" dirty="0">
+                          <a:solidFill>
+                            <a:srgbClr val="1B2430"/>
+                          </a:solidFill>
+                          <a:latin typeface="Malgun Gothic" pitchFamily="34" charset="0"/>
+                          <a:ea typeface="Malgun Gothic" pitchFamily="34" charset="-122"/>
+                          <a:cs typeface="Malgun Gothic" pitchFamily="34" charset="-120"/>
+                        </a:rPr>
+                        <a:t>최소 사이즈</a:t>
+                      </a:r>
+                      <a:endParaRPr lang="en-US" sz="1050" dirty="0">
+                        <a:latin typeface="Malgun Gothic" charset="0"/>
+                        <a:ea typeface="Malgun Gothic" charset="0"/>
+                        <a:cs typeface="Malgun Gothic" charset="0"/>
+                      </a:endParaRPr>
+                    </a:p>
+                  </a:txBody>
+                  <a:tcPr marL="91440" marR="91440" marT="45720" marB="45720" anchor="ctr">
+                    <a:lnL w="9525" cap="flat" cmpd="sng" algn="ctr">
+                      <a:solidFill>
+                        <a:srgbClr val="D8DBD2"/>
+                      </a:solidFill>
+                      <a:prstDash val="solid"/>
+                      <a:round/>
+                      <a:headEnd type="none" w="med" len="med"/>
+                      <a:tailEnd type="none" w="med" len="med"/>
+                    </a:lnL>
+                    <a:lnR w="9525" cap="flat" cmpd="sng" algn="ctr">
+                      <a:solidFill>
+                        <a:srgbClr val="D8DBD2"/>
+                      </a:solidFill>
+                      <a:prstDash val="solid"/>
+                      <a:round/>
+                      <a:headEnd type="none" w="med" len="med"/>
+                      <a:tailEnd type="none" w="med" len="med"/>
+                    </a:lnR>
+                    <a:lnT w="9525" cap="flat" cmpd="sng" algn="ctr">
+                      <a:solidFill>
+                        <a:srgbClr val="D8DBD2"/>
+                      </a:solidFill>
+                      <a:prstDash val="solid"/>
+                      <a:round/>
+                      <a:headEnd type="none" w="med" len="med"/>
+                      <a:tailEnd type="none" w="med" len="med"/>
+                    </a:lnT>
+                    <a:lnB w="9525" cap="flat" cmpd="sng" algn="ctr">
+                      <a:solidFill>
+                        <a:srgbClr val="D8DBD2"/>
+                      </a:solidFill>
+                      <a:prstDash val="solid"/>
+                      <a:round/>
+                      <a:headEnd type="none" w="med" len="med"/>
+                      <a:tailEnd type="none" w="med" len="med"/>
+                    </a:lnB>
+                    <a:solidFill>
+                      <a:srgbClr val="FFFFFF"/>
+                    </a:solidFill>
+                  </a:tcPr>
+                </a:tc>
+              </a:tr>
+            </a:tbl>
+          </a:graphicData>
+        </a:graphic>
+      </p:graphicFrame>
+      <p:sp>
+        <p:nvSpPr>
+          <p:cNvPr id="6" name="Text 3"/>
+          <p:cNvSpPr txBox="1"/>
+          <p:nvPr/>
+        </p:nvSpPr>
+        <p:spPr>
+          <a:xfrm>
+            <a:off x="11368735" y="6419088"/>
+            <a:ext cx="457200" cy="274320"/>
+          </a:xfrm>
+          <a:prstGeom prst="rect">
+            <a:avLst/>
+          </a:prstGeom>
+          <a:noFill/>
+          <a:ln/>
+        </p:spPr>
+        <p:txBody>
+          <a:bodyPr wrap="square" lIns="0" tIns="0" rIns="0" bIns="0" rtlCol="0" anchor="ctr"/>
+          <a:lstStyle/>
+          <a:p>
+            <a:pPr algn="r" indent="0" marL="0">
+              <a:buNone/>
+            </a:pPr>
+            <a:r>
+              <a:rPr lang="en-US" sz="1000" dirty="0">
+                <a:solidFill>
+                  <a:srgbClr val="8B95A3"/>
+                </a:solidFill>
+                <a:latin typeface="Consolas" pitchFamily="34" charset="0"/>
+                <a:ea typeface="Consolas" pitchFamily="34" charset="-122"/>
+                <a:cs typeface="Consolas" pitchFamily="34" charset="-120"/>
+              </a:rPr>
+              <a:t>04</a:t>
+            </a:r>
+            <a:endParaRPr lang="en-US" sz="1000" dirty="0"/>
+          </a:p>
+        </p:txBody>
+      </p:sp>
+    </p:spTree>
+  </p:cSld>
+  <p:clrMapOvr>
+    <a:masterClrMapping/>
+  </p:clrMapOvr>
+</p:sld>
+</file>
+
+<file path=ppt/slides/slide5.xml><?xml version="1.0" encoding="utf-8"?>
+<p:sld xmlns:a="http://schemas.openxmlformats.org/drawingml/2006/main" xmlns:r="http://schemas.openxmlformats.org/officeDocument/2006/relationships" xmlns:p="http://schemas.openxmlformats.org/presentationml/2006/main">
+  <p:cSld name="Slide 5">
+    <p:bg>
+      <p:bgPr>
+        <a:solidFill>
+          <a:srgbClr val="FFFFFF"/>
+        </a:solidFill>
+      </p:bgPr>
+    </p:bg>
+    <p:spTree>
+      <p:nvGrpSpPr>
+        <p:cNvPr id="1" name=""/>
+        <p:cNvGrpSpPr/>
+        <p:nvPr/>
+      </p:nvGrpSpPr>
+      <p:grpSpPr>
+        <a:xfrm>
+          <a:off x="0" y="0"/>
+          <a:ext cx="0" cy="0"/>
+          <a:chOff x="0" y="0"/>
+          <a:chExt cx="0" cy="0"/>
+        </a:xfrm>
+      </p:grpSpPr>
+      <p:sp>
+        <p:nvSpPr>
+          <p:cNvPr id="2" name="Text 0"/>
+          <p:cNvSpPr txBox="1"/>
+          <p:nvPr/>
+        </p:nvSpPr>
+        <p:spPr>
+          <a:xfrm>
+            <a:off x="502920" y="320040"/>
+            <a:ext cx="7315200" cy="274320"/>
+          </a:xfrm>
+          <a:prstGeom prst="rect">
+            <a:avLst/>
+          </a:prstGeom>
+          <a:noFill/>
+          <a:ln/>
+        </p:spPr>
+        <p:txBody>
+          <a:bodyPr wrap="square" lIns="0" tIns="0" rIns="0" bIns="0" rtlCol="0" anchor="ctr"/>
+          <a:lstStyle/>
+          <a:p>
+            <a:pPr indent="0" marL="0">
+              <a:buNone/>
+            </a:pPr>
+            <a:r>
+              <a:rPr lang="en-US" sz="1100" b="1" spc="200" kern="0" dirty="0">
+                <a:solidFill>
+                  <a:srgbClr val="5B6572"/>
+                </a:solidFill>
+                <a:latin typeface="Consolas" pitchFamily="34" charset="0"/>
+                <a:ea typeface="Consolas" pitchFamily="34" charset="-122"/>
+                <a:cs typeface="Consolas" pitchFamily="34" charset="-120"/>
+              </a:rPr>
+              <a:t>03 · ARCHITECTURE</a:t>
             </a:r>
             <a:endParaRPr lang="en-US" sz="1100" dirty="0"/>
           </a:p>
@@ -19885,7 +24055,7 @@
                 <a:ea typeface="Consolas" pitchFamily="34" charset="-122"/>
                 <a:cs typeface="Consolas" pitchFamily="34" charset="-120"/>
               </a:rPr>
-              <a:t>04</a:t>
+              <a:t>05</a:t>
             </a:r>
             <a:endParaRPr lang="en-US" sz="1000" dirty="0"/>
           </a:p>
@@ -19899,9 +24069,9 @@
 </p:sld>
 </file>
 
-<file path=ppt/slides/slide5.xml><?xml version="1.0" encoding="utf-8"?>
+<file path=ppt/slides/slide6.xml><?xml version="1.0" encoding="utf-8"?>
 <p:sld xmlns:a="http://schemas.openxmlformats.org/drawingml/2006/main" xmlns:r="http://schemas.openxmlformats.org/officeDocument/2006/relationships" xmlns:p="http://schemas.openxmlformats.org/presentationml/2006/main">
-  <p:cSld name="Slide 5">
+  <p:cSld name="Slide 6">
     <p:bg>
       <p:bgPr>
         <a:solidFill>
@@ -19956,7 +24126,7 @@
                 <a:ea typeface="Consolas" pitchFamily="34" charset="-122"/>
                 <a:cs typeface="Consolas" pitchFamily="34" charset="-120"/>
               </a:rPr>
-              <a:t>03 · AWS DETAIL</a:t>
+              <a:t>04 · AWS DETAIL</a:t>
             </a:r>
             <a:endParaRPr lang="en-US" sz="1100" dirty="0"/>
           </a:p>
@@ -20106,7 +24276,7 @@
                 <a:ea typeface="Malgun Gothic" pitchFamily="34" charset="-122"/>
                 <a:cs typeface="Malgun Gothic" pitchFamily="34" charset="-120"/>
               </a:rPr>
-              <a:t>WEB ZONE</a:t>
+              <a:t>WEB ZONE(SUBNET)</a:t>
             </a:r>
             <a:endParaRPr lang="en-US" sz="1200" dirty="0"/>
           </a:p>
@@ -20126,7 +24296,7 @@
                 <a:ea typeface="Malgun Gothic" pitchFamily="34" charset="-122"/>
                 <a:cs typeface="Malgun Gothic" pitchFamily="34" charset="-120"/>
               </a:rPr>
-              <a:t>ALB(내부) + EC2 웹서버</a:t>
+              <a:t>ALB + EC2 웹서버</a:t>
             </a:r>
             <a:endParaRPr lang="en-US" sz="1200" dirty="0"/>
           </a:p>
@@ -20239,7 +24409,7 @@
                 <a:ea typeface="Malgun Gothic" pitchFamily="34" charset="-122"/>
                 <a:cs typeface="Malgun Gothic" pitchFamily="34" charset="-120"/>
               </a:rPr>
-              <a:t>WAS ZONE</a:t>
+              <a:t>WAS ZONE(SUBNET)</a:t>
             </a:r>
             <a:endParaRPr lang="en-US" sz="1200" dirty="0"/>
           </a:p>
@@ -20372,7 +24542,7 @@
                 <a:ea typeface="Malgun Gothic" pitchFamily="34" charset="-122"/>
                 <a:cs typeface="Malgun Gothic" pitchFamily="34" charset="-120"/>
               </a:rPr>
-              <a:t>DB ZONE · 개인신용정보</a:t>
+              <a:t>DB ZONE(SUBNET) · 개인신용정보</a:t>
             </a:r>
             <a:endParaRPr lang="en-US" sz="1200" dirty="0"/>
           </a:p>
@@ -20392,7 +24562,7 @@
                 <a:ea typeface="Malgun Gothic" pitchFamily="34" charset="-122"/>
                 <a:cs typeface="Malgun Gothic" pitchFamily="34" charset="-120"/>
               </a:rPr>
-              <a:t>Amazon Aurora(회사 A 전용 인스턴스)</a:t>
+              <a:t>Amazon Aurora / RDS(회사 A 전용 인스턴스)</a:t>
             </a:r>
             <a:endParaRPr lang="en-US" sz="1200" dirty="0"/>
           </a:p>
@@ -20505,7 +24675,7 @@
                 <a:ea typeface="Malgun Gothic" pitchFamily="34" charset="-122"/>
                 <a:cs typeface="Malgun Gothic" pitchFamily="34" charset="-120"/>
               </a:rPr>
-              <a:t>관리 ZONE</a:t>
+              <a:t>관리 ZONE(SUBNET)</a:t>
             </a:r>
             <a:endParaRPr lang="en-US" sz="1200" dirty="0"/>
           </a:p>
@@ -20525,7 +24695,7 @@
                 <a:ea typeface="Malgun Gothic" pitchFamily="34" charset="-122"/>
                 <a:cs typeface="Malgun Gothic" pitchFamily="34" charset="-120"/>
               </a:rPr>
-              <a:t>Bastion 연동 · 로그 Agent · Systems Manager</a:t>
+              <a:t>Bastion 연동 · Systems Manager · S3(로그·백업 저장)</a:t>
             </a:r>
             <a:endParaRPr lang="en-US" sz="1200" dirty="0"/>
           </a:p>
@@ -20584,7 +24754,7 @@
                 <a:ea typeface="Consolas" pitchFamily="34" charset="-122"/>
                 <a:cs typeface="Consolas" pitchFamily="34" charset="-120"/>
               </a:rPr>
-              <a:t>05</a:t>
+              <a:t>06</a:t>
             </a:r>
             <a:endParaRPr lang="en-US" sz="1000" dirty="0"/>
           </a:p>
@@ -20598,9 +24768,9 @@
 </p:sld>
 </file>
 
-<file path=ppt/slides/slide6.xml><?xml version="1.0" encoding="utf-8"?>
+<file path=ppt/slides/slide7.xml><?xml version="1.0" encoding="utf-8"?>
 <p:sld xmlns:a="http://schemas.openxmlformats.org/drawingml/2006/main" xmlns:r="http://schemas.openxmlformats.org/officeDocument/2006/relationships" xmlns:p="http://schemas.openxmlformats.org/presentationml/2006/main">
-  <p:cSld name="Slide 6">
+  <p:cSld name="Slide 7">
     <p:bg>
       <p:bgPr>
         <a:solidFill>
@@ -20655,7 +24825,7 @@
                 <a:ea typeface="Consolas" pitchFamily="34" charset="-122"/>
                 <a:cs typeface="Consolas" pitchFamily="34" charset="-120"/>
               </a:rPr>
-              <a:t>04 · AZURE DETAIL</a:t>
+              <a:t>05 · AZURE DETAIL</a:t>
             </a:r>
             <a:endParaRPr lang="en-US" sz="1100" dirty="0"/>
           </a:p>
@@ -20805,7 +24975,7 @@
                 <a:ea typeface="Malgun Gothic" pitchFamily="34" charset="-122"/>
                 <a:cs typeface="Malgun Gothic" pitchFamily="34" charset="-120"/>
               </a:rPr>
-              <a:t>WEB ZONE</a:t>
+              <a:t>WEB ZONE(SUBNET)</a:t>
             </a:r>
             <a:endParaRPr lang="en-US" sz="1200" dirty="0"/>
           </a:p>
@@ -20825,7 +24995,7 @@
                 <a:ea typeface="Malgun Gothic" pitchFamily="34" charset="-122"/>
                 <a:cs typeface="Malgun Gothic" pitchFamily="34" charset="-120"/>
               </a:rPr>
-              <a:t>Application Gateway(내부) + VM 웹서버</a:t>
+              <a:t>Application Gateway + VM 웹서버</a:t>
             </a:r>
             <a:endParaRPr lang="en-US" sz="1200" dirty="0"/>
           </a:p>
@@ -20938,7 +25108,7 @@
                 <a:ea typeface="Malgun Gothic" pitchFamily="34" charset="-122"/>
                 <a:cs typeface="Malgun Gothic" pitchFamily="34" charset="-120"/>
               </a:rPr>
-              <a:t>WAS ZONE</a:t>
+              <a:t>WAS ZONE(SUBNET)</a:t>
             </a:r>
             <a:endParaRPr lang="en-US" sz="1200" dirty="0"/>
           </a:p>
@@ -21071,7 +25241,7 @@
                 <a:ea typeface="Malgun Gothic" pitchFamily="34" charset="-122"/>
                 <a:cs typeface="Malgun Gothic" pitchFamily="34" charset="-120"/>
               </a:rPr>
-              <a:t>DB ZONE · 개인신용정보</a:t>
+              <a:t>DB ZONE(SUBNET) · 개인신용정보</a:t>
             </a:r>
             <a:endParaRPr lang="en-US" sz="1200" dirty="0"/>
           </a:p>
@@ -21204,7 +25374,7 @@
                 <a:ea typeface="Malgun Gothic" pitchFamily="34" charset="-122"/>
                 <a:cs typeface="Malgun Gothic" pitchFamily="34" charset="-120"/>
               </a:rPr>
-              <a:t>관리 ZONE</a:t>
+              <a:t>관리 ZONE(SUBNET)</a:t>
             </a:r>
             <a:endParaRPr lang="en-US" sz="1200" dirty="0"/>
           </a:p>
@@ -21224,7 +25394,7 @@
                 <a:ea typeface="Malgun Gothic" pitchFamily="34" charset="-122"/>
                 <a:cs typeface="Malgun Gothic" pitchFamily="34" charset="-120"/>
               </a:rPr>
-              <a:t>Bastion 연동 · 로그 Agent · Update Manager</a:t>
+              <a:t>Bastion 연동 · Update Manager · Blob Storage(로그·백업 저장)</a:t>
             </a:r>
             <a:endParaRPr lang="en-US" sz="1200" dirty="0"/>
           </a:p>
@@ -21283,7 +25453,7 @@
                 <a:ea typeface="Consolas" pitchFamily="34" charset="-122"/>
                 <a:cs typeface="Consolas" pitchFamily="34" charset="-120"/>
               </a:rPr>
-              <a:t>06</a:t>
+              <a:t>07</a:t>
             </a:r>
             <a:endParaRPr lang="en-US" sz="1000" dirty="0"/>
           </a:p>
@@ -21297,9 +25467,9 @@
 </p:sld>
 </file>
 
-<file path=ppt/slides/slide7.xml><?xml version="1.0" encoding="utf-8"?>
+<file path=ppt/slides/slide8.xml><?xml version="1.0" encoding="utf-8"?>
 <p:sld xmlns:a="http://schemas.openxmlformats.org/drawingml/2006/main" xmlns:r="http://schemas.openxmlformats.org/officeDocument/2006/relationships" xmlns:p="http://schemas.openxmlformats.org/presentationml/2006/main">
-  <p:cSld name="Slide 7">
+  <p:cSld name="Slide 8">
     <p:bg>
       <p:bgPr>
         <a:solidFill>
@@ -21354,7 +25524,7 @@
                 <a:ea typeface="Consolas" pitchFamily="34" charset="-122"/>
                 <a:cs typeface="Consolas" pitchFamily="34" charset="-120"/>
               </a:rPr>
-              <a:t>05 · COMMON NETWORK</a:t>
+              <a:t>06 · COMMON NETWORK</a:t>
             </a:r>
             <a:endParaRPr lang="en-US" sz="1100" dirty="0"/>
           </a:p>
@@ -22237,7 +26407,7 @@
                 <a:ea typeface="Consolas" pitchFamily="34" charset="-122"/>
                 <a:cs typeface="Consolas" pitchFamily="34" charset="-120"/>
               </a:rPr>
-              <a:t>07</a:t>
+              <a:t>08</a:t>
             </a:r>
             <a:endParaRPr lang="en-US" sz="1000" dirty="0"/>
           </a:p>
@@ -22251,9 +26421,9 @@
 </p:sld>
 </file>
 
-<file path=ppt/slides/slide8.xml><?xml version="1.0" encoding="utf-8"?>
+<file path=ppt/slides/slide9.xml><?xml version="1.0" encoding="utf-8"?>
 <p:sld xmlns:a="http://schemas.openxmlformats.org/drawingml/2006/main" xmlns:r="http://schemas.openxmlformats.org/officeDocument/2006/relationships" xmlns:p="http://schemas.openxmlformats.org/presentationml/2006/main">
-  <p:cSld name="Slide 8">
+  <p:cSld name="Slide 9">
     <p:bg>
       <p:bgPr>
         <a:solidFill>
@@ -22308,7 +26478,7 @@
                 <a:ea typeface="Consolas" pitchFamily="34" charset="-122"/>
                 <a:cs typeface="Consolas" pitchFamily="34" charset="-120"/>
               </a:rPr>
-              <a:t>06 · TERMINOLOGY</a:t>
+              <a:t>07 · TERMINOLOGY</a:t>
             </a:r>
             <a:endParaRPr lang="en-US" sz="1100" dirty="0"/>
           </a:p>
@@ -22397,7 +26567,7 @@
       </p:sp>
       <p:graphicFrame>
         <p:nvGraphicFramePr>
-          <p:cNvPr id="9" name="Table 0"/>
+          <p:cNvPr id="10" name="Table 0"/>
           <p:cNvGraphicFramePr>
             <a:graphicFrameLocks noGrp="1"/>
           </p:cNvGraphicFramePr>
@@ -23537,6 +27707,828 @@
                           <a:ea typeface="Malgun Gothic" pitchFamily="34" charset="-122"/>
                           <a:cs typeface="Malgun Gothic" pitchFamily="34" charset="-120"/>
                         </a:rPr>
+                        <a:t>컴퓨팅 인스턴스</a:t>
+                      </a:r>
+                      <a:endParaRPr lang="en-US" sz="1050" dirty="0">
+                        <a:latin typeface="Malgun Gothic" charset="0"/>
+                        <a:ea typeface="Malgun Gothic" charset="0"/>
+                        <a:cs typeface="Malgun Gothic" charset="0"/>
+                      </a:endParaRPr>
+                    </a:p>
+                  </a:txBody>
+                  <a:tcPr marL="91440" marR="91440" marT="45720" marB="45720" anchor="ctr">
+                    <a:lnL w="9525" cap="flat" cmpd="sng" algn="ctr">
+                      <a:solidFill>
+                        <a:srgbClr val="D8DBD2"/>
+                      </a:solidFill>
+                      <a:prstDash val="solid"/>
+                      <a:round/>
+                      <a:headEnd type="none" w="med" len="med"/>
+                      <a:tailEnd type="none" w="med" len="med"/>
+                    </a:lnL>
+                    <a:lnR w="9525" cap="flat" cmpd="sng" algn="ctr">
+                      <a:solidFill>
+                        <a:srgbClr val="D8DBD2"/>
+                      </a:solidFill>
+                      <a:prstDash val="solid"/>
+                      <a:round/>
+                      <a:headEnd type="none" w="med" len="med"/>
+                      <a:tailEnd type="none" w="med" len="med"/>
+                    </a:lnR>
+                    <a:lnT w="9525" cap="flat" cmpd="sng" algn="ctr">
+                      <a:solidFill>
+                        <a:srgbClr val="D8DBD2"/>
+                      </a:solidFill>
+                      <a:prstDash val="solid"/>
+                      <a:round/>
+                      <a:headEnd type="none" w="med" len="med"/>
+                      <a:tailEnd type="none" w="med" len="med"/>
+                    </a:lnT>
+                    <a:lnB w="9525" cap="flat" cmpd="sng" algn="ctr">
+                      <a:solidFill>
+                        <a:srgbClr val="D8DBD2"/>
+                      </a:solidFill>
+                      <a:prstDash val="solid"/>
+                      <a:round/>
+                      <a:headEnd type="none" w="med" len="med"/>
+                      <a:tailEnd type="none" w="med" len="med"/>
+                    </a:lnB>
+                    <a:solidFill>
+                      <a:srgbClr val="F1F2EF"/>
+                    </a:solidFill>
+                  </a:tcPr>
+                </a:tc>
+                <a:tc>
+                  <a:txBody>
+                    <a:bodyPr/>
+                    <a:lstStyle/>
+                    <a:p>
+                      <a:pPr algn="l" indent="0" marL="0">
+                        <a:buNone/>
+                      </a:pPr>
+                      <a:r>
+                        <a:rPr lang="en-US" sz="1050" dirty="0">
+                          <a:solidFill>
+                            <a:srgbClr val="B5642A"/>
+                          </a:solidFill>
+                          <a:latin typeface="Consolas" pitchFamily="34" charset="0"/>
+                          <a:ea typeface="Consolas" pitchFamily="34" charset="-122"/>
+                          <a:cs typeface="Consolas" pitchFamily="34" charset="-120"/>
+                        </a:rPr>
+                        <a:t>EC2</a:t>
+                      </a:r>
+                      <a:endParaRPr lang="en-US" sz="1050" dirty="0">
+                        <a:latin typeface="Consolas" charset="0"/>
+                        <a:ea typeface="Consolas" charset="0"/>
+                        <a:cs typeface="Consolas" charset="0"/>
+                      </a:endParaRPr>
+                    </a:p>
+                  </a:txBody>
+                  <a:tcPr marL="91440" marR="91440" marT="45720" marB="45720" anchor="ctr">
+                    <a:lnL w="9525" cap="flat" cmpd="sng" algn="ctr">
+                      <a:solidFill>
+                        <a:srgbClr val="D8DBD2"/>
+                      </a:solidFill>
+                      <a:prstDash val="solid"/>
+                      <a:round/>
+                      <a:headEnd type="none" w="med" len="med"/>
+                      <a:tailEnd type="none" w="med" len="med"/>
+                    </a:lnL>
+                    <a:lnR w="9525" cap="flat" cmpd="sng" algn="ctr">
+                      <a:solidFill>
+                        <a:srgbClr val="D8DBD2"/>
+                      </a:solidFill>
+                      <a:prstDash val="solid"/>
+                      <a:round/>
+                      <a:headEnd type="none" w="med" len="med"/>
+                      <a:tailEnd type="none" w="med" len="med"/>
+                    </a:lnR>
+                    <a:lnT w="9525" cap="flat" cmpd="sng" algn="ctr">
+                      <a:solidFill>
+                        <a:srgbClr val="D8DBD2"/>
+                      </a:solidFill>
+                      <a:prstDash val="solid"/>
+                      <a:round/>
+                      <a:headEnd type="none" w="med" len="med"/>
+                      <a:tailEnd type="none" w="med" len="med"/>
+                    </a:lnT>
+                    <a:lnB w="9525" cap="flat" cmpd="sng" algn="ctr">
+                      <a:solidFill>
+                        <a:srgbClr val="D8DBD2"/>
+                      </a:solidFill>
+                      <a:prstDash val="solid"/>
+                      <a:round/>
+                      <a:headEnd type="none" w="med" len="med"/>
+                      <a:tailEnd type="none" w="med" len="med"/>
+                    </a:lnB>
+                    <a:solidFill>
+                      <a:srgbClr val="F1F2EF"/>
+                    </a:solidFill>
+                  </a:tcPr>
+                </a:tc>
+                <a:tc>
+                  <a:txBody>
+                    <a:bodyPr/>
+                    <a:lstStyle/>
+                    <a:p>
+                      <a:pPr algn="l" indent="0" marL="0">
+                        <a:buNone/>
+                      </a:pPr>
+                      <a:r>
+                        <a:rPr lang="en-US" sz="1050" dirty="0">
+                          <a:solidFill>
+                            <a:srgbClr val="2E6DA4"/>
+                          </a:solidFill>
+                          <a:latin typeface="Consolas" pitchFamily="34" charset="0"/>
+                          <a:ea typeface="Consolas" pitchFamily="34" charset="-122"/>
+                          <a:cs typeface="Consolas" pitchFamily="34" charset="-120"/>
+                        </a:rPr>
+                        <a:t>Virtual Machine(VM)</a:t>
+                      </a:r>
+                      <a:endParaRPr lang="en-US" sz="1050" dirty="0">
+                        <a:latin typeface="Consolas" charset="0"/>
+                        <a:ea typeface="Consolas" charset="0"/>
+                        <a:cs typeface="Consolas" charset="0"/>
+                      </a:endParaRPr>
+                    </a:p>
+                  </a:txBody>
+                  <a:tcPr marL="91440" marR="91440" marT="45720" marB="45720" anchor="ctr">
+                    <a:lnL w="9525" cap="flat" cmpd="sng" algn="ctr">
+                      <a:solidFill>
+                        <a:srgbClr val="D8DBD2"/>
+                      </a:solidFill>
+                      <a:prstDash val="solid"/>
+                      <a:round/>
+                      <a:headEnd type="none" w="med" len="med"/>
+                      <a:tailEnd type="none" w="med" len="med"/>
+                    </a:lnL>
+                    <a:lnR w="9525" cap="flat" cmpd="sng" algn="ctr">
+                      <a:solidFill>
+                        <a:srgbClr val="D8DBD2"/>
+                      </a:solidFill>
+                      <a:prstDash val="solid"/>
+                      <a:round/>
+                      <a:headEnd type="none" w="med" len="med"/>
+                      <a:tailEnd type="none" w="med" len="med"/>
+                    </a:lnR>
+                    <a:lnT w="9525" cap="flat" cmpd="sng" algn="ctr">
+                      <a:solidFill>
+                        <a:srgbClr val="D8DBD2"/>
+                      </a:solidFill>
+                      <a:prstDash val="solid"/>
+                      <a:round/>
+                      <a:headEnd type="none" w="med" len="med"/>
+                      <a:tailEnd type="none" w="med" len="med"/>
+                    </a:lnT>
+                    <a:lnB w="9525" cap="flat" cmpd="sng" algn="ctr">
+                      <a:solidFill>
+                        <a:srgbClr val="D8DBD2"/>
+                      </a:solidFill>
+                      <a:prstDash val="solid"/>
+                      <a:round/>
+                      <a:headEnd type="none" w="med" len="med"/>
+                      <a:tailEnd type="none" w="med" len="med"/>
+                    </a:lnB>
+                    <a:solidFill>
+                      <a:srgbClr val="F1F2EF"/>
+                    </a:solidFill>
+                  </a:tcPr>
+                </a:tc>
+                <a:tc>
+                  <a:txBody>
+                    <a:bodyPr/>
+                    <a:lstStyle/>
+                    <a:p>
+                      <a:pPr algn="l" indent="0" marL="0">
+                        <a:buNone/>
+                      </a:pPr>
+                      <a:r>
+                        <a:rPr lang="en-US" sz="1050" dirty="0">
+                          <a:solidFill>
+                            <a:srgbClr val="5B6572"/>
+                          </a:solidFill>
+                          <a:latin typeface="Malgun Gothic" pitchFamily="34" charset="0"/>
+                          <a:ea typeface="Malgun Gothic" pitchFamily="34" charset="-122"/>
+                          <a:cs typeface="Malgun Gothic" pitchFamily="34" charset="-120"/>
+                        </a:rPr>
+                        <a:t>Web·WAS Zone 서버 컴퓨팅 자원</a:t>
+                      </a:r>
+                      <a:endParaRPr lang="en-US" sz="1050" dirty="0">
+                        <a:latin typeface="Malgun Gothic" charset="0"/>
+                        <a:ea typeface="Malgun Gothic" charset="0"/>
+                        <a:cs typeface="Malgun Gothic" charset="0"/>
+                      </a:endParaRPr>
+                    </a:p>
+                  </a:txBody>
+                  <a:tcPr marL="91440" marR="91440" marT="45720" marB="45720" anchor="ctr">
+                    <a:lnL w="9525" cap="flat" cmpd="sng" algn="ctr">
+                      <a:solidFill>
+                        <a:srgbClr val="D8DBD2"/>
+                      </a:solidFill>
+                      <a:prstDash val="solid"/>
+                      <a:round/>
+                      <a:headEnd type="none" w="med" len="med"/>
+                      <a:tailEnd type="none" w="med" len="med"/>
+                    </a:lnL>
+                    <a:lnR w="9525" cap="flat" cmpd="sng" algn="ctr">
+                      <a:solidFill>
+                        <a:srgbClr val="D8DBD2"/>
+                      </a:solidFill>
+                      <a:prstDash val="solid"/>
+                      <a:round/>
+                      <a:headEnd type="none" w="med" len="med"/>
+                      <a:tailEnd type="none" w="med" len="med"/>
+                    </a:lnR>
+                    <a:lnT w="9525" cap="flat" cmpd="sng" algn="ctr">
+                      <a:solidFill>
+                        <a:srgbClr val="D8DBD2"/>
+                      </a:solidFill>
+                      <a:prstDash val="solid"/>
+                      <a:round/>
+                      <a:headEnd type="none" w="med" len="med"/>
+                      <a:tailEnd type="none" w="med" len="med"/>
+                    </a:lnT>
+                    <a:lnB w="9525" cap="flat" cmpd="sng" algn="ctr">
+                      <a:solidFill>
+                        <a:srgbClr val="D8DBD2"/>
+                      </a:solidFill>
+                      <a:prstDash val="solid"/>
+                      <a:round/>
+                      <a:headEnd type="none" w="med" len="med"/>
+                      <a:tailEnd type="none" w="med" len="med"/>
+                    </a:lnB>
+                    <a:solidFill>
+                      <a:srgbClr val="F1F2EF"/>
+                    </a:solidFill>
+                  </a:tcPr>
+                </a:tc>
+              </a:tr>
+              <a:tr h="0">
+                <a:tc>
+                  <a:txBody>
+                    <a:bodyPr/>
+                    <a:lstStyle/>
+                    <a:p>
+                      <a:pPr algn="l" indent="0" marL="0">
+                        <a:buNone/>
+                      </a:pPr>
+                      <a:r>
+                        <a:rPr lang="en-US" sz="1050" b="1" dirty="0">
+                          <a:solidFill>
+                            <a:srgbClr val="5B6572"/>
+                          </a:solidFill>
+                          <a:latin typeface="Malgun Gothic" pitchFamily="34" charset="0"/>
+                          <a:ea typeface="Malgun Gothic" pitchFamily="34" charset="-122"/>
+                          <a:cs typeface="Malgun Gothic" pitchFamily="34" charset="-120"/>
+                        </a:rPr>
+                        <a:t>로드밸런서</a:t>
+                      </a:r>
+                      <a:endParaRPr lang="en-US" sz="1050" dirty="0">
+                        <a:latin typeface="Malgun Gothic" charset="0"/>
+                        <a:ea typeface="Malgun Gothic" charset="0"/>
+                        <a:cs typeface="Malgun Gothic" charset="0"/>
+                      </a:endParaRPr>
+                    </a:p>
+                  </a:txBody>
+                  <a:tcPr marL="91440" marR="91440" marT="45720" marB="45720" anchor="ctr">
+                    <a:lnL w="9525" cap="flat" cmpd="sng" algn="ctr">
+                      <a:solidFill>
+                        <a:srgbClr val="D8DBD2"/>
+                      </a:solidFill>
+                      <a:prstDash val="solid"/>
+                      <a:round/>
+                      <a:headEnd type="none" w="med" len="med"/>
+                      <a:tailEnd type="none" w="med" len="med"/>
+                    </a:lnL>
+                    <a:lnR w="9525" cap="flat" cmpd="sng" algn="ctr">
+                      <a:solidFill>
+                        <a:srgbClr val="D8DBD2"/>
+                      </a:solidFill>
+                      <a:prstDash val="solid"/>
+                      <a:round/>
+                      <a:headEnd type="none" w="med" len="med"/>
+                      <a:tailEnd type="none" w="med" len="med"/>
+                    </a:lnR>
+                    <a:lnT w="9525" cap="flat" cmpd="sng" algn="ctr">
+                      <a:solidFill>
+                        <a:srgbClr val="D8DBD2"/>
+                      </a:solidFill>
+                      <a:prstDash val="solid"/>
+                      <a:round/>
+                      <a:headEnd type="none" w="med" len="med"/>
+                      <a:tailEnd type="none" w="med" len="med"/>
+                    </a:lnT>
+                    <a:lnB w="9525" cap="flat" cmpd="sng" algn="ctr">
+                      <a:solidFill>
+                        <a:srgbClr val="D8DBD2"/>
+                      </a:solidFill>
+                      <a:prstDash val="solid"/>
+                      <a:round/>
+                      <a:headEnd type="none" w="med" len="med"/>
+                      <a:tailEnd type="none" w="med" len="med"/>
+                    </a:lnB>
+                    <a:solidFill>
+                      <a:srgbClr val="FFFFFF"/>
+                    </a:solidFill>
+                  </a:tcPr>
+                </a:tc>
+                <a:tc>
+                  <a:txBody>
+                    <a:bodyPr/>
+                    <a:lstStyle/>
+                    <a:p>
+                      <a:pPr algn="l" indent="0" marL="0">
+                        <a:buNone/>
+                      </a:pPr>
+                      <a:r>
+                        <a:rPr lang="en-US" sz="1050" dirty="0">
+                          <a:solidFill>
+                            <a:srgbClr val="B5642A"/>
+                          </a:solidFill>
+                          <a:latin typeface="Consolas" pitchFamily="34" charset="0"/>
+                          <a:ea typeface="Consolas" pitchFamily="34" charset="-122"/>
+                          <a:cs typeface="Consolas" pitchFamily="34" charset="-120"/>
+                        </a:rPr>
+                        <a:t>ALB</a:t>
+                      </a:r>
+                      <a:endParaRPr lang="en-US" sz="1050" dirty="0">
+                        <a:latin typeface="Consolas" charset="0"/>
+                        <a:ea typeface="Consolas" charset="0"/>
+                        <a:cs typeface="Consolas" charset="0"/>
+                      </a:endParaRPr>
+                    </a:p>
+                  </a:txBody>
+                  <a:tcPr marL="91440" marR="91440" marT="45720" marB="45720" anchor="ctr">
+                    <a:lnL w="9525" cap="flat" cmpd="sng" algn="ctr">
+                      <a:solidFill>
+                        <a:srgbClr val="D8DBD2"/>
+                      </a:solidFill>
+                      <a:prstDash val="solid"/>
+                      <a:round/>
+                      <a:headEnd type="none" w="med" len="med"/>
+                      <a:tailEnd type="none" w="med" len="med"/>
+                    </a:lnL>
+                    <a:lnR w="9525" cap="flat" cmpd="sng" algn="ctr">
+                      <a:solidFill>
+                        <a:srgbClr val="D8DBD2"/>
+                      </a:solidFill>
+                      <a:prstDash val="solid"/>
+                      <a:round/>
+                      <a:headEnd type="none" w="med" len="med"/>
+                      <a:tailEnd type="none" w="med" len="med"/>
+                    </a:lnR>
+                    <a:lnT w="9525" cap="flat" cmpd="sng" algn="ctr">
+                      <a:solidFill>
+                        <a:srgbClr val="D8DBD2"/>
+                      </a:solidFill>
+                      <a:prstDash val="solid"/>
+                      <a:round/>
+                      <a:headEnd type="none" w="med" len="med"/>
+                      <a:tailEnd type="none" w="med" len="med"/>
+                    </a:lnT>
+                    <a:lnB w="9525" cap="flat" cmpd="sng" algn="ctr">
+                      <a:solidFill>
+                        <a:srgbClr val="D8DBD2"/>
+                      </a:solidFill>
+                      <a:prstDash val="solid"/>
+                      <a:round/>
+                      <a:headEnd type="none" w="med" len="med"/>
+                      <a:tailEnd type="none" w="med" len="med"/>
+                    </a:lnB>
+                    <a:solidFill>
+                      <a:srgbClr val="FFFFFF"/>
+                    </a:solidFill>
+                  </a:tcPr>
+                </a:tc>
+                <a:tc>
+                  <a:txBody>
+                    <a:bodyPr/>
+                    <a:lstStyle/>
+                    <a:p>
+                      <a:pPr algn="l" indent="0" marL="0">
+                        <a:buNone/>
+                      </a:pPr>
+                      <a:r>
+                        <a:rPr lang="en-US" sz="1050" dirty="0">
+                          <a:solidFill>
+                            <a:srgbClr val="2E6DA4"/>
+                          </a:solidFill>
+                          <a:latin typeface="Consolas" pitchFamily="34" charset="0"/>
+                          <a:ea typeface="Consolas" pitchFamily="34" charset="-122"/>
+                          <a:cs typeface="Consolas" pitchFamily="34" charset="-120"/>
+                        </a:rPr>
+                        <a:t>Application Gateway</a:t>
+                      </a:r>
+                      <a:endParaRPr lang="en-US" sz="1050" dirty="0">
+                        <a:latin typeface="Consolas" charset="0"/>
+                        <a:ea typeface="Consolas" charset="0"/>
+                        <a:cs typeface="Consolas" charset="0"/>
+                      </a:endParaRPr>
+                    </a:p>
+                  </a:txBody>
+                  <a:tcPr marL="91440" marR="91440" marT="45720" marB="45720" anchor="ctr">
+                    <a:lnL w="9525" cap="flat" cmpd="sng" algn="ctr">
+                      <a:solidFill>
+                        <a:srgbClr val="D8DBD2"/>
+                      </a:solidFill>
+                      <a:prstDash val="solid"/>
+                      <a:round/>
+                      <a:headEnd type="none" w="med" len="med"/>
+                      <a:tailEnd type="none" w="med" len="med"/>
+                    </a:lnL>
+                    <a:lnR w="9525" cap="flat" cmpd="sng" algn="ctr">
+                      <a:solidFill>
+                        <a:srgbClr val="D8DBD2"/>
+                      </a:solidFill>
+                      <a:prstDash val="solid"/>
+                      <a:round/>
+                      <a:headEnd type="none" w="med" len="med"/>
+                      <a:tailEnd type="none" w="med" len="med"/>
+                    </a:lnR>
+                    <a:lnT w="9525" cap="flat" cmpd="sng" algn="ctr">
+                      <a:solidFill>
+                        <a:srgbClr val="D8DBD2"/>
+                      </a:solidFill>
+                      <a:prstDash val="solid"/>
+                      <a:round/>
+                      <a:headEnd type="none" w="med" len="med"/>
+                      <a:tailEnd type="none" w="med" len="med"/>
+                    </a:lnT>
+                    <a:lnB w="9525" cap="flat" cmpd="sng" algn="ctr">
+                      <a:solidFill>
+                        <a:srgbClr val="D8DBD2"/>
+                      </a:solidFill>
+                      <a:prstDash val="solid"/>
+                      <a:round/>
+                      <a:headEnd type="none" w="med" len="med"/>
+                      <a:tailEnd type="none" w="med" len="med"/>
+                    </a:lnB>
+                    <a:solidFill>
+                      <a:srgbClr val="FFFFFF"/>
+                    </a:solidFill>
+                  </a:tcPr>
+                </a:tc>
+                <a:tc>
+                  <a:txBody>
+                    <a:bodyPr/>
+                    <a:lstStyle/>
+                    <a:p>
+                      <a:pPr algn="l" indent="0" marL="0">
+                        <a:buNone/>
+                      </a:pPr>
+                      <a:r>
+                        <a:rPr lang="en-US" sz="1050" dirty="0">
+                          <a:solidFill>
+                            <a:srgbClr val="5B6572"/>
+                          </a:solidFill>
+                          <a:latin typeface="Malgun Gothic" pitchFamily="34" charset="0"/>
+                          <a:ea typeface="Malgun Gothic" pitchFamily="34" charset="-122"/>
+                          <a:cs typeface="Malgun Gothic" pitchFamily="34" charset="-120"/>
+                        </a:rPr>
+                        <a:t>Web Zone 내부 트래픽 분산</a:t>
+                      </a:r>
+                      <a:endParaRPr lang="en-US" sz="1050" dirty="0">
+                        <a:latin typeface="Malgun Gothic" charset="0"/>
+                        <a:ea typeface="Malgun Gothic" charset="0"/>
+                        <a:cs typeface="Malgun Gothic" charset="0"/>
+                      </a:endParaRPr>
+                    </a:p>
+                  </a:txBody>
+                  <a:tcPr marL="91440" marR="91440" marT="45720" marB="45720" anchor="ctr">
+                    <a:lnL w="9525" cap="flat" cmpd="sng" algn="ctr">
+                      <a:solidFill>
+                        <a:srgbClr val="D8DBD2"/>
+                      </a:solidFill>
+                      <a:prstDash val="solid"/>
+                      <a:round/>
+                      <a:headEnd type="none" w="med" len="med"/>
+                      <a:tailEnd type="none" w="med" len="med"/>
+                    </a:lnL>
+                    <a:lnR w="9525" cap="flat" cmpd="sng" algn="ctr">
+                      <a:solidFill>
+                        <a:srgbClr val="D8DBD2"/>
+                      </a:solidFill>
+                      <a:prstDash val="solid"/>
+                      <a:round/>
+                      <a:headEnd type="none" w="med" len="med"/>
+                      <a:tailEnd type="none" w="med" len="med"/>
+                    </a:lnR>
+                    <a:lnT w="9525" cap="flat" cmpd="sng" algn="ctr">
+                      <a:solidFill>
+                        <a:srgbClr val="D8DBD2"/>
+                      </a:solidFill>
+                      <a:prstDash val="solid"/>
+                      <a:round/>
+                      <a:headEnd type="none" w="med" len="med"/>
+                      <a:tailEnd type="none" w="med" len="med"/>
+                    </a:lnT>
+                    <a:lnB w="9525" cap="flat" cmpd="sng" algn="ctr">
+                      <a:solidFill>
+                        <a:srgbClr val="D8DBD2"/>
+                      </a:solidFill>
+                      <a:prstDash val="solid"/>
+                      <a:round/>
+                      <a:headEnd type="none" w="med" len="med"/>
+                      <a:tailEnd type="none" w="med" len="med"/>
+                    </a:lnB>
+                    <a:solidFill>
+                      <a:srgbClr val="FFFFFF"/>
+                    </a:solidFill>
+                  </a:tcPr>
+                </a:tc>
+              </a:tr>
+              <a:tr h="0">
+                <a:tc>
+                  <a:txBody>
+                    <a:bodyPr/>
+                    <a:lstStyle/>
+                    <a:p>
+                      <a:pPr algn="l" indent="0" marL="0">
+                        <a:buNone/>
+                      </a:pPr>
+                      <a:r>
+                        <a:rPr lang="en-US" sz="1050" b="1" dirty="0">
+                          <a:solidFill>
+                            <a:srgbClr val="5B6572"/>
+                          </a:solidFill>
+                          <a:latin typeface="Malgun Gothic" pitchFamily="34" charset="0"/>
+                          <a:ea typeface="Malgun Gothic" pitchFamily="34" charset="-122"/>
+                          <a:cs typeface="Malgun Gothic" pitchFamily="34" charset="-120"/>
+                        </a:rPr>
+                        <a:t>오브젝트 스토리지</a:t>
+                      </a:r>
+                      <a:endParaRPr lang="en-US" sz="1050" dirty="0">
+                        <a:latin typeface="Malgun Gothic" charset="0"/>
+                        <a:ea typeface="Malgun Gothic" charset="0"/>
+                        <a:cs typeface="Malgun Gothic" charset="0"/>
+                      </a:endParaRPr>
+                    </a:p>
+                  </a:txBody>
+                  <a:tcPr marL="91440" marR="91440" marT="45720" marB="45720" anchor="ctr">
+                    <a:lnL w="9525" cap="flat" cmpd="sng" algn="ctr">
+                      <a:solidFill>
+                        <a:srgbClr val="D8DBD2"/>
+                      </a:solidFill>
+                      <a:prstDash val="solid"/>
+                      <a:round/>
+                      <a:headEnd type="none" w="med" len="med"/>
+                      <a:tailEnd type="none" w="med" len="med"/>
+                    </a:lnL>
+                    <a:lnR w="9525" cap="flat" cmpd="sng" algn="ctr">
+                      <a:solidFill>
+                        <a:srgbClr val="D8DBD2"/>
+                      </a:solidFill>
+                      <a:prstDash val="solid"/>
+                      <a:round/>
+                      <a:headEnd type="none" w="med" len="med"/>
+                      <a:tailEnd type="none" w="med" len="med"/>
+                    </a:lnR>
+                    <a:lnT w="9525" cap="flat" cmpd="sng" algn="ctr">
+                      <a:solidFill>
+                        <a:srgbClr val="D8DBD2"/>
+                      </a:solidFill>
+                      <a:prstDash val="solid"/>
+                      <a:round/>
+                      <a:headEnd type="none" w="med" len="med"/>
+                      <a:tailEnd type="none" w="med" len="med"/>
+                    </a:lnT>
+                    <a:lnB w="9525" cap="flat" cmpd="sng" algn="ctr">
+                      <a:solidFill>
+                        <a:srgbClr val="D8DBD2"/>
+                      </a:solidFill>
+                      <a:prstDash val="solid"/>
+                      <a:round/>
+                      <a:headEnd type="none" w="med" len="med"/>
+                      <a:tailEnd type="none" w="med" len="med"/>
+                    </a:lnB>
+                    <a:solidFill>
+                      <a:srgbClr val="F1F2EF"/>
+                    </a:solidFill>
+                  </a:tcPr>
+                </a:tc>
+                <a:tc>
+                  <a:txBody>
+                    <a:bodyPr/>
+                    <a:lstStyle/>
+                    <a:p>
+                      <a:pPr algn="l" indent="0" marL="0">
+                        <a:buNone/>
+                      </a:pPr>
+                      <a:r>
+                        <a:rPr lang="en-US" sz="1050" dirty="0">
+                          <a:solidFill>
+                            <a:srgbClr val="B5642A"/>
+                          </a:solidFill>
+                          <a:latin typeface="Consolas" pitchFamily="34" charset="0"/>
+                          <a:ea typeface="Consolas" pitchFamily="34" charset="-122"/>
+                          <a:cs typeface="Consolas" pitchFamily="34" charset="-120"/>
+                        </a:rPr>
+                        <a:t>S3</a:t>
+                      </a:r>
+                      <a:endParaRPr lang="en-US" sz="1050" dirty="0">
+                        <a:latin typeface="Consolas" charset="0"/>
+                        <a:ea typeface="Consolas" charset="0"/>
+                        <a:cs typeface="Consolas" charset="0"/>
+                      </a:endParaRPr>
+                    </a:p>
+                  </a:txBody>
+                  <a:tcPr marL="91440" marR="91440" marT="45720" marB="45720" anchor="ctr">
+                    <a:lnL w="9525" cap="flat" cmpd="sng" algn="ctr">
+                      <a:solidFill>
+                        <a:srgbClr val="D8DBD2"/>
+                      </a:solidFill>
+                      <a:prstDash val="solid"/>
+                      <a:round/>
+                      <a:headEnd type="none" w="med" len="med"/>
+                      <a:tailEnd type="none" w="med" len="med"/>
+                    </a:lnL>
+                    <a:lnR w="9525" cap="flat" cmpd="sng" algn="ctr">
+                      <a:solidFill>
+                        <a:srgbClr val="D8DBD2"/>
+                      </a:solidFill>
+                      <a:prstDash val="solid"/>
+                      <a:round/>
+                      <a:headEnd type="none" w="med" len="med"/>
+                      <a:tailEnd type="none" w="med" len="med"/>
+                    </a:lnR>
+                    <a:lnT w="9525" cap="flat" cmpd="sng" algn="ctr">
+                      <a:solidFill>
+                        <a:srgbClr val="D8DBD2"/>
+                      </a:solidFill>
+                      <a:prstDash val="solid"/>
+                      <a:round/>
+                      <a:headEnd type="none" w="med" len="med"/>
+                      <a:tailEnd type="none" w="med" len="med"/>
+                    </a:lnT>
+                    <a:lnB w="9525" cap="flat" cmpd="sng" algn="ctr">
+                      <a:solidFill>
+                        <a:srgbClr val="D8DBD2"/>
+                      </a:solidFill>
+                      <a:prstDash val="solid"/>
+                      <a:round/>
+                      <a:headEnd type="none" w="med" len="med"/>
+                      <a:tailEnd type="none" w="med" len="med"/>
+                    </a:lnB>
+                    <a:solidFill>
+                      <a:srgbClr val="F1F2EF"/>
+                    </a:solidFill>
+                  </a:tcPr>
+                </a:tc>
+                <a:tc>
+                  <a:txBody>
+                    <a:bodyPr/>
+                    <a:lstStyle/>
+                    <a:p>
+                      <a:pPr algn="l" indent="0" marL="0">
+                        <a:buNone/>
+                      </a:pPr>
+                      <a:r>
+                        <a:rPr lang="en-US" sz="1050" dirty="0">
+                          <a:solidFill>
+                            <a:srgbClr val="2E6DA4"/>
+                          </a:solidFill>
+                          <a:latin typeface="Consolas" pitchFamily="34" charset="0"/>
+                          <a:ea typeface="Consolas" pitchFamily="34" charset="-122"/>
+                          <a:cs typeface="Consolas" pitchFamily="34" charset="-120"/>
+                        </a:rPr>
+                        <a:t>Blob Storage</a:t>
+                      </a:r>
+                      <a:endParaRPr lang="en-US" sz="1050" dirty="0">
+                        <a:latin typeface="Consolas" charset="0"/>
+                        <a:ea typeface="Consolas" charset="0"/>
+                        <a:cs typeface="Consolas" charset="0"/>
+                      </a:endParaRPr>
+                    </a:p>
+                  </a:txBody>
+                  <a:tcPr marL="91440" marR="91440" marT="45720" marB="45720" anchor="ctr">
+                    <a:lnL w="9525" cap="flat" cmpd="sng" algn="ctr">
+                      <a:solidFill>
+                        <a:srgbClr val="D8DBD2"/>
+                      </a:solidFill>
+                      <a:prstDash val="solid"/>
+                      <a:round/>
+                      <a:headEnd type="none" w="med" len="med"/>
+                      <a:tailEnd type="none" w="med" len="med"/>
+                    </a:lnL>
+                    <a:lnR w="9525" cap="flat" cmpd="sng" algn="ctr">
+                      <a:solidFill>
+                        <a:srgbClr val="D8DBD2"/>
+                      </a:solidFill>
+                      <a:prstDash val="solid"/>
+                      <a:round/>
+                      <a:headEnd type="none" w="med" len="med"/>
+                      <a:tailEnd type="none" w="med" len="med"/>
+                    </a:lnR>
+                    <a:lnT w="9525" cap="flat" cmpd="sng" algn="ctr">
+                      <a:solidFill>
+                        <a:srgbClr val="D8DBD2"/>
+                      </a:solidFill>
+                      <a:prstDash val="solid"/>
+                      <a:round/>
+                      <a:headEnd type="none" w="med" len="med"/>
+                      <a:tailEnd type="none" w="med" len="med"/>
+                    </a:lnT>
+                    <a:lnB w="9525" cap="flat" cmpd="sng" algn="ctr">
+                      <a:solidFill>
+                        <a:srgbClr val="D8DBD2"/>
+                      </a:solidFill>
+                      <a:prstDash val="solid"/>
+                      <a:round/>
+                      <a:headEnd type="none" w="med" len="med"/>
+                      <a:tailEnd type="none" w="med" len="med"/>
+                    </a:lnB>
+                    <a:solidFill>
+                      <a:srgbClr val="F1F2EF"/>
+                    </a:solidFill>
+                  </a:tcPr>
+                </a:tc>
+                <a:tc>
+                  <a:txBody>
+                    <a:bodyPr/>
+                    <a:lstStyle/>
+                    <a:p>
+                      <a:pPr algn="l" indent="0" marL="0">
+                        <a:buNone/>
+                      </a:pPr>
+                      <a:r>
+                        <a:rPr lang="en-US" sz="1050" dirty="0">
+                          <a:solidFill>
+                            <a:srgbClr val="5B6572"/>
+                          </a:solidFill>
+                          <a:latin typeface="Malgun Gothic" pitchFamily="34" charset="0"/>
+                          <a:ea typeface="Malgun Gothic" pitchFamily="34" charset="-122"/>
+                          <a:cs typeface="Malgun Gothic" pitchFamily="34" charset="-120"/>
+                        </a:rPr>
+                        <a:t>로그·백업 저장</a:t>
+                      </a:r>
+                      <a:endParaRPr lang="en-US" sz="1050" dirty="0">
+                        <a:latin typeface="Malgun Gothic" charset="0"/>
+                        <a:ea typeface="Malgun Gothic" charset="0"/>
+                        <a:cs typeface="Malgun Gothic" charset="0"/>
+                      </a:endParaRPr>
+                    </a:p>
+                  </a:txBody>
+                  <a:tcPr marL="91440" marR="91440" marT="45720" marB="45720" anchor="ctr">
+                    <a:lnL w="9525" cap="flat" cmpd="sng" algn="ctr">
+                      <a:solidFill>
+                        <a:srgbClr val="D8DBD2"/>
+                      </a:solidFill>
+                      <a:prstDash val="solid"/>
+                      <a:round/>
+                      <a:headEnd type="none" w="med" len="med"/>
+                      <a:tailEnd type="none" w="med" len="med"/>
+                    </a:lnL>
+                    <a:lnR w="9525" cap="flat" cmpd="sng" algn="ctr">
+                      <a:solidFill>
+                        <a:srgbClr val="D8DBD2"/>
+                      </a:solidFill>
+                      <a:prstDash val="solid"/>
+                      <a:round/>
+                      <a:headEnd type="none" w="med" len="med"/>
+                      <a:tailEnd type="none" w="med" len="med"/>
+                    </a:lnR>
+                    <a:lnT w="9525" cap="flat" cmpd="sng" algn="ctr">
+                      <a:solidFill>
+                        <a:srgbClr val="D8DBD2"/>
+                      </a:solidFill>
+                      <a:prstDash val="solid"/>
+                      <a:round/>
+                      <a:headEnd type="none" w="med" len="med"/>
+                      <a:tailEnd type="none" w="med" len="med"/>
+                    </a:lnT>
+                    <a:lnB w="9525" cap="flat" cmpd="sng" algn="ctr">
+                      <a:solidFill>
+                        <a:srgbClr val="D8DBD2"/>
+                      </a:solidFill>
+                      <a:prstDash val="solid"/>
+                      <a:round/>
+                      <a:headEnd type="none" w="med" len="med"/>
+                      <a:tailEnd type="none" w="med" len="med"/>
+                    </a:lnB>
+                    <a:solidFill>
+                      <a:srgbClr val="F1F2EF"/>
+                    </a:solidFill>
+                  </a:tcPr>
+                </a:tc>
+              </a:tr>
+              <a:tr h="0">
+                <a:tc>
+                  <a:txBody>
+                    <a:bodyPr/>
+                    <a:lstStyle/>
+                    <a:p>
+                      <a:pPr algn="l" indent="0" marL="0">
+                        <a:buNone/>
+                      </a:pPr>
+                      <a:r>
+                        <a:rPr lang="en-US" sz="1050" b="1" dirty="0">
+                          <a:solidFill>
+                            <a:srgbClr val="5B6572"/>
+                          </a:solidFill>
+                          <a:latin typeface="Malgun Gothic" pitchFamily="34" charset="0"/>
+                          <a:ea typeface="Malgun Gothic" pitchFamily="34" charset="-122"/>
+                          <a:cs typeface="Malgun Gothic" pitchFamily="34" charset="-120"/>
+                        </a:rPr>
                         <a:t>인스턴스 방화벽</a:t>
                       </a:r>
                       <a:endParaRPr lang="en-US" sz="1050" dirty="0">
@@ -23584,7 +28576,7 @@
                       <a:tailEnd type="none" w="med" len="med"/>
                     </a:lnB>
                     <a:solidFill>
-                      <a:srgbClr val="F1F2EF"/>
+                      <a:srgbClr val="FFFFFF"/>
                     </a:solidFill>
                   </a:tcPr>
                 </a:tc>
@@ -23652,7 +28644,7 @@
                       <a:tailEnd type="none" w="med" len="med"/>
                     </a:lnB>
                     <a:solidFill>
-                      <a:srgbClr val="F1F2EF"/>
+                      <a:srgbClr val="FFFFFF"/>
                     </a:solidFill>
                   </a:tcPr>
                 </a:tc>
@@ -23720,7 +28712,7 @@
                       <a:tailEnd type="none" w="med" len="med"/>
                     </a:lnB>
                     <a:solidFill>
-                      <a:srgbClr val="F1F2EF"/>
+                      <a:srgbClr val="FFFFFF"/>
                     </a:solidFill>
                   </a:tcPr>
                 </a:tc>
@@ -23788,7 +28780,7 @@
                       <a:tailEnd type="none" w="med" len="med"/>
                     </a:lnB>
                     <a:solidFill>
-                      <a:srgbClr val="F1F2EF"/>
+                      <a:srgbClr val="FFFFFF"/>
                     </a:solidFill>
                   </a:tcPr>
                 </a:tc>
@@ -23858,7 +28850,7 @@
                       <a:tailEnd type="none" w="med" len="med"/>
                     </a:lnB>
                     <a:solidFill>
-                      <a:srgbClr val="FFFFFF"/>
+                      <a:srgbClr val="F1F2EF"/>
                     </a:solidFill>
                   </a:tcPr>
                 </a:tc>
@@ -23926,7 +28918,7 @@
                       <a:tailEnd type="none" w="med" len="med"/>
                     </a:lnB>
                     <a:solidFill>
-                      <a:srgbClr val="FFFFFF"/>
+                      <a:srgbClr val="F1F2EF"/>
                     </a:solidFill>
                   </a:tcPr>
                 </a:tc>
@@ -23994,7 +28986,7 @@
                       <a:tailEnd type="none" w="med" len="med"/>
                     </a:lnB>
                     <a:solidFill>
-                      <a:srgbClr val="FFFFFF"/>
+                      <a:srgbClr val="F1F2EF"/>
                     </a:solidFill>
                   </a:tcPr>
                 </a:tc>
@@ -24062,7 +29054,7 @@
                       <a:tailEnd type="none" w="med" len="med"/>
                     </a:lnB>
                     <a:solidFill>
-                      <a:srgbClr val="FFFFFF"/>
+                      <a:srgbClr val="F1F2EF"/>
                     </a:solidFill>
                   </a:tcPr>
                 </a:tc>
@@ -24132,7 +29124,7 @@
                       <a:tailEnd type="none" w="med" len="med"/>
                     </a:lnB>
                     <a:solidFill>
-                      <a:srgbClr val="F1F2EF"/>
+                      <a:srgbClr val="FFFFFF"/>
                     </a:solidFill>
                   </a:tcPr>
                 </a:tc>
@@ -24200,7 +29192,7 @@
                       <a:tailEnd type="none" w="med" len="med"/>
                     </a:lnB>
                     <a:solidFill>
-                      <a:srgbClr val="F1F2EF"/>
+                      <a:srgbClr val="FFFFFF"/>
                     </a:solidFill>
                   </a:tcPr>
                 </a:tc>
@@ -24268,7 +29260,7 @@
                       <a:tailEnd type="none" w="med" len="med"/>
                     </a:lnB>
                     <a:solidFill>
-                      <a:srgbClr val="F1F2EF"/>
+                      <a:srgbClr val="FFFFFF"/>
                     </a:solidFill>
                   </a:tcPr>
                 </a:tc>
@@ -24336,7 +29328,7 @@
                       <a:tailEnd type="none" w="med" len="med"/>
                     </a:lnB>
                     <a:solidFill>
-                      <a:srgbClr val="F1F2EF"/>
+                      <a:srgbClr val="FFFFFF"/>
                     </a:solidFill>
                   </a:tcPr>
                 </a:tc>
@@ -24406,7 +29398,7 @@
                       <a:tailEnd type="none" w="med" len="med"/>
                     </a:lnB>
                     <a:solidFill>
-                      <a:srgbClr val="FFFFFF"/>
+                      <a:srgbClr val="F1F2EF"/>
                     </a:solidFill>
                   </a:tcPr>
                 </a:tc>
@@ -24474,7 +29466,7 @@
                       <a:tailEnd type="none" w="med" len="med"/>
                     </a:lnB>
                     <a:solidFill>
-                      <a:srgbClr val="FFFFFF"/>
+                      <a:srgbClr val="F1F2EF"/>
                     </a:solidFill>
                   </a:tcPr>
                 </a:tc>
@@ -24542,7 +29534,7 @@
                       <a:tailEnd type="none" w="med" len="med"/>
                     </a:lnB>
                     <a:solidFill>
-                      <a:srgbClr val="FFFFFF"/>
+                      <a:srgbClr val="F1F2EF"/>
                     </a:solidFill>
                   </a:tcPr>
                 </a:tc>
@@ -24610,7 +29602,7 @@
                       <a:tailEnd type="none" w="med" len="med"/>
                     </a:lnB>
                     <a:solidFill>
-                      <a:srgbClr val="FFFFFF"/>
+                      <a:srgbClr val="F1F2EF"/>
                     </a:solidFill>
                   </a:tcPr>
                 </a:tc>
@@ -24680,7 +29672,7 @@
                       <a:tailEnd type="none" w="med" len="med"/>
                     </a:lnB>
                     <a:solidFill>
-                      <a:srgbClr val="F1F2EF"/>
+                      <a:srgbClr val="FFFFFF"/>
                     </a:solidFill>
                   </a:tcPr>
                 </a:tc>
@@ -24748,7 +29740,7 @@
                       <a:tailEnd type="none" w="med" len="med"/>
                     </a:lnB>
                     <a:solidFill>
-                      <a:srgbClr val="F1F2EF"/>
+                      <a:srgbClr val="FFFFFF"/>
                     </a:solidFill>
                   </a:tcPr>
                 </a:tc>
@@ -24816,7 +29808,7 @@
                       <a:tailEnd type="none" w="med" len="med"/>
                     </a:lnB>
                     <a:solidFill>
-                      <a:srgbClr val="F1F2EF"/>
+                      <a:srgbClr val="FFFFFF"/>
                     </a:solidFill>
                   </a:tcPr>
                 </a:tc>
@@ -24884,7 +29876,7 @@
                       <a:tailEnd type="none" w="med" len="med"/>
                     </a:lnB>
                     <a:solidFill>
-                      <a:srgbClr val="F1F2EF"/>
+                      <a:srgbClr val="FFFFFF"/>
                     </a:solidFill>
                   </a:tcPr>
                 </a:tc>
@@ -24954,7 +29946,7 @@
                       <a:tailEnd type="none" w="med" len="med"/>
                     </a:lnB>
                     <a:solidFill>
-                      <a:srgbClr val="FFFFFF"/>
+                      <a:srgbClr val="F1F2EF"/>
                     </a:solidFill>
                   </a:tcPr>
                 </a:tc>
@@ -25022,7 +30014,7 @@
                       <a:tailEnd type="none" w="med" len="med"/>
                     </a:lnB>
                     <a:solidFill>
-                      <a:srgbClr val="FFFFFF"/>
+                      <a:srgbClr val="F1F2EF"/>
                     </a:solidFill>
                   </a:tcPr>
                 </a:tc>
@@ -25090,7 +30082,7 @@
                       <a:tailEnd type="none" w="med" len="med"/>
                     </a:lnB>
                     <a:solidFill>
-                      <a:srgbClr val="FFFFFF"/>
+                      <a:srgbClr val="F1F2EF"/>
                     </a:solidFill>
                   </a:tcPr>
                 </a:tc>
@@ -25158,7 +30150,7 @@
                       <a:tailEnd type="none" w="med" len="med"/>
                     </a:lnB>
                     <a:solidFill>
-                      <a:srgbClr val="FFFFFF"/>
+                      <a:srgbClr val="F1F2EF"/>
                     </a:solidFill>
                   </a:tcPr>
                 </a:tc>
@@ -25228,7 +30220,7 @@
                       <a:tailEnd type="none" w="med" len="med"/>
                     </a:lnB>
                     <a:solidFill>
-                      <a:srgbClr val="F1F2EF"/>
+                      <a:srgbClr val="FFFFFF"/>
                     </a:solidFill>
                   </a:tcPr>
                 </a:tc>
@@ -25296,7 +30288,7 @@
                       <a:tailEnd type="none" w="med" len="med"/>
                     </a:lnB>
                     <a:solidFill>
-                      <a:srgbClr val="F1F2EF"/>
+                      <a:srgbClr val="FFFFFF"/>
                     </a:solidFill>
                   </a:tcPr>
                 </a:tc>
@@ -25364,7 +30356,7 @@
                       <a:tailEnd type="none" w="med" len="med"/>
                     </a:lnB>
                     <a:solidFill>
-                      <a:srgbClr val="F1F2EF"/>
+                      <a:srgbClr val="FFFFFF"/>
                     </a:solidFill>
                   </a:tcPr>
                 </a:tc>
@@ -25432,7 +30424,7 @@
                       <a:tailEnd type="none" w="med" len="med"/>
                     </a:lnB>
                     <a:solidFill>
-                      <a:srgbClr val="F1F2EF"/>
+                      <a:srgbClr val="FFFFFF"/>
                     </a:solidFill>
                   </a:tcPr>
                 </a:tc>
@@ -25502,7 +30494,7 @@
                       <a:tailEnd type="none" w="med" len="med"/>
                     </a:lnB>
                     <a:solidFill>
-                      <a:srgbClr val="FFFFFF"/>
+                      <a:srgbClr val="F1F2EF"/>
                     </a:solidFill>
                   </a:tcPr>
                 </a:tc>
@@ -25570,7 +30562,7 @@
                       <a:tailEnd type="none" w="med" len="med"/>
                     </a:lnB>
                     <a:solidFill>
-                      <a:srgbClr val="FFFFFF"/>
+                      <a:srgbClr val="F1F2EF"/>
                     </a:solidFill>
                   </a:tcPr>
                 </a:tc>
@@ -25638,7 +30630,7 @@
                       <a:tailEnd type="none" w="med" len="med"/>
                     </a:lnB>
                     <a:solidFill>
-                      <a:srgbClr val="FFFFFF"/>
+                      <a:srgbClr val="F1F2EF"/>
                     </a:solidFill>
                   </a:tcPr>
                 </a:tc>
@@ -25706,7 +30698,7 @@
                       <a:tailEnd type="none" w="med" len="med"/>
                     </a:lnB>
                     <a:solidFill>
-                      <a:srgbClr val="FFFFFF"/>
+                      <a:srgbClr val="F1F2EF"/>
                     </a:solidFill>
                   </a:tcPr>
                 </a:tc>
@@ -25776,7 +30768,7 @@
                       <a:tailEnd type="none" w="med" len="med"/>
                     </a:lnB>
                     <a:solidFill>
-                      <a:srgbClr val="F1F2EF"/>
+                      <a:srgbClr val="FFFFFF"/>
                     </a:solidFill>
                   </a:tcPr>
                 </a:tc>
@@ -25844,7 +30836,7 @@
                       <a:tailEnd type="none" w="med" len="med"/>
                     </a:lnB>
                     <a:solidFill>
-                      <a:srgbClr val="F1F2EF"/>
+                      <a:srgbClr val="FFFFFF"/>
                     </a:solidFill>
                   </a:tcPr>
                 </a:tc>
@@ -25912,7 +30904,7 @@
                       <a:tailEnd type="none" w="med" len="med"/>
                     </a:lnB>
                     <a:solidFill>
-                      <a:srgbClr val="F1F2EF"/>
+                      <a:srgbClr val="FFFFFF"/>
                     </a:solidFill>
                   </a:tcPr>
                 </a:tc>
@@ -25980,7 +30972,7 @@
                       <a:tailEnd type="none" w="med" len="med"/>
                     </a:lnB>
                     <a:solidFill>
-                      <a:srgbClr val="F1F2EF"/>
+                      <a:srgbClr val="FFFFFF"/>
                     </a:solidFill>
                   </a:tcPr>
                 </a:tc>
@@ -26050,7 +31042,7 @@
                       <a:tailEnd type="none" w="med" len="med"/>
                     </a:lnB>
                     <a:solidFill>
-                      <a:srgbClr val="FFFFFF"/>
+                      <a:srgbClr val="F1F2EF"/>
                     </a:solidFill>
                   </a:tcPr>
                 </a:tc>
@@ -26118,7 +31110,7 @@
                       <a:tailEnd type="none" w="med" len="med"/>
                     </a:lnB>
                     <a:solidFill>
-                      <a:srgbClr val="FFFFFF"/>
+                      <a:srgbClr val="F1F2EF"/>
                     </a:solidFill>
                   </a:tcPr>
                 </a:tc>
@@ -26186,7 +31178,7 @@
                       <a:tailEnd type="none" w="med" len="med"/>
                     </a:lnB>
                     <a:solidFill>
-                      <a:srgbClr val="FFFFFF"/>
+                      <a:srgbClr val="F1F2EF"/>
                     </a:solidFill>
                   </a:tcPr>
                 </a:tc>
@@ -26254,7 +31246,7 @@
                       <a:tailEnd type="none" w="med" len="med"/>
                     </a:lnB>
                     <a:solidFill>
-                      <a:srgbClr val="FFFFFF"/>
+                      <a:srgbClr val="F1F2EF"/>
                     </a:solidFill>
                   </a:tcPr>
                 </a:tc>
@@ -26324,7 +31316,7 @@
                       <a:tailEnd type="none" w="med" len="med"/>
                     </a:lnB>
                     <a:solidFill>
-                      <a:srgbClr val="F1F2EF"/>
+                      <a:srgbClr val="FFFFFF"/>
                     </a:solidFill>
                   </a:tcPr>
                 </a:tc>
@@ -26392,7 +31384,7 @@
                       <a:tailEnd type="none" w="med" len="med"/>
                     </a:lnB>
                     <a:solidFill>
-                      <a:srgbClr val="F1F2EF"/>
+                      <a:srgbClr val="FFFFFF"/>
                     </a:solidFill>
                   </a:tcPr>
                 </a:tc>
@@ -26460,7 +31452,7 @@
                       <a:tailEnd type="none" w="med" len="med"/>
                     </a:lnB>
                     <a:solidFill>
-                      <a:srgbClr val="F1F2EF"/>
+                      <a:srgbClr val="FFFFFF"/>
                     </a:solidFill>
                   </a:tcPr>
                 </a:tc>
@@ -26528,7 +31520,7 @@
                       <a:tailEnd type="none" w="med" len="med"/>
                     </a:lnB>
                     <a:solidFill>
-                      <a:srgbClr val="F1F2EF"/>
+                      <a:srgbClr val="FFFFFF"/>
                     </a:solidFill>
                   </a:tcPr>
                 </a:tc>
@@ -26540,1124 +31532,6 @@
       <p:sp>
         <p:nvSpPr>
           <p:cNvPr id="6" name="Text 3"/>
-          <p:cNvSpPr txBox="1"/>
-          <p:nvPr/>
-        </p:nvSpPr>
-        <p:spPr>
-          <a:xfrm>
-            <a:off x="11368735" y="6419088"/>
-            <a:ext cx="457200" cy="274320"/>
-          </a:xfrm>
-          <a:prstGeom prst="rect">
-            <a:avLst/>
-          </a:prstGeom>
-          <a:noFill/>
-          <a:ln/>
-        </p:spPr>
-        <p:txBody>
-          <a:bodyPr wrap="square" lIns="0" tIns="0" rIns="0" bIns="0" rtlCol="0" anchor="ctr"/>
-          <a:lstStyle/>
-          <a:p>
-            <a:pPr algn="r" indent="0" marL="0">
-              <a:buNone/>
-            </a:pPr>
-            <a:r>
-              <a:rPr lang="en-US" sz="1000" dirty="0">
-                <a:solidFill>
-                  <a:srgbClr val="8B95A3"/>
-                </a:solidFill>
-                <a:latin typeface="Consolas" pitchFamily="34" charset="0"/>
-                <a:ea typeface="Consolas" pitchFamily="34" charset="-122"/>
-                <a:cs typeface="Consolas" pitchFamily="34" charset="-120"/>
-              </a:rPr>
-              <a:t>08</a:t>
-            </a:r>
-            <a:endParaRPr lang="en-US" sz="1000" dirty="0"/>
-          </a:p>
-        </p:txBody>
-      </p:sp>
-    </p:spTree>
-  </p:cSld>
-  <p:clrMapOvr>
-    <a:masterClrMapping/>
-  </p:clrMapOvr>
-</p:sld>
-</file>
-
-<file path=ppt/slides/slide9.xml><?xml version="1.0" encoding="utf-8"?>
-<p:sld xmlns:a="http://schemas.openxmlformats.org/drawingml/2006/main" xmlns:r="http://schemas.openxmlformats.org/officeDocument/2006/relationships" xmlns:p="http://schemas.openxmlformats.org/presentationml/2006/main">
-  <p:cSld name="Slide 9">
-    <p:bg>
-      <p:bgPr>
-        <a:solidFill>
-          <a:srgbClr val="FFFFFF"/>
-        </a:solidFill>
-      </p:bgPr>
-    </p:bg>
-    <p:spTree>
-      <p:nvGrpSpPr>
-        <p:cNvPr id="1" name=""/>
-        <p:cNvGrpSpPr/>
-        <p:nvPr/>
-      </p:nvGrpSpPr>
-      <p:grpSpPr>
-        <a:xfrm>
-          <a:off x="0" y="0"/>
-          <a:ext cx="0" cy="0"/>
-          <a:chOff x="0" y="0"/>
-          <a:chExt cx="0" cy="0"/>
-        </a:xfrm>
-      </p:grpSpPr>
-      <p:sp>
-        <p:nvSpPr>
-          <p:cNvPr id="2" name="Text 0"/>
-          <p:cNvSpPr txBox="1"/>
-          <p:nvPr/>
-        </p:nvSpPr>
-        <p:spPr>
-          <a:xfrm>
-            <a:off x="502920" y="320040"/>
-            <a:ext cx="7315200" cy="274320"/>
-          </a:xfrm>
-          <a:prstGeom prst="rect">
-            <a:avLst/>
-          </a:prstGeom>
-          <a:noFill/>
-          <a:ln/>
-        </p:spPr>
-        <p:txBody>
-          <a:bodyPr wrap="square" lIns="0" tIns="0" rIns="0" bIns="0" rtlCol="0" anchor="ctr"/>
-          <a:lstStyle/>
-          <a:p>
-            <a:pPr indent="0" marL="0">
-              <a:buNone/>
-            </a:pPr>
-            <a:r>
-              <a:rPr lang="en-US" sz="1100" b="1" spc="200" kern="0" dirty="0">
-                <a:solidFill>
-                  <a:srgbClr val="5B6572"/>
-                </a:solidFill>
-                <a:latin typeface="Consolas" pitchFamily="34" charset="0"/>
-                <a:ea typeface="Consolas" pitchFamily="34" charset="-122"/>
-                <a:cs typeface="Consolas" pitchFamily="34" charset="-120"/>
-              </a:rPr>
-              <a:t>07 · ACCESS CONTROL</a:t>
-            </a:r>
-            <a:endParaRPr lang="en-US" sz="1100" dirty="0"/>
-          </a:p>
-        </p:txBody>
-      </p:sp>
-      <p:sp>
-        <p:nvSpPr>
-          <p:cNvPr id="3" name="Text 1"/>
-          <p:cNvSpPr txBox="1"/>
-          <p:nvPr/>
-        </p:nvSpPr>
-        <p:spPr>
-          <a:xfrm>
-            <a:off x="502920" y="566928"/>
-            <a:ext cx="9601200" cy="566928"/>
-          </a:xfrm>
-          <a:prstGeom prst="rect">
-            <a:avLst/>
-          </a:prstGeom>
-          <a:noFill/>
-          <a:ln/>
-        </p:spPr>
-        <p:txBody>
-          <a:bodyPr wrap="square" lIns="0" tIns="0" rIns="0" bIns="0" rtlCol="0" anchor="t"/>
-          <a:lstStyle/>
-          <a:p>
-            <a:pPr indent="0" marL="0">
-              <a:buNone/>
-            </a:pPr>
-            <a:r>
-              <a:rPr lang="en-US" sz="2800" b="1" dirty="0">
-                <a:solidFill>
-                  <a:srgbClr val="1B2430"/>
-                </a:solidFill>
-                <a:latin typeface="Malgun Gothic" pitchFamily="34" charset="0"/>
-                <a:ea typeface="Malgun Gothic" pitchFamily="34" charset="-122"/>
-                <a:cs typeface="Malgun Gothic" pitchFamily="34" charset="-120"/>
-              </a:rPr>
-              <a:t>접근 통제 방안</a:t>
-            </a:r>
-            <a:endParaRPr lang="en-US" sz="2800" dirty="0"/>
-          </a:p>
-        </p:txBody>
-      </p:sp>
-      <p:sp>
-        <p:nvSpPr>
-          <p:cNvPr id="4" name="Text 2"/>
-          <p:cNvSpPr txBox="1"/>
-          <p:nvPr/>
-        </p:nvSpPr>
-        <p:spPr>
-          <a:xfrm>
-            <a:off x="502920" y="1170432"/>
-            <a:ext cx="10607040" cy="457200"/>
-          </a:xfrm>
-          <a:prstGeom prst="rect">
-            <a:avLst/>
-          </a:prstGeom>
-          <a:noFill/>
-          <a:ln/>
-        </p:spPr>
-        <p:txBody>
-          <a:bodyPr wrap="square" lIns="0" tIns="0" rIns="0" bIns="0" rtlCol="0" anchor="t"/>
-          <a:lstStyle/>
-          <a:p>
-            <a:pPr indent="0" marL="0">
-              <a:lnSpc>
-                <a:spcPct val="125000"/>
-              </a:lnSpc>
-              <a:buNone/>
-            </a:pPr>
-            <a:r>
-              <a:rPr lang="en-US" sz="1250" dirty="0">
-                <a:solidFill>
-                  <a:srgbClr val="5B6572"/>
-                </a:solidFill>
-                <a:latin typeface="Malgun Gothic" pitchFamily="34" charset="0"/>
-                <a:ea typeface="Malgun Gothic" pitchFamily="34" charset="-122"/>
-                <a:cs typeface="Malgun Gothic" pitchFamily="34" charset="-120"/>
-              </a:rPr>
-              <a:t>관리자는 망분리 전용단말 → VDI → 그룹 공통 Bastion(MFA·PAM) 순서로만 접속할 수 있습니다. 일반 PC의 직접 접속은 차단됩니다.</a:t>
-            </a:r>
-            <a:endParaRPr lang="en-US" sz="1250" dirty="0"/>
-          </a:p>
-        </p:txBody>
-      </p:sp>
-      <p:sp>
-        <p:nvSpPr>
-          <p:cNvPr id="5" name="Shape 3"/>
-          <p:cNvSpPr/>
-          <p:nvPr/>
-        </p:nvSpPr>
-        <p:spPr>
-          <a:xfrm>
-            <a:off x="548640" y="1828800"/>
-            <a:ext cx="2194560" cy="685800"/>
-          </a:xfrm>
-          <a:prstGeom prst="roundRect">
-            <a:avLst>
-              <a:gd name="adj" fmla="val 10667"/>
-            </a:avLst>
-          </a:prstGeom>
-          <a:solidFill>
-            <a:srgbClr val="FFFFFF"/>
-          </a:solidFill>
-          <a:ln w="15875">
-            <a:solidFill>
-              <a:srgbClr val="8F3226"/>
-            </a:solidFill>
-            <a:prstDash val="solid"/>
-          </a:ln>
-        </p:spPr>
-      </p:sp>
-      <p:sp>
-        <p:nvSpPr>
-          <p:cNvPr id="6" name="Text 4"/>
-          <p:cNvSpPr txBox="1"/>
-          <p:nvPr/>
-        </p:nvSpPr>
-        <p:spPr>
-          <a:xfrm>
-            <a:off x="658368" y="1828800"/>
-            <a:ext cx="1975104" cy="685800"/>
-          </a:xfrm>
-          <a:prstGeom prst="rect">
-            <a:avLst/>
-          </a:prstGeom>
-          <a:noFill/>
-          <a:ln/>
-        </p:spPr>
-        <p:txBody>
-          <a:bodyPr wrap="square" lIns="0" tIns="0" rIns="0" bIns="0" rtlCol="0" anchor="ctr"/>
-          <a:lstStyle/>
-          <a:p>
-            <a:pPr algn="ctr" indent="0" marL="0">
-              <a:lnSpc>
-                <a:spcPct val="120000"/>
-              </a:lnSpc>
-              <a:buNone/>
-            </a:pPr>
-            <a:r>
-              <a:rPr lang="en-US" sz="1050" b="1" dirty="0">
-                <a:solidFill>
-                  <a:srgbClr val="8F3226"/>
-                </a:solidFill>
-                <a:latin typeface="Malgun Gothic" pitchFamily="34" charset="0"/>
-                <a:ea typeface="Malgun Gothic" pitchFamily="34" charset="-122"/>
-                <a:cs typeface="Malgun Gothic" pitchFamily="34" charset="-120"/>
-              </a:rPr>
-              <a:t>일반 업무 PC</a:t>
-            </a:r>
-            <a:endParaRPr lang="en-US" sz="1050" dirty="0"/>
-          </a:p>
-          <a:p>
-            <a:pPr algn="ctr" indent="0" marL="0">
-              <a:lnSpc>
-                <a:spcPct val="120000"/>
-              </a:lnSpc>
-              <a:buNone/>
-            </a:pPr>
-            <a:r>
-              <a:rPr lang="en-US" sz="900" dirty="0">
-                <a:solidFill>
-                  <a:srgbClr val="5B6572"/>
-                </a:solidFill>
-                <a:latin typeface="Malgun Gothic" pitchFamily="34" charset="0"/>
-                <a:ea typeface="Malgun Gothic" pitchFamily="34" charset="-122"/>
-                <a:cs typeface="Malgun Gothic" pitchFamily="34" charset="-120"/>
-              </a:rPr>
-              <a:t>/ 외부 인터넷</a:t>
-            </a:r>
-            <a:endParaRPr lang="en-US" sz="1050" dirty="0"/>
-          </a:p>
-        </p:txBody>
-      </p:sp>
-      <p:sp>
-        <p:nvSpPr>
-          <p:cNvPr id="7" name="Shape 5"/>
-          <p:cNvSpPr/>
-          <p:nvPr/>
-        </p:nvSpPr>
-        <p:spPr>
-          <a:xfrm>
-            <a:off x="548640" y="3108960"/>
-            <a:ext cx="2194560" cy="685800"/>
-          </a:xfrm>
-          <a:prstGeom prst="roundRect">
-            <a:avLst>
-              <a:gd name="adj" fmla="val 10667"/>
-            </a:avLst>
-          </a:prstGeom>
-          <a:solidFill>
-            <a:srgbClr val="FFFFFF"/>
-          </a:solidFill>
-          <a:ln w="15875">
-            <a:solidFill>
-              <a:srgbClr val="B7BBA9"/>
-            </a:solidFill>
-            <a:prstDash val="solid"/>
-          </a:ln>
-        </p:spPr>
-      </p:sp>
-      <p:sp>
-        <p:nvSpPr>
-          <p:cNvPr id="8" name="Text 6"/>
-          <p:cNvSpPr txBox="1"/>
-          <p:nvPr/>
-        </p:nvSpPr>
-        <p:spPr>
-          <a:xfrm>
-            <a:off x="658368" y="3108960"/>
-            <a:ext cx="1975104" cy="685800"/>
-          </a:xfrm>
-          <a:prstGeom prst="rect">
-            <a:avLst/>
-          </a:prstGeom>
-          <a:noFill/>
-          <a:ln/>
-        </p:spPr>
-        <p:txBody>
-          <a:bodyPr wrap="square" lIns="0" tIns="0" rIns="0" bIns="0" rtlCol="0" anchor="ctr"/>
-          <a:lstStyle/>
-          <a:p>
-            <a:pPr algn="ctr" indent="0" marL="0">
-              <a:lnSpc>
-                <a:spcPct val="120000"/>
-              </a:lnSpc>
-              <a:buNone/>
-            </a:pPr>
-            <a:r>
-              <a:rPr lang="en-US" sz="1050" b="1" dirty="0">
-                <a:solidFill>
-                  <a:srgbClr val="1B2430"/>
-                </a:solidFill>
-                <a:latin typeface="Malgun Gothic" pitchFamily="34" charset="0"/>
-                <a:ea typeface="Malgun Gothic" pitchFamily="34" charset="-122"/>
-                <a:cs typeface="Malgun Gothic" pitchFamily="34" charset="-120"/>
-              </a:rPr>
-              <a:t>관리자 PC</a:t>
-            </a:r>
-            <a:endParaRPr lang="en-US" sz="1050" dirty="0"/>
-          </a:p>
-          <a:p>
-            <a:pPr algn="ctr" indent="0" marL="0">
-              <a:lnSpc>
-                <a:spcPct val="120000"/>
-              </a:lnSpc>
-              <a:buNone/>
-            </a:pPr>
-            <a:r>
-              <a:rPr lang="en-US" sz="900" dirty="0">
-                <a:solidFill>
-                  <a:srgbClr val="5B6572"/>
-                </a:solidFill>
-                <a:latin typeface="Malgun Gothic" pitchFamily="34" charset="0"/>
-                <a:ea typeface="Malgun Gothic" pitchFamily="34" charset="-122"/>
-                <a:cs typeface="Malgun Gothic" pitchFamily="34" charset="-120"/>
-              </a:rPr>
-              <a:t>(망분리 전용단말)</a:t>
-            </a:r>
-            <a:endParaRPr lang="en-US" sz="1050" dirty="0"/>
-          </a:p>
-        </p:txBody>
-      </p:sp>
-      <p:sp>
-        <p:nvSpPr>
-          <p:cNvPr id="9" name="Shape 7"/>
-          <p:cNvSpPr/>
-          <p:nvPr/>
-        </p:nvSpPr>
-        <p:spPr>
-          <a:xfrm>
-            <a:off x="3246120" y="3108960"/>
-            <a:ext cx="1920240" cy="685800"/>
-          </a:xfrm>
-          <a:prstGeom prst="roundRect">
-            <a:avLst>
-              <a:gd name="adj" fmla="val 10667"/>
-            </a:avLst>
-          </a:prstGeom>
-          <a:solidFill>
-            <a:srgbClr val="FFFFFF"/>
-          </a:solidFill>
-          <a:ln w="15875">
-            <a:solidFill>
-              <a:srgbClr val="B7BBA9"/>
-            </a:solidFill>
-            <a:prstDash val="solid"/>
-          </a:ln>
-        </p:spPr>
-      </p:sp>
-      <p:sp>
-        <p:nvSpPr>
-          <p:cNvPr id="10" name="Text 8"/>
-          <p:cNvSpPr txBox="1"/>
-          <p:nvPr/>
-        </p:nvSpPr>
-        <p:spPr>
-          <a:xfrm>
-            <a:off x="3355848" y="3108960"/>
-            <a:ext cx="1700784" cy="685800"/>
-          </a:xfrm>
-          <a:prstGeom prst="rect">
-            <a:avLst/>
-          </a:prstGeom>
-          <a:noFill/>
-          <a:ln/>
-        </p:spPr>
-        <p:txBody>
-          <a:bodyPr wrap="square" lIns="0" tIns="0" rIns="0" bIns="0" rtlCol="0" anchor="ctr"/>
-          <a:lstStyle/>
-          <a:p>
-            <a:pPr algn="ctr" indent="0" marL="0">
-              <a:lnSpc>
-                <a:spcPct val="120000"/>
-              </a:lnSpc>
-              <a:buNone/>
-            </a:pPr>
-            <a:r>
-              <a:rPr lang="en-US" sz="1050" b="1" dirty="0">
-                <a:solidFill>
-                  <a:srgbClr val="1B2430"/>
-                </a:solidFill>
-                <a:latin typeface="Malgun Gothic" pitchFamily="34" charset="0"/>
-                <a:ea typeface="Malgun Gothic" pitchFamily="34" charset="-122"/>
-                <a:cs typeface="Malgun Gothic" pitchFamily="34" charset="-120"/>
-              </a:rPr>
-              <a:t>VDI</a:t>
-            </a:r>
-            <a:endParaRPr lang="en-US" sz="1050" dirty="0"/>
-          </a:p>
-          <a:p>
-            <a:pPr algn="ctr" indent="0" marL="0">
-              <a:lnSpc>
-                <a:spcPct val="120000"/>
-              </a:lnSpc>
-              <a:buNone/>
-            </a:pPr>
-            <a:r>
-              <a:rPr lang="en-US" sz="900" dirty="0">
-                <a:solidFill>
-                  <a:srgbClr val="5B6572"/>
-                </a:solidFill>
-                <a:latin typeface="Malgun Gothic" pitchFamily="34" charset="0"/>
-                <a:ea typeface="Malgun Gothic" pitchFamily="34" charset="-122"/>
-                <a:cs typeface="Malgun Gothic" pitchFamily="34" charset="-120"/>
-              </a:rPr>
-              <a:t>가상 데스크톱</a:t>
-            </a:r>
-            <a:endParaRPr lang="en-US" sz="1050" dirty="0"/>
-          </a:p>
-        </p:txBody>
-      </p:sp>
-      <p:sp>
-        <p:nvSpPr>
-          <p:cNvPr id="11" name="Shape 9"/>
-          <p:cNvSpPr/>
-          <p:nvPr/>
-        </p:nvSpPr>
-        <p:spPr>
-          <a:xfrm>
-            <a:off x="5623560" y="2990088"/>
-            <a:ext cx="2651760" cy="914400"/>
-          </a:xfrm>
-          <a:prstGeom prst="roundRect">
-            <a:avLst>
-              <a:gd name="adj" fmla="val 8000"/>
-            </a:avLst>
-          </a:prstGeom>
-          <a:solidFill>
-            <a:srgbClr val="E4E5F0"/>
-          </a:solidFill>
-          <a:ln w="15875">
-            <a:solidFill>
-              <a:srgbClr val="5B60A0"/>
-            </a:solidFill>
-            <a:prstDash val="solid"/>
-          </a:ln>
-        </p:spPr>
-      </p:sp>
-      <p:sp>
-        <p:nvSpPr>
-          <p:cNvPr id="12" name="Text 10"/>
-          <p:cNvSpPr txBox="1"/>
-          <p:nvPr/>
-        </p:nvSpPr>
-        <p:spPr>
-          <a:xfrm>
-            <a:off x="5733288" y="2990088"/>
-            <a:ext cx="2432304" cy="914400"/>
-          </a:xfrm>
-          <a:prstGeom prst="rect">
-            <a:avLst/>
-          </a:prstGeom>
-          <a:noFill/>
-          <a:ln/>
-        </p:spPr>
-        <p:txBody>
-          <a:bodyPr wrap="square" lIns="0" tIns="0" rIns="0" bIns="0" rtlCol="0" anchor="ctr"/>
-          <a:lstStyle/>
-          <a:p>
-            <a:pPr algn="ctr" indent="0" marL="0">
-              <a:lnSpc>
-                <a:spcPct val="120000"/>
-              </a:lnSpc>
-              <a:buNone/>
-            </a:pPr>
-            <a:r>
-              <a:rPr lang="en-US" sz="1100" b="1" dirty="0">
-                <a:solidFill>
-                  <a:srgbClr val="5B60A0"/>
-                </a:solidFill>
-                <a:latin typeface="Malgun Gothic" pitchFamily="34" charset="0"/>
-                <a:ea typeface="Malgun Gothic" pitchFamily="34" charset="-122"/>
-                <a:cs typeface="Malgun Gothic" pitchFamily="34" charset="-120"/>
-              </a:rPr>
-              <a:t>그룹 공통 Bastion</a:t>
-            </a:r>
-            <a:endParaRPr lang="en-US" sz="1100" dirty="0"/>
-          </a:p>
-          <a:p>
-            <a:pPr algn="ctr" indent="0" marL="0">
-              <a:lnSpc>
-                <a:spcPct val="120000"/>
-              </a:lnSpc>
-              <a:buNone/>
-            </a:pPr>
-            <a:r>
-              <a:rPr lang="en-US" sz="850" dirty="0">
-                <a:solidFill>
-                  <a:srgbClr val="5B6572"/>
-                </a:solidFill>
-                <a:latin typeface="Malgun Gothic" pitchFamily="34" charset="0"/>
-                <a:ea typeface="Malgun Gothic" pitchFamily="34" charset="-122"/>
-                <a:cs typeface="Malgun Gothic" pitchFamily="34" charset="-120"/>
-              </a:rPr>
-              <a:t>Session Manager / Azure Bastion</a:t>
-            </a:r>
-            <a:endParaRPr lang="en-US" sz="1100" dirty="0"/>
-          </a:p>
-          <a:p>
-            <a:pPr algn="ctr" indent="0" marL="0">
-              <a:lnSpc>
-                <a:spcPct val="120000"/>
-              </a:lnSpc>
-              <a:buNone/>
-            </a:pPr>
-            <a:r>
-              <a:rPr lang="en-US" sz="850" dirty="0">
-                <a:solidFill>
-                  <a:srgbClr val="5B6572"/>
-                </a:solidFill>
-                <a:latin typeface="Malgun Gothic" pitchFamily="34" charset="0"/>
-                <a:ea typeface="Malgun Gothic" pitchFamily="34" charset="-122"/>
-                <a:cs typeface="Malgun Gothic" pitchFamily="34" charset="-120"/>
-              </a:rPr>
-              <a:t>+ PAM 체크아웃 · MFA</a:t>
-            </a:r>
-            <a:endParaRPr lang="en-US" sz="1100" dirty="0"/>
-          </a:p>
-        </p:txBody>
-      </p:sp>
-      <p:sp>
-        <p:nvSpPr>
-          <p:cNvPr id="13" name="Shape 11"/>
-          <p:cNvSpPr/>
-          <p:nvPr/>
-        </p:nvSpPr>
-        <p:spPr>
-          <a:xfrm>
-            <a:off x="8823960" y="1920240"/>
-            <a:ext cx="2651760" cy="685800"/>
-          </a:xfrm>
-          <a:prstGeom prst="roundRect">
-            <a:avLst>
-              <a:gd name="adj" fmla="val 10667"/>
-            </a:avLst>
-          </a:prstGeom>
-          <a:solidFill>
-            <a:srgbClr val="F4DFDA"/>
-          </a:solidFill>
-          <a:ln w="15875">
-            <a:solidFill>
-              <a:srgbClr val="AE4536"/>
-            </a:solidFill>
-            <a:prstDash val="solid"/>
-          </a:ln>
-        </p:spPr>
-      </p:sp>
-      <p:sp>
-        <p:nvSpPr>
-          <p:cNvPr id="14" name="Text 12"/>
-          <p:cNvSpPr txBox="1"/>
-          <p:nvPr/>
-        </p:nvSpPr>
-        <p:spPr>
-          <a:xfrm>
-            <a:off x="8933688" y="1920240"/>
-            <a:ext cx="2432304" cy="685800"/>
-          </a:xfrm>
-          <a:prstGeom prst="rect">
-            <a:avLst/>
-          </a:prstGeom>
-          <a:noFill/>
-          <a:ln/>
-        </p:spPr>
-        <p:txBody>
-          <a:bodyPr wrap="square" lIns="0" tIns="0" rIns="0" bIns="0" rtlCol="0" anchor="ctr"/>
-          <a:lstStyle/>
-          <a:p>
-            <a:pPr algn="ctr" indent="0" marL="0">
-              <a:lnSpc>
-                <a:spcPct val="120000"/>
-              </a:lnSpc>
-              <a:buNone/>
-            </a:pPr>
-            <a:r>
-              <a:rPr lang="en-US" sz="1050" b="1" dirty="0">
-                <a:solidFill>
-                  <a:srgbClr val="AE4536"/>
-                </a:solidFill>
-                <a:latin typeface="Malgun Gothic" pitchFamily="34" charset="0"/>
-                <a:ea typeface="Malgun Gothic" pitchFamily="34" charset="-122"/>
-                <a:cs typeface="Malgun Gothic" pitchFamily="34" charset="-120"/>
-              </a:rPr>
-              <a:t>대상 서버</a:t>
-            </a:r>
-            <a:endParaRPr lang="en-US" sz="1050" dirty="0"/>
-          </a:p>
-          <a:p>
-            <a:pPr algn="ctr" indent="0" marL="0">
-              <a:lnSpc>
-                <a:spcPct val="120000"/>
-              </a:lnSpc>
-              <a:buNone/>
-            </a:pPr>
-            <a:r>
-              <a:rPr lang="en-US" sz="900" dirty="0">
-                <a:solidFill>
-                  <a:srgbClr val="5B6572"/>
-                </a:solidFill>
-                <a:latin typeface="Malgun Gothic" pitchFamily="34" charset="0"/>
-                <a:ea typeface="Malgun Gothic" pitchFamily="34" charset="-122"/>
-                <a:cs typeface="Malgun Gothic" pitchFamily="34" charset="-120"/>
-              </a:rPr>
-              <a:t>Web / WAS Zone</a:t>
-            </a:r>
-            <a:endParaRPr lang="en-US" sz="1050" dirty="0"/>
-          </a:p>
-        </p:txBody>
-      </p:sp>
-      <p:sp>
-        <p:nvSpPr>
-          <p:cNvPr id="15" name="Shape 13"/>
-          <p:cNvSpPr/>
-          <p:nvPr/>
-        </p:nvSpPr>
-        <p:spPr>
-          <a:xfrm>
-            <a:off x="8823960" y="3840480"/>
-            <a:ext cx="2651760" cy="685800"/>
-          </a:xfrm>
-          <a:prstGeom prst="roundRect">
-            <a:avLst>
-              <a:gd name="adj" fmla="val 10667"/>
-            </a:avLst>
-          </a:prstGeom>
-          <a:solidFill>
-            <a:srgbClr val="F2E8CD"/>
-          </a:solidFill>
-          <a:ln w="15875">
-            <a:solidFill>
-              <a:srgbClr val="A9842A"/>
-            </a:solidFill>
-            <a:prstDash val="solid"/>
-          </a:ln>
-        </p:spPr>
-      </p:sp>
-      <p:sp>
-        <p:nvSpPr>
-          <p:cNvPr id="16" name="Text 14"/>
-          <p:cNvSpPr txBox="1"/>
-          <p:nvPr/>
-        </p:nvSpPr>
-        <p:spPr>
-          <a:xfrm>
-            <a:off x="8933688" y="3840480"/>
-            <a:ext cx="2432304" cy="685800"/>
-          </a:xfrm>
-          <a:prstGeom prst="rect">
-            <a:avLst/>
-          </a:prstGeom>
-          <a:noFill/>
-          <a:ln/>
-        </p:spPr>
-        <p:txBody>
-          <a:bodyPr wrap="square" lIns="0" tIns="0" rIns="0" bIns="0" rtlCol="0" anchor="ctr"/>
-          <a:lstStyle/>
-          <a:p>
-            <a:pPr algn="ctr" indent="0" marL="0">
-              <a:lnSpc>
-                <a:spcPct val="120000"/>
-              </a:lnSpc>
-              <a:buNone/>
-            </a:pPr>
-            <a:r>
-              <a:rPr lang="en-US" sz="1050" b="1" dirty="0">
-                <a:solidFill>
-                  <a:srgbClr val="A9842A"/>
-                </a:solidFill>
-                <a:latin typeface="Malgun Gothic" pitchFamily="34" charset="0"/>
-                <a:ea typeface="Malgun Gothic" pitchFamily="34" charset="-122"/>
-                <a:cs typeface="Malgun Gothic" pitchFamily="34" charset="-120"/>
-              </a:rPr>
-              <a:t>DAM 감사</a:t>
-            </a:r>
-            <a:endParaRPr lang="en-US" sz="1050" dirty="0"/>
-          </a:p>
-          <a:p>
-            <a:pPr algn="ctr" indent="0" marL="0">
-              <a:lnSpc>
-                <a:spcPct val="120000"/>
-              </a:lnSpc>
-              <a:buNone/>
-            </a:pPr>
-            <a:r>
-              <a:rPr lang="en-US" sz="900" dirty="0">
-                <a:solidFill>
-                  <a:srgbClr val="5B6572"/>
-                </a:solidFill>
-                <a:latin typeface="Malgun Gothic" pitchFamily="34" charset="0"/>
-                <a:ea typeface="Malgun Gothic" pitchFamily="34" charset="-122"/>
-                <a:cs typeface="Malgun Gothic" pitchFamily="34" charset="-120"/>
-              </a:rPr>
-              <a:t>DB 접근통제(쿼리 로깅)</a:t>
-            </a:r>
-            <a:endParaRPr lang="en-US" sz="1050" dirty="0"/>
-          </a:p>
-        </p:txBody>
-      </p:sp>
-      <p:sp>
-        <p:nvSpPr>
-          <p:cNvPr id="17" name="Shape 15"/>
-          <p:cNvSpPr/>
-          <p:nvPr/>
-        </p:nvSpPr>
-        <p:spPr>
-          <a:xfrm>
-            <a:off x="8823960" y="4846320"/>
-            <a:ext cx="2651760" cy="685800"/>
-          </a:xfrm>
-          <a:prstGeom prst="roundRect">
-            <a:avLst>
-              <a:gd name="adj" fmla="val 10667"/>
-            </a:avLst>
-          </a:prstGeom>
-          <a:solidFill>
-            <a:srgbClr val="F4DFDA"/>
-          </a:solidFill>
-          <a:ln w="15875">
-            <a:solidFill>
-              <a:srgbClr val="AE4536"/>
-            </a:solidFill>
-            <a:prstDash val="solid"/>
-          </a:ln>
-        </p:spPr>
-      </p:sp>
-      <p:sp>
-        <p:nvSpPr>
-          <p:cNvPr id="18" name="Text 16"/>
-          <p:cNvSpPr txBox="1"/>
-          <p:nvPr/>
-        </p:nvSpPr>
-        <p:spPr>
-          <a:xfrm>
-            <a:off x="8933688" y="4846320"/>
-            <a:ext cx="2432304" cy="685800"/>
-          </a:xfrm>
-          <a:prstGeom prst="rect">
-            <a:avLst/>
-          </a:prstGeom>
-          <a:noFill/>
-          <a:ln/>
-        </p:spPr>
-        <p:txBody>
-          <a:bodyPr wrap="square" lIns="0" tIns="0" rIns="0" bIns="0" rtlCol="0" anchor="ctr"/>
-          <a:lstStyle/>
-          <a:p>
-            <a:pPr algn="ctr" indent="0" marL="0">
-              <a:lnSpc>
-                <a:spcPct val="120000"/>
-              </a:lnSpc>
-              <a:buNone/>
-            </a:pPr>
-            <a:r>
-              <a:rPr lang="en-US" sz="1050" b="1" dirty="0">
-                <a:solidFill>
-                  <a:srgbClr val="AE4536"/>
-                </a:solidFill>
-                <a:latin typeface="Malgun Gothic" pitchFamily="34" charset="0"/>
-                <a:ea typeface="Malgun Gothic" pitchFamily="34" charset="-122"/>
-                <a:cs typeface="Malgun Gothic" pitchFamily="34" charset="-120"/>
-              </a:rPr>
-              <a:t>DB Zone</a:t>
-            </a:r>
-            <a:endParaRPr lang="en-US" sz="1050" dirty="0"/>
-          </a:p>
-          <a:p>
-            <a:pPr algn="ctr" indent="0" marL="0">
-              <a:lnSpc>
-                <a:spcPct val="120000"/>
-              </a:lnSpc>
-              <a:buNone/>
-            </a:pPr>
-            <a:r>
-              <a:rPr lang="en-US" sz="900" dirty="0">
-                <a:solidFill>
-                  <a:srgbClr val="5B6572"/>
-                </a:solidFill>
-                <a:latin typeface="Malgun Gothic" pitchFamily="34" charset="0"/>
-                <a:ea typeface="Malgun Gothic" pitchFamily="34" charset="-122"/>
-                <a:cs typeface="Malgun Gothic" pitchFamily="34" charset="-120"/>
-              </a:rPr>
-              <a:t>개인신용정보 · 암호화</a:t>
-            </a:r>
-            <a:endParaRPr lang="en-US" sz="1050" dirty="0"/>
-          </a:p>
-        </p:txBody>
-      </p:sp>
-      <p:sp>
-        <p:nvSpPr>
-          <p:cNvPr id="19" name="Shape 17"/>
-          <p:cNvSpPr/>
-          <p:nvPr/>
-        </p:nvSpPr>
-        <p:spPr>
-          <a:xfrm>
-            <a:off x="2743200" y="3451860"/>
-            <a:ext cx="457200" cy="9144"/>
-          </a:xfrm>
-          <a:prstGeom prst="line">
-            <a:avLst/>
-          </a:prstGeom>
-          <a:noFill/>
-          <a:ln w="19050">
-            <a:solidFill>
-              <a:srgbClr val="1B2430"/>
-            </a:solidFill>
-            <a:prstDash val="solid"/>
-            <a:tailEnd type="triangle"/>
-          </a:ln>
-        </p:spPr>
-      </p:sp>
-      <p:sp>
-        <p:nvSpPr>
-          <p:cNvPr id="20" name="Shape 18"/>
-          <p:cNvSpPr/>
-          <p:nvPr/>
-        </p:nvSpPr>
-        <p:spPr>
-          <a:xfrm>
-            <a:off x="5166360" y="3451860"/>
-            <a:ext cx="411480" cy="9144"/>
-          </a:xfrm>
-          <a:prstGeom prst="line">
-            <a:avLst/>
-          </a:prstGeom>
-          <a:noFill/>
-          <a:ln w="19050">
-            <a:solidFill>
-              <a:srgbClr val="1B2430"/>
-            </a:solidFill>
-            <a:prstDash val="solid"/>
-            <a:tailEnd type="triangle"/>
-          </a:ln>
-        </p:spPr>
-      </p:sp>
-      <p:sp>
-        <p:nvSpPr>
-          <p:cNvPr id="21" name="Shape 19"/>
-          <p:cNvSpPr/>
-          <p:nvPr/>
-        </p:nvSpPr>
-        <p:spPr>
-          <a:xfrm flipV="1">
-            <a:off x="8275320" y="2267712"/>
-            <a:ext cx="502920" cy="1097280"/>
-          </a:xfrm>
-          <a:prstGeom prst="line">
-            <a:avLst/>
-          </a:prstGeom>
-          <a:noFill/>
-          <a:ln w="19050">
-            <a:solidFill>
-              <a:srgbClr val="1B2430"/>
-            </a:solidFill>
-            <a:prstDash val="solid"/>
-            <a:tailEnd type="triangle"/>
-          </a:ln>
-        </p:spPr>
-      </p:sp>
-      <p:sp>
-        <p:nvSpPr>
-          <p:cNvPr id="22" name="Shape 20"/>
-          <p:cNvSpPr/>
-          <p:nvPr/>
-        </p:nvSpPr>
-        <p:spPr>
-          <a:xfrm>
-            <a:off x="10149840" y="2606040"/>
-            <a:ext cx="9144" cy="1207008"/>
-          </a:xfrm>
-          <a:prstGeom prst="line">
-            <a:avLst/>
-          </a:prstGeom>
-          <a:noFill/>
-          <a:ln w="19050">
-            <a:solidFill>
-              <a:srgbClr val="A9842A"/>
-            </a:solidFill>
-            <a:prstDash val="solid"/>
-            <a:tailEnd type="triangle"/>
-          </a:ln>
-        </p:spPr>
-      </p:sp>
-      <p:sp>
-        <p:nvSpPr>
-          <p:cNvPr id="23" name="Text 21"/>
-          <p:cNvSpPr txBox="1"/>
-          <p:nvPr/>
-        </p:nvSpPr>
-        <p:spPr>
-          <a:xfrm>
-            <a:off x="10378440" y="3063240"/>
-            <a:ext cx="1188720" cy="228600"/>
-          </a:xfrm>
-          <a:prstGeom prst="rect">
-            <a:avLst/>
-          </a:prstGeom>
-          <a:noFill/>
-          <a:ln/>
-        </p:spPr>
-        <p:txBody>
-          <a:bodyPr wrap="square" lIns="0" tIns="0" rIns="0" bIns="0" rtlCol="0" anchor="ctr"/>
-          <a:lstStyle/>
-          <a:p>
-            <a:pPr algn="l" indent="0" marL="0">
-              <a:buNone/>
-            </a:pPr>
-            <a:r>
-              <a:rPr lang="en-US" sz="900" dirty="0">
-                <a:solidFill>
-                  <a:srgbClr val="5B6572"/>
-                </a:solidFill>
-                <a:latin typeface="Consolas" pitchFamily="34" charset="0"/>
-                <a:ea typeface="Consolas" pitchFamily="34" charset="-122"/>
-                <a:cs typeface="Consolas" pitchFamily="34" charset="-120"/>
-              </a:rPr>
-              <a:t>DB 호출 시</a:t>
-            </a:r>
-            <a:endParaRPr lang="en-US" sz="900" dirty="0"/>
-          </a:p>
-        </p:txBody>
-      </p:sp>
-      <p:sp>
-        <p:nvSpPr>
-          <p:cNvPr id="24" name="Shape 22"/>
-          <p:cNvSpPr/>
-          <p:nvPr/>
-        </p:nvSpPr>
-        <p:spPr>
-          <a:xfrm>
-            <a:off x="10149840" y="4526280"/>
-            <a:ext cx="9144" cy="292608"/>
-          </a:xfrm>
-          <a:prstGeom prst="line">
-            <a:avLst/>
-          </a:prstGeom>
-          <a:noFill/>
-          <a:ln w="19050">
-            <a:solidFill>
-              <a:srgbClr val="A9842A"/>
-            </a:solidFill>
-            <a:prstDash val="solid"/>
-            <a:tailEnd type="triangle"/>
-          </a:ln>
-        </p:spPr>
-      </p:sp>
-      <p:sp>
-        <p:nvSpPr>
-          <p:cNvPr id="25" name="Shape 23"/>
-          <p:cNvSpPr/>
-          <p:nvPr/>
-        </p:nvSpPr>
-        <p:spPr>
-          <a:xfrm flipV="1">
-            <a:off x="2743200" y="2171700"/>
-            <a:ext cx="6035040" cy="1280160"/>
-          </a:xfrm>
-          <a:prstGeom prst="line">
-            <a:avLst/>
-          </a:prstGeom>
-          <a:noFill/>
-          <a:ln w="15875">
-            <a:solidFill>
-              <a:srgbClr val="8F3226"/>
-            </a:solidFill>
-            <a:prstDash val="dash"/>
-            <a:tailEnd type="triangle"/>
-          </a:ln>
-        </p:spPr>
-      </p:sp>
-      <p:sp>
-        <p:nvSpPr>
-          <p:cNvPr id="26" name="Text 24"/>
-          <p:cNvSpPr txBox="1"/>
-          <p:nvPr/>
-        </p:nvSpPr>
-        <p:spPr>
-          <a:xfrm>
-            <a:off x="548640" y="2606040"/>
-            <a:ext cx="2103120" cy="502920"/>
-          </a:xfrm>
-          <a:prstGeom prst="rect">
-            <a:avLst/>
-          </a:prstGeom>
-          <a:noFill/>
-          <a:ln/>
-        </p:spPr>
-        <p:txBody>
-          <a:bodyPr wrap="square" lIns="0" tIns="0" rIns="0" bIns="0" rtlCol="0" anchor="ctr"/>
-          <a:lstStyle/>
-          <a:p>
-            <a:pPr algn="l" indent="0" marL="0">
-              <a:lnSpc>
-                <a:spcPct val="125000"/>
-              </a:lnSpc>
-              <a:buNone/>
-            </a:pPr>
-            <a:r>
-              <a:rPr lang="en-US" sz="900" dirty="0">
-                <a:solidFill>
-                  <a:srgbClr val="8F3226"/>
-                </a:solidFill>
-                <a:latin typeface="Consolas" pitchFamily="34" charset="0"/>
-                <a:ea typeface="Consolas" pitchFamily="34" charset="-122"/>
-                <a:cs typeface="Consolas" pitchFamily="34" charset="-120"/>
-              </a:rPr>
-              <a:t>직접 접속 차단</a:t>
-            </a:r>
-            <a:endParaRPr lang="en-US" sz="900" dirty="0"/>
-          </a:p>
-          <a:p>
-            <a:pPr algn="l" indent="0" marL="0">
-              <a:lnSpc>
-                <a:spcPct val="125000"/>
-              </a:lnSpc>
-              <a:buNone/>
-            </a:pPr>
-            <a:r>
-              <a:rPr lang="en-US" sz="900" dirty="0">
-                <a:solidFill>
-                  <a:srgbClr val="8F3226"/>
-                </a:solidFill>
-                <a:latin typeface="Consolas" pitchFamily="34" charset="0"/>
-                <a:ea typeface="Consolas" pitchFamily="34" charset="-122"/>
-                <a:cs typeface="Consolas" pitchFamily="34" charset="-120"/>
-              </a:rPr>
-              <a:t>(SSH/RDP 미노출)</a:t>
-            </a:r>
-            <a:endParaRPr lang="en-US" sz="900" dirty="0"/>
-          </a:p>
-        </p:txBody>
-      </p:sp>
-      <p:sp>
-        <p:nvSpPr>
-          <p:cNvPr id="27" name="Text 25"/>
-          <p:cNvSpPr txBox="1"/>
-          <p:nvPr/>
-        </p:nvSpPr>
-        <p:spPr>
-          <a:xfrm>
-            <a:off x="3246120" y="3886200"/>
-            <a:ext cx="1920240" cy="228600"/>
-          </a:xfrm>
-          <a:prstGeom prst="rect">
-            <a:avLst/>
-          </a:prstGeom>
-          <a:noFill/>
-          <a:ln/>
-        </p:spPr>
-        <p:txBody>
-          <a:bodyPr wrap="square" lIns="0" tIns="0" rIns="0" bIns="0" rtlCol="0" anchor="ctr"/>
-          <a:lstStyle/>
-          <a:p>
-            <a:pPr algn="ctr" indent="0" marL="0">
-              <a:buNone/>
-            </a:pPr>
-            <a:r>
-              <a:rPr lang="en-US" sz="900" dirty="0">
-                <a:solidFill>
-                  <a:srgbClr val="5B6572"/>
-                </a:solidFill>
-                <a:latin typeface="Consolas" pitchFamily="34" charset="0"/>
-                <a:ea typeface="Consolas" pitchFamily="34" charset="-122"/>
-                <a:cs typeface="Consolas" pitchFamily="34" charset="-120"/>
-              </a:rPr>
-              <a:t>인터넷 구간 없음</a:t>
-            </a:r>
-            <a:endParaRPr lang="en-US" sz="900" dirty="0"/>
-          </a:p>
-        </p:txBody>
-      </p:sp>
-      <p:sp>
-        <p:nvSpPr>
-          <p:cNvPr id="28" name="Text 26"/>
           <p:cNvSpPr txBox="1"/>
           <p:nvPr/>
         </p:nvSpPr>

--- a/architecture/finance-multicloud-architecture.pptx
+++ b/architecture/finance-multicloud-architecture.pptx
@@ -10908,14 +10908,75 @@
       </p:sp>
       <p:sp>
         <p:nvSpPr>
-          <p:cNvPr id="12" name="Text 10"/>
+          <p:cNvPr id="12" name="Shape 10"/>
+          <p:cNvSpPr/>
+          <p:nvPr/>
+        </p:nvSpPr>
+        <p:spPr>
+          <a:xfrm>
+            <a:off x="649224" y="2907792"/>
+            <a:ext cx="201168" cy="201168"/>
+          </a:xfrm>
+          <a:prstGeom prst="roundRect">
+            <a:avLst>
+              <a:gd name="adj" fmla="val 28000"/>
+            </a:avLst>
+          </a:prstGeom>
+          <a:solidFill>
+            <a:srgbClr val="B5642A"/>
+          </a:solidFill>
+          <a:ln/>
+        </p:spPr>
+      </p:sp>
+      <p:sp>
+        <p:nvSpPr>
+          <p:cNvPr id="13" name="Text 11"/>
           <p:cNvSpPr txBox="1"/>
           <p:nvPr/>
         </p:nvSpPr>
         <p:spPr>
           <a:xfrm>
-            <a:off x="649224" y="2889504"/>
-            <a:ext cx="2284400" cy="384048"/>
+            <a:off x="649224" y="2907792"/>
+            <a:ext cx="201168" cy="201168"/>
+          </a:xfrm>
+          <a:prstGeom prst="rect">
+            <a:avLst/>
+          </a:prstGeom>
+          <a:noFill/>
+          <a:ln/>
+        </p:spPr>
+        <p:txBody>
+          <a:bodyPr wrap="square" lIns="0" tIns="0" rIns="0" bIns="0" rtlCol="0" anchor="ctr"/>
+          <a:lstStyle/>
+          <a:p>
+            <a:pPr algn="ctr" indent="0" marL="0">
+              <a:buNone/>
+            </a:pPr>
+            <a:r>
+              <a:rPr lang="en-US" sz="600" b="1" dirty="0">
+                <a:solidFill>
+                  <a:srgbClr val="FFFFFF"/>
+                </a:solidFill>
+                <a:latin typeface="Consolas" pitchFamily="34" charset="0"/>
+                <a:ea typeface="Consolas" pitchFamily="34" charset="-122"/>
+                <a:cs typeface="Consolas" pitchFamily="34" charset="-120"/>
+              </a:rPr>
+              <a:t>ID</a:t>
+            </a:r>
+            <a:endParaRPr lang="en-US" sz="600" dirty="0"/>
+          </a:p>
+        </p:txBody>
+      </p:sp>
+      <p:sp>
+        <p:nvSpPr>
+          <p:cNvPr id="14" name="Text 12"/>
+          <p:cNvSpPr txBox="1"/>
+          <p:nvPr/>
+        </p:nvSpPr>
+        <p:spPr>
+          <a:xfrm>
+            <a:off x="905256" y="2889504"/>
+            <a:ext cx="2028368" cy="384048"/>
           </a:xfrm>
           <a:prstGeom prst="rect">
             <a:avLst/>
@@ -10947,7 +11008,7 @@
       </p:sp>
       <p:sp>
         <p:nvSpPr>
-          <p:cNvPr id="13" name="Text 11"/>
+          <p:cNvPr id="15" name="Text 13"/>
           <p:cNvSpPr txBox="1"/>
           <p:nvPr/>
         </p:nvSpPr>
@@ -10989,7 +11050,7 @@
       </p:sp>
       <p:sp>
         <p:nvSpPr>
-          <p:cNvPr id="14" name="Text 12"/>
+          <p:cNvPr id="16" name="Text 14"/>
           <p:cNvSpPr txBox="1"/>
           <p:nvPr/>
         </p:nvSpPr>
@@ -11028,7 +11089,7 @@
       </p:sp>
       <p:sp>
         <p:nvSpPr>
-          <p:cNvPr id="15" name="Shape 13"/>
+          <p:cNvPr id="17" name="Shape 15"/>
           <p:cNvSpPr/>
           <p:nvPr/>
         </p:nvSpPr>
@@ -11062,7 +11123,7 @@
       </p:sp>
       <p:sp>
         <p:nvSpPr>
-          <p:cNvPr id="16" name="Text 14"/>
+          <p:cNvPr id="18" name="Text 16"/>
           <p:cNvSpPr txBox="1"/>
           <p:nvPr/>
         </p:nvSpPr>
@@ -11101,14 +11162,75 @@
       </p:sp>
       <p:sp>
         <p:nvSpPr>
-          <p:cNvPr id="17" name="Text 15"/>
+          <p:cNvPr id="19" name="Shape 17"/>
+          <p:cNvSpPr/>
+          <p:nvPr/>
+        </p:nvSpPr>
+        <p:spPr>
+          <a:xfrm>
+            <a:off x="3518840" y="2907792"/>
+            <a:ext cx="201168" cy="201168"/>
+          </a:xfrm>
+          <a:prstGeom prst="roundRect">
+            <a:avLst>
+              <a:gd name="adj" fmla="val 28000"/>
+            </a:avLst>
+          </a:prstGeom>
+          <a:solidFill>
+            <a:srgbClr val="B5642A"/>
+          </a:solidFill>
+          <a:ln/>
+        </p:spPr>
+      </p:sp>
+      <p:sp>
+        <p:nvSpPr>
+          <p:cNvPr id="20" name="Text 18"/>
           <p:cNvSpPr txBox="1"/>
           <p:nvPr/>
         </p:nvSpPr>
         <p:spPr>
           <a:xfrm>
-            <a:off x="3518840" y="2889504"/>
-            <a:ext cx="2284400" cy="384048"/>
+            <a:off x="3518840" y="2907792"/>
+            <a:ext cx="201168" cy="201168"/>
+          </a:xfrm>
+          <a:prstGeom prst="rect">
+            <a:avLst/>
+          </a:prstGeom>
+          <a:noFill/>
+          <a:ln/>
+        </p:spPr>
+        <p:txBody>
+          <a:bodyPr wrap="square" lIns="0" tIns="0" rIns="0" bIns="0" rtlCol="0" anchor="ctr"/>
+          <a:lstStyle/>
+          <a:p>
+            <a:pPr algn="ctr" indent="0" marL="0">
+              <a:buNone/>
+            </a:pPr>
+            <a:r>
+              <a:rPr lang="en-US" sz="600" b="1" dirty="0">
+                <a:solidFill>
+                  <a:srgbClr val="FFFFFF"/>
+                </a:solidFill>
+                <a:latin typeface="Consolas" pitchFamily="34" charset="0"/>
+                <a:ea typeface="Consolas" pitchFamily="34" charset="-122"/>
+                <a:cs typeface="Consolas" pitchFamily="34" charset="-120"/>
+              </a:rPr>
+              <a:t>KEY</a:t>
+            </a:r>
+            <a:endParaRPr lang="en-US" sz="600" dirty="0"/>
+          </a:p>
+        </p:txBody>
+      </p:sp>
+      <p:sp>
+        <p:nvSpPr>
+          <p:cNvPr id="21" name="Text 19"/>
+          <p:cNvSpPr txBox="1"/>
+          <p:nvPr/>
+        </p:nvSpPr>
+        <p:spPr>
+          <a:xfrm>
+            <a:off x="3774872" y="2889504"/>
+            <a:ext cx="2028368" cy="384048"/>
           </a:xfrm>
           <a:prstGeom prst="rect">
             <a:avLst/>
@@ -11140,7 +11262,7 @@
       </p:sp>
       <p:sp>
         <p:nvSpPr>
-          <p:cNvPr id="18" name="Text 16"/>
+          <p:cNvPr id="22" name="Text 20"/>
           <p:cNvSpPr txBox="1"/>
           <p:nvPr/>
         </p:nvSpPr>
@@ -11182,7 +11304,7 @@
       </p:sp>
       <p:sp>
         <p:nvSpPr>
-          <p:cNvPr id="19" name="Text 17"/>
+          <p:cNvPr id="23" name="Text 21"/>
           <p:cNvSpPr txBox="1"/>
           <p:nvPr/>
         </p:nvSpPr>
@@ -11221,7 +11343,7 @@
       </p:sp>
       <p:sp>
         <p:nvSpPr>
-          <p:cNvPr id="20" name="Shape 18"/>
+          <p:cNvPr id="24" name="Shape 22"/>
           <p:cNvSpPr/>
           <p:nvPr/>
         </p:nvSpPr>
@@ -11255,7 +11377,7 @@
       </p:sp>
       <p:sp>
         <p:nvSpPr>
-          <p:cNvPr id="21" name="Text 19"/>
+          <p:cNvPr id="25" name="Text 23"/>
           <p:cNvSpPr txBox="1"/>
           <p:nvPr/>
         </p:nvSpPr>
@@ -11294,14 +11416,75 @@
       </p:sp>
       <p:sp>
         <p:nvSpPr>
-          <p:cNvPr id="22" name="Text 20"/>
+          <p:cNvPr id="26" name="Shape 24"/>
+          <p:cNvSpPr/>
+          <p:nvPr/>
+        </p:nvSpPr>
+        <p:spPr>
+          <a:xfrm>
+            <a:off x="6388456" y="2907792"/>
+            <a:ext cx="201168" cy="201168"/>
+          </a:xfrm>
+          <a:prstGeom prst="roundRect">
+            <a:avLst>
+              <a:gd name="adj" fmla="val 28000"/>
+            </a:avLst>
+          </a:prstGeom>
+          <a:solidFill>
+            <a:srgbClr val="B5642A"/>
+          </a:solidFill>
+          <a:ln/>
+        </p:spPr>
+      </p:sp>
+      <p:sp>
+        <p:nvSpPr>
+          <p:cNvPr id="27" name="Text 25"/>
           <p:cNvSpPr txBox="1"/>
           <p:nvPr/>
         </p:nvSpPr>
         <p:spPr>
           <a:xfrm>
-            <a:off x="6388456" y="2889504"/>
-            <a:ext cx="2284400" cy="384048"/>
+            <a:off x="6388456" y="2907792"/>
+            <a:ext cx="201168" cy="201168"/>
+          </a:xfrm>
+          <a:prstGeom prst="rect">
+            <a:avLst/>
+          </a:prstGeom>
+          <a:noFill/>
+          <a:ln/>
+        </p:spPr>
+        <p:txBody>
+          <a:bodyPr wrap="square" lIns="0" tIns="0" rIns="0" bIns="0" rtlCol="0" anchor="ctr"/>
+          <a:lstStyle/>
+          <a:p>
+            <a:pPr algn="ctr" indent="0" marL="0">
+              <a:buNone/>
+            </a:pPr>
+            <a:r>
+              <a:rPr lang="en-US" sz="600" b="1" dirty="0">
+                <a:solidFill>
+                  <a:srgbClr val="FFFFFF"/>
+                </a:solidFill>
+                <a:latin typeface="Consolas" pitchFamily="34" charset="0"/>
+                <a:ea typeface="Consolas" pitchFamily="34" charset="-122"/>
+                <a:cs typeface="Consolas" pitchFamily="34" charset="-120"/>
+              </a:rPr>
+              <a:t>NET</a:t>
+            </a:r>
+            <a:endParaRPr lang="en-US" sz="600" dirty="0"/>
+          </a:p>
+        </p:txBody>
+      </p:sp>
+      <p:sp>
+        <p:nvSpPr>
+          <p:cNvPr id="28" name="Text 26"/>
+          <p:cNvSpPr txBox="1"/>
+          <p:nvPr/>
+        </p:nvSpPr>
+        <p:spPr>
+          <a:xfrm>
+            <a:off x="6644488" y="2889504"/>
+            <a:ext cx="2028368" cy="384048"/>
           </a:xfrm>
           <a:prstGeom prst="rect">
             <a:avLst/>
@@ -11333,7 +11516,7 @@
       </p:sp>
       <p:sp>
         <p:nvSpPr>
-          <p:cNvPr id="23" name="Text 21"/>
+          <p:cNvPr id="29" name="Text 27"/>
           <p:cNvSpPr txBox="1"/>
           <p:nvPr/>
         </p:nvSpPr>
@@ -11375,7 +11558,7 @@
       </p:sp>
       <p:sp>
         <p:nvSpPr>
-          <p:cNvPr id="24" name="Text 22"/>
+          <p:cNvPr id="30" name="Text 28"/>
           <p:cNvSpPr txBox="1"/>
           <p:nvPr/>
         </p:nvSpPr>
@@ -11414,7 +11597,7 @@
       </p:sp>
       <p:sp>
         <p:nvSpPr>
-          <p:cNvPr id="25" name="Shape 23"/>
+          <p:cNvPr id="31" name="Shape 29"/>
           <p:cNvSpPr/>
           <p:nvPr/>
         </p:nvSpPr>
@@ -11448,7 +11631,7 @@
       </p:sp>
       <p:sp>
         <p:nvSpPr>
-          <p:cNvPr id="26" name="Text 24"/>
+          <p:cNvPr id="32" name="Text 30"/>
           <p:cNvSpPr txBox="1"/>
           <p:nvPr/>
         </p:nvSpPr>
@@ -11487,14 +11670,75 @@
       </p:sp>
       <p:sp>
         <p:nvSpPr>
-          <p:cNvPr id="27" name="Text 25"/>
+          <p:cNvPr id="33" name="Shape 31"/>
+          <p:cNvSpPr/>
+          <p:nvPr/>
+        </p:nvSpPr>
+        <p:spPr>
+          <a:xfrm>
+            <a:off x="9258071" y="2907792"/>
+            <a:ext cx="201168" cy="201168"/>
+          </a:xfrm>
+          <a:prstGeom prst="roundRect">
+            <a:avLst>
+              <a:gd name="adj" fmla="val 28000"/>
+            </a:avLst>
+          </a:prstGeom>
+          <a:solidFill>
+            <a:srgbClr val="B5642A"/>
+          </a:solidFill>
+          <a:ln/>
+        </p:spPr>
+      </p:sp>
+      <p:sp>
+        <p:nvSpPr>
+          <p:cNvPr id="34" name="Text 32"/>
           <p:cNvSpPr txBox="1"/>
           <p:nvPr/>
         </p:nvSpPr>
         <p:spPr>
           <a:xfrm>
-            <a:off x="9258071" y="2889504"/>
-            <a:ext cx="2284400" cy="384048"/>
+            <a:off x="9258071" y="2907792"/>
+            <a:ext cx="201168" cy="201168"/>
+          </a:xfrm>
+          <a:prstGeom prst="rect">
+            <a:avLst/>
+          </a:prstGeom>
+          <a:noFill/>
+          <a:ln/>
+        </p:spPr>
+        <p:txBody>
+          <a:bodyPr wrap="square" lIns="0" tIns="0" rIns="0" bIns="0" rtlCol="0" anchor="ctr"/>
+          <a:lstStyle/>
+          <a:p>
+            <a:pPr algn="ctr" indent="0" marL="0">
+              <a:buNone/>
+            </a:pPr>
+            <a:r>
+              <a:rPr lang="en-US" sz="600" b="1" dirty="0">
+                <a:solidFill>
+                  <a:srgbClr val="FFFFFF"/>
+                </a:solidFill>
+                <a:latin typeface="Consolas" pitchFamily="34" charset="0"/>
+                <a:ea typeface="Consolas" pitchFamily="34" charset="-122"/>
+                <a:cs typeface="Consolas" pitchFamily="34" charset="-120"/>
+              </a:rPr>
+              <a:t>BAS</a:t>
+            </a:r>
+            <a:endParaRPr lang="en-US" sz="600" dirty="0"/>
+          </a:p>
+        </p:txBody>
+      </p:sp>
+      <p:sp>
+        <p:nvSpPr>
+          <p:cNvPr id="35" name="Text 33"/>
+          <p:cNvSpPr txBox="1"/>
+          <p:nvPr/>
+        </p:nvSpPr>
+        <p:spPr>
+          <a:xfrm>
+            <a:off x="9514103" y="2889504"/>
+            <a:ext cx="2028368" cy="384048"/>
           </a:xfrm>
           <a:prstGeom prst="rect">
             <a:avLst/>
@@ -11526,7 +11770,7 @@
       </p:sp>
       <p:sp>
         <p:nvSpPr>
-          <p:cNvPr id="28" name="Text 26"/>
+          <p:cNvPr id="36" name="Text 34"/>
           <p:cNvSpPr txBox="1"/>
           <p:nvPr/>
         </p:nvSpPr>
@@ -11568,7 +11812,7 @@
       </p:sp>
       <p:sp>
         <p:nvSpPr>
-          <p:cNvPr id="29" name="Text 27"/>
+          <p:cNvPr id="37" name="Text 35"/>
           <p:cNvSpPr txBox="1"/>
           <p:nvPr/>
         </p:nvSpPr>
@@ -12003,14 +12247,75 @@
       </p:sp>
       <p:sp>
         <p:nvSpPr>
-          <p:cNvPr id="12" name="Text 10"/>
+          <p:cNvPr id="12" name="Shape 10"/>
+          <p:cNvSpPr/>
+          <p:nvPr/>
+        </p:nvSpPr>
+        <p:spPr>
+          <a:xfrm>
+            <a:off x="649224" y="2907792"/>
+            <a:ext cx="201168" cy="201168"/>
+          </a:xfrm>
+          <a:prstGeom prst="roundRect">
+            <a:avLst>
+              <a:gd name="adj" fmla="val 28000"/>
+            </a:avLst>
+          </a:prstGeom>
+          <a:solidFill>
+            <a:srgbClr val="2E6DA4"/>
+          </a:solidFill>
+          <a:ln/>
+        </p:spPr>
+      </p:sp>
+      <p:sp>
+        <p:nvSpPr>
+          <p:cNvPr id="13" name="Text 11"/>
           <p:cNvSpPr txBox="1"/>
           <p:nvPr/>
         </p:nvSpPr>
         <p:spPr>
           <a:xfrm>
-            <a:off x="649224" y="2889504"/>
-            <a:ext cx="2284400" cy="384048"/>
+            <a:off x="649224" y="2907792"/>
+            <a:ext cx="201168" cy="201168"/>
+          </a:xfrm>
+          <a:prstGeom prst="rect">
+            <a:avLst/>
+          </a:prstGeom>
+          <a:noFill/>
+          <a:ln/>
+        </p:spPr>
+        <p:txBody>
+          <a:bodyPr wrap="square" lIns="0" tIns="0" rIns="0" bIns="0" rtlCol="0" anchor="ctr"/>
+          <a:lstStyle/>
+          <a:p>
+            <a:pPr algn="ctr" indent="0" marL="0">
+              <a:buNone/>
+            </a:pPr>
+            <a:r>
+              <a:rPr lang="en-US" sz="600" b="1" dirty="0">
+                <a:solidFill>
+                  <a:srgbClr val="FFFFFF"/>
+                </a:solidFill>
+                <a:latin typeface="Consolas" pitchFamily="34" charset="0"/>
+                <a:ea typeface="Consolas" pitchFamily="34" charset="-122"/>
+                <a:cs typeface="Consolas" pitchFamily="34" charset="-120"/>
+              </a:rPr>
+              <a:t>ID</a:t>
+            </a:r>
+            <a:endParaRPr lang="en-US" sz="600" dirty="0"/>
+          </a:p>
+        </p:txBody>
+      </p:sp>
+      <p:sp>
+        <p:nvSpPr>
+          <p:cNvPr id="14" name="Text 12"/>
+          <p:cNvSpPr txBox="1"/>
+          <p:nvPr/>
+        </p:nvSpPr>
+        <p:spPr>
+          <a:xfrm>
+            <a:off x="905256" y="2889504"/>
+            <a:ext cx="2028368" cy="384048"/>
           </a:xfrm>
           <a:prstGeom prst="rect">
             <a:avLst/>
@@ -12042,7 +12347,7 @@
       </p:sp>
       <p:sp>
         <p:nvSpPr>
-          <p:cNvPr id="13" name="Text 11"/>
+          <p:cNvPr id="15" name="Text 13"/>
           <p:cNvSpPr txBox="1"/>
           <p:nvPr/>
         </p:nvSpPr>
@@ -12084,7 +12389,7 @@
       </p:sp>
       <p:sp>
         <p:nvSpPr>
-          <p:cNvPr id="14" name="Text 12"/>
+          <p:cNvPr id="16" name="Text 14"/>
           <p:cNvSpPr txBox="1"/>
           <p:nvPr/>
         </p:nvSpPr>
@@ -12123,7 +12428,7 @@
       </p:sp>
       <p:sp>
         <p:nvSpPr>
-          <p:cNvPr id="15" name="Shape 13"/>
+          <p:cNvPr id="17" name="Shape 15"/>
           <p:cNvSpPr/>
           <p:nvPr/>
         </p:nvSpPr>
@@ -12157,7 +12462,7 @@
       </p:sp>
       <p:sp>
         <p:nvSpPr>
-          <p:cNvPr id="16" name="Text 14"/>
+          <p:cNvPr id="18" name="Text 16"/>
           <p:cNvSpPr txBox="1"/>
           <p:nvPr/>
         </p:nvSpPr>
@@ -12196,14 +12501,75 @@
       </p:sp>
       <p:sp>
         <p:nvSpPr>
-          <p:cNvPr id="17" name="Text 15"/>
+          <p:cNvPr id="19" name="Shape 17"/>
+          <p:cNvSpPr/>
+          <p:nvPr/>
+        </p:nvSpPr>
+        <p:spPr>
+          <a:xfrm>
+            <a:off x="3518840" y="2907792"/>
+            <a:ext cx="201168" cy="201168"/>
+          </a:xfrm>
+          <a:prstGeom prst="roundRect">
+            <a:avLst>
+              <a:gd name="adj" fmla="val 28000"/>
+            </a:avLst>
+          </a:prstGeom>
+          <a:solidFill>
+            <a:srgbClr val="2E6DA4"/>
+          </a:solidFill>
+          <a:ln/>
+        </p:spPr>
+      </p:sp>
+      <p:sp>
+        <p:nvSpPr>
+          <p:cNvPr id="20" name="Text 18"/>
           <p:cNvSpPr txBox="1"/>
           <p:nvPr/>
         </p:nvSpPr>
         <p:spPr>
           <a:xfrm>
-            <a:off x="3518840" y="2889504"/>
-            <a:ext cx="2284400" cy="384048"/>
+            <a:off x="3518840" y="2907792"/>
+            <a:ext cx="201168" cy="201168"/>
+          </a:xfrm>
+          <a:prstGeom prst="rect">
+            <a:avLst/>
+          </a:prstGeom>
+          <a:noFill/>
+          <a:ln/>
+        </p:spPr>
+        <p:txBody>
+          <a:bodyPr wrap="square" lIns="0" tIns="0" rIns="0" bIns="0" rtlCol="0" anchor="ctr"/>
+          <a:lstStyle/>
+          <a:p>
+            <a:pPr algn="ctr" indent="0" marL="0">
+              <a:buNone/>
+            </a:pPr>
+            <a:r>
+              <a:rPr lang="en-US" sz="600" b="1" dirty="0">
+                <a:solidFill>
+                  <a:srgbClr val="FFFFFF"/>
+                </a:solidFill>
+                <a:latin typeface="Consolas" pitchFamily="34" charset="0"/>
+                <a:ea typeface="Consolas" pitchFamily="34" charset="-122"/>
+                <a:cs typeface="Consolas" pitchFamily="34" charset="-120"/>
+              </a:rPr>
+              <a:t>KEY</a:t>
+            </a:r>
+            <a:endParaRPr lang="en-US" sz="600" dirty="0"/>
+          </a:p>
+        </p:txBody>
+      </p:sp>
+      <p:sp>
+        <p:nvSpPr>
+          <p:cNvPr id="21" name="Text 19"/>
+          <p:cNvSpPr txBox="1"/>
+          <p:nvPr/>
+        </p:nvSpPr>
+        <p:spPr>
+          <a:xfrm>
+            <a:off x="3774872" y="2889504"/>
+            <a:ext cx="2028368" cy="384048"/>
           </a:xfrm>
           <a:prstGeom prst="rect">
             <a:avLst/>
@@ -12235,7 +12601,7 @@
       </p:sp>
       <p:sp>
         <p:nvSpPr>
-          <p:cNvPr id="18" name="Text 16"/>
+          <p:cNvPr id="22" name="Text 20"/>
           <p:cNvSpPr txBox="1"/>
           <p:nvPr/>
         </p:nvSpPr>
@@ -12277,7 +12643,7 @@
       </p:sp>
       <p:sp>
         <p:nvSpPr>
-          <p:cNvPr id="19" name="Text 17"/>
+          <p:cNvPr id="23" name="Text 21"/>
           <p:cNvSpPr txBox="1"/>
           <p:nvPr/>
         </p:nvSpPr>
@@ -12316,7 +12682,7 @@
       </p:sp>
       <p:sp>
         <p:nvSpPr>
-          <p:cNvPr id="20" name="Shape 18"/>
+          <p:cNvPr id="24" name="Shape 22"/>
           <p:cNvSpPr/>
           <p:nvPr/>
         </p:nvSpPr>
@@ -12350,7 +12716,7 @@
       </p:sp>
       <p:sp>
         <p:nvSpPr>
-          <p:cNvPr id="21" name="Text 19"/>
+          <p:cNvPr id="25" name="Text 23"/>
           <p:cNvSpPr txBox="1"/>
           <p:nvPr/>
         </p:nvSpPr>
@@ -12389,14 +12755,75 @@
       </p:sp>
       <p:sp>
         <p:nvSpPr>
-          <p:cNvPr id="22" name="Text 20"/>
+          <p:cNvPr id="26" name="Shape 24"/>
+          <p:cNvSpPr/>
+          <p:nvPr/>
+        </p:nvSpPr>
+        <p:spPr>
+          <a:xfrm>
+            <a:off x="6388456" y="2907792"/>
+            <a:ext cx="201168" cy="201168"/>
+          </a:xfrm>
+          <a:prstGeom prst="roundRect">
+            <a:avLst>
+              <a:gd name="adj" fmla="val 28000"/>
+            </a:avLst>
+          </a:prstGeom>
+          <a:solidFill>
+            <a:srgbClr val="2E6DA4"/>
+          </a:solidFill>
+          <a:ln/>
+        </p:spPr>
+      </p:sp>
+      <p:sp>
+        <p:nvSpPr>
+          <p:cNvPr id="27" name="Text 25"/>
           <p:cNvSpPr txBox="1"/>
           <p:nvPr/>
         </p:nvSpPr>
         <p:spPr>
           <a:xfrm>
-            <a:off x="6388456" y="2889504"/>
-            <a:ext cx="2284400" cy="384048"/>
+            <a:off x="6388456" y="2907792"/>
+            <a:ext cx="201168" cy="201168"/>
+          </a:xfrm>
+          <a:prstGeom prst="rect">
+            <a:avLst/>
+          </a:prstGeom>
+          <a:noFill/>
+          <a:ln/>
+        </p:spPr>
+        <p:txBody>
+          <a:bodyPr wrap="square" lIns="0" tIns="0" rIns="0" bIns="0" rtlCol="0" anchor="ctr"/>
+          <a:lstStyle/>
+          <a:p>
+            <a:pPr algn="ctr" indent="0" marL="0">
+              <a:buNone/>
+            </a:pPr>
+            <a:r>
+              <a:rPr lang="en-US" sz="600" b="1" dirty="0">
+                <a:solidFill>
+                  <a:srgbClr val="FFFFFF"/>
+                </a:solidFill>
+                <a:latin typeface="Consolas" pitchFamily="34" charset="0"/>
+                <a:ea typeface="Consolas" pitchFamily="34" charset="-122"/>
+                <a:cs typeface="Consolas" pitchFamily="34" charset="-120"/>
+              </a:rPr>
+              <a:t>NET</a:t>
+            </a:r>
+            <a:endParaRPr lang="en-US" sz="600" dirty="0"/>
+          </a:p>
+        </p:txBody>
+      </p:sp>
+      <p:sp>
+        <p:nvSpPr>
+          <p:cNvPr id="28" name="Text 26"/>
+          <p:cNvSpPr txBox="1"/>
+          <p:nvPr/>
+        </p:nvSpPr>
+        <p:spPr>
+          <a:xfrm>
+            <a:off x="6644488" y="2889504"/>
+            <a:ext cx="2028368" cy="384048"/>
           </a:xfrm>
           <a:prstGeom prst="rect">
             <a:avLst/>
@@ -12428,7 +12855,7 @@
       </p:sp>
       <p:sp>
         <p:nvSpPr>
-          <p:cNvPr id="23" name="Text 21"/>
+          <p:cNvPr id="29" name="Text 27"/>
           <p:cNvSpPr txBox="1"/>
           <p:nvPr/>
         </p:nvSpPr>
@@ -12470,7 +12897,7 @@
       </p:sp>
       <p:sp>
         <p:nvSpPr>
-          <p:cNvPr id="24" name="Text 22"/>
+          <p:cNvPr id="30" name="Text 28"/>
           <p:cNvSpPr txBox="1"/>
           <p:nvPr/>
         </p:nvSpPr>
@@ -12509,7 +12936,7 @@
       </p:sp>
       <p:sp>
         <p:nvSpPr>
-          <p:cNvPr id="25" name="Shape 23"/>
+          <p:cNvPr id="31" name="Shape 29"/>
           <p:cNvSpPr/>
           <p:nvPr/>
         </p:nvSpPr>
@@ -12543,7 +12970,7 @@
       </p:sp>
       <p:sp>
         <p:nvSpPr>
-          <p:cNvPr id="26" name="Text 24"/>
+          <p:cNvPr id="32" name="Text 30"/>
           <p:cNvSpPr txBox="1"/>
           <p:nvPr/>
         </p:nvSpPr>
@@ -12582,14 +13009,75 @@
       </p:sp>
       <p:sp>
         <p:nvSpPr>
-          <p:cNvPr id="27" name="Text 25"/>
+          <p:cNvPr id="33" name="Shape 31"/>
+          <p:cNvSpPr/>
+          <p:nvPr/>
+        </p:nvSpPr>
+        <p:spPr>
+          <a:xfrm>
+            <a:off x="9258071" y="2907792"/>
+            <a:ext cx="201168" cy="201168"/>
+          </a:xfrm>
+          <a:prstGeom prst="roundRect">
+            <a:avLst>
+              <a:gd name="adj" fmla="val 28000"/>
+            </a:avLst>
+          </a:prstGeom>
+          <a:solidFill>
+            <a:srgbClr val="2E6DA4"/>
+          </a:solidFill>
+          <a:ln/>
+        </p:spPr>
+      </p:sp>
+      <p:sp>
+        <p:nvSpPr>
+          <p:cNvPr id="34" name="Text 32"/>
           <p:cNvSpPr txBox="1"/>
           <p:nvPr/>
         </p:nvSpPr>
         <p:spPr>
           <a:xfrm>
-            <a:off x="9258071" y="2889504"/>
-            <a:ext cx="2284400" cy="384048"/>
+            <a:off x="9258071" y="2907792"/>
+            <a:ext cx="201168" cy="201168"/>
+          </a:xfrm>
+          <a:prstGeom prst="rect">
+            <a:avLst/>
+          </a:prstGeom>
+          <a:noFill/>
+          <a:ln/>
+        </p:spPr>
+        <p:txBody>
+          <a:bodyPr wrap="square" lIns="0" tIns="0" rIns="0" bIns="0" rtlCol="0" anchor="ctr"/>
+          <a:lstStyle/>
+          <a:p>
+            <a:pPr algn="ctr" indent="0" marL="0">
+              <a:buNone/>
+            </a:pPr>
+            <a:r>
+              <a:rPr lang="en-US" sz="600" b="1" dirty="0">
+                <a:solidFill>
+                  <a:srgbClr val="FFFFFF"/>
+                </a:solidFill>
+                <a:latin typeface="Consolas" pitchFamily="34" charset="0"/>
+                <a:ea typeface="Consolas" pitchFamily="34" charset="-122"/>
+                <a:cs typeface="Consolas" pitchFamily="34" charset="-120"/>
+              </a:rPr>
+              <a:t>BAS</a:t>
+            </a:r>
+            <a:endParaRPr lang="en-US" sz="600" dirty="0"/>
+          </a:p>
+        </p:txBody>
+      </p:sp>
+      <p:sp>
+        <p:nvSpPr>
+          <p:cNvPr id="35" name="Text 33"/>
+          <p:cNvSpPr txBox="1"/>
+          <p:nvPr/>
+        </p:nvSpPr>
+        <p:spPr>
+          <a:xfrm>
+            <a:off x="9514103" y="2889504"/>
+            <a:ext cx="2028368" cy="384048"/>
           </a:xfrm>
           <a:prstGeom prst="rect">
             <a:avLst/>
@@ -12621,7 +13109,7 @@
       </p:sp>
       <p:sp>
         <p:nvSpPr>
-          <p:cNvPr id="28" name="Text 26"/>
+          <p:cNvPr id="36" name="Text 34"/>
           <p:cNvSpPr txBox="1"/>
           <p:nvPr/>
         </p:nvSpPr>
@@ -12663,7 +13151,7 @@
       </p:sp>
       <p:sp>
         <p:nvSpPr>
-          <p:cNvPr id="29" name="Text 27"/>
+          <p:cNvPr id="37" name="Text 35"/>
           <p:cNvSpPr txBox="1"/>
           <p:nvPr/>
         </p:nvSpPr>
@@ -36037,6 +36525,67 @@
         </p:nvSpPr>
         <p:spPr>
           <a:xfrm>
+            <a:off x="1938528" y="1664208"/>
+            <a:ext cx="219456" cy="219456"/>
+          </a:xfrm>
+          <a:prstGeom prst="roundRect">
+            <a:avLst>
+              <a:gd name="adj" fmla="val 28000"/>
+            </a:avLst>
+          </a:prstGeom>
+          <a:solidFill>
+            <a:srgbClr val="B5642A"/>
+          </a:solidFill>
+          <a:ln/>
+        </p:spPr>
+      </p:sp>
+      <p:sp>
+        <p:nvSpPr>
+          <p:cNvPr id="8" name="Text 6"/>
+          <p:cNvSpPr txBox="1"/>
+          <p:nvPr/>
+        </p:nvSpPr>
+        <p:spPr>
+          <a:xfrm>
+            <a:off x="1938528" y="1664208"/>
+            <a:ext cx="219456" cy="219456"/>
+          </a:xfrm>
+          <a:prstGeom prst="rect">
+            <a:avLst/>
+          </a:prstGeom>
+          <a:noFill/>
+          <a:ln/>
+        </p:spPr>
+        <p:txBody>
+          <a:bodyPr wrap="square" lIns="0" tIns="0" rIns="0" bIns="0" rtlCol="0" anchor="ctr"/>
+          <a:lstStyle/>
+          <a:p>
+            <a:pPr algn="ctr" indent="0" marL="0">
+              <a:buNone/>
+            </a:pPr>
+            <a:r>
+              <a:rPr lang="en-US" sz="600" b="1" dirty="0">
+                <a:solidFill>
+                  <a:srgbClr val="FFFFFF"/>
+                </a:solidFill>
+                <a:latin typeface="Consolas" pitchFamily="34" charset="0"/>
+                <a:ea typeface="Consolas" pitchFamily="34" charset="-122"/>
+                <a:cs typeface="Consolas" pitchFamily="34" charset="-120"/>
+              </a:rPr>
+              <a:t>LB</a:t>
+            </a:r>
+            <a:endParaRPr lang="en-US" sz="600" dirty="0"/>
+          </a:p>
+        </p:txBody>
+      </p:sp>
+      <p:sp>
+        <p:nvSpPr>
+          <p:cNvPr id="9" name="Shape 7"/>
+          <p:cNvSpPr/>
+          <p:nvPr/>
+        </p:nvSpPr>
+        <p:spPr>
+          <a:xfrm>
             <a:off x="6094476" y="2395728"/>
             <a:ext cx="9144" cy="310896"/>
           </a:xfrm>
@@ -36055,7 +36604,7 @@
       </p:sp>
       <p:sp>
         <p:nvSpPr>
-          <p:cNvPr id="8" name="Shape 6"/>
+          <p:cNvPr id="10" name="Shape 8"/>
           <p:cNvSpPr/>
           <p:nvPr/>
         </p:nvSpPr>
@@ -36082,7 +36631,7 @@
       </p:sp>
       <p:sp>
         <p:nvSpPr>
-          <p:cNvPr id="9" name="Text 7"/>
+          <p:cNvPr id="11" name="Text 9"/>
           <p:cNvSpPr txBox="1"/>
           <p:nvPr/>
         </p:nvSpPr>
@@ -36164,7 +36713,68 @@
       </p:sp>
       <p:sp>
         <p:nvSpPr>
-          <p:cNvPr id="10" name="Shape 8"/>
+          <p:cNvPr id="12" name="Shape 10"/>
+          <p:cNvSpPr/>
+          <p:nvPr/>
+        </p:nvSpPr>
+        <p:spPr>
+          <a:xfrm>
+            <a:off x="1938528" y="2816352"/>
+            <a:ext cx="219456" cy="219456"/>
+          </a:xfrm>
+          <a:prstGeom prst="roundRect">
+            <a:avLst>
+              <a:gd name="adj" fmla="val 28000"/>
+            </a:avLst>
+          </a:prstGeom>
+          <a:solidFill>
+            <a:srgbClr val="B5642A"/>
+          </a:solidFill>
+          <a:ln/>
+        </p:spPr>
+      </p:sp>
+      <p:sp>
+        <p:nvSpPr>
+          <p:cNvPr id="13" name="Text 11"/>
+          <p:cNvSpPr txBox="1"/>
+          <p:nvPr/>
+        </p:nvSpPr>
+        <p:spPr>
+          <a:xfrm>
+            <a:off x="1938528" y="2816352"/>
+            <a:ext cx="219456" cy="219456"/>
+          </a:xfrm>
+          <a:prstGeom prst="rect">
+            <a:avLst/>
+          </a:prstGeom>
+          <a:noFill/>
+          <a:ln/>
+        </p:spPr>
+        <p:txBody>
+          <a:bodyPr wrap="square" lIns="0" tIns="0" rIns="0" bIns="0" rtlCol="0" anchor="ctr"/>
+          <a:lstStyle/>
+          <a:p>
+            <a:pPr algn="ctr" indent="0" marL="0">
+              <a:buNone/>
+            </a:pPr>
+            <a:r>
+              <a:rPr lang="en-US" sz="600" b="1" dirty="0">
+                <a:solidFill>
+                  <a:srgbClr val="FFFFFF"/>
+                </a:solidFill>
+                <a:latin typeface="Consolas" pitchFamily="34" charset="0"/>
+                <a:ea typeface="Consolas" pitchFamily="34" charset="-122"/>
+                <a:cs typeface="Consolas" pitchFamily="34" charset="-120"/>
+              </a:rPr>
+              <a:t>SRV</a:t>
+            </a:r>
+            <a:endParaRPr lang="en-US" sz="600" dirty="0"/>
+          </a:p>
+        </p:txBody>
+      </p:sp>
+      <p:sp>
+        <p:nvSpPr>
+          <p:cNvPr id="14" name="Shape 12"/>
           <p:cNvSpPr/>
           <p:nvPr/>
         </p:nvSpPr>
@@ -36188,7 +36798,7 @@
       </p:sp>
       <p:sp>
         <p:nvSpPr>
-          <p:cNvPr id="11" name="Shape 9"/>
+          <p:cNvPr id="15" name="Shape 13"/>
           <p:cNvSpPr/>
           <p:nvPr/>
         </p:nvSpPr>
@@ -36215,7 +36825,7 @@
       </p:sp>
       <p:sp>
         <p:nvSpPr>
-          <p:cNvPr id="12" name="Text 10"/>
+          <p:cNvPr id="16" name="Text 14"/>
           <p:cNvSpPr txBox="1"/>
           <p:nvPr/>
         </p:nvSpPr>
@@ -36297,7 +36907,68 @@
       </p:sp>
       <p:sp>
         <p:nvSpPr>
-          <p:cNvPr id="13" name="Shape 11"/>
+          <p:cNvPr id="17" name="Shape 15"/>
+          <p:cNvSpPr/>
+          <p:nvPr/>
+        </p:nvSpPr>
+        <p:spPr>
+          <a:xfrm>
+            <a:off x="1938528" y="3968496"/>
+            <a:ext cx="219456" cy="219456"/>
+          </a:xfrm>
+          <a:prstGeom prst="roundRect">
+            <a:avLst>
+              <a:gd name="adj" fmla="val 28000"/>
+            </a:avLst>
+          </a:prstGeom>
+          <a:solidFill>
+            <a:srgbClr val="B5642A"/>
+          </a:solidFill>
+          <a:ln/>
+        </p:spPr>
+      </p:sp>
+      <p:sp>
+        <p:nvSpPr>
+          <p:cNvPr id="18" name="Text 16"/>
+          <p:cNvSpPr txBox="1"/>
+          <p:nvPr/>
+        </p:nvSpPr>
+        <p:spPr>
+          <a:xfrm>
+            <a:off x="1938528" y="3968496"/>
+            <a:ext cx="219456" cy="219456"/>
+          </a:xfrm>
+          <a:prstGeom prst="rect">
+            <a:avLst/>
+          </a:prstGeom>
+          <a:noFill/>
+          <a:ln/>
+        </p:spPr>
+        <p:txBody>
+          <a:bodyPr wrap="square" lIns="0" tIns="0" rIns="0" bIns="0" rtlCol="0" anchor="ctr"/>
+          <a:lstStyle/>
+          <a:p>
+            <a:pPr algn="ctr" indent="0" marL="0">
+              <a:buNone/>
+            </a:pPr>
+            <a:r>
+              <a:rPr lang="en-US" sz="600" b="1" dirty="0">
+                <a:solidFill>
+                  <a:srgbClr val="FFFFFF"/>
+                </a:solidFill>
+                <a:latin typeface="Consolas" pitchFamily="34" charset="0"/>
+                <a:ea typeface="Consolas" pitchFamily="34" charset="-122"/>
+                <a:cs typeface="Consolas" pitchFamily="34" charset="-120"/>
+              </a:rPr>
+              <a:t>DB</a:t>
+            </a:r>
+            <a:endParaRPr lang="en-US" sz="600" dirty="0"/>
+          </a:p>
+        </p:txBody>
+      </p:sp>
+      <p:sp>
+        <p:nvSpPr>
+          <p:cNvPr id="19" name="Shape 17"/>
           <p:cNvSpPr/>
           <p:nvPr/>
         </p:nvSpPr>
@@ -36321,7 +36992,7 @@
       </p:sp>
       <p:sp>
         <p:nvSpPr>
-          <p:cNvPr id="14" name="Shape 12"/>
+          <p:cNvPr id="20" name="Shape 18"/>
           <p:cNvSpPr/>
           <p:nvPr/>
         </p:nvSpPr>
@@ -36348,7 +37019,7 @@
       </p:sp>
       <p:sp>
         <p:nvSpPr>
-          <p:cNvPr id="15" name="Text 13"/>
+          <p:cNvPr id="21" name="Text 19"/>
           <p:cNvSpPr txBox="1"/>
           <p:nvPr/>
         </p:nvSpPr>
@@ -36430,7 +37101,68 @@
       </p:sp>
       <p:sp>
         <p:nvSpPr>
-          <p:cNvPr id="16" name="Text 14"/>
+          <p:cNvPr id="22" name="Shape 20"/>
+          <p:cNvSpPr/>
+          <p:nvPr/>
+        </p:nvSpPr>
+        <p:spPr>
+          <a:xfrm>
+            <a:off x="1938528" y="5120640"/>
+            <a:ext cx="219456" cy="219456"/>
+          </a:xfrm>
+          <a:prstGeom prst="roundRect">
+            <a:avLst>
+              <a:gd name="adj" fmla="val 28000"/>
+            </a:avLst>
+          </a:prstGeom>
+          <a:solidFill>
+            <a:srgbClr val="B5642A"/>
+          </a:solidFill>
+          <a:ln/>
+        </p:spPr>
+      </p:sp>
+      <p:sp>
+        <p:nvSpPr>
+          <p:cNvPr id="23" name="Text 21"/>
+          <p:cNvSpPr txBox="1"/>
+          <p:nvPr/>
+        </p:nvSpPr>
+        <p:spPr>
+          <a:xfrm>
+            <a:off x="1938528" y="5120640"/>
+            <a:ext cx="219456" cy="219456"/>
+          </a:xfrm>
+          <a:prstGeom prst="rect">
+            <a:avLst/>
+          </a:prstGeom>
+          <a:noFill/>
+          <a:ln/>
+        </p:spPr>
+        <p:txBody>
+          <a:bodyPr wrap="square" lIns="0" tIns="0" rIns="0" bIns="0" rtlCol="0" anchor="ctr"/>
+          <a:lstStyle/>
+          <a:p>
+            <a:pPr algn="ctr" indent="0" marL="0">
+              <a:buNone/>
+            </a:pPr>
+            <a:r>
+              <a:rPr lang="en-US" sz="600" b="1" dirty="0">
+                <a:solidFill>
+                  <a:srgbClr val="FFFFFF"/>
+                </a:solidFill>
+                <a:latin typeface="Consolas" pitchFamily="34" charset="0"/>
+                <a:ea typeface="Consolas" pitchFamily="34" charset="-122"/>
+                <a:cs typeface="Consolas" pitchFamily="34" charset="-120"/>
+              </a:rPr>
+              <a:t>BAS</a:t>
+            </a:r>
+            <a:endParaRPr lang="en-US" sz="600" dirty="0"/>
+          </a:p>
+        </p:txBody>
+      </p:sp>
+      <p:sp>
+        <p:nvSpPr>
+          <p:cNvPr id="24" name="Text 22"/>
           <p:cNvSpPr txBox="1"/>
           <p:nvPr/>
         </p:nvSpPr>
@@ -36736,6 +37468,67 @@
         </p:nvSpPr>
         <p:spPr>
           <a:xfrm>
+            <a:off x="1938528" y="1664208"/>
+            <a:ext cx="219456" cy="219456"/>
+          </a:xfrm>
+          <a:prstGeom prst="roundRect">
+            <a:avLst>
+              <a:gd name="adj" fmla="val 28000"/>
+            </a:avLst>
+          </a:prstGeom>
+          <a:solidFill>
+            <a:srgbClr val="2E6DA4"/>
+          </a:solidFill>
+          <a:ln/>
+        </p:spPr>
+      </p:sp>
+      <p:sp>
+        <p:nvSpPr>
+          <p:cNvPr id="8" name="Text 6"/>
+          <p:cNvSpPr txBox="1"/>
+          <p:nvPr/>
+        </p:nvSpPr>
+        <p:spPr>
+          <a:xfrm>
+            <a:off x="1938528" y="1664208"/>
+            <a:ext cx="219456" cy="219456"/>
+          </a:xfrm>
+          <a:prstGeom prst="rect">
+            <a:avLst/>
+          </a:prstGeom>
+          <a:noFill/>
+          <a:ln/>
+        </p:spPr>
+        <p:txBody>
+          <a:bodyPr wrap="square" lIns="0" tIns="0" rIns="0" bIns="0" rtlCol="0" anchor="ctr"/>
+          <a:lstStyle/>
+          <a:p>
+            <a:pPr algn="ctr" indent="0" marL="0">
+              <a:buNone/>
+            </a:pPr>
+            <a:r>
+              <a:rPr lang="en-US" sz="600" b="1" dirty="0">
+                <a:solidFill>
+                  <a:srgbClr val="FFFFFF"/>
+                </a:solidFill>
+                <a:latin typeface="Consolas" pitchFamily="34" charset="0"/>
+                <a:ea typeface="Consolas" pitchFamily="34" charset="-122"/>
+                <a:cs typeface="Consolas" pitchFamily="34" charset="-120"/>
+              </a:rPr>
+              <a:t>LB</a:t>
+            </a:r>
+            <a:endParaRPr lang="en-US" sz="600" dirty="0"/>
+          </a:p>
+        </p:txBody>
+      </p:sp>
+      <p:sp>
+        <p:nvSpPr>
+          <p:cNvPr id="9" name="Shape 7"/>
+          <p:cNvSpPr/>
+          <p:nvPr/>
+        </p:nvSpPr>
+        <p:spPr>
+          <a:xfrm>
             <a:off x="6094476" y="2395728"/>
             <a:ext cx="9144" cy="310896"/>
           </a:xfrm>
@@ -36754,7 +37547,7 @@
       </p:sp>
       <p:sp>
         <p:nvSpPr>
-          <p:cNvPr id="8" name="Shape 6"/>
+          <p:cNvPr id="10" name="Shape 8"/>
           <p:cNvSpPr/>
           <p:nvPr/>
         </p:nvSpPr>
@@ -36781,7 +37574,7 @@
       </p:sp>
       <p:sp>
         <p:nvSpPr>
-          <p:cNvPr id="9" name="Text 7"/>
+          <p:cNvPr id="11" name="Text 9"/>
           <p:cNvSpPr txBox="1"/>
           <p:nvPr/>
         </p:nvSpPr>
@@ -36863,7 +37656,68 @@
       </p:sp>
       <p:sp>
         <p:nvSpPr>
-          <p:cNvPr id="10" name="Shape 8"/>
+          <p:cNvPr id="12" name="Shape 10"/>
+          <p:cNvSpPr/>
+          <p:nvPr/>
+        </p:nvSpPr>
+        <p:spPr>
+          <a:xfrm>
+            <a:off x="1938528" y="2816352"/>
+            <a:ext cx="219456" cy="219456"/>
+          </a:xfrm>
+          <a:prstGeom prst="roundRect">
+            <a:avLst>
+              <a:gd name="adj" fmla="val 28000"/>
+            </a:avLst>
+          </a:prstGeom>
+          <a:solidFill>
+            <a:srgbClr val="2E6DA4"/>
+          </a:solidFill>
+          <a:ln/>
+        </p:spPr>
+      </p:sp>
+      <p:sp>
+        <p:nvSpPr>
+          <p:cNvPr id="13" name="Text 11"/>
+          <p:cNvSpPr txBox="1"/>
+          <p:nvPr/>
+        </p:nvSpPr>
+        <p:spPr>
+          <a:xfrm>
+            <a:off x="1938528" y="2816352"/>
+            <a:ext cx="219456" cy="219456"/>
+          </a:xfrm>
+          <a:prstGeom prst="rect">
+            <a:avLst/>
+          </a:prstGeom>
+          <a:noFill/>
+          <a:ln/>
+        </p:spPr>
+        <p:txBody>
+          <a:bodyPr wrap="square" lIns="0" tIns="0" rIns="0" bIns="0" rtlCol="0" anchor="ctr"/>
+          <a:lstStyle/>
+          <a:p>
+            <a:pPr algn="ctr" indent="0" marL="0">
+              <a:buNone/>
+            </a:pPr>
+            <a:r>
+              <a:rPr lang="en-US" sz="600" b="1" dirty="0">
+                <a:solidFill>
+                  <a:srgbClr val="FFFFFF"/>
+                </a:solidFill>
+                <a:latin typeface="Consolas" pitchFamily="34" charset="0"/>
+                <a:ea typeface="Consolas" pitchFamily="34" charset="-122"/>
+                <a:cs typeface="Consolas" pitchFamily="34" charset="-120"/>
+              </a:rPr>
+              <a:t>SRV</a:t>
+            </a:r>
+            <a:endParaRPr lang="en-US" sz="600" dirty="0"/>
+          </a:p>
+        </p:txBody>
+      </p:sp>
+      <p:sp>
+        <p:nvSpPr>
+          <p:cNvPr id="14" name="Shape 12"/>
           <p:cNvSpPr/>
           <p:nvPr/>
         </p:nvSpPr>
@@ -36887,7 +37741,7 @@
       </p:sp>
       <p:sp>
         <p:nvSpPr>
-          <p:cNvPr id="11" name="Shape 9"/>
+          <p:cNvPr id="15" name="Shape 13"/>
           <p:cNvSpPr/>
           <p:nvPr/>
         </p:nvSpPr>
@@ -36914,7 +37768,7 @@
       </p:sp>
       <p:sp>
         <p:nvSpPr>
-          <p:cNvPr id="12" name="Text 10"/>
+          <p:cNvPr id="16" name="Text 14"/>
           <p:cNvSpPr txBox="1"/>
           <p:nvPr/>
         </p:nvSpPr>
@@ -36996,7 +37850,68 @@
       </p:sp>
       <p:sp>
         <p:nvSpPr>
-          <p:cNvPr id="13" name="Shape 11"/>
+          <p:cNvPr id="17" name="Shape 15"/>
+          <p:cNvSpPr/>
+          <p:nvPr/>
+        </p:nvSpPr>
+        <p:spPr>
+          <a:xfrm>
+            <a:off x="1938528" y="3968496"/>
+            <a:ext cx="219456" cy="219456"/>
+          </a:xfrm>
+          <a:prstGeom prst="roundRect">
+            <a:avLst>
+              <a:gd name="adj" fmla="val 28000"/>
+            </a:avLst>
+          </a:prstGeom>
+          <a:solidFill>
+            <a:srgbClr val="2E6DA4"/>
+          </a:solidFill>
+          <a:ln/>
+        </p:spPr>
+      </p:sp>
+      <p:sp>
+        <p:nvSpPr>
+          <p:cNvPr id="18" name="Text 16"/>
+          <p:cNvSpPr txBox="1"/>
+          <p:nvPr/>
+        </p:nvSpPr>
+        <p:spPr>
+          <a:xfrm>
+            <a:off x="1938528" y="3968496"/>
+            <a:ext cx="219456" cy="219456"/>
+          </a:xfrm>
+          <a:prstGeom prst="rect">
+            <a:avLst/>
+          </a:prstGeom>
+          <a:noFill/>
+          <a:ln/>
+        </p:spPr>
+        <p:txBody>
+          <a:bodyPr wrap="square" lIns="0" tIns="0" rIns="0" bIns="0" rtlCol="0" anchor="ctr"/>
+          <a:lstStyle/>
+          <a:p>
+            <a:pPr algn="ctr" indent="0" marL="0">
+              <a:buNone/>
+            </a:pPr>
+            <a:r>
+              <a:rPr lang="en-US" sz="600" b="1" dirty="0">
+                <a:solidFill>
+                  <a:srgbClr val="FFFFFF"/>
+                </a:solidFill>
+                <a:latin typeface="Consolas" pitchFamily="34" charset="0"/>
+                <a:ea typeface="Consolas" pitchFamily="34" charset="-122"/>
+                <a:cs typeface="Consolas" pitchFamily="34" charset="-120"/>
+              </a:rPr>
+              <a:t>DB</a:t>
+            </a:r>
+            <a:endParaRPr lang="en-US" sz="600" dirty="0"/>
+          </a:p>
+        </p:txBody>
+      </p:sp>
+      <p:sp>
+        <p:nvSpPr>
+          <p:cNvPr id="19" name="Shape 17"/>
           <p:cNvSpPr/>
           <p:nvPr/>
         </p:nvSpPr>
@@ -37020,7 +37935,7 @@
       </p:sp>
       <p:sp>
         <p:nvSpPr>
-          <p:cNvPr id="14" name="Shape 12"/>
+          <p:cNvPr id="20" name="Shape 18"/>
           <p:cNvSpPr/>
           <p:nvPr/>
         </p:nvSpPr>
@@ -37047,7 +37962,7 @@
       </p:sp>
       <p:sp>
         <p:nvSpPr>
-          <p:cNvPr id="15" name="Text 13"/>
+          <p:cNvPr id="21" name="Text 19"/>
           <p:cNvSpPr txBox="1"/>
           <p:nvPr/>
         </p:nvSpPr>
@@ -37129,7 +38044,68 @@
       </p:sp>
       <p:sp>
         <p:nvSpPr>
-          <p:cNvPr id="16" name="Text 14"/>
+          <p:cNvPr id="22" name="Shape 20"/>
+          <p:cNvSpPr/>
+          <p:nvPr/>
+        </p:nvSpPr>
+        <p:spPr>
+          <a:xfrm>
+            <a:off x="1938528" y="5120640"/>
+            <a:ext cx="219456" cy="219456"/>
+          </a:xfrm>
+          <a:prstGeom prst="roundRect">
+            <a:avLst>
+              <a:gd name="adj" fmla="val 28000"/>
+            </a:avLst>
+          </a:prstGeom>
+          <a:solidFill>
+            <a:srgbClr val="2E6DA4"/>
+          </a:solidFill>
+          <a:ln/>
+        </p:spPr>
+      </p:sp>
+      <p:sp>
+        <p:nvSpPr>
+          <p:cNvPr id="23" name="Text 21"/>
+          <p:cNvSpPr txBox="1"/>
+          <p:nvPr/>
+        </p:nvSpPr>
+        <p:spPr>
+          <a:xfrm>
+            <a:off x="1938528" y="5120640"/>
+            <a:ext cx="219456" cy="219456"/>
+          </a:xfrm>
+          <a:prstGeom prst="rect">
+            <a:avLst/>
+          </a:prstGeom>
+          <a:noFill/>
+          <a:ln/>
+        </p:spPr>
+        <p:txBody>
+          <a:bodyPr wrap="square" lIns="0" tIns="0" rIns="0" bIns="0" rtlCol="0" anchor="ctr"/>
+          <a:lstStyle/>
+          <a:p>
+            <a:pPr algn="ctr" indent="0" marL="0">
+              <a:buNone/>
+            </a:pPr>
+            <a:r>
+              <a:rPr lang="en-US" sz="600" b="1" dirty="0">
+                <a:solidFill>
+                  <a:srgbClr val="FFFFFF"/>
+                </a:solidFill>
+                <a:latin typeface="Consolas" pitchFamily="34" charset="0"/>
+                <a:ea typeface="Consolas" pitchFamily="34" charset="-122"/>
+                <a:cs typeface="Consolas" pitchFamily="34" charset="-120"/>
+              </a:rPr>
+              <a:t>BAS</a:t>
+            </a:r>
+            <a:endParaRPr lang="en-US" sz="600" dirty="0"/>
+          </a:p>
+        </p:txBody>
+      </p:sp>
+      <p:sp>
+        <p:nvSpPr>
+          <p:cNvPr id="24" name="Text 22"/>
           <p:cNvSpPr txBox="1"/>
           <p:nvPr/>
         </p:nvSpPr>
@@ -37579,14 +38555,75 @@
       </p:sp>
       <p:sp>
         <p:nvSpPr>
-          <p:cNvPr id="13" name="Text 11"/>
+          <p:cNvPr id="13" name="Shape 11"/>
+          <p:cNvSpPr/>
+          <p:nvPr/>
+        </p:nvSpPr>
+        <p:spPr>
+          <a:xfrm>
+            <a:off x="969264" y="2916936"/>
+            <a:ext cx="182880" cy="182880"/>
+          </a:xfrm>
+          <a:prstGeom prst="roundRect">
+            <a:avLst>
+              <a:gd name="adj" fmla="val 28000"/>
+            </a:avLst>
+          </a:prstGeom>
+          <a:solidFill>
+            <a:srgbClr val="B5642A"/>
+          </a:solidFill>
+          <a:ln/>
+        </p:spPr>
+      </p:sp>
+      <p:sp>
+        <p:nvSpPr>
+          <p:cNvPr id="14" name="Text 12"/>
           <p:cNvSpPr txBox="1"/>
           <p:nvPr/>
         </p:nvSpPr>
         <p:spPr>
           <a:xfrm>
-            <a:off x="1005840" y="2715768"/>
-            <a:ext cx="4820260" cy="585216"/>
+            <a:off x="969264" y="2916936"/>
+            <a:ext cx="182880" cy="182880"/>
+          </a:xfrm>
+          <a:prstGeom prst="rect">
+            <a:avLst/>
+          </a:prstGeom>
+          <a:noFill/>
+          <a:ln/>
+        </p:spPr>
+        <p:txBody>
+          <a:bodyPr wrap="square" lIns="0" tIns="0" rIns="0" bIns="0" rtlCol="0" anchor="ctr"/>
+          <a:lstStyle/>
+          <a:p>
+            <a:pPr algn="ctr" indent="0" marL="0">
+              <a:buNone/>
+            </a:pPr>
+            <a:r>
+              <a:rPr lang="en-US" sz="600" b="1" dirty="0">
+                <a:solidFill>
+                  <a:srgbClr val="FFFFFF"/>
+                </a:solidFill>
+                <a:latin typeface="Consolas" pitchFamily="34" charset="0"/>
+                <a:ea typeface="Consolas" pitchFamily="34" charset="-122"/>
+                <a:cs typeface="Consolas" pitchFamily="34" charset="-120"/>
+              </a:rPr>
+              <a:t>LB</a:t>
+            </a:r>
+            <a:endParaRPr lang="en-US" sz="600" dirty="0"/>
+          </a:p>
+        </p:txBody>
+      </p:sp>
+      <p:sp>
+        <p:nvSpPr>
+          <p:cNvPr id="15" name="Text 13"/>
+          <p:cNvSpPr txBox="1"/>
+          <p:nvPr/>
+        </p:nvSpPr>
+        <p:spPr>
+          <a:xfrm>
+            <a:off x="1225296" y="2715768"/>
+            <a:ext cx="4600804" cy="585216"/>
           </a:xfrm>
           <a:prstGeom prst="rect">
             <a:avLst/>
@@ -37641,7 +38678,7 @@
       </p:sp>
       <p:sp>
         <p:nvSpPr>
-          <p:cNvPr id="14" name="Shape 12"/>
+          <p:cNvPr id="16" name="Shape 14"/>
           <p:cNvSpPr/>
           <p:nvPr/>
         </p:nvSpPr>
@@ -37663,14 +38700,75 @@
       </p:sp>
       <p:sp>
         <p:nvSpPr>
-          <p:cNvPr id="15" name="Text 13"/>
+          <p:cNvPr id="17" name="Shape 15"/>
+          <p:cNvSpPr/>
+          <p:nvPr/>
+        </p:nvSpPr>
+        <p:spPr>
+          <a:xfrm>
+            <a:off x="969264" y="3557016"/>
+            <a:ext cx="182880" cy="182880"/>
+          </a:xfrm>
+          <a:prstGeom prst="roundRect">
+            <a:avLst>
+              <a:gd name="adj" fmla="val 28000"/>
+            </a:avLst>
+          </a:prstGeom>
+          <a:solidFill>
+            <a:srgbClr val="B5642A"/>
+          </a:solidFill>
+          <a:ln/>
+        </p:spPr>
+      </p:sp>
+      <p:sp>
+        <p:nvSpPr>
+          <p:cNvPr id="18" name="Text 16"/>
           <p:cNvSpPr txBox="1"/>
           <p:nvPr/>
         </p:nvSpPr>
         <p:spPr>
           <a:xfrm>
-            <a:off x="1005840" y="3355848"/>
-            <a:ext cx="4820260" cy="585216"/>
+            <a:off x="969264" y="3557016"/>
+            <a:ext cx="182880" cy="182880"/>
+          </a:xfrm>
+          <a:prstGeom prst="rect">
+            <a:avLst/>
+          </a:prstGeom>
+          <a:noFill/>
+          <a:ln/>
+        </p:spPr>
+        <p:txBody>
+          <a:bodyPr wrap="square" lIns="0" tIns="0" rIns="0" bIns="0" rtlCol="0" anchor="ctr"/>
+          <a:lstStyle/>
+          <a:p>
+            <a:pPr algn="ctr" indent="0" marL="0">
+              <a:buNone/>
+            </a:pPr>
+            <a:r>
+              <a:rPr lang="en-US" sz="600" b="1" dirty="0">
+                <a:solidFill>
+                  <a:srgbClr val="FFFFFF"/>
+                </a:solidFill>
+                <a:latin typeface="Consolas" pitchFamily="34" charset="0"/>
+                <a:ea typeface="Consolas" pitchFamily="34" charset="-122"/>
+                <a:cs typeface="Consolas" pitchFamily="34" charset="-120"/>
+              </a:rPr>
+              <a:t>SRV</a:t>
+            </a:r>
+            <a:endParaRPr lang="en-US" sz="600" dirty="0"/>
+          </a:p>
+        </p:txBody>
+      </p:sp>
+      <p:sp>
+        <p:nvSpPr>
+          <p:cNvPr id="19" name="Text 17"/>
+          <p:cNvSpPr txBox="1"/>
+          <p:nvPr/>
+        </p:nvSpPr>
+        <p:spPr>
+          <a:xfrm>
+            <a:off x="1225296" y="3355848"/>
+            <a:ext cx="4600804" cy="585216"/>
           </a:xfrm>
           <a:prstGeom prst="rect">
             <a:avLst/>
@@ -37725,7 +38823,7 @@
       </p:sp>
       <p:sp>
         <p:nvSpPr>
-          <p:cNvPr id="16" name="Shape 14"/>
+          <p:cNvPr id="20" name="Shape 18"/>
           <p:cNvSpPr/>
           <p:nvPr/>
         </p:nvSpPr>
@@ -37747,14 +38845,75 @@
       </p:sp>
       <p:sp>
         <p:nvSpPr>
-          <p:cNvPr id="17" name="Text 15"/>
+          <p:cNvPr id="21" name="Shape 19"/>
+          <p:cNvSpPr/>
+          <p:nvPr/>
+        </p:nvSpPr>
+        <p:spPr>
+          <a:xfrm>
+            <a:off x="969264" y="4197096"/>
+            <a:ext cx="182880" cy="182880"/>
+          </a:xfrm>
+          <a:prstGeom prst="roundRect">
+            <a:avLst>
+              <a:gd name="adj" fmla="val 28000"/>
+            </a:avLst>
+          </a:prstGeom>
+          <a:solidFill>
+            <a:srgbClr val="B5642A"/>
+          </a:solidFill>
+          <a:ln/>
+        </p:spPr>
+      </p:sp>
+      <p:sp>
+        <p:nvSpPr>
+          <p:cNvPr id="22" name="Text 20"/>
           <p:cNvSpPr txBox="1"/>
           <p:nvPr/>
         </p:nvSpPr>
         <p:spPr>
           <a:xfrm>
-            <a:off x="1005840" y="3995928"/>
-            <a:ext cx="4820260" cy="585216"/>
+            <a:off x="969264" y="4197096"/>
+            <a:ext cx="182880" cy="182880"/>
+          </a:xfrm>
+          <a:prstGeom prst="rect">
+            <a:avLst/>
+          </a:prstGeom>
+          <a:noFill/>
+          <a:ln/>
+        </p:spPr>
+        <p:txBody>
+          <a:bodyPr wrap="square" lIns="0" tIns="0" rIns="0" bIns="0" rtlCol="0" anchor="ctr"/>
+          <a:lstStyle/>
+          <a:p>
+            <a:pPr algn="ctr" indent="0" marL="0">
+              <a:buNone/>
+            </a:pPr>
+            <a:r>
+              <a:rPr lang="en-US" sz="600" b="1" dirty="0">
+                <a:solidFill>
+                  <a:srgbClr val="FFFFFF"/>
+                </a:solidFill>
+                <a:latin typeface="Consolas" pitchFamily="34" charset="0"/>
+                <a:ea typeface="Consolas" pitchFamily="34" charset="-122"/>
+                <a:cs typeface="Consolas" pitchFamily="34" charset="-120"/>
+              </a:rPr>
+              <a:t>DB</a:t>
+            </a:r>
+            <a:endParaRPr lang="en-US" sz="600" dirty="0"/>
+          </a:p>
+        </p:txBody>
+      </p:sp>
+      <p:sp>
+        <p:nvSpPr>
+          <p:cNvPr id="23" name="Text 21"/>
+          <p:cNvSpPr txBox="1"/>
+          <p:nvPr/>
+        </p:nvSpPr>
+        <p:spPr>
+          <a:xfrm>
+            <a:off x="1225296" y="3995928"/>
+            <a:ext cx="4600804" cy="585216"/>
           </a:xfrm>
           <a:prstGeom prst="rect">
             <a:avLst/>
@@ -37809,7 +38968,7 @@
       </p:sp>
       <p:sp>
         <p:nvSpPr>
-          <p:cNvPr id="18" name="Shape 16"/>
+          <p:cNvPr id="24" name="Shape 22"/>
           <p:cNvSpPr/>
           <p:nvPr/>
         </p:nvSpPr>
@@ -37836,7 +38995,7 @@
       </p:sp>
       <p:sp>
         <p:nvSpPr>
-          <p:cNvPr id="19" name="Text 17"/>
+          <p:cNvPr id="25" name="Text 23"/>
           <p:cNvSpPr txBox="1"/>
           <p:nvPr/>
         </p:nvSpPr>
@@ -37875,7 +39034,7 @@
       </p:sp>
       <p:sp>
         <p:nvSpPr>
-          <p:cNvPr id="20" name="Shape 18"/>
+          <p:cNvPr id="26" name="Shape 24"/>
           <p:cNvSpPr/>
           <p:nvPr/>
         </p:nvSpPr>
@@ -37897,14 +39056,75 @@
       </p:sp>
       <p:sp>
         <p:nvSpPr>
-          <p:cNvPr id="21" name="Text 19"/>
+          <p:cNvPr id="27" name="Shape 25"/>
+          <p:cNvSpPr/>
+          <p:nvPr/>
+        </p:nvSpPr>
+        <p:spPr>
+          <a:xfrm>
+            <a:off x="6329020" y="2916936"/>
+            <a:ext cx="182880" cy="182880"/>
+          </a:xfrm>
+          <a:prstGeom prst="roundRect">
+            <a:avLst>
+              <a:gd name="adj" fmla="val 28000"/>
+            </a:avLst>
+          </a:prstGeom>
+          <a:solidFill>
+            <a:srgbClr val="B5642A"/>
+          </a:solidFill>
+          <a:ln/>
+        </p:spPr>
+      </p:sp>
+      <p:sp>
+        <p:nvSpPr>
+          <p:cNvPr id="28" name="Text 26"/>
           <p:cNvSpPr txBox="1"/>
           <p:nvPr/>
         </p:nvSpPr>
         <p:spPr>
           <a:xfrm>
-            <a:off x="6365596" y="2715768"/>
-            <a:ext cx="4820260" cy="585216"/>
+            <a:off x="6329020" y="2916936"/>
+            <a:ext cx="182880" cy="182880"/>
+          </a:xfrm>
+          <a:prstGeom prst="rect">
+            <a:avLst/>
+          </a:prstGeom>
+          <a:noFill/>
+          <a:ln/>
+        </p:spPr>
+        <p:txBody>
+          <a:bodyPr wrap="square" lIns="0" tIns="0" rIns="0" bIns="0" rtlCol="0" anchor="ctr"/>
+          <a:lstStyle/>
+          <a:p>
+            <a:pPr algn="ctr" indent="0" marL="0">
+              <a:buNone/>
+            </a:pPr>
+            <a:r>
+              <a:rPr lang="en-US" sz="600" b="1" dirty="0">
+                <a:solidFill>
+                  <a:srgbClr val="FFFFFF"/>
+                </a:solidFill>
+                <a:latin typeface="Consolas" pitchFamily="34" charset="0"/>
+                <a:ea typeface="Consolas" pitchFamily="34" charset="-122"/>
+                <a:cs typeface="Consolas" pitchFamily="34" charset="-120"/>
+              </a:rPr>
+              <a:t>LB</a:t>
+            </a:r>
+            <a:endParaRPr lang="en-US" sz="600" dirty="0"/>
+          </a:p>
+        </p:txBody>
+      </p:sp>
+      <p:sp>
+        <p:nvSpPr>
+          <p:cNvPr id="29" name="Text 27"/>
+          <p:cNvSpPr txBox="1"/>
+          <p:nvPr/>
+        </p:nvSpPr>
+        <p:spPr>
+          <a:xfrm>
+            <a:off x="6585052" y="2715768"/>
+            <a:ext cx="4600804" cy="585216"/>
           </a:xfrm>
           <a:prstGeom prst="rect">
             <a:avLst/>
@@ -37959,7 +39179,7 @@
       </p:sp>
       <p:sp>
         <p:nvSpPr>
-          <p:cNvPr id="22" name="Shape 20"/>
+          <p:cNvPr id="30" name="Shape 28"/>
           <p:cNvSpPr/>
           <p:nvPr/>
         </p:nvSpPr>
@@ -37981,14 +39201,75 @@
       </p:sp>
       <p:sp>
         <p:nvSpPr>
-          <p:cNvPr id="23" name="Text 21"/>
+          <p:cNvPr id="31" name="Shape 29"/>
+          <p:cNvSpPr/>
+          <p:nvPr/>
+        </p:nvSpPr>
+        <p:spPr>
+          <a:xfrm>
+            <a:off x="6329020" y="3557016"/>
+            <a:ext cx="182880" cy="182880"/>
+          </a:xfrm>
+          <a:prstGeom prst="roundRect">
+            <a:avLst>
+              <a:gd name="adj" fmla="val 28000"/>
+            </a:avLst>
+          </a:prstGeom>
+          <a:solidFill>
+            <a:srgbClr val="B5642A"/>
+          </a:solidFill>
+          <a:ln/>
+        </p:spPr>
+      </p:sp>
+      <p:sp>
+        <p:nvSpPr>
+          <p:cNvPr id="32" name="Text 30"/>
           <p:cNvSpPr txBox="1"/>
           <p:nvPr/>
         </p:nvSpPr>
         <p:spPr>
           <a:xfrm>
-            <a:off x="6365596" y="3355848"/>
-            <a:ext cx="4820260" cy="585216"/>
+            <a:off x="6329020" y="3557016"/>
+            <a:ext cx="182880" cy="182880"/>
+          </a:xfrm>
+          <a:prstGeom prst="rect">
+            <a:avLst/>
+          </a:prstGeom>
+          <a:noFill/>
+          <a:ln/>
+        </p:spPr>
+        <p:txBody>
+          <a:bodyPr wrap="square" lIns="0" tIns="0" rIns="0" bIns="0" rtlCol="0" anchor="ctr"/>
+          <a:lstStyle/>
+          <a:p>
+            <a:pPr algn="ctr" indent="0" marL="0">
+              <a:buNone/>
+            </a:pPr>
+            <a:r>
+              <a:rPr lang="en-US" sz="600" b="1" dirty="0">
+                <a:solidFill>
+                  <a:srgbClr val="FFFFFF"/>
+                </a:solidFill>
+                <a:latin typeface="Consolas" pitchFamily="34" charset="0"/>
+                <a:ea typeface="Consolas" pitchFamily="34" charset="-122"/>
+                <a:cs typeface="Consolas" pitchFamily="34" charset="-120"/>
+              </a:rPr>
+              <a:t>SRV</a:t>
+            </a:r>
+            <a:endParaRPr lang="en-US" sz="600" dirty="0"/>
+          </a:p>
+        </p:txBody>
+      </p:sp>
+      <p:sp>
+        <p:nvSpPr>
+          <p:cNvPr id="33" name="Text 31"/>
+          <p:cNvSpPr txBox="1"/>
+          <p:nvPr/>
+        </p:nvSpPr>
+        <p:spPr>
+          <a:xfrm>
+            <a:off x="6585052" y="3355848"/>
+            <a:ext cx="4600804" cy="585216"/>
           </a:xfrm>
           <a:prstGeom prst="rect">
             <a:avLst/>
@@ -38043,7 +39324,7 @@
       </p:sp>
       <p:sp>
         <p:nvSpPr>
-          <p:cNvPr id="24" name="Shape 22"/>
+          <p:cNvPr id="34" name="Shape 32"/>
           <p:cNvSpPr/>
           <p:nvPr/>
         </p:nvSpPr>
@@ -38065,14 +39346,75 @@
       </p:sp>
       <p:sp>
         <p:nvSpPr>
-          <p:cNvPr id="25" name="Text 23"/>
+          <p:cNvPr id="35" name="Shape 33"/>
+          <p:cNvSpPr/>
+          <p:nvPr/>
+        </p:nvSpPr>
+        <p:spPr>
+          <a:xfrm>
+            <a:off x="6329020" y="4197096"/>
+            <a:ext cx="182880" cy="182880"/>
+          </a:xfrm>
+          <a:prstGeom prst="roundRect">
+            <a:avLst>
+              <a:gd name="adj" fmla="val 28000"/>
+            </a:avLst>
+          </a:prstGeom>
+          <a:solidFill>
+            <a:srgbClr val="B5642A"/>
+          </a:solidFill>
+          <a:ln/>
+        </p:spPr>
+      </p:sp>
+      <p:sp>
+        <p:nvSpPr>
+          <p:cNvPr id="36" name="Text 34"/>
           <p:cNvSpPr txBox="1"/>
           <p:nvPr/>
         </p:nvSpPr>
         <p:spPr>
           <a:xfrm>
-            <a:off x="6365596" y="3995928"/>
-            <a:ext cx="4820260" cy="585216"/>
+            <a:off x="6329020" y="4197096"/>
+            <a:ext cx="182880" cy="182880"/>
+          </a:xfrm>
+          <a:prstGeom prst="rect">
+            <a:avLst/>
+          </a:prstGeom>
+          <a:noFill/>
+          <a:ln/>
+        </p:spPr>
+        <p:txBody>
+          <a:bodyPr wrap="square" lIns="0" tIns="0" rIns="0" bIns="0" rtlCol="0" anchor="ctr"/>
+          <a:lstStyle/>
+          <a:p>
+            <a:pPr algn="ctr" indent="0" marL="0">
+              <a:buNone/>
+            </a:pPr>
+            <a:r>
+              <a:rPr lang="en-US" sz="600" b="1" dirty="0">
+                <a:solidFill>
+                  <a:srgbClr val="FFFFFF"/>
+                </a:solidFill>
+                <a:latin typeface="Consolas" pitchFamily="34" charset="0"/>
+                <a:ea typeface="Consolas" pitchFamily="34" charset="-122"/>
+                <a:cs typeface="Consolas" pitchFamily="34" charset="-120"/>
+              </a:rPr>
+              <a:t>DB</a:t>
+            </a:r>
+            <a:endParaRPr lang="en-US" sz="600" dirty="0"/>
+          </a:p>
+        </p:txBody>
+      </p:sp>
+      <p:sp>
+        <p:nvSpPr>
+          <p:cNvPr id="37" name="Text 35"/>
+          <p:cNvSpPr txBox="1"/>
+          <p:nvPr/>
+        </p:nvSpPr>
+        <p:spPr>
+          <a:xfrm>
+            <a:off x="6585052" y="3995928"/>
+            <a:ext cx="4600804" cy="585216"/>
           </a:xfrm>
           <a:prstGeom prst="rect">
             <a:avLst/>
@@ -38127,7 +39469,7 @@
       </p:sp>
       <p:sp>
         <p:nvSpPr>
-          <p:cNvPr id="26" name="Shape 24"/>
+          <p:cNvPr id="38" name="Shape 36"/>
           <p:cNvSpPr/>
           <p:nvPr/>
         </p:nvSpPr>
@@ -38149,14 +39491,75 @@
       </p:sp>
       <p:sp>
         <p:nvSpPr>
-          <p:cNvPr id="27" name="Text 25"/>
+          <p:cNvPr id="39" name="Shape 37"/>
+          <p:cNvSpPr/>
+          <p:nvPr/>
+        </p:nvSpPr>
+        <p:spPr>
+          <a:xfrm>
+            <a:off x="914400" y="5015484"/>
+            <a:ext cx="201168" cy="201168"/>
+          </a:xfrm>
+          <a:prstGeom prst="roundRect">
+            <a:avLst>
+              <a:gd name="adj" fmla="val 28000"/>
+            </a:avLst>
+          </a:prstGeom>
+          <a:solidFill>
+            <a:srgbClr val="B5642A"/>
+          </a:solidFill>
+          <a:ln/>
+        </p:spPr>
+      </p:sp>
+      <p:sp>
+        <p:nvSpPr>
+          <p:cNvPr id="40" name="Text 38"/>
           <p:cNvSpPr txBox="1"/>
           <p:nvPr/>
         </p:nvSpPr>
         <p:spPr>
           <a:xfrm>
-            <a:off x="914400" y="4864608"/>
-            <a:ext cx="10362895" cy="502920"/>
+            <a:off x="914400" y="5015484"/>
+            <a:ext cx="201168" cy="201168"/>
+          </a:xfrm>
+          <a:prstGeom prst="rect">
+            <a:avLst/>
+          </a:prstGeom>
+          <a:noFill/>
+          <a:ln/>
+        </p:spPr>
+        <p:txBody>
+          <a:bodyPr wrap="square" lIns="0" tIns="0" rIns="0" bIns="0" rtlCol="0" anchor="ctr"/>
+          <a:lstStyle/>
+          <a:p>
+            <a:pPr algn="ctr" indent="0" marL="0">
+              <a:buNone/>
+            </a:pPr>
+            <a:r>
+              <a:rPr lang="en-US" sz="600" b="1" dirty="0">
+                <a:solidFill>
+                  <a:srgbClr val="FFFFFF"/>
+                </a:solidFill>
+                <a:latin typeface="Consolas" pitchFamily="34" charset="0"/>
+                <a:ea typeface="Consolas" pitchFamily="34" charset="-122"/>
+                <a:cs typeface="Consolas" pitchFamily="34" charset="-120"/>
+              </a:rPr>
+              <a:t>BAS</a:t>
+            </a:r>
+            <a:endParaRPr lang="en-US" sz="600" dirty="0"/>
+          </a:p>
+        </p:txBody>
+      </p:sp>
+      <p:sp>
+        <p:nvSpPr>
+          <p:cNvPr id="41" name="Text 39"/>
+          <p:cNvSpPr txBox="1"/>
+          <p:nvPr/>
+        </p:nvSpPr>
+        <p:spPr>
+          <a:xfrm>
+            <a:off x="1188720" y="4864608"/>
+            <a:ext cx="10088575" cy="502920"/>
           </a:xfrm>
           <a:prstGeom prst="rect">
             <a:avLst/>
@@ -38191,7 +39594,7 @@
       </p:sp>
       <p:sp>
         <p:nvSpPr>
-          <p:cNvPr id="28" name="Shape 26"/>
+          <p:cNvPr id="42" name="Shape 40"/>
           <p:cNvSpPr/>
           <p:nvPr/>
         </p:nvSpPr>
@@ -38218,7 +39621,7 @@
       </p:sp>
       <p:sp>
         <p:nvSpPr>
-          <p:cNvPr id="29" name="Text 27"/>
+          <p:cNvPr id="43" name="Text 41"/>
           <p:cNvSpPr txBox="1"/>
           <p:nvPr/>
         </p:nvSpPr>
@@ -38257,7 +39660,7 @@
       </p:sp>
       <p:sp>
         <p:nvSpPr>
-          <p:cNvPr id="30" name="Text 28"/>
+          <p:cNvPr id="44" name="Text 42"/>
           <p:cNvSpPr txBox="1"/>
           <p:nvPr/>
         </p:nvSpPr>
@@ -38707,14 +40110,75 @@
       </p:sp>
       <p:sp>
         <p:nvSpPr>
-          <p:cNvPr id="13" name="Text 11"/>
+          <p:cNvPr id="13" name="Shape 11"/>
+          <p:cNvSpPr/>
+          <p:nvPr/>
+        </p:nvSpPr>
+        <p:spPr>
+          <a:xfrm>
+            <a:off x="969264" y="2916936"/>
+            <a:ext cx="182880" cy="182880"/>
+          </a:xfrm>
+          <a:prstGeom prst="roundRect">
+            <a:avLst>
+              <a:gd name="adj" fmla="val 28000"/>
+            </a:avLst>
+          </a:prstGeom>
+          <a:solidFill>
+            <a:srgbClr val="2E6DA4"/>
+          </a:solidFill>
+          <a:ln/>
+        </p:spPr>
+      </p:sp>
+      <p:sp>
+        <p:nvSpPr>
+          <p:cNvPr id="14" name="Text 12"/>
           <p:cNvSpPr txBox="1"/>
           <p:nvPr/>
         </p:nvSpPr>
         <p:spPr>
           <a:xfrm>
-            <a:off x="1005840" y="2715768"/>
-            <a:ext cx="4820260" cy="585216"/>
+            <a:off x="969264" y="2916936"/>
+            <a:ext cx="182880" cy="182880"/>
+          </a:xfrm>
+          <a:prstGeom prst="rect">
+            <a:avLst/>
+          </a:prstGeom>
+          <a:noFill/>
+          <a:ln/>
+        </p:spPr>
+        <p:txBody>
+          <a:bodyPr wrap="square" lIns="0" tIns="0" rIns="0" bIns="0" rtlCol="0" anchor="ctr"/>
+          <a:lstStyle/>
+          <a:p>
+            <a:pPr algn="ctr" indent="0" marL="0">
+              <a:buNone/>
+            </a:pPr>
+            <a:r>
+              <a:rPr lang="en-US" sz="600" b="1" dirty="0">
+                <a:solidFill>
+                  <a:srgbClr val="FFFFFF"/>
+                </a:solidFill>
+                <a:latin typeface="Consolas" pitchFamily="34" charset="0"/>
+                <a:ea typeface="Consolas" pitchFamily="34" charset="-122"/>
+                <a:cs typeface="Consolas" pitchFamily="34" charset="-120"/>
+              </a:rPr>
+              <a:t>LB</a:t>
+            </a:r>
+            <a:endParaRPr lang="en-US" sz="600" dirty="0"/>
+          </a:p>
+        </p:txBody>
+      </p:sp>
+      <p:sp>
+        <p:nvSpPr>
+          <p:cNvPr id="15" name="Text 13"/>
+          <p:cNvSpPr txBox="1"/>
+          <p:nvPr/>
+        </p:nvSpPr>
+        <p:spPr>
+          <a:xfrm>
+            <a:off x="1225296" y="2715768"/>
+            <a:ext cx="4600804" cy="585216"/>
           </a:xfrm>
           <a:prstGeom prst="rect">
             <a:avLst/>
@@ -38769,7 +40233,7 @@
       </p:sp>
       <p:sp>
         <p:nvSpPr>
-          <p:cNvPr id="14" name="Shape 12"/>
+          <p:cNvPr id="16" name="Shape 14"/>
           <p:cNvSpPr/>
           <p:nvPr/>
         </p:nvSpPr>
@@ -38791,14 +40255,75 @@
       </p:sp>
       <p:sp>
         <p:nvSpPr>
-          <p:cNvPr id="15" name="Text 13"/>
+          <p:cNvPr id="17" name="Shape 15"/>
+          <p:cNvSpPr/>
+          <p:nvPr/>
+        </p:nvSpPr>
+        <p:spPr>
+          <a:xfrm>
+            <a:off x="969264" y="3557016"/>
+            <a:ext cx="182880" cy="182880"/>
+          </a:xfrm>
+          <a:prstGeom prst="roundRect">
+            <a:avLst>
+              <a:gd name="adj" fmla="val 28000"/>
+            </a:avLst>
+          </a:prstGeom>
+          <a:solidFill>
+            <a:srgbClr val="2E6DA4"/>
+          </a:solidFill>
+          <a:ln/>
+        </p:spPr>
+      </p:sp>
+      <p:sp>
+        <p:nvSpPr>
+          <p:cNvPr id="18" name="Text 16"/>
           <p:cNvSpPr txBox="1"/>
           <p:nvPr/>
         </p:nvSpPr>
         <p:spPr>
           <a:xfrm>
-            <a:off x="1005840" y="3355848"/>
-            <a:ext cx="4820260" cy="585216"/>
+            <a:off x="969264" y="3557016"/>
+            <a:ext cx="182880" cy="182880"/>
+          </a:xfrm>
+          <a:prstGeom prst="rect">
+            <a:avLst/>
+          </a:prstGeom>
+          <a:noFill/>
+          <a:ln/>
+        </p:spPr>
+        <p:txBody>
+          <a:bodyPr wrap="square" lIns="0" tIns="0" rIns="0" bIns="0" rtlCol="0" anchor="ctr"/>
+          <a:lstStyle/>
+          <a:p>
+            <a:pPr algn="ctr" indent="0" marL="0">
+              <a:buNone/>
+            </a:pPr>
+            <a:r>
+              <a:rPr lang="en-US" sz="600" b="1" dirty="0">
+                <a:solidFill>
+                  <a:srgbClr val="FFFFFF"/>
+                </a:solidFill>
+                <a:latin typeface="Consolas" pitchFamily="34" charset="0"/>
+                <a:ea typeface="Consolas" pitchFamily="34" charset="-122"/>
+                <a:cs typeface="Consolas" pitchFamily="34" charset="-120"/>
+              </a:rPr>
+              <a:t>SRV</a:t>
+            </a:r>
+            <a:endParaRPr lang="en-US" sz="600" dirty="0"/>
+          </a:p>
+        </p:txBody>
+      </p:sp>
+      <p:sp>
+        <p:nvSpPr>
+          <p:cNvPr id="19" name="Text 17"/>
+          <p:cNvSpPr txBox="1"/>
+          <p:nvPr/>
+        </p:nvSpPr>
+        <p:spPr>
+          <a:xfrm>
+            <a:off x="1225296" y="3355848"/>
+            <a:ext cx="4600804" cy="585216"/>
           </a:xfrm>
           <a:prstGeom prst="rect">
             <a:avLst/>
@@ -38853,7 +40378,7 @@
       </p:sp>
       <p:sp>
         <p:nvSpPr>
-          <p:cNvPr id="16" name="Shape 14"/>
+          <p:cNvPr id="20" name="Shape 18"/>
           <p:cNvSpPr/>
           <p:nvPr/>
         </p:nvSpPr>
@@ -38875,14 +40400,75 @@
       </p:sp>
       <p:sp>
         <p:nvSpPr>
-          <p:cNvPr id="17" name="Text 15"/>
+          <p:cNvPr id="21" name="Shape 19"/>
+          <p:cNvSpPr/>
+          <p:nvPr/>
+        </p:nvSpPr>
+        <p:spPr>
+          <a:xfrm>
+            <a:off x="969264" y="4197096"/>
+            <a:ext cx="182880" cy="182880"/>
+          </a:xfrm>
+          <a:prstGeom prst="roundRect">
+            <a:avLst>
+              <a:gd name="adj" fmla="val 28000"/>
+            </a:avLst>
+          </a:prstGeom>
+          <a:solidFill>
+            <a:srgbClr val="2E6DA4"/>
+          </a:solidFill>
+          <a:ln/>
+        </p:spPr>
+      </p:sp>
+      <p:sp>
+        <p:nvSpPr>
+          <p:cNvPr id="22" name="Text 20"/>
           <p:cNvSpPr txBox="1"/>
           <p:nvPr/>
         </p:nvSpPr>
         <p:spPr>
           <a:xfrm>
-            <a:off x="1005840" y="3995928"/>
-            <a:ext cx="4820260" cy="585216"/>
+            <a:off x="969264" y="4197096"/>
+            <a:ext cx="182880" cy="182880"/>
+          </a:xfrm>
+          <a:prstGeom prst="rect">
+            <a:avLst/>
+          </a:prstGeom>
+          <a:noFill/>
+          <a:ln/>
+        </p:spPr>
+        <p:txBody>
+          <a:bodyPr wrap="square" lIns="0" tIns="0" rIns="0" bIns="0" rtlCol="0" anchor="ctr"/>
+          <a:lstStyle/>
+          <a:p>
+            <a:pPr algn="ctr" indent="0" marL="0">
+              <a:buNone/>
+            </a:pPr>
+            <a:r>
+              <a:rPr lang="en-US" sz="600" b="1" dirty="0">
+                <a:solidFill>
+                  <a:srgbClr val="FFFFFF"/>
+                </a:solidFill>
+                <a:latin typeface="Consolas" pitchFamily="34" charset="0"/>
+                <a:ea typeface="Consolas" pitchFamily="34" charset="-122"/>
+                <a:cs typeface="Consolas" pitchFamily="34" charset="-120"/>
+              </a:rPr>
+              <a:t>DB</a:t>
+            </a:r>
+            <a:endParaRPr lang="en-US" sz="600" dirty="0"/>
+          </a:p>
+        </p:txBody>
+      </p:sp>
+      <p:sp>
+        <p:nvSpPr>
+          <p:cNvPr id="23" name="Text 21"/>
+          <p:cNvSpPr txBox="1"/>
+          <p:nvPr/>
+        </p:nvSpPr>
+        <p:spPr>
+          <a:xfrm>
+            <a:off x="1225296" y="3995928"/>
+            <a:ext cx="4600804" cy="585216"/>
           </a:xfrm>
           <a:prstGeom prst="rect">
             <a:avLst/>
@@ -38937,7 +40523,7 @@
       </p:sp>
       <p:sp>
         <p:nvSpPr>
-          <p:cNvPr id="18" name="Shape 16"/>
+          <p:cNvPr id="24" name="Shape 22"/>
           <p:cNvSpPr/>
           <p:nvPr/>
         </p:nvSpPr>
@@ -38964,7 +40550,7 @@
       </p:sp>
       <p:sp>
         <p:nvSpPr>
-          <p:cNvPr id="19" name="Text 17"/>
+          <p:cNvPr id="25" name="Text 23"/>
           <p:cNvSpPr txBox="1"/>
           <p:nvPr/>
         </p:nvSpPr>
@@ -39003,7 +40589,7 @@
       </p:sp>
       <p:sp>
         <p:nvSpPr>
-          <p:cNvPr id="20" name="Shape 18"/>
+          <p:cNvPr id="26" name="Shape 24"/>
           <p:cNvSpPr/>
           <p:nvPr/>
         </p:nvSpPr>
@@ -39025,14 +40611,75 @@
       </p:sp>
       <p:sp>
         <p:nvSpPr>
-          <p:cNvPr id="21" name="Text 19"/>
+          <p:cNvPr id="27" name="Shape 25"/>
+          <p:cNvSpPr/>
+          <p:nvPr/>
+        </p:nvSpPr>
+        <p:spPr>
+          <a:xfrm>
+            <a:off x="6329020" y="2916936"/>
+            <a:ext cx="182880" cy="182880"/>
+          </a:xfrm>
+          <a:prstGeom prst="roundRect">
+            <a:avLst>
+              <a:gd name="adj" fmla="val 28000"/>
+            </a:avLst>
+          </a:prstGeom>
+          <a:solidFill>
+            <a:srgbClr val="2E6DA4"/>
+          </a:solidFill>
+          <a:ln/>
+        </p:spPr>
+      </p:sp>
+      <p:sp>
+        <p:nvSpPr>
+          <p:cNvPr id="28" name="Text 26"/>
           <p:cNvSpPr txBox="1"/>
           <p:nvPr/>
         </p:nvSpPr>
         <p:spPr>
           <a:xfrm>
-            <a:off x="6365596" y="2715768"/>
-            <a:ext cx="4820260" cy="585216"/>
+            <a:off x="6329020" y="2916936"/>
+            <a:ext cx="182880" cy="182880"/>
+          </a:xfrm>
+          <a:prstGeom prst="rect">
+            <a:avLst/>
+          </a:prstGeom>
+          <a:noFill/>
+          <a:ln/>
+        </p:spPr>
+        <p:txBody>
+          <a:bodyPr wrap="square" lIns="0" tIns="0" rIns="0" bIns="0" rtlCol="0" anchor="ctr"/>
+          <a:lstStyle/>
+          <a:p>
+            <a:pPr algn="ctr" indent="0" marL="0">
+              <a:buNone/>
+            </a:pPr>
+            <a:r>
+              <a:rPr lang="en-US" sz="600" b="1" dirty="0">
+                <a:solidFill>
+                  <a:srgbClr val="FFFFFF"/>
+                </a:solidFill>
+                <a:latin typeface="Consolas" pitchFamily="34" charset="0"/>
+                <a:ea typeface="Consolas" pitchFamily="34" charset="-122"/>
+                <a:cs typeface="Consolas" pitchFamily="34" charset="-120"/>
+              </a:rPr>
+              <a:t>LB</a:t>
+            </a:r>
+            <a:endParaRPr lang="en-US" sz="600" dirty="0"/>
+          </a:p>
+        </p:txBody>
+      </p:sp>
+      <p:sp>
+        <p:nvSpPr>
+          <p:cNvPr id="29" name="Text 27"/>
+          <p:cNvSpPr txBox="1"/>
+          <p:nvPr/>
+        </p:nvSpPr>
+        <p:spPr>
+          <a:xfrm>
+            <a:off x="6585052" y="2715768"/>
+            <a:ext cx="4600804" cy="585216"/>
           </a:xfrm>
           <a:prstGeom prst="rect">
             <a:avLst/>
@@ -39087,7 +40734,7 @@
       </p:sp>
       <p:sp>
         <p:nvSpPr>
-          <p:cNvPr id="22" name="Shape 20"/>
+          <p:cNvPr id="30" name="Shape 28"/>
           <p:cNvSpPr/>
           <p:nvPr/>
         </p:nvSpPr>
@@ -39109,14 +40756,75 @@
       </p:sp>
       <p:sp>
         <p:nvSpPr>
-          <p:cNvPr id="23" name="Text 21"/>
+          <p:cNvPr id="31" name="Shape 29"/>
+          <p:cNvSpPr/>
+          <p:nvPr/>
+        </p:nvSpPr>
+        <p:spPr>
+          <a:xfrm>
+            <a:off x="6329020" y="3557016"/>
+            <a:ext cx="182880" cy="182880"/>
+          </a:xfrm>
+          <a:prstGeom prst="roundRect">
+            <a:avLst>
+              <a:gd name="adj" fmla="val 28000"/>
+            </a:avLst>
+          </a:prstGeom>
+          <a:solidFill>
+            <a:srgbClr val="2E6DA4"/>
+          </a:solidFill>
+          <a:ln/>
+        </p:spPr>
+      </p:sp>
+      <p:sp>
+        <p:nvSpPr>
+          <p:cNvPr id="32" name="Text 30"/>
           <p:cNvSpPr txBox="1"/>
           <p:nvPr/>
         </p:nvSpPr>
         <p:spPr>
           <a:xfrm>
-            <a:off x="6365596" y="3355848"/>
-            <a:ext cx="4820260" cy="585216"/>
+            <a:off x="6329020" y="3557016"/>
+            <a:ext cx="182880" cy="182880"/>
+          </a:xfrm>
+          <a:prstGeom prst="rect">
+            <a:avLst/>
+          </a:prstGeom>
+          <a:noFill/>
+          <a:ln/>
+        </p:spPr>
+        <p:txBody>
+          <a:bodyPr wrap="square" lIns="0" tIns="0" rIns="0" bIns="0" rtlCol="0" anchor="ctr"/>
+          <a:lstStyle/>
+          <a:p>
+            <a:pPr algn="ctr" indent="0" marL="0">
+              <a:buNone/>
+            </a:pPr>
+            <a:r>
+              <a:rPr lang="en-US" sz="600" b="1" dirty="0">
+                <a:solidFill>
+                  <a:srgbClr val="FFFFFF"/>
+                </a:solidFill>
+                <a:latin typeface="Consolas" pitchFamily="34" charset="0"/>
+                <a:ea typeface="Consolas" pitchFamily="34" charset="-122"/>
+                <a:cs typeface="Consolas" pitchFamily="34" charset="-120"/>
+              </a:rPr>
+              <a:t>SRV</a:t>
+            </a:r>
+            <a:endParaRPr lang="en-US" sz="600" dirty="0"/>
+          </a:p>
+        </p:txBody>
+      </p:sp>
+      <p:sp>
+        <p:nvSpPr>
+          <p:cNvPr id="33" name="Text 31"/>
+          <p:cNvSpPr txBox="1"/>
+          <p:nvPr/>
+        </p:nvSpPr>
+        <p:spPr>
+          <a:xfrm>
+            <a:off x="6585052" y="3355848"/>
+            <a:ext cx="4600804" cy="585216"/>
           </a:xfrm>
           <a:prstGeom prst="rect">
             <a:avLst/>
@@ -39171,7 +40879,7 @@
       </p:sp>
       <p:sp>
         <p:nvSpPr>
-          <p:cNvPr id="24" name="Shape 22"/>
+          <p:cNvPr id="34" name="Shape 32"/>
           <p:cNvSpPr/>
           <p:nvPr/>
         </p:nvSpPr>
@@ -39193,14 +40901,75 @@
       </p:sp>
       <p:sp>
         <p:nvSpPr>
-          <p:cNvPr id="25" name="Text 23"/>
+          <p:cNvPr id="35" name="Shape 33"/>
+          <p:cNvSpPr/>
+          <p:nvPr/>
+        </p:nvSpPr>
+        <p:spPr>
+          <a:xfrm>
+            <a:off x="6329020" y="4197096"/>
+            <a:ext cx="182880" cy="182880"/>
+          </a:xfrm>
+          <a:prstGeom prst="roundRect">
+            <a:avLst>
+              <a:gd name="adj" fmla="val 28000"/>
+            </a:avLst>
+          </a:prstGeom>
+          <a:solidFill>
+            <a:srgbClr val="2E6DA4"/>
+          </a:solidFill>
+          <a:ln/>
+        </p:spPr>
+      </p:sp>
+      <p:sp>
+        <p:nvSpPr>
+          <p:cNvPr id="36" name="Text 34"/>
           <p:cNvSpPr txBox="1"/>
           <p:nvPr/>
         </p:nvSpPr>
         <p:spPr>
           <a:xfrm>
-            <a:off x="6365596" y="3995928"/>
-            <a:ext cx="4820260" cy="585216"/>
+            <a:off x="6329020" y="4197096"/>
+            <a:ext cx="182880" cy="182880"/>
+          </a:xfrm>
+          <a:prstGeom prst="rect">
+            <a:avLst/>
+          </a:prstGeom>
+          <a:noFill/>
+          <a:ln/>
+        </p:spPr>
+        <p:txBody>
+          <a:bodyPr wrap="square" lIns="0" tIns="0" rIns="0" bIns="0" rtlCol="0" anchor="ctr"/>
+          <a:lstStyle/>
+          <a:p>
+            <a:pPr algn="ctr" indent="0" marL="0">
+              <a:buNone/>
+            </a:pPr>
+            <a:r>
+              <a:rPr lang="en-US" sz="600" b="1" dirty="0">
+                <a:solidFill>
+                  <a:srgbClr val="FFFFFF"/>
+                </a:solidFill>
+                <a:latin typeface="Consolas" pitchFamily="34" charset="0"/>
+                <a:ea typeface="Consolas" pitchFamily="34" charset="-122"/>
+                <a:cs typeface="Consolas" pitchFamily="34" charset="-120"/>
+              </a:rPr>
+              <a:t>DB</a:t>
+            </a:r>
+            <a:endParaRPr lang="en-US" sz="600" dirty="0"/>
+          </a:p>
+        </p:txBody>
+      </p:sp>
+      <p:sp>
+        <p:nvSpPr>
+          <p:cNvPr id="37" name="Text 35"/>
+          <p:cNvSpPr txBox="1"/>
+          <p:nvPr/>
+        </p:nvSpPr>
+        <p:spPr>
+          <a:xfrm>
+            <a:off x="6585052" y="3995928"/>
+            <a:ext cx="4600804" cy="585216"/>
           </a:xfrm>
           <a:prstGeom prst="rect">
             <a:avLst/>
@@ -39255,7 +41024,7 @@
       </p:sp>
       <p:sp>
         <p:nvSpPr>
-          <p:cNvPr id="26" name="Shape 24"/>
+          <p:cNvPr id="38" name="Shape 36"/>
           <p:cNvSpPr/>
           <p:nvPr/>
         </p:nvSpPr>
@@ -39277,14 +41046,75 @@
       </p:sp>
       <p:sp>
         <p:nvSpPr>
-          <p:cNvPr id="27" name="Text 25"/>
+          <p:cNvPr id="39" name="Shape 37"/>
+          <p:cNvSpPr/>
+          <p:nvPr/>
+        </p:nvSpPr>
+        <p:spPr>
+          <a:xfrm>
+            <a:off x="914400" y="5015484"/>
+            <a:ext cx="201168" cy="201168"/>
+          </a:xfrm>
+          <a:prstGeom prst="roundRect">
+            <a:avLst>
+              <a:gd name="adj" fmla="val 28000"/>
+            </a:avLst>
+          </a:prstGeom>
+          <a:solidFill>
+            <a:srgbClr val="2E6DA4"/>
+          </a:solidFill>
+          <a:ln/>
+        </p:spPr>
+      </p:sp>
+      <p:sp>
+        <p:nvSpPr>
+          <p:cNvPr id="40" name="Text 38"/>
           <p:cNvSpPr txBox="1"/>
           <p:nvPr/>
         </p:nvSpPr>
         <p:spPr>
           <a:xfrm>
-            <a:off x="914400" y="4864608"/>
-            <a:ext cx="10362895" cy="502920"/>
+            <a:off x="914400" y="5015484"/>
+            <a:ext cx="201168" cy="201168"/>
+          </a:xfrm>
+          <a:prstGeom prst="rect">
+            <a:avLst/>
+          </a:prstGeom>
+          <a:noFill/>
+          <a:ln/>
+        </p:spPr>
+        <p:txBody>
+          <a:bodyPr wrap="square" lIns="0" tIns="0" rIns="0" bIns="0" rtlCol="0" anchor="ctr"/>
+          <a:lstStyle/>
+          <a:p>
+            <a:pPr algn="ctr" indent="0" marL="0">
+              <a:buNone/>
+            </a:pPr>
+            <a:r>
+              <a:rPr lang="en-US" sz="600" b="1" dirty="0">
+                <a:solidFill>
+                  <a:srgbClr val="FFFFFF"/>
+                </a:solidFill>
+                <a:latin typeface="Consolas" pitchFamily="34" charset="0"/>
+                <a:ea typeface="Consolas" pitchFamily="34" charset="-122"/>
+                <a:cs typeface="Consolas" pitchFamily="34" charset="-120"/>
+              </a:rPr>
+              <a:t>BAS</a:t>
+            </a:r>
+            <a:endParaRPr lang="en-US" sz="600" dirty="0"/>
+          </a:p>
+        </p:txBody>
+      </p:sp>
+      <p:sp>
+        <p:nvSpPr>
+          <p:cNvPr id="41" name="Text 39"/>
+          <p:cNvSpPr txBox="1"/>
+          <p:nvPr/>
+        </p:nvSpPr>
+        <p:spPr>
+          <a:xfrm>
+            <a:off x="1188720" y="4864608"/>
+            <a:ext cx="10088575" cy="502920"/>
           </a:xfrm>
           <a:prstGeom prst="rect">
             <a:avLst/>
@@ -39319,7 +41149,7 @@
       </p:sp>
       <p:sp>
         <p:nvSpPr>
-          <p:cNvPr id="28" name="Shape 26"/>
+          <p:cNvPr id="42" name="Shape 40"/>
           <p:cNvSpPr/>
           <p:nvPr/>
         </p:nvSpPr>
@@ -39346,7 +41176,7 @@
       </p:sp>
       <p:sp>
         <p:nvSpPr>
-          <p:cNvPr id="29" name="Text 27"/>
+          <p:cNvPr id="43" name="Text 41"/>
           <p:cNvSpPr txBox="1"/>
           <p:nvPr/>
         </p:nvSpPr>
@@ -39385,7 +41215,7 @@
       </p:sp>
       <p:sp>
         <p:nvSpPr>
-          <p:cNvPr id="30" name="Text 28"/>
+          <p:cNvPr id="44" name="Text 42"/>
           <p:cNvSpPr txBox="1"/>
           <p:nvPr/>
         </p:nvSpPr>
